--- a/docs/pptx/auc3/jx-auc3-linsubhr-ratio-anyhosp.pptx
+++ b/docs/pptx/auc3/jx-auc3-linsubhr-ratio-anyhosp.pptx
@@ -2271,7 +2271,7 @@
           </p:nvSpPr>
           <p:spPr>
             <a:xfrm>
-              <a:off x="817517" y="5114368"/>
+              <a:off x="817517" y="5142518"/>
               <a:ext cx="7799693" cy="0"/>
             </a:xfrm>
             <a:custGeom>
@@ -2314,7 +2314,7 @@
           </p:nvSpPr>
           <p:spPr>
             <a:xfrm>
-              <a:off x="817517" y="4244691"/>
+              <a:off x="817517" y="4313054"/>
               <a:ext cx="7799693" cy="0"/>
             </a:xfrm>
             <a:custGeom>
@@ -2357,7 +2357,7 @@
           </p:nvSpPr>
           <p:spPr>
             <a:xfrm>
-              <a:off x="817517" y="3375014"/>
+              <a:off x="817517" y="3483591"/>
               <a:ext cx="7799693" cy="0"/>
             </a:xfrm>
             <a:custGeom>
@@ -2400,7 +2400,7 @@
           </p:nvSpPr>
           <p:spPr>
             <a:xfrm>
-              <a:off x="817517" y="2505337"/>
+              <a:off x="817517" y="2654127"/>
               <a:ext cx="7799693" cy="0"/>
             </a:xfrm>
             <a:custGeom>
@@ -2443,15 +2443,15 @@
           </p:nvSpPr>
           <p:spPr>
             <a:xfrm>
-              <a:off x="1615213" y="1896563"/>
-              <a:ext cx="0" cy="3826579"/>
+              <a:off x="1615213" y="2073503"/>
+              <a:ext cx="0" cy="3649639"/>
             </a:xfrm>
             <a:custGeom>
               <a:avLst/>
               <a:pathLst>
-                <a:path w="0" h="3826579">
+                <a:path w="0" h="3649639">
                   <a:moveTo>
-                    <a:pt x="0" y="3826579"/>
+                    <a:pt x="0" y="3649639"/>
                   </a:moveTo>
                   <a:lnTo>
                     <a:pt x="0" y="0"/>
@@ -2486,15 +2486,15 @@
           </p:nvSpPr>
           <p:spPr>
             <a:xfrm>
-              <a:off x="3387871" y="1896563"/>
-              <a:ext cx="0" cy="3826579"/>
+              <a:off x="3387871" y="2073503"/>
+              <a:ext cx="0" cy="3649639"/>
             </a:xfrm>
             <a:custGeom>
               <a:avLst/>
               <a:pathLst>
-                <a:path w="0" h="3826579">
+                <a:path w="0" h="3649639">
                   <a:moveTo>
-                    <a:pt x="0" y="3826579"/>
+                    <a:pt x="0" y="3649639"/>
                   </a:moveTo>
                   <a:lnTo>
                     <a:pt x="0" y="0"/>
@@ -2529,15 +2529,15 @@
           </p:nvSpPr>
           <p:spPr>
             <a:xfrm>
-              <a:off x="5160528" y="1896563"/>
-              <a:ext cx="0" cy="3826579"/>
+              <a:off x="5160528" y="2073503"/>
+              <a:ext cx="0" cy="3649639"/>
             </a:xfrm>
             <a:custGeom>
               <a:avLst/>
               <a:pathLst>
-                <a:path w="0" h="3826579">
+                <a:path w="0" h="3649639">
                   <a:moveTo>
-                    <a:pt x="0" y="3826579"/>
+                    <a:pt x="0" y="3649639"/>
                   </a:moveTo>
                   <a:lnTo>
                     <a:pt x="0" y="0"/>
@@ -2572,15 +2572,15 @@
           </p:nvSpPr>
           <p:spPr>
             <a:xfrm>
-              <a:off x="6933186" y="1896563"/>
-              <a:ext cx="0" cy="3826579"/>
+              <a:off x="6933186" y="2073503"/>
+              <a:ext cx="0" cy="3649639"/>
             </a:xfrm>
             <a:custGeom>
               <a:avLst/>
               <a:pathLst>
-                <a:path w="0" h="3826579">
+                <a:path w="0" h="3649639">
                   <a:moveTo>
-                    <a:pt x="0" y="3826579"/>
+                    <a:pt x="0" y="3649639"/>
                   </a:moveTo>
                   <a:lnTo>
                     <a:pt x="0" y="0"/>
@@ -2615,7 +2615,7 @@
           </p:nvSpPr>
           <p:spPr>
             <a:xfrm>
-              <a:off x="817517" y="5549207"/>
+              <a:off x="817517" y="5557249"/>
               <a:ext cx="7799693" cy="0"/>
             </a:xfrm>
             <a:custGeom>
@@ -2658,7 +2658,7 @@
           </p:nvSpPr>
           <p:spPr>
             <a:xfrm>
-              <a:off x="817517" y="4679530"/>
+              <a:off x="817517" y="4727786"/>
               <a:ext cx="7799693" cy="0"/>
             </a:xfrm>
             <a:custGeom>
@@ -2701,7 +2701,7 @@
           </p:nvSpPr>
           <p:spPr>
             <a:xfrm>
-              <a:off x="817517" y="3809853"/>
+              <a:off x="817517" y="3898322"/>
               <a:ext cx="7799693" cy="0"/>
             </a:xfrm>
             <a:custGeom>
@@ -2744,7 +2744,7 @@
           </p:nvSpPr>
           <p:spPr>
             <a:xfrm>
-              <a:off x="817517" y="2940175"/>
+              <a:off x="817517" y="3068859"/>
               <a:ext cx="7799693" cy="0"/>
             </a:xfrm>
             <a:custGeom>
@@ -2787,7 +2787,7 @@
           </p:nvSpPr>
           <p:spPr>
             <a:xfrm>
-              <a:off x="817517" y="2070498"/>
+              <a:off x="817517" y="2239395"/>
               <a:ext cx="7799693" cy="0"/>
             </a:xfrm>
             <a:custGeom>
@@ -2830,15 +2830,15 @@
           </p:nvSpPr>
           <p:spPr>
             <a:xfrm>
-              <a:off x="2501542" y="1896563"/>
-              <a:ext cx="0" cy="3826579"/>
+              <a:off x="2501542" y="2073503"/>
+              <a:ext cx="0" cy="3649639"/>
             </a:xfrm>
             <a:custGeom>
               <a:avLst/>
               <a:pathLst>
-                <a:path w="0" h="3826579">
+                <a:path w="0" h="3649639">
                   <a:moveTo>
-                    <a:pt x="0" y="3826579"/>
+                    <a:pt x="0" y="3649639"/>
                   </a:moveTo>
                   <a:lnTo>
                     <a:pt x="0" y="0"/>
@@ -2873,15 +2873,15 @@
           </p:nvSpPr>
           <p:spPr>
             <a:xfrm>
-              <a:off x="4274200" y="1896563"/>
-              <a:ext cx="0" cy="3826579"/>
+              <a:off x="4274200" y="2073503"/>
+              <a:ext cx="0" cy="3649639"/>
             </a:xfrm>
             <a:custGeom>
               <a:avLst/>
               <a:pathLst>
-                <a:path w="0" h="3826579">
+                <a:path w="0" h="3649639">
                   <a:moveTo>
-                    <a:pt x="0" y="3826579"/>
+                    <a:pt x="0" y="3649639"/>
                   </a:moveTo>
                   <a:lnTo>
                     <a:pt x="0" y="0"/>
@@ -2916,15 +2916,15 @@
           </p:nvSpPr>
           <p:spPr>
             <a:xfrm>
-              <a:off x="6046857" y="1896563"/>
-              <a:ext cx="0" cy="3826579"/>
+              <a:off x="6046857" y="2073503"/>
+              <a:ext cx="0" cy="3649639"/>
             </a:xfrm>
             <a:custGeom>
               <a:avLst/>
               <a:pathLst>
-                <a:path w="0" h="3826579">
+                <a:path w="0" h="3649639">
                   <a:moveTo>
-                    <a:pt x="0" y="3826579"/>
+                    <a:pt x="0" y="3649639"/>
                   </a:moveTo>
                   <a:lnTo>
                     <a:pt x="0" y="0"/>
@@ -2959,15 +2959,15 @@
           </p:nvSpPr>
           <p:spPr>
             <a:xfrm>
-              <a:off x="7819515" y="1896563"/>
-              <a:ext cx="0" cy="3826579"/>
+              <a:off x="7819515" y="2073503"/>
+              <a:ext cx="0" cy="3649639"/>
             </a:xfrm>
             <a:custGeom>
               <a:avLst/>
               <a:pathLst>
-                <a:path w="0" h="3826579">
+                <a:path w="0" h="3649639">
                   <a:moveTo>
-                    <a:pt x="0" y="3826579"/>
+                    <a:pt x="0" y="3649639"/>
                   </a:moveTo>
                   <a:lnTo>
                     <a:pt x="0" y="0"/>
@@ -3002,594 +3002,594 @@
           </p:nvSpPr>
           <p:spPr>
             <a:xfrm>
-              <a:off x="817517" y="2767522"/>
-              <a:ext cx="7392041" cy="2575980"/>
+              <a:off x="817517" y="2904189"/>
+              <a:ext cx="7392041" cy="2456867"/>
             </a:xfrm>
             <a:custGeom>
               <a:avLst/>
               <a:pathLst>
-                <a:path w="7392041" h="2575980">
+                <a:path w="7392041" h="2456867">
                   <a:moveTo>
                     <a:pt x="0" y="0"/>
                   </a:moveTo>
                   <a:lnTo>
-                    <a:pt x="53901" y="52538"/>
-                  </a:lnTo>
-                  <a:lnTo>
-                    <a:pt x="131145" y="125807"/>
-                  </a:lnTo>
-                  <a:lnTo>
-                    <a:pt x="208389" y="197109"/>
-                  </a:lnTo>
-                  <a:lnTo>
-                    <a:pt x="285632" y="266496"/>
-                  </a:lnTo>
-                  <a:lnTo>
-                    <a:pt x="362876" y="334021"/>
-                  </a:lnTo>
-                  <a:lnTo>
-                    <a:pt x="440119" y="399733"/>
-                  </a:lnTo>
-                  <a:lnTo>
-                    <a:pt x="517363" y="463680"/>
-                  </a:lnTo>
-                  <a:lnTo>
-                    <a:pt x="594606" y="525911"/>
-                  </a:lnTo>
-                  <a:lnTo>
-                    <a:pt x="671850" y="586471"/>
-                  </a:lnTo>
-                  <a:lnTo>
-                    <a:pt x="749094" y="645406"/>
-                  </a:lnTo>
-                  <a:lnTo>
-                    <a:pt x="826337" y="702758"/>
-                  </a:lnTo>
-                  <a:lnTo>
-                    <a:pt x="903581" y="758570"/>
-                  </a:lnTo>
-                  <a:lnTo>
-                    <a:pt x="980824" y="812884"/>
-                  </a:lnTo>
-                  <a:lnTo>
-                    <a:pt x="1058068" y="865740"/>
-                  </a:lnTo>
-                  <a:lnTo>
-                    <a:pt x="1135311" y="917177"/>
-                  </a:lnTo>
-                  <a:lnTo>
-                    <a:pt x="1212555" y="967233"/>
-                  </a:lnTo>
-                  <a:lnTo>
-                    <a:pt x="1289799" y="1015945"/>
-                  </a:lnTo>
-                  <a:lnTo>
-                    <a:pt x="1367042" y="1063349"/>
-                  </a:lnTo>
-                  <a:lnTo>
-                    <a:pt x="1444286" y="1109481"/>
-                  </a:lnTo>
-                  <a:lnTo>
-                    <a:pt x="1521529" y="1154374"/>
-                  </a:lnTo>
-                  <a:lnTo>
-                    <a:pt x="1598773" y="1198062"/>
-                  </a:lnTo>
-                  <a:lnTo>
-                    <a:pt x="1676016" y="1240578"/>
-                  </a:lnTo>
-                  <a:lnTo>
-                    <a:pt x="1753260" y="1281951"/>
-                  </a:lnTo>
-                  <a:lnTo>
-                    <a:pt x="1830504" y="1322214"/>
-                  </a:lnTo>
-                  <a:lnTo>
-                    <a:pt x="1907747" y="1361396"/>
-                  </a:lnTo>
-                  <a:lnTo>
-                    <a:pt x="1984991" y="1399526"/>
-                  </a:lnTo>
-                  <a:lnTo>
-                    <a:pt x="2062234" y="1436633"/>
-                  </a:lnTo>
-                  <a:lnTo>
-                    <a:pt x="2139478" y="1472743"/>
-                  </a:lnTo>
-                  <a:lnTo>
-                    <a:pt x="2216721" y="1507884"/>
-                  </a:lnTo>
-                  <a:lnTo>
-                    <a:pt x="2293965" y="1542081"/>
-                  </a:lnTo>
-                  <a:lnTo>
-                    <a:pt x="2371209" y="1575361"/>
-                  </a:lnTo>
-                  <a:lnTo>
-                    <a:pt x="2448452" y="1607747"/>
-                  </a:lnTo>
-                  <a:lnTo>
-                    <a:pt x="2525696" y="1639263"/>
-                  </a:lnTo>
-                  <a:lnTo>
-                    <a:pt x="2602939" y="1669933"/>
-                  </a:lnTo>
-                  <a:lnTo>
-                    <a:pt x="2680183" y="1699780"/>
-                  </a:lnTo>
-                  <a:lnTo>
-                    <a:pt x="2757426" y="1728826"/>
-                  </a:lnTo>
-                  <a:lnTo>
-                    <a:pt x="2834670" y="1757092"/>
-                  </a:lnTo>
-                  <a:lnTo>
-                    <a:pt x="2911914" y="1784599"/>
-                  </a:lnTo>
-                  <a:lnTo>
-                    <a:pt x="2989157" y="1811367"/>
-                  </a:lnTo>
-                  <a:lnTo>
-                    <a:pt x="3066401" y="1837417"/>
-                  </a:lnTo>
-                  <a:lnTo>
-                    <a:pt x="3143644" y="1862767"/>
-                  </a:lnTo>
-                  <a:lnTo>
-                    <a:pt x="3220888" y="1887437"/>
-                  </a:lnTo>
-                  <a:lnTo>
-                    <a:pt x="3298131" y="1911445"/>
-                  </a:lnTo>
-                  <a:lnTo>
-                    <a:pt x="3375375" y="1916102"/>
-                  </a:lnTo>
-                  <a:lnTo>
-                    <a:pt x="3452619" y="1920276"/>
-                  </a:lnTo>
-                  <a:lnTo>
-                    <a:pt x="3529862" y="1924430"/>
-                  </a:lnTo>
-                  <a:lnTo>
-                    <a:pt x="3607106" y="1928563"/>
-                  </a:lnTo>
-                  <a:lnTo>
-                    <a:pt x="3684349" y="1932677"/>
-                  </a:lnTo>
-                  <a:lnTo>
-                    <a:pt x="3761593" y="1936771"/>
-                  </a:lnTo>
-                  <a:lnTo>
-                    <a:pt x="3838836" y="1940846"/>
-                  </a:lnTo>
-                  <a:lnTo>
-                    <a:pt x="3916080" y="1944900"/>
-                  </a:lnTo>
-                  <a:lnTo>
-                    <a:pt x="3993324" y="1948935"/>
-                  </a:lnTo>
-                  <a:lnTo>
-                    <a:pt x="4070567" y="1952951"/>
-                  </a:lnTo>
-                  <a:lnTo>
-                    <a:pt x="4147811" y="1956947"/>
-                  </a:lnTo>
-                  <a:lnTo>
-                    <a:pt x="4225054" y="1960924"/>
-                  </a:lnTo>
-                  <a:lnTo>
-                    <a:pt x="4302298" y="1964882"/>
-                  </a:lnTo>
-                  <a:lnTo>
-                    <a:pt x="4379541" y="1968821"/>
-                  </a:lnTo>
-                  <a:lnTo>
-                    <a:pt x="4456785" y="1972741"/>
-                  </a:lnTo>
-                  <a:lnTo>
-                    <a:pt x="4534029" y="1976641"/>
-                  </a:lnTo>
-                  <a:lnTo>
-                    <a:pt x="4611272" y="1980523"/>
-                  </a:lnTo>
-                  <a:lnTo>
-                    <a:pt x="4688516" y="1984387"/>
-                  </a:lnTo>
-                  <a:lnTo>
-                    <a:pt x="4765759" y="1988231"/>
-                  </a:lnTo>
-                  <a:lnTo>
-                    <a:pt x="4843003" y="1992058"/>
-                  </a:lnTo>
-                  <a:lnTo>
-                    <a:pt x="4920246" y="1995865"/>
-                  </a:lnTo>
-                  <a:lnTo>
-                    <a:pt x="4997490" y="1999655"/>
-                  </a:lnTo>
-                  <a:lnTo>
-                    <a:pt x="5074734" y="2003426"/>
-                  </a:lnTo>
-                  <a:lnTo>
-                    <a:pt x="5151977" y="2007179"/>
-                  </a:lnTo>
-                  <a:lnTo>
-                    <a:pt x="5229221" y="2010913"/>
-                  </a:lnTo>
-                  <a:lnTo>
-                    <a:pt x="5306464" y="2014630"/>
-                  </a:lnTo>
-                  <a:lnTo>
-                    <a:pt x="5383708" y="2018329"/>
-                  </a:lnTo>
-                  <a:lnTo>
-                    <a:pt x="5460951" y="2022010"/>
-                  </a:lnTo>
-                  <a:lnTo>
-                    <a:pt x="5538195" y="2025673"/>
-                  </a:lnTo>
-                  <a:lnTo>
-                    <a:pt x="5615439" y="2029319"/>
-                  </a:lnTo>
-                  <a:lnTo>
-                    <a:pt x="5692682" y="2032947"/>
-                  </a:lnTo>
-                  <a:lnTo>
-                    <a:pt x="5769926" y="2036557"/>
-                  </a:lnTo>
-                  <a:lnTo>
-                    <a:pt x="5847169" y="2040151"/>
-                  </a:lnTo>
-                  <a:lnTo>
-                    <a:pt x="5924413" y="2043726"/>
-                  </a:lnTo>
-                  <a:lnTo>
-                    <a:pt x="6001656" y="2047285"/>
-                  </a:lnTo>
-                  <a:lnTo>
-                    <a:pt x="6078900" y="2050826"/>
-                  </a:lnTo>
-                  <a:lnTo>
-                    <a:pt x="6156144" y="2054351"/>
-                  </a:lnTo>
-                  <a:lnTo>
-                    <a:pt x="6233387" y="2057858"/>
-                  </a:lnTo>
-                  <a:lnTo>
-                    <a:pt x="6310631" y="2061348"/>
-                  </a:lnTo>
-                  <a:lnTo>
-                    <a:pt x="6387874" y="2064822"/>
-                  </a:lnTo>
-                  <a:lnTo>
-                    <a:pt x="6465118" y="2068279"/>
-                  </a:lnTo>
-                  <a:lnTo>
-                    <a:pt x="6542361" y="2071719"/>
-                  </a:lnTo>
-                  <a:lnTo>
-                    <a:pt x="6619605" y="2075142"/>
-                  </a:lnTo>
-                  <a:lnTo>
-                    <a:pt x="6696849" y="2078549"/>
-                  </a:lnTo>
-                  <a:lnTo>
-                    <a:pt x="6774092" y="2081940"/>
-                  </a:lnTo>
-                  <a:lnTo>
-                    <a:pt x="6851336" y="2085314"/>
-                  </a:lnTo>
-                  <a:lnTo>
-                    <a:pt x="6928579" y="2088672"/>
-                  </a:lnTo>
-                  <a:lnTo>
-                    <a:pt x="7005823" y="2092014"/>
-                  </a:lnTo>
-                  <a:lnTo>
-                    <a:pt x="7083066" y="2095340"/>
-                  </a:lnTo>
-                  <a:lnTo>
-                    <a:pt x="7160310" y="2098650"/>
-                  </a:lnTo>
-                  <a:lnTo>
-                    <a:pt x="7237554" y="2101943"/>
-                  </a:lnTo>
-                  <a:lnTo>
-                    <a:pt x="7314797" y="2105221"/>
-                  </a:lnTo>
-                  <a:lnTo>
-                    <a:pt x="7392041" y="2108483"/>
-                  </a:lnTo>
-                  <a:lnTo>
-                    <a:pt x="7392041" y="2575980"/>
-                  </a:lnTo>
-                  <a:lnTo>
-                    <a:pt x="7314797" y="2570305"/>
-                  </a:lnTo>
-                  <a:lnTo>
-                    <a:pt x="7237554" y="2564473"/>
-                  </a:lnTo>
-                  <a:lnTo>
-                    <a:pt x="7160310" y="2558481"/>
-                  </a:lnTo>
-                  <a:lnTo>
-                    <a:pt x="7083066" y="2552324"/>
-                  </a:lnTo>
-                  <a:lnTo>
-                    <a:pt x="7005823" y="2545996"/>
-                  </a:lnTo>
-                  <a:lnTo>
-                    <a:pt x="6928579" y="2539494"/>
-                  </a:lnTo>
-                  <a:lnTo>
-                    <a:pt x="6851336" y="2532813"/>
-                  </a:lnTo>
-                  <a:lnTo>
-                    <a:pt x="6774092" y="2525947"/>
-                  </a:lnTo>
-                  <a:lnTo>
-                    <a:pt x="6696849" y="2518892"/>
-                  </a:lnTo>
-                  <a:lnTo>
-                    <a:pt x="6619605" y="2511642"/>
-                  </a:lnTo>
-                  <a:lnTo>
-                    <a:pt x="6542361" y="2504192"/>
-                  </a:lnTo>
-                  <a:lnTo>
-                    <a:pt x="6465118" y="2496537"/>
-                  </a:lnTo>
-                  <a:lnTo>
-                    <a:pt x="6387874" y="2488671"/>
-                  </a:lnTo>
-                  <a:lnTo>
-                    <a:pt x="6310631" y="2480587"/>
-                  </a:lnTo>
-                  <a:lnTo>
-                    <a:pt x="6233387" y="2472281"/>
-                  </a:lnTo>
-                  <a:lnTo>
-                    <a:pt x="6156144" y="2463745"/>
-                  </a:lnTo>
-                  <a:lnTo>
-                    <a:pt x="6078900" y="2454974"/>
-                  </a:lnTo>
-                  <a:lnTo>
-                    <a:pt x="6001656" y="2445961"/>
-                  </a:lnTo>
-                  <a:lnTo>
-                    <a:pt x="5924413" y="2436699"/>
-                  </a:lnTo>
-                  <a:lnTo>
-                    <a:pt x="5847169" y="2427182"/>
-                  </a:lnTo>
-                  <a:lnTo>
-                    <a:pt x="5769926" y="2417402"/>
-                  </a:lnTo>
-                  <a:lnTo>
-                    <a:pt x="5692682" y="2407352"/>
-                  </a:lnTo>
-                  <a:lnTo>
-                    <a:pt x="5615439" y="2397026"/>
-                  </a:lnTo>
-                  <a:lnTo>
-                    <a:pt x="5538195" y="2386414"/>
-                  </a:lnTo>
-                  <a:lnTo>
-                    <a:pt x="5460951" y="2375509"/>
-                  </a:lnTo>
-                  <a:lnTo>
-                    <a:pt x="5383708" y="2364304"/>
-                  </a:lnTo>
-                  <a:lnTo>
-                    <a:pt x="5306464" y="2352790"/>
-                  </a:lnTo>
-                  <a:lnTo>
-                    <a:pt x="5229221" y="2340957"/>
-                  </a:lnTo>
-                  <a:lnTo>
-                    <a:pt x="5151977" y="2328799"/>
-                  </a:lnTo>
-                  <a:lnTo>
-                    <a:pt x="5074734" y="2316305"/>
-                  </a:lnTo>
-                  <a:lnTo>
-                    <a:pt x="4997490" y="2303466"/>
-                  </a:lnTo>
-                  <a:lnTo>
-                    <a:pt x="4920246" y="2290274"/>
-                  </a:lnTo>
-                  <a:lnTo>
-                    <a:pt x="4843003" y="2276717"/>
-                  </a:lnTo>
-                  <a:lnTo>
-                    <a:pt x="4765759" y="2262786"/>
-                  </a:lnTo>
-                  <a:lnTo>
-                    <a:pt x="4688516" y="2248471"/>
-                  </a:lnTo>
-                  <a:lnTo>
-                    <a:pt x="4611272" y="2233761"/>
-                  </a:lnTo>
-                  <a:lnTo>
-                    <a:pt x="4534029" y="2218645"/>
-                  </a:lnTo>
-                  <a:lnTo>
-                    <a:pt x="4456785" y="2203113"/>
-                  </a:lnTo>
-                  <a:lnTo>
-                    <a:pt x="4379541" y="2187151"/>
-                  </a:lnTo>
-                  <a:lnTo>
-                    <a:pt x="4302298" y="2170750"/>
-                  </a:lnTo>
-                  <a:lnTo>
-                    <a:pt x="4225054" y="2153896"/>
-                  </a:lnTo>
-                  <a:lnTo>
-                    <a:pt x="4147811" y="2136577"/>
-                  </a:lnTo>
-                  <a:lnTo>
-                    <a:pt x="4070567" y="2118780"/>
-                  </a:lnTo>
-                  <a:lnTo>
-                    <a:pt x="3993324" y="2100492"/>
-                  </a:lnTo>
-                  <a:lnTo>
-                    <a:pt x="3916080" y="2081700"/>
-                  </a:lnTo>
-                  <a:lnTo>
-                    <a:pt x="3838836" y="2062389"/>
-                  </a:lnTo>
-                  <a:lnTo>
-                    <a:pt x="3761593" y="2042545"/>
-                  </a:lnTo>
-                  <a:lnTo>
-                    <a:pt x="3684349" y="2022154"/>
-                  </a:lnTo>
-                  <a:lnTo>
-                    <a:pt x="3607106" y="2001201"/>
-                  </a:lnTo>
-                  <a:lnTo>
-                    <a:pt x="3529862" y="1979670"/>
-                  </a:lnTo>
-                  <a:lnTo>
-                    <a:pt x="3452619" y="1957544"/>
-                  </a:lnTo>
-                  <a:lnTo>
-                    <a:pt x="3375375" y="1934808"/>
-                  </a:lnTo>
-                  <a:lnTo>
-                    <a:pt x="3298131" y="1911908"/>
-                  </a:lnTo>
-                  <a:lnTo>
-                    <a:pt x="3220888" y="1907693"/>
-                  </a:lnTo>
-                  <a:lnTo>
-                    <a:pt x="3143644" y="1903458"/>
-                  </a:lnTo>
-                  <a:lnTo>
-                    <a:pt x="3066401" y="1899203"/>
-                  </a:lnTo>
-                  <a:lnTo>
-                    <a:pt x="2989157" y="1894927"/>
-                  </a:lnTo>
-                  <a:lnTo>
-                    <a:pt x="2911914" y="1890630"/>
-                  </a:lnTo>
-                  <a:lnTo>
-                    <a:pt x="2834670" y="1886312"/>
-                  </a:lnTo>
-                  <a:lnTo>
-                    <a:pt x="2757426" y="1881974"/>
-                  </a:lnTo>
-                  <a:lnTo>
-                    <a:pt x="2680183" y="1877614"/>
-                  </a:lnTo>
-                  <a:lnTo>
-                    <a:pt x="2602939" y="1873233"/>
-                  </a:lnTo>
-                  <a:lnTo>
-                    <a:pt x="2525696" y="1868831"/>
-                  </a:lnTo>
-                  <a:lnTo>
-                    <a:pt x="2448452" y="1864408"/>
-                  </a:lnTo>
-                  <a:lnTo>
-                    <a:pt x="2371209" y="1859963"/>
-                  </a:lnTo>
-                  <a:lnTo>
-                    <a:pt x="2293965" y="1855497"/>
-                  </a:lnTo>
-                  <a:lnTo>
-                    <a:pt x="2216721" y="1851009"/>
-                  </a:lnTo>
-                  <a:lnTo>
-                    <a:pt x="2139478" y="1846500"/>
-                  </a:lnTo>
-                  <a:lnTo>
-                    <a:pt x="2062234" y="1841968"/>
-                  </a:lnTo>
-                  <a:lnTo>
-                    <a:pt x="1984991" y="1837415"/>
-                  </a:lnTo>
-                  <a:lnTo>
-                    <a:pt x="1907747" y="1832839"/>
-                  </a:lnTo>
-                  <a:lnTo>
-                    <a:pt x="1830504" y="1828242"/>
-                  </a:lnTo>
-                  <a:lnTo>
-                    <a:pt x="1753260" y="1823622"/>
-                  </a:lnTo>
-                  <a:lnTo>
-                    <a:pt x="1676016" y="1818980"/>
-                  </a:lnTo>
-                  <a:lnTo>
-                    <a:pt x="1598773" y="1814315"/>
-                  </a:lnTo>
-                  <a:lnTo>
-                    <a:pt x="1521529" y="1809627"/>
-                  </a:lnTo>
-                  <a:lnTo>
-                    <a:pt x="1444286" y="1804917"/>
-                  </a:lnTo>
-                  <a:lnTo>
-                    <a:pt x="1367042" y="1800184"/>
-                  </a:lnTo>
-                  <a:lnTo>
-                    <a:pt x="1289799" y="1795428"/>
-                  </a:lnTo>
-                  <a:lnTo>
-                    <a:pt x="1212555" y="1790649"/>
-                  </a:lnTo>
-                  <a:lnTo>
-                    <a:pt x="1135311" y="1785847"/>
-                  </a:lnTo>
-                  <a:lnTo>
-                    <a:pt x="1058068" y="1781022"/>
-                  </a:lnTo>
-                  <a:lnTo>
-                    <a:pt x="980824" y="1776173"/>
-                  </a:lnTo>
-                  <a:lnTo>
-                    <a:pt x="903581" y="1771301"/>
-                  </a:lnTo>
-                  <a:lnTo>
-                    <a:pt x="826337" y="1766405"/>
-                  </a:lnTo>
-                  <a:lnTo>
-                    <a:pt x="749094" y="1761486"/>
-                  </a:lnTo>
-                  <a:lnTo>
-                    <a:pt x="671850" y="1756542"/>
-                  </a:lnTo>
-                  <a:lnTo>
-                    <a:pt x="594606" y="1751575"/>
-                  </a:lnTo>
-                  <a:lnTo>
-                    <a:pt x="517363" y="1746584"/>
-                  </a:lnTo>
-                  <a:lnTo>
-                    <a:pt x="440119" y="1741568"/>
-                  </a:lnTo>
-                  <a:lnTo>
-                    <a:pt x="362876" y="1736528"/>
-                  </a:lnTo>
-                  <a:lnTo>
-                    <a:pt x="285632" y="1731464"/>
-                  </a:lnTo>
-                  <a:lnTo>
-                    <a:pt x="208389" y="1726375"/>
-                  </a:lnTo>
-                  <a:lnTo>
-                    <a:pt x="131145" y="1721261"/>
-                  </a:lnTo>
-                  <a:lnTo>
-                    <a:pt x="53901" y="1716123"/>
-                  </a:lnTo>
-                  <a:lnTo>
-                    <a:pt x="0" y="1712520"/>
+                    <a:pt x="53901" y="50109"/>
+                  </a:lnTo>
+                  <a:lnTo>
+                    <a:pt x="131145" y="119990"/>
+                  </a:lnTo>
+                  <a:lnTo>
+                    <a:pt x="208389" y="187994"/>
+                  </a:lnTo>
+                  <a:lnTo>
+                    <a:pt x="285632" y="254173"/>
+                  </a:lnTo>
+                  <a:lnTo>
+                    <a:pt x="362876" y="318576"/>
+                  </a:lnTo>
+                  <a:lnTo>
+                    <a:pt x="440119" y="381249"/>
+                  </a:lnTo>
+                  <a:lnTo>
+                    <a:pt x="517363" y="442240"/>
+                  </a:lnTo>
+                  <a:lnTo>
+                    <a:pt x="594606" y="501593"/>
+                  </a:lnTo>
+                  <a:lnTo>
+                    <a:pt x="671850" y="559353"/>
+                  </a:lnTo>
+                  <a:lnTo>
+                    <a:pt x="749094" y="615562"/>
+                  </a:lnTo>
+                  <a:lnTo>
+                    <a:pt x="826337" y="670262"/>
+                  </a:lnTo>
+                  <a:lnTo>
+                    <a:pt x="903581" y="723494"/>
+                  </a:lnTo>
+                  <a:lnTo>
+                    <a:pt x="980824" y="775297"/>
+                  </a:lnTo>
+                  <a:lnTo>
+                    <a:pt x="1058068" y="825709"/>
+                  </a:lnTo>
+                  <a:lnTo>
+                    <a:pt x="1135311" y="874767"/>
+                  </a:lnTo>
+                  <a:lnTo>
+                    <a:pt x="1212555" y="922508"/>
+                  </a:lnTo>
+                  <a:lnTo>
+                    <a:pt x="1289799" y="968968"/>
+                  </a:lnTo>
+                  <a:lnTo>
+                    <a:pt x="1367042" y="1014181"/>
+                  </a:lnTo>
+                  <a:lnTo>
+                    <a:pt x="1444286" y="1058179"/>
+                  </a:lnTo>
+                  <a:lnTo>
+                    <a:pt x="1521529" y="1100997"/>
+                  </a:lnTo>
+                  <a:lnTo>
+                    <a:pt x="1598773" y="1142664"/>
+                  </a:lnTo>
+                  <a:lnTo>
+                    <a:pt x="1676016" y="1183214"/>
+                  </a:lnTo>
+                  <a:lnTo>
+                    <a:pt x="1753260" y="1222674"/>
+                  </a:lnTo>
+                  <a:lnTo>
+                    <a:pt x="1830504" y="1261075"/>
+                  </a:lnTo>
+                  <a:lnTo>
+                    <a:pt x="1907747" y="1298446"/>
+                  </a:lnTo>
+                  <a:lnTo>
+                    <a:pt x="1984991" y="1334813"/>
+                  </a:lnTo>
+                  <a:lnTo>
+                    <a:pt x="2062234" y="1370203"/>
+                  </a:lnTo>
+                  <a:lnTo>
+                    <a:pt x="2139478" y="1404644"/>
+                  </a:lnTo>
+                  <a:lnTo>
+                    <a:pt x="2216721" y="1438160"/>
+                  </a:lnTo>
+                  <a:lnTo>
+                    <a:pt x="2293965" y="1470776"/>
+                  </a:lnTo>
+                  <a:lnTo>
+                    <a:pt x="2371209" y="1502517"/>
+                  </a:lnTo>
+                  <a:lnTo>
+                    <a:pt x="2448452" y="1533405"/>
+                  </a:lnTo>
+                  <a:lnTo>
+                    <a:pt x="2525696" y="1563464"/>
+                  </a:lnTo>
+                  <a:lnTo>
+                    <a:pt x="2602939" y="1592716"/>
+                  </a:lnTo>
+                  <a:lnTo>
+                    <a:pt x="2680183" y="1621183"/>
+                  </a:lnTo>
+                  <a:lnTo>
+                    <a:pt x="2757426" y="1648885"/>
+                  </a:lnTo>
+                  <a:lnTo>
+                    <a:pt x="2834670" y="1675844"/>
+                  </a:lnTo>
+                  <a:lnTo>
+                    <a:pt x="2911914" y="1702079"/>
+                  </a:lnTo>
+                  <a:lnTo>
+                    <a:pt x="2989157" y="1727610"/>
+                  </a:lnTo>
+                  <a:lnTo>
+                    <a:pt x="3066401" y="1752455"/>
+                  </a:lnTo>
+                  <a:lnTo>
+                    <a:pt x="3143644" y="1776634"/>
+                  </a:lnTo>
+                  <a:lnTo>
+                    <a:pt x="3220888" y="1800163"/>
+                  </a:lnTo>
+                  <a:lnTo>
+                    <a:pt x="3298131" y="1823061"/>
+                  </a:lnTo>
+                  <a:lnTo>
+                    <a:pt x="3375375" y="1827502"/>
+                  </a:lnTo>
+                  <a:lnTo>
+                    <a:pt x="3452619" y="1831483"/>
+                  </a:lnTo>
+                  <a:lnTo>
+                    <a:pt x="3529862" y="1835445"/>
+                  </a:lnTo>
+                  <a:lnTo>
+                    <a:pt x="3607106" y="1839387"/>
+                  </a:lnTo>
+                  <a:lnTo>
+                    <a:pt x="3684349" y="1843311"/>
+                  </a:lnTo>
+                  <a:lnTo>
+                    <a:pt x="3761593" y="1847216"/>
+                  </a:lnTo>
+                  <a:lnTo>
+                    <a:pt x="3838836" y="1851102"/>
+                  </a:lnTo>
+                  <a:lnTo>
+                    <a:pt x="3916080" y="1854969"/>
+                  </a:lnTo>
+                  <a:lnTo>
+                    <a:pt x="3993324" y="1858817"/>
+                  </a:lnTo>
+                  <a:lnTo>
+                    <a:pt x="4070567" y="1862647"/>
+                  </a:lnTo>
+                  <a:lnTo>
+                    <a:pt x="4147811" y="1866459"/>
+                  </a:lnTo>
+                  <a:lnTo>
+                    <a:pt x="4225054" y="1870252"/>
+                  </a:lnTo>
+                  <a:lnTo>
+                    <a:pt x="4302298" y="1874027"/>
+                  </a:lnTo>
+                  <a:lnTo>
+                    <a:pt x="4379541" y="1877783"/>
+                  </a:lnTo>
+                  <a:lnTo>
+                    <a:pt x="4456785" y="1881522"/>
+                  </a:lnTo>
+                  <a:lnTo>
+                    <a:pt x="4534029" y="1885242"/>
+                  </a:lnTo>
+                  <a:lnTo>
+                    <a:pt x="4611272" y="1888945"/>
+                  </a:lnTo>
+                  <a:lnTo>
+                    <a:pt x="4688516" y="1892629"/>
+                  </a:lnTo>
+                  <a:lnTo>
+                    <a:pt x="4765759" y="1896296"/>
+                  </a:lnTo>
+                  <a:lnTo>
+                    <a:pt x="4843003" y="1899946"/>
+                  </a:lnTo>
+                  <a:lnTo>
+                    <a:pt x="4920246" y="1903577"/>
+                  </a:lnTo>
+                  <a:lnTo>
+                    <a:pt x="4997490" y="1907191"/>
+                  </a:lnTo>
+                  <a:lnTo>
+                    <a:pt x="5074734" y="1910788"/>
+                  </a:lnTo>
+                  <a:lnTo>
+                    <a:pt x="5151977" y="1914367"/>
+                  </a:lnTo>
+                  <a:lnTo>
+                    <a:pt x="5229221" y="1917929"/>
+                  </a:lnTo>
+                  <a:lnTo>
+                    <a:pt x="5306464" y="1921474"/>
+                  </a:lnTo>
+                  <a:lnTo>
+                    <a:pt x="5383708" y="1925002"/>
+                  </a:lnTo>
+                  <a:lnTo>
+                    <a:pt x="5460951" y="1928513"/>
+                  </a:lnTo>
+                  <a:lnTo>
+                    <a:pt x="5538195" y="1932007"/>
+                  </a:lnTo>
+                  <a:lnTo>
+                    <a:pt x="5615439" y="1935484"/>
+                  </a:lnTo>
+                  <a:lnTo>
+                    <a:pt x="5692682" y="1938944"/>
+                  </a:lnTo>
+                  <a:lnTo>
+                    <a:pt x="5769926" y="1942388"/>
+                  </a:lnTo>
+                  <a:lnTo>
+                    <a:pt x="5847169" y="1945815"/>
+                  </a:lnTo>
+                  <a:lnTo>
+                    <a:pt x="5924413" y="1949225"/>
+                  </a:lnTo>
+                  <a:lnTo>
+                    <a:pt x="6001656" y="1952619"/>
+                  </a:lnTo>
+                  <a:lnTo>
+                    <a:pt x="6078900" y="1955997"/>
+                  </a:lnTo>
+                  <a:lnTo>
+                    <a:pt x="6156144" y="1959358"/>
+                  </a:lnTo>
+                  <a:lnTo>
+                    <a:pt x="6233387" y="1962703"/>
+                  </a:lnTo>
+                  <a:lnTo>
+                    <a:pt x="6310631" y="1966032"/>
+                  </a:lnTo>
+                  <a:lnTo>
+                    <a:pt x="6387874" y="1969345"/>
+                  </a:lnTo>
+                  <a:lnTo>
+                    <a:pt x="6465118" y="1972642"/>
+                  </a:lnTo>
+                  <a:lnTo>
+                    <a:pt x="6542361" y="1975923"/>
+                  </a:lnTo>
+                  <a:lnTo>
+                    <a:pt x="6619605" y="1979189"/>
+                  </a:lnTo>
+                  <a:lnTo>
+                    <a:pt x="6696849" y="1982438"/>
+                  </a:lnTo>
+                  <a:lnTo>
+                    <a:pt x="6774092" y="1985672"/>
+                  </a:lnTo>
+                  <a:lnTo>
+                    <a:pt x="6851336" y="1988890"/>
+                  </a:lnTo>
+                  <a:lnTo>
+                    <a:pt x="6928579" y="1992093"/>
+                  </a:lnTo>
+                  <a:lnTo>
+                    <a:pt x="7005823" y="1995280"/>
+                  </a:lnTo>
+                  <a:lnTo>
+                    <a:pt x="7083066" y="1998452"/>
+                  </a:lnTo>
+                  <a:lnTo>
+                    <a:pt x="7160310" y="2001609"/>
+                  </a:lnTo>
+                  <a:lnTo>
+                    <a:pt x="7237554" y="2004750"/>
+                  </a:lnTo>
+                  <a:lnTo>
+                    <a:pt x="7314797" y="2007876"/>
+                  </a:lnTo>
+                  <a:lnTo>
+                    <a:pt x="7392041" y="2010988"/>
+                  </a:lnTo>
+                  <a:lnTo>
+                    <a:pt x="7392041" y="2456867"/>
+                  </a:lnTo>
+                  <a:lnTo>
+                    <a:pt x="7314797" y="2451455"/>
+                  </a:lnTo>
+                  <a:lnTo>
+                    <a:pt x="7237554" y="2445893"/>
+                  </a:lnTo>
+                  <a:lnTo>
+                    <a:pt x="7160310" y="2440178"/>
+                  </a:lnTo>
+                  <a:lnTo>
+                    <a:pt x="7083066" y="2434305"/>
+                  </a:lnTo>
+                  <a:lnTo>
+                    <a:pt x="7005823" y="2428270"/>
+                  </a:lnTo>
+                  <a:lnTo>
+                    <a:pt x="6928579" y="2422069"/>
+                  </a:lnTo>
+                  <a:lnTo>
+                    <a:pt x="6851336" y="2415696"/>
+                  </a:lnTo>
+                  <a:lnTo>
+                    <a:pt x="6774092" y="2409148"/>
+                  </a:lnTo>
+                  <a:lnTo>
+                    <a:pt x="6696849" y="2402419"/>
+                  </a:lnTo>
+                  <a:lnTo>
+                    <a:pt x="6619605" y="2395505"/>
+                  </a:lnTo>
+                  <a:lnTo>
+                    <a:pt x="6542361" y="2388399"/>
+                  </a:lnTo>
+                  <a:lnTo>
+                    <a:pt x="6465118" y="2381098"/>
+                  </a:lnTo>
+                  <a:lnTo>
+                    <a:pt x="6387874" y="2373595"/>
+                  </a:lnTo>
+                  <a:lnTo>
+                    <a:pt x="6310631" y="2365886"/>
+                  </a:lnTo>
+                  <a:lnTo>
+                    <a:pt x="6233387" y="2357963"/>
+                  </a:lnTo>
+                  <a:lnTo>
+                    <a:pt x="6156144" y="2349822"/>
+                  </a:lnTo>
+                  <a:lnTo>
+                    <a:pt x="6078900" y="2341457"/>
+                  </a:lnTo>
+                  <a:lnTo>
+                    <a:pt x="6001656" y="2332860"/>
+                  </a:lnTo>
+                  <a:lnTo>
+                    <a:pt x="5924413" y="2324027"/>
+                  </a:lnTo>
+                  <a:lnTo>
+                    <a:pt x="5847169" y="2314950"/>
+                  </a:lnTo>
+                  <a:lnTo>
+                    <a:pt x="5769926" y="2305622"/>
+                  </a:lnTo>
+                  <a:lnTo>
+                    <a:pt x="5692682" y="2296037"/>
+                  </a:lnTo>
+                  <a:lnTo>
+                    <a:pt x="5615439" y="2286188"/>
+                  </a:lnTo>
+                  <a:lnTo>
+                    <a:pt x="5538195" y="2276067"/>
+                  </a:lnTo>
+                  <a:lnTo>
+                    <a:pt x="5460951" y="2265667"/>
+                  </a:lnTo>
+                  <a:lnTo>
+                    <a:pt x="5383708" y="2254979"/>
+                  </a:lnTo>
+                  <a:lnTo>
+                    <a:pt x="5306464" y="2243997"/>
+                  </a:lnTo>
+                  <a:lnTo>
+                    <a:pt x="5229221" y="2232712"/>
+                  </a:lnTo>
+                  <a:lnTo>
+                    <a:pt x="5151977" y="2221116"/>
+                  </a:lnTo>
+                  <a:lnTo>
+                    <a:pt x="5074734" y="2209200"/>
+                  </a:lnTo>
+                  <a:lnTo>
+                    <a:pt x="4997490" y="2196955"/>
+                  </a:lnTo>
+                  <a:lnTo>
+                    <a:pt x="4920246" y="2184372"/>
+                  </a:lnTo>
+                  <a:lnTo>
+                    <a:pt x="4843003" y="2171442"/>
+                  </a:lnTo>
+                  <a:lnTo>
+                    <a:pt x="4765759" y="2158156"/>
+                  </a:lnTo>
+                  <a:lnTo>
+                    <a:pt x="4688516" y="2144503"/>
+                  </a:lnTo>
+                  <a:lnTo>
+                    <a:pt x="4611272" y="2130473"/>
+                  </a:lnTo>
+                  <a:lnTo>
+                    <a:pt x="4534029" y="2116056"/>
+                  </a:lnTo>
+                  <a:lnTo>
+                    <a:pt x="4456785" y="2101241"/>
+                  </a:lnTo>
+                  <a:lnTo>
+                    <a:pt x="4379541" y="2086018"/>
+                  </a:lnTo>
+                  <a:lnTo>
+                    <a:pt x="4302298" y="2070375"/>
+                  </a:lnTo>
+                  <a:lnTo>
+                    <a:pt x="4225054" y="2054300"/>
+                  </a:lnTo>
+                  <a:lnTo>
+                    <a:pt x="4147811" y="2037782"/>
+                  </a:lnTo>
+                  <a:lnTo>
+                    <a:pt x="4070567" y="2020808"/>
+                  </a:lnTo>
+                  <a:lnTo>
+                    <a:pt x="3993324" y="2003366"/>
+                  </a:lnTo>
+                  <a:lnTo>
+                    <a:pt x="3916080" y="1985443"/>
+                  </a:lnTo>
+                  <a:lnTo>
+                    <a:pt x="3838836" y="1967025"/>
+                  </a:lnTo>
+                  <a:lnTo>
+                    <a:pt x="3761593" y="1948099"/>
+                  </a:lnTo>
+                  <a:lnTo>
+                    <a:pt x="3684349" y="1928651"/>
+                  </a:lnTo>
+                  <a:lnTo>
+                    <a:pt x="3607106" y="1908666"/>
+                  </a:lnTo>
+                  <a:lnTo>
+                    <a:pt x="3529862" y="1888130"/>
+                  </a:lnTo>
+                  <a:lnTo>
+                    <a:pt x="3452619" y="1867028"/>
+                  </a:lnTo>
+                  <a:lnTo>
+                    <a:pt x="3375375" y="1845343"/>
+                  </a:lnTo>
+                  <a:lnTo>
+                    <a:pt x="3298131" y="1823502"/>
+                  </a:lnTo>
+                  <a:lnTo>
+                    <a:pt x="3220888" y="1819482"/>
+                  </a:lnTo>
+                  <a:lnTo>
+                    <a:pt x="3143644" y="1815443"/>
+                  </a:lnTo>
+                  <a:lnTo>
+                    <a:pt x="3066401" y="1811384"/>
+                  </a:lnTo>
+                  <a:lnTo>
+                    <a:pt x="2989157" y="1807306"/>
+                  </a:lnTo>
+                  <a:lnTo>
+                    <a:pt x="2911914" y="1803208"/>
+                  </a:lnTo>
+                  <a:lnTo>
+                    <a:pt x="2834670" y="1799090"/>
+                  </a:lnTo>
+                  <a:lnTo>
+                    <a:pt x="2757426" y="1794952"/>
+                  </a:lnTo>
+                  <a:lnTo>
+                    <a:pt x="2680183" y="1790794"/>
+                  </a:lnTo>
+                  <a:lnTo>
+                    <a:pt x="2602939" y="1786616"/>
+                  </a:lnTo>
+                  <a:lnTo>
+                    <a:pt x="2525696" y="1782417"/>
+                  </a:lnTo>
+                  <a:lnTo>
+                    <a:pt x="2448452" y="1778199"/>
+                  </a:lnTo>
+                  <a:lnTo>
+                    <a:pt x="2371209" y="1773959"/>
+                  </a:lnTo>
+                  <a:lnTo>
+                    <a:pt x="2293965" y="1769700"/>
+                  </a:lnTo>
+                  <a:lnTo>
+                    <a:pt x="2216721" y="1765419"/>
+                  </a:lnTo>
+                  <a:lnTo>
+                    <a:pt x="2139478" y="1761118"/>
+                  </a:lnTo>
+                  <a:lnTo>
+                    <a:pt x="2062234" y="1756796"/>
+                  </a:lnTo>
+                  <a:lnTo>
+                    <a:pt x="1984991" y="1752454"/>
+                  </a:lnTo>
+                  <a:lnTo>
+                    <a:pt x="1907747" y="1748090"/>
+                  </a:lnTo>
+                  <a:lnTo>
+                    <a:pt x="1830504" y="1743705"/>
+                  </a:lnTo>
+                  <a:lnTo>
+                    <a:pt x="1753260" y="1739298"/>
+                  </a:lnTo>
+                  <a:lnTo>
+                    <a:pt x="1676016" y="1734871"/>
+                  </a:lnTo>
+                  <a:lnTo>
+                    <a:pt x="1598773" y="1730422"/>
+                  </a:lnTo>
+                  <a:lnTo>
+                    <a:pt x="1521529" y="1725951"/>
+                  </a:lnTo>
+                  <a:lnTo>
+                    <a:pt x="1444286" y="1721459"/>
+                  </a:lnTo>
+                  <a:lnTo>
+                    <a:pt x="1367042" y="1716944"/>
+                  </a:lnTo>
+                  <a:lnTo>
+                    <a:pt x="1289799" y="1712408"/>
+                  </a:lnTo>
+                  <a:lnTo>
+                    <a:pt x="1212555" y="1707851"/>
+                  </a:lnTo>
+                  <a:lnTo>
+                    <a:pt x="1135311" y="1703270"/>
+                  </a:lnTo>
+                  <a:lnTo>
+                    <a:pt x="1058068" y="1698668"/>
+                  </a:lnTo>
+                  <a:lnTo>
+                    <a:pt x="980824" y="1694044"/>
+                  </a:lnTo>
+                  <a:lnTo>
+                    <a:pt x="903581" y="1689397"/>
+                  </a:lnTo>
+                  <a:lnTo>
+                    <a:pt x="826337" y="1684727"/>
+                  </a:lnTo>
+                  <a:lnTo>
+                    <a:pt x="749094" y="1680035"/>
+                  </a:lnTo>
+                  <a:lnTo>
+                    <a:pt x="671850" y="1675320"/>
+                  </a:lnTo>
+                  <a:lnTo>
+                    <a:pt x="594606" y="1670583"/>
+                  </a:lnTo>
+                  <a:lnTo>
+                    <a:pt x="517363" y="1665822"/>
+                  </a:lnTo>
+                  <a:lnTo>
+                    <a:pt x="440119" y="1661039"/>
+                  </a:lnTo>
+                  <a:lnTo>
+                    <a:pt x="362876" y="1656232"/>
+                  </a:lnTo>
+                  <a:lnTo>
+                    <a:pt x="285632" y="1651402"/>
+                  </a:lnTo>
+                  <a:lnTo>
+                    <a:pt x="208389" y="1646548"/>
+                  </a:lnTo>
+                  <a:lnTo>
+                    <a:pt x="131145" y="1641671"/>
+                  </a:lnTo>
+                  <a:lnTo>
+                    <a:pt x="53901" y="1636770"/>
+                  </a:lnTo>
+                  <a:lnTo>
+                    <a:pt x="0" y="1633334"/>
                   </a:lnTo>
                   <a:close/>
                 </a:path>
@@ -3615,303 +3615,303 @@
           </p:nvSpPr>
           <p:spPr>
             <a:xfrm>
-              <a:off x="817517" y="2767522"/>
-              <a:ext cx="7392041" cy="2108483"/>
+              <a:off x="817517" y="2904189"/>
+              <a:ext cx="7392041" cy="2010988"/>
             </a:xfrm>
             <a:custGeom>
               <a:avLst/>
               <a:pathLst>
-                <a:path w="7392041" h="2108483">
+                <a:path w="7392041" h="2010988">
                   <a:moveTo>
                     <a:pt x="0" y="0"/>
                   </a:moveTo>
                   <a:lnTo>
-                    <a:pt x="53901" y="52538"/>
-                  </a:lnTo>
-                  <a:lnTo>
-                    <a:pt x="131145" y="125807"/>
-                  </a:lnTo>
-                  <a:lnTo>
-                    <a:pt x="208389" y="197109"/>
-                  </a:lnTo>
-                  <a:lnTo>
-                    <a:pt x="285632" y="266496"/>
-                  </a:lnTo>
-                  <a:lnTo>
-                    <a:pt x="362876" y="334021"/>
-                  </a:lnTo>
-                  <a:lnTo>
-                    <a:pt x="440119" y="399733"/>
-                  </a:lnTo>
-                  <a:lnTo>
-                    <a:pt x="517363" y="463680"/>
-                  </a:lnTo>
-                  <a:lnTo>
-                    <a:pt x="594606" y="525911"/>
-                  </a:lnTo>
-                  <a:lnTo>
-                    <a:pt x="671850" y="586471"/>
-                  </a:lnTo>
-                  <a:lnTo>
-                    <a:pt x="749094" y="645406"/>
-                  </a:lnTo>
-                  <a:lnTo>
-                    <a:pt x="826337" y="702758"/>
-                  </a:lnTo>
-                  <a:lnTo>
-                    <a:pt x="903581" y="758570"/>
-                  </a:lnTo>
-                  <a:lnTo>
-                    <a:pt x="980824" y="812884"/>
-                  </a:lnTo>
-                  <a:lnTo>
-                    <a:pt x="1058068" y="865740"/>
-                  </a:lnTo>
-                  <a:lnTo>
-                    <a:pt x="1135311" y="917177"/>
-                  </a:lnTo>
-                  <a:lnTo>
-                    <a:pt x="1212555" y="967233"/>
-                  </a:lnTo>
-                  <a:lnTo>
-                    <a:pt x="1289799" y="1015945"/>
-                  </a:lnTo>
-                  <a:lnTo>
-                    <a:pt x="1367042" y="1063349"/>
-                  </a:lnTo>
-                  <a:lnTo>
-                    <a:pt x="1444286" y="1109481"/>
-                  </a:lnTo>
-                  <a:lnTo>
-                    <a:pt x="1521529" y="1154374"/>
-                  </a:lnTo>
-                  <a:lnTo>
-                    <a:pt x="1598773" y="1198062"/>
-                  </a:lnTo>
-                  <a:lnTo>
-                    <a:pt x="1676016" y="1240578"/>
-                  </a:lnTo>
-                  <a:lnTo>
-                    <a:pt x="1753260" y="1281951"/>
-                  </a:lnTo>
-                  <a:lnTo>
-                    <a:pt x="1830504" y="1322214"/>
-                  </a:lnTo>
-                  <a:lnTo>
-                    <a:pt x="1907747" y="1361396"/>
-                  </a:lnTo>
-                  <a:lnTo>
-                    <a:pt x="1984991" y="1399526"/>
-                  </a:lnTo>
-                  <a:lnTo>
-                    <a:pt x="2062234" y="1436633"/>
-                  </a:lnTo>
-                  <a:lnTo>
-                    <a:pt x="2139478" y="1472743"/>
-                  </a:lnTo>
-                  <a:lnTo>
-                    <a:pt x="2216721" y="1507884"/>
-                  </a:lnTo>
-                  <a:lnTo>
-                    <a:pt x="2293965" y="1542081"/>
-                  </a:lnTo>
-                  <a:lnTo>
-                    <a:pt x="2371209" y="1575361"/>
-                  </a:lnTo>
-                  <a:lnTo>
-                    <a:pt x="2448452" y="1607747"/>
-                  </a:lnTo>
-                  <a:lnTo>
-                    <a:pt x="2525696" y="1639263"/>
-                  </a:lnTo>
-                  <a:lnTo>
-                    <a:pt x="2602939" y="1669933"/>
-                  </a:lnTo>
-                  <a:lnTo>
-                    <a:pt x="2680183" y="1699780"/>
-                  </a:lnTo>
-                  <a:lnTo>
-                    <a:pt x="2757426" y="1728826"/>
-                  </a:lnTo>
-                  <a:lnTo>
-                    <a:pt x="2834670" y="1757092"/>
-                  </a:lnTo>
-                  <a:lnTo>
-                    <a:pt x="2911914" y="1784599"/>
-                  </a:lnTo>
-                  <a:lnTo>
-                    <a:pt x="2989157" y="1811367"/>
-                  </a:lnTo>
-                  <a:lnTo>
-                    <a:pt x="3066401" y="1837417"/>
-                  </a:lnTo>
-                  <a:lnTo>
-                    <a:pt x="3143644" y="1862767"/>
-                  </a:lnTo>
-                  <a:lnTo>
-                    <a:pt x="3220888" y="1887437"/>
-                  </a:lnTo>
-                  <a:lnTo>
-                    <a:pt x="3298131" y="1911445"/>
-                  </a:lnTo>
-                  <a:lnTo>
-                    <a:pt x="3375375" y="1916102"/>
-                  </a:lnTo>
-                  <a:lnTo>
-                    <a:pt x="3452619" y="1920276"/>
-                  </a:lnTo>
-                  <a:lnTo>
-                    <a:pt x="3529862" y="1924430"/>
-                  </a:lnTo>
-                  <a:lnTo>
-                    <a:pt x="3607106" y="1928563"/>
-                  </a:lnTo>
-                  <a:lnTo>
-                    <a:pt x="3684349" y="1932677"/>
-                  </a:lnTo>
-                  <a:lnTo>
-                    <a:pt x="3761593" y="1936771"/>
-                  </a:lnTo>
-                  <a:lnTo>
-                    <a:pt x="3838836" y="1940846"/>
-                  </a:lnTo>
-                  <a:lnTo>
-                    <a:pt x="3916080" y="1944900"/>
-                  </a:lnTo>
-                  <a:lnTo>
-                    <a:pt x="3993324" y="1948935"/>
-                  </a:lnTo>
-                  <a:lnTo>
-                    <a:pt x="4070567" y="1952951"/>
-                  </a:lnTo>
-                  <a:lnTo>
-                    <a:pt x="4147811" y="1956947"/>
-                  </a:lnTo>
-                  <a:lnTo>
-                    <a:pt x="4225054" y="1960924"/>
-                  </a:lnTo>
-                  <a:lnTo>
-                    <a:pt x="4302298" y="1964882"/>
-                  </a:lnTo>
-                  <a:lnTo>
-                    <a:pt x="4379541" y="1968821"/>
-                  </a:lnTo>
-                  <a:lnTo>
-                    <a:pt x="4456785" y="1972741"/>
-                  </a:lnTo>
-                  <a:lnTo>
-                    <a:pt x="4534029" y="1976641"/>
-                  </a:lnTo>
-                  <a:lnTo>
-                    <a:pt x="4611272" y="1980523"/>
-                  </a:lnTo>
-                  <a:lnTo>
-                    <a:pt x="4688516" y="1984387"/>
-                  </a:lnTo>
-                  <a:lnTo>
-                    <a:pt x="4765759" y="1988231"/>
-                  </a:lnTo>
-                  <a:lnTo>
-                    <a:pt x="4843003" y="1992058"/>
-                  </a:lnTo>
-                  <a:lnTo>
-                    <a:pt x="4920246" y="1995865"/>
-                  </a:lnTo>
-                  <a:lnTo>
-                    <a:pt x="4997490" y="1999655"/>
-                  </a:lnTo>
-                  <a:lnTo>
-                    <a:pt x="5074734" y="2003426"/>
-                  </a:lnTo>
-                  <a:lnTo>
-                    <a:pt x="5151977" y="2007179"/>
-                  </a:lnTo>
-                  <a:lnTo>
-                    <a:pt x="5229221" y="2010913"/>
-                  </a:lnTo>
-                  <a:lnTo>
-                    <a:pt x="5306464" y="2014630"/>
-                  </a:lnTo>
-                  <a:lnTo>
-                    <a:pt x="5383708" y="2018329"/>
-                  </a:lnTo>
-                  <a:lnTo>
-                    <a:pt x="5460951" y="2022010"/>
-                  </a:lnTo>
-                  <a:lnTo>
-                    <a:pt x="5538195" y="2025673"/>
-                  </a:lnTo>
-                  <a:lnTo>
-                    <a:pt x="5615439" y="2029319"/>
-                  </a:lnTo>
-                  <a:lnTo>
-                    <a:pt x="5692682" y="2032947"/>
-                  </a:lnTo>
-                  <a:lnTo>
-                    <a:pt x="5769926" y="2036557"/>
-                  </a:lnTo>
-                  <a:lnTo>
-                    <a:pt x="5847169" y="2040151"/>
-                  </a:lnTo>
-                  <a:lnTo>
-                    <a:pt x="5924413" y="2043726"/>
-                  </a:lnTo>
-                  <a:lnTo>
-                    <a:pt x="6001656" y="2047285"/>
-                  </a:lnTo>
-                  <a:lnTo>
-                    <a:pt x="6078900" y="2050826"/>
-                  </a:lnTo>
-                  <a:lnTo>
-                    <a:pt x="6156144" y="2054351"/>
-                  </a:lnTo>
-                  <a:lnTo>
-                    <a:pt x="6233387" y="2057858"/>
-                  </a:lnTo>
-                  <a:lnTo>
-                    <a:pt x="6310631" y="2061348"/>
-                  </a:lnTo>
-                  <a:lnTo>
-                    <a:pt x="6387874" y="2064822"/>
-                  </a:lnTo>
-                  <a:lnTo>
-                    <a:pt x="6465118" y="2068279"/>
-                  </a:lnTo>
-                  <a:lnTo>
-                    <a:pt x="6542361" y="2071719"/>
-                  </a:lnTo>
-                  <a:lnTo>
-                    <a:pt x="6619605" y="2075142"/>
-                  </a:lnTo>
-                  <a:lnTo>
-                    <a:pt x="6696849" y="2078549"/>
-                  </a:lnTo>
-                  <a:lnTo>
-                    <a:pt x="6774092" y="2081940"/>
-                  </a:lnTo>
-                  <a:lnTo>
-                    <a:pt x="6851336" y="2085314"/>
-                  </a:lnTo>
-                  <a:lnTo>
-                    <a:pt x="6928579" y="2088672"/>
-                  </a:lnTo>
-                  <a:lnTo>
-                    <a:pt x="7005823" y="2092014"/>
-                  </a:lnTo>
-                  <a:lnTo>
-                    <a:pt x="7083066" y="2095340"/>
-                  </a:lnTo>
-                  <a:lnTo>
-                    <a:pt x="7160310" y="2098650"/>
-                  </a:lnTo>
-                  <a:lnTo>
-                    <a:pt x="7237554" y="2101943"/>
-                  </a:lnTo>
-                  <a:lnTo>
-                    <a:pt x="7314797" y="2105221"/>
-                  </a:lnTo>
-                  <a:lnTo>
-                    <a:pt x="7392041" y="2108483"/>
+                    <a:pt x="53901" y="50109"/>
+                  </a:lnTo>
+                  <a:lnTo>
+                    <a:pt x="131145" y="119990"/>
+                  </a:lnTo>
+                  <a:lnTo>
+                    <a:pt x="208389" y="187994"/>
+                  </a:lnTo>
+                  <a:lnTo>
+                    <a:pt x="285632" y="254173"/>
+                  </a:lnTo>
+                  <a:lnTo>
+                    <a:pt x="362876" y="318576"/>
+                  </a:lnTo>
+                  <a:lnTo>
+                    <a:pt x="440119" y="381249"/>
+                  </a:lnTo>
+                  <a:lnTo>
+                    <a:pt x="517363" y="442240"/>
+                  </a:lnTo>
+                  <a:lnTo>
+                    <a:pt x="594606" y="501593"/>
+                  </a:lnTo>
+                  <a:lnTo>
+                    <a:pt x="671850" y="559353"/>
+                  </a:lnTo>
+                  <a:lnTo>
+                    <a:pt x="749094" y="615562"/>
+                  </a:lnTo>
+                  <a:lnTo>
+                    <a:pt x="826337" y="670262"/>
+                  </a:lnTo>
+                  <a:lnTo>
+                    <a:pt x="903581" y="723494"/>
+                  </a:lnTo>
+                  <a:lnTo>
+                    <a:pt x="980824" y="775297"/>
+                  </a:lnTo>
+                  <a:lnTo>
+                    <a:pt x="1058068" y="825709"/>
+                  </a:lnTo>
+                  <a:lnTo>
+                    <a:pt x="1135311" y="874767"/>
+                  </a:lnTo>
+                  <a:lnTo>
+                    <a:pt x="1212555" y="922508"/>
+                  </a:lnTo>
+                  <a:lnTo>
+                    <a:pt x="1289799" y="968968"/>
+                  </a:lnTo>
+                  <a:lnTo>
+                    <a:pt x="1367042" y="1014181"/>
+                  </a:lnTo>
+                  <a:lnTo>
+                    <a:pt x="1444286" y="1058179"/>
+                  </a:lnTo>
+                  <a:lnTo>
+                    <a:pt x="1521529" y="1100997"/>
+                  </a:lnTo>
+                  <a:lnTo>
+                    <a:pt x="1598773" y="1142664"/>
+                  </a:lnTo>
+                  <a:lnTo>
+                    <a:pt x="1676016" y="1183214"/>
+                  </a:lnTo>
+                  <a:lnTo>
+                    <a:pt x="1753260" y="1222674"/>
+                  </a:lnTo>
+                  <a:lnTo>
+                    <a:pt x="1830504" y="1261075"/>
+                  </a:lnTo>
+                  <a:lnTo>
+                    <a:pt x="1907747" y="1298446"/>
+                  </a:lnTo>
+                  <a:lnTo>
+                    <a:pt x="1984991" y="1334813"/>
+                  </a:lnTo>
+                  <a:lnTo>
+                    <a:pt x="2062234" y="1370203"/>
+                  </a:lnTo>
+                  <a:lnTo>
+                    <a:pt x="2139478" y="1404644"/>
+                  </a:lnTo>
+                  <a:lnTo>
+                    <a:pt x="2216721" y="1438160"/>
+                  </a:lnTo>
+                  <a:lnTo>
+                    <a:pt x="2293965" y="1470776"/>
+                  </a:lnTo>
+                  <a:lnTo>
+                    <a:pt x="2371209" y="1502517"/>
+                  </a:lnTo>
+                  <a:lnTo>
+                    <a:pt x="2448452" y="1533405"/>
+                  </a:lnTo>
+                  <a:lnTo>
+                    <a:pt x="2525696" y="1563464"/>
+                  </a:lnTo>
+                  <a:lnTo>
+                    <a:pt x="2602939" y="1592716"/>
+                  </a:lnTo>
+                  <a:lnTo>
+                    <a:pt x="2680183" y="1621183"/>
+                  </a:lnTo>
+                  <a:lnTo>
+                    <a:pt x="2757426" y="1648885"/>
+                  </a:lnTo>
+                  <a:lnTo>
+                    <a:pt x="2834670" y="1675844"/>
+                  </a:lnTo>
+                  <a:lnTo>
+                    <a:pt x="2911914" y="1702079"/>
+                  </a:lnTo>
+                  <a:lnTo>
+                    <a:pt x="2989157" y="1727610"/>
+                  </a:lnTo>
+                  <a:lnTo>
+                    <a:pt x="3066401" y="1752455"/>
+                  </a:lnTo>
+                  <a:lnTo>
+                    <a:pt x="3143644" y="1776634"/>
+                  </a:lnTo>
+                  <a:lnTo>
+                    <a:pt x="3220888" y="1800163"/>
+                  </a:lnTo>
+                  <a:lnTo>
+                    <a:pt x="3298131" y="1823061"/>
+                  </a:lnTo>
+                  <a:lnTo>
+                    <a:pt x="3375375" y="1827502"/>
+                  </a:lnTo>
+                  <a:lnTo>
+                    <a:pt x="3452619" y="1831483"/>
+                  </a:lnTo>
+                  <a:lnTo>
+                    <a:pt x="3529862" y="1835445"/>
+                  </a:lnTo>
+                  <a:lnTo>
+                    <a:pt x="3607106" y="1839387"/>
+                  </a:lnTo>
+                  <a:lnTo>
+                    <a:pt x="3684349" y="1843311"/>
+                  </a:lnTo>
+                  <a:lnTo>
+                    <a:pt x="3761593" y="1847216"/>
+                  </a:lnTo>
+                  <a:lnTo>
+                    <a:pt x="3838836" y="1851102"/>
+                  </a:lnTo>
+                  <a:lnTo>
+                    <a:pt x="3916080" y="1854969"/>
+                  </a:lnTo>
+                  <a:lnTo>
+                    <a:pt x="3993324" y="1858817"/>
+                  </a:lnTo>
+                  <a:lnTo>
+                    <a:pt x="4070567" y="1862647"/>
+                  </a:lnTo>
+                  <a:lnTo>
+                    <a:pt x="4147811" y="1866459"/>
+                  </a:lnTo>
+                  <a:lnTo>
+                    <a:pt x="4225054" y="1870252"/>
+                  </a:lnTo>
+                  <a:lnTo>
+                    <a:pt x="4302298" y="1874027"/>
+                  </a:lnTo>
+                  <a:lnTo>
+                    <a:pt x="4379541" y="1877783"/>
+                  </a:lnTo>
+                  <a:lnTo>
+                    <a:pt x="4456785" y="1881522"/>
+                  </a:lnTo>
+                  <a:lnTo>
+                    <a:pt x="4534029" y="1885242"/>
+                  </a:lnTo>
+                  <a:lnTo>
+                    <a:pt x="4611272" y="1888945"/>
+                  </a:lnTo>
+                  <a:lnTo>
+                    <a:pt x="4688516" y="1892629"/>
+                  </a:lnTo>
+                  <a:lnTo>
+                    <a:pt x="4765759" y="1896296"/>
+                  </a:lnTo>
+                  <a:lnTo>
+                    <a:pt x="4843003" y="1899946"/>
+                  </a:lnTo>
+                  <a:lnTo>
+                    <a:pt x="4920246" y="1903577"/>
+                  </a:lnTo>
+                  <a:lnTo>
+                    <a:pt x="4997490" y="1907191"/>
+                  </a:lnTo>
+                  <a:lnTo>
+                    <a:pt x="5074734" y="1910788"/>
+                  </a:lnTo>
+                  <a:lnTo>
+                    <a:pt x="5151977" y="1914367"/>
+                  </a:lnTo>
+                  <a:lnTo>
+                    <a:pt x="5229221" y="1917929"/>
+                  </a:lnTo>
+                  <a:lnTo>
+                    <a:pt x="5306464" y="1921474"/>
+                  </a:lnTo>
+                  <a:lnTo>
+                    <a:pt x="5383708" y="1925002"/>
+                  </a:lnTo>
+                  <a:lnTo>
+                    <a:pt x="5460951" y="1928513"/>
+                  </a:lnTo>
+                  <a:lnTo>
+                    <a:pt x="5538195" y="1932007"/>
+                  </a:lnTo>
+                  <a:lnTo>
+                    <a:pt x="5615439" y="1935484"/>
+                  </a:lnTo>
+                  <a:lnTo>
+                    <a:pt x="5692682" y="1938944"/>
+                  </a:lnTo>
+                  <a:lnTo>
+                    <a:pt x="5769926" y="1942388"/>
+                  </a:lnTo>
+                  <a:lnTo>
+                    <a:pt x="5847169" y="1945815"/>
+                  </a:lnTo>
+                  <a:lnTo>
+                    <a:pt x="5924413" y="1949225"/>
+                  </a:lnTo>
+                  <a:lnTo>
+                    <a:pt x="6001656" y="1952619"/>
+                  </a:lnTo>
+                  <a:lnTo>
+                    <a:pt x="6078900" y="1955997"/>
+                  </a:lnTo>
+                  <a:lnTo>
+                    <a:pt x="6156144" y="1959358"/>
+                  </a:lnTo>
+                  <a:lnTo>
+                    <a:pt x="6233387" y="1962703"/>
+                  </a:lnTo>
+                  <a:lnTo>
+                    <a:pt x="6310631" y="1966032"/>
+                  </a:lnTo>
+                  <a:lnTo>
+                    <a:pt x="6387874" y="1969345"/>
+                  </a:lnTo>
+                  <a:lnTo>
+                    <a:pt x="6465118" y="1972642"/>
+                  </a:lnTo>
+                  <a:lnTo>
+                    <a:pt x="6542361" y="1975923"/>
+                  </a:lnTo>
+                  <a:lnTo>
+                    <a:pt x="6619605" y="1979189"/>
+                  </a:lnTo>
+                  <a:lnTo>
+                    <a:pt x="6696849" y="1982438"/>
+                  </a:lnTo>
+                  <a:lnTo>
+                    <a:pt x="6774092" y="1985672"/>
+                  </a:lnTo>
+                  <a:lnTo>
+                    <a:pt x="6851336" y="1988890"/>
+                  </a:lnTo>
+                  <a:lnTo>
+                    <a:pt x="6928579" y="1992093"/>
+                  </a:lnTo>
+                  <a:lnTo>
+                    <a:pt x="7005823" y="1995280"/>
+                  </a:lnTo>
+                  <a:lnTo>
+                    <a:pt x="7083066" y="1998452"/>
+                  </a:lnTo>
+                  <a:lnTo>
+                    <a:pt x="7160310" y="2001609"/>
+                  </a:lnTo>
+                  <a:lnTo>
+                    <a:pt x="7237554" y="2004750"/>
+                  </a:lnTo>
+                  <a:lnTo>
+                    <a:pt x="7314797" y="2007876"/>
+                  </a:lnTo>
+                  <a:lnTo>
+                    <a:pt x="7392041" y="2010988"/>
                   </a:lnTo>
                 </a:path>
               </a:pathLst>
@@ -3931,300 +3931,300 @@
           </p:nvSpPr>
           <p:spPr>
             <a:xfrm>
-              <a:off x="817517" y="4480042"/>
-              <a:ext cx="7392041" cy="863459"/>
+              <a:off x="817517" y="4537523"/>
+              <a:ext cx="7392041" cy="823533"/>
             </a:xfrm>
             <a:custGeom>
               <a:avLst/>
               <a:pathLst>
-                <a:path w="7392041" h="863459">
+                <a:path w="7392041" h="823533">
                   <a:moveTo>
-                    <a:pt x="7392041" y="863459"/>
+                    <a:pt x="7392041" y="823533"/>
                   </a:moveTo>
                   <a:lnTo>
-                    <a:pt x="7314797" y="857784"/>
-                  </a:lnTo>
-                  <a:lnTo>
-                    <a:pt x="7237554" y="851953"/>
-                  </a:lnTo>
-                  <a:lnTo>
-                    <a:pt x="7160310" y="845961"/>
-                  </a:lnTo>
-                  <a:lnTo>
-                    <a:pt x="7083066" y="839803"/>
-                  </a:lnTo>
-                  <a:lnTo>
-                    <a:pt x="7005823" y="833476"/>
-                  </a:lnTo>
-                  <a:lnTo>
-                    <a:pt x="6928579" y="826973"/>
-                  </a:lnTo>
-                  <a:lnTo>
-                    <a:pt x="6851336" y="820292"/>
-                  </a:lnTo>
-                  <a:lnTo>
-                    <a:pt x="6774092" y="813426"/>
-                  </a:lnTo>
-                  <a:lnTo>
-                    <a:pt x="6696849" y="806371"/>
-                  </a:lnTo>
-                  <a:lnTo>
-                    <a:pt x="6619605" y="799121"/>
-                  </a:lnTo>
-                  <a:lnTo>
-                    <a:pt x="6542361" y="791672"/>
-                  </a:lnTo>
-                  <a:lnTo>
-                    <a:pt x="6465118" y="784016"/>
-                  </a:lnTo>
-                  <a:lnTo>
-                    <a:pt x="6387874" y="776150"/>
-                  </a:lnTo>
-                  <a:lnTo>
-                    <a:pt x="6310631" y="768066"/>
-                  </a:lnTo>
-                  <a:lnTo>
-                    <a:pt x="6233387" y="759760"/>
-                  </a:lnTo>
-                  <a:lnTo>
-                    <a:pt x="6156144" y="751224"/>
-                  </a:lnTo>
-                  <a:lnTo>
-                    <a:pt x="6078900" y="742453"/>
-                  </a:lnTo>
-                  <a:lnTo>
-                    <a:pt x="6001656" y="733440"/>
-                  </a:lnTo>
-                  <a:lnTo>
-                    <a:pt x="5924413" y="724178"/>
-                  </a:lnTo>
-                  <a:lnTo>
-                    <a:pt x="5847169" y="714661"/>
-                  </a:lnTo>
-                  <a:lnTo>
-                    <a:pt x="5769926" y="704881"/>
-                  </a:lnTo>
-                  <a:lnTo>
-                    <a:pt x="5692682" y="694832"/>
-                  </a:lnTo>
-                  <a:lnTo>
-                    <a:pt x="5615439" y="684505"/>
-                  </a:lnTo>
-                  <a:lnTo>
-                    <a:pt x="5538195" y="673893"/>
-                  </a:lnTo>
-                  <a:lnTo>
-                    <a:pt x="5460951" y="662989"/>
-                  </a:lnTo>
-                  <a:lnTo>
-                    <a:pt x="5383708" y="651783"/>
-                  </a:lnTo>
-                  <a:lnTo>
-                    <a:pt x="5306464" y="640269"/>
-                  </a:lnTo>
-                  <a:lnTo>
-                    <a:pt x="5229221" y="628437"/>
-                  </a:lnTo>
-                  <a:lnTo>
-                    <a:pt x="5151977" y="616278"/>
-                  </a:lnTo>
-                  <a:lnTo>
-                    <a:pt x="5074734" y="603784"/>
-                  </a:lnTo>
-                  <a:lnTo>
-                    <a:pt x="4997490" y="590946"/>
-                  </a:lnTo>
-                  <a:lnTo>
-                    <a:pt x="4920246" y="577753"/>
-                  </a:lnTo>
-                  <a:lnTo>
-                    <a:pt x="4843003" y="564196"/>
-                  </a:lnTo>
-                  <a:lnTo>
-                    <a:pt x="4765759" y="550266"/>
-                  </a:lnTo>
-                  <a:lnTo>
-                    <a:pt x="4688516" y="535951"/>
-                  </a:lnTo>
-                  <a:lnTo>
-                    <a:pt x="4611272" y="521241"/>
-                  </a:lnTo>
-                  <a:lnTo>
-                    <a:pt x="4534029" y="506125"/>
-                  </a:lnTo>
-                  <a:lnTo>
-                    <a:pt x="4456785" y="490592"/>
-                  </a:lnTo>
-                  <a:lnTo>
-                    <a:pt x="4379541" y="474631"/>
-                  </a:lnTo>
-                  <a:lnTo>
-                    <a:pt x="4302298" y="458229"/>
-                  </a:lnTo>
-                  <a:lnTo>
-                    <a:pt x="4225054" y="441375"/>
-                  </a:lnTo>
-                  <a:lnTo>
-                    <a:pt x="4147811" y="424056"/>
-                  </a:lnTo>
-                  <a:lnTo>
-                    <a:pt x="4070567" y="406259"/>
-                  </a:lnTo>
-                  <a:lnTo>
-                    <a:pt x="3993324" y="387971"/>
-                  </a:lnTo>
-                  <a:lnTo>
-                    <a:pt x="3916080" y="369179"/>
-                  </a:lnTo>
-                  <a:lnTo>
-                    <a:pt x="3838836" y="349868"/>
-                  </a:lnTo>
-                  <a:lnTo>
-                    <a:pt x="3761593" y="330025"/>
-                  </a:lnTo>
-                  <a:lnTo>
-                    <a:pt x="3684349" y="309634"/>
-                  </a:lnTo>
-                  <a:lnTo>
-                    <a:pt x="3607106" y="288680"/>
-                  </a:lnTo>
-                  <a:lnTo>
-                    <a:pt x="3529862" y="267149"/>
-                  </a:lnTo>
-                  <a:lnTo>
-                    <a:pt x="3452619" y="245023"/>
-                  </a:lnTo>
-                  <a:lnTo>
-                    <a:pt x="3375375" y="222288"/>
-                  </a:lnTo>
-                  <a:lnTo>
-                    <a:pt x="3298131" y="199387"/>
-                  </a:lnTo>
-                  <a:lnTo>
-                    <a:pt x="3220888" y="195172"/>
-                  </a:lnTo>
-                  <a:lnTo>
-                    <a:pt x="3143644" y="190937"/>
-                  </a:lnTo>
-                  <a:lnTo>
-                    <a:pt x="3066401" y="186682"/>
-                  </a:lnTo>
-                  <a:lnTo>
-                    <a:pt x="2989157" y="182406"/>
-                  </a:lnTo>
-                  <a:lnTo>
-                    <a:pt x="2911914" y="178109"/>
-                  </a:lnTo>
-                  <a:lnTo>
-                    <a:pt x="2834670" y="173791"/>
-                  </a:lnTo>
-                  <a:lnTo>
-                    <a:pt x="2757426" y="169453"/>
-                  </a:lnTo>
-                  <a:lnTo>
-                    <a:pt x="2680183" y="165093"/>
-                  </a:lnTo>
-                  <a:lnTo>
-                    <a:pt x="2602939" y="160713"/>
-                  </a:lnTo>
-                  <a:lnTo>
-                    <a:pt x="2525696" y="156311"/>
-                  </a:lnTo>
-                  <a:lnTo>
-                    <a:pt x="2448452" y="151888"/>
-                  </a:lnTo>
-                  <a:lnTo>
-                    <a:pt x="2371209" y="147443"/>
-                  </a:lnTo>
-                  <a:lnTo>
-                    <a:pt x="2293965" y="142977"/>
-                  </a:lnTo>
-                  <a:lnTo>
-                    <a:pt x="2216721" y="138489"/>
-                  </a:lnTo>
-                  <a:lnTo>
-                    <a:pt x="2139478" y="133979"/>
-                  </a:lnTo>
-                  <a:lnTo>
-                    <a:pt x="2062234" y="129448"/>
-                  </a:lnTo>
-                  <a:lnTo>
-                    <a:pt x="1984991" y="124894"/>
-                  </a:lnTo>
-                  <a:lnTo>
-                    <a:pt x="1907747" y="120319"/>
-                  </a:lnTo>
-                  <a:lnTo>
-                    <a:pt x="1830504" y="115721"/>
-                  </a:lnTo>
-                  <a:lnTo>
-                    <a:pt x="1753260" y="111101"/>
-                  </a:lnTo>
-                  <a:lnTo>
-                    <a:pt x="1676016" y="106459"/>
-                  </a:lnTo>
-                  <a:lnTo>
-                    <a:pt x="1598773" y="101794"/>
-                  </a:lnTo>
-                  <a:lnTo>
-                    <a:pt x="1521529" y="97107"/>
-                  </a:lnTo>
-                  <a:lnTo>
-                    <a:pt x="1444286" y="92397"/>
-                  </a:lnTo>
-                  <a:lnTo>
-                    <a:pt x="1367042" y="87664"/>
-                  </a:lnTo>
-                  <a:lnTo>
-                    <a:pt x="1289799" y="82908"/>
-                  </a:lnTo>
-                  <a:lnTo>
-                    <a:pt x="1212555" y="78129"/>
-                  </a:lnTo>
-                  <a:lnTo>
-                    <a:pt x="1135311" y="73327"/>
-                  </a:lnTo>
-                  <a:lnTo>
-                    <a:pt x="1058068" y="68501"/>
-                  </a:lnTo>
-                  <a:lnTo>
-                    <a:pt x="980824" y="63653"/>
-                  </a:lnTo>
-                  <a:lnTo>
-                    <a:pt x="903581" y="58781"/>
-                  </a:lnTo>
-                  <a:lnTo>
-                    <a:pt x="826337" y="53885"/>
-                  </a:lnTo>
-                  <a:lnTo>
-                    <a:pt x="749094" y="48965"/>
-                  </a:lnTo>
-                  <a:lnTo>
-                    <a:pt x="671850" y="44022"/>
-                  </a:lnTo>
-                  <a:lnTo>
-                    <a:pt x="594606" y="39054"/>
-                  </a:lnTo>
-                  <a:lnTo>
-                    <a:pt x="517363" y="34063"/>
-                  </a:lnTo>
-                  <a:lnTo>
-                    <a:pt x="440119" y="29047"/>
-                  </a:lnTo>
-                  <a:lnTo>
-                    <a:pt x="362876" y="24007"/>
-                  </a:lnTo>
-                  <a:lnTo>
-                    <a:pt x="285632" y="18943"/>
-                  </a:lnTo>
-                  <a:lnTo>
-                    <a:pt x="208389" y="13854"/>
-                  </a:lnTo>
-                  <a:lnTo>
-                    <a:pt x="131145" y="8741"/>
-                  </a:lnTo>
-                  <a:lnTo>
-                    <a:pt x="53901" y="3602"/>
+                    <a:pt x="7314797" y="818121"/>
+                  </a:lnTo>
+                  <a:lnTo>
+                    <a:pt x="7237554" y="812559"/>
+                  </a:lnTo>
+                  <a:lnTo>
+                    <a:pt x="7160310" y="806844"/>
+                  </a:lnTo>
+                  <a:lnTo>
+                    <a:pt x="7083066" y="800971"/>
+                  </a:lnTo>
+                  <a:lnTo>
+                    <a:pt x="7005823" y="794936"/>
+                  </a:lnTo>
+                  <a:lnTo>
+                    <a:pt x="6928579" y="788735"/>
+                  </a:lnTo>
+                  <a:lnTo>
+                    <a:pt x="6851336" y="782362"/>
+                  </a:lnTo>
+                  <a:lnTo>
+                    <a:pt x="6774092" y="775814"/>
+                  </a:lnTo>
+                  <a:lnTo>
+                    <a:pt x="6696849" y="769085"/>
+                  </a:lnTo>
+                  <a:lnTo>
+                    <a:pt x="6619605" y="762170"/>
+                  </a:lnTo>
+                  <a:lnTo>
+                    <a:pt x="6542361" y="755065"/>
+                  </a:lnTo>
+                  <a:lnTo>
+                    <a:pt x="6465118" y="747764"/>
+                  </a:lnTo>
+                  <a:lnTo>
+                    <a:pt x="6387874" y="740261"/>
+                  </a:lnTo>
+                  <a:lnTo>
+                    <a:pt x="6310631" y="732551"/>
+                  </a:lnTo>
+                  <a:lnTo>
+                    <a:pt x="6233387" y="724629"/>
+                  </a:lnTo>
+                  <a:lnTo>
+                    <a:pt x="6156144" y="716488"/>
+                  </a:lnTo>
+                  <a:lnTo>
+                    <a:pt x="6078900" y="708122"/>
+                  </a:lnTo>
+                  <a:lnTo>
+                    <a:pt x="6001656" y="699526"/>
+                  </a:lnTo>
+                  <a:lnTo>
+                    <a:pt x="5924413" y="690693"/>
+                  </a:lnTo>
+                  <a:lnTo>
+                    <a:pt x="5847169" y="681615"/>
+                  </a:lnTo>
+                  <a:lnTo>
+                    <a:pt x="5769926" y="672288"/>
+                  </a:lnTo>
+                  <a:lnTo>
+                    <a:pt x="5692682" y="662703"/>
+                  </a:lnTo>
+                  <a:lnTo>
+                    <a:pt x="5615439" y="652854"/>
+                  </a:lnTo>
+                  <a:lnTo>
+                    <a:pt x="5538195" y="642733"/>
+                  </a:lnTo>
+                  <a:lnTo>
+                    <a:pt x="5460951" y="632332"/>
+                  </a:lnTo>
+                  <a:lnTo>
+                    <a:pt x="5383708" y="621645"/>
+                  </a:lnTo>
+                  <a:lnTo>
+                    <a:pt x="5306464" y="610663"/>
+                  </a:lnTo>
+                  <a:lnTo>
+                    <a:pt x="5229221" y="599378"/>
+                  </a:lnTo>
+                  <a:lnTo>
+                    <a:pt x="5151977" y="587782"/>
+                  </a:lnTo>
+                  <a:lnTo>
+                    <a:pt x="5074734" y="575866"/>
+                  </a:lnTo>
+                  <a:lnTo>
+                    <a:pt x="4997490" y="563621"/>
+                  </a:lnTo>
+                  <a:lnTo>
+                    <a:pt x="4920246" y="551038"/>
+                  </a:lnTo>
+                  <a:lnTo>
+                    <a:pt x="4843003" y="538108"/>
+                  </a:lnTo>
+                  <a:lnTo>
+                    <a:pt x="4765759" y="524821"/>
+                  </a:lnTo>
+                  <a:lnTo>
+                    <a:pt x="4688516" y="511168"/>
+                  </a:lnTo>
+                  <a:lnTo>
+                    <a:pt x="4611272" y="497139"/>
+                  </a:lnTo>
+                  <a:lnTo>
+                    <a:pt x="4534029" y="482722"/>
+                  </a:lnTo>
+                  <a:lnTo>
+                    <a:pt x="4456785" y="467907"/>
+                  </a:lnTo>
+                  <a:lnTo>
+                    <a:pt x="4379541" y="452684"/>
+                  </a:lnTo>
+                  <a:lnTo>
+                    <a:pt x="4302298" y="437041"/>
+                  </a:lnTo>
+                  <a:lnTo>
+                    <a:pt x="4225054" y="420966"/>
+                  </a:lnTo>
+                  <a:lnTo>
+                    <a:pt x="4147811" y="404448"/>
+                  </a:lnTo>
+                  <a:lnTo>
+                    <a:pt x="4070567" y="387474"/>
+                  </a:lnTo>
+                  <a:lnTo>
+                    <a:pt x="3993324" y="370032"/>
+                  </a:lnTo>
+                  <a:lnTo>
+                    <a:pt x="3916080" y="352108"/>
+                  </a:lnTo>
+                  <a:lnTo>
+                    <a:pt x="3838836" y="333690"/>
+                  </a:lnTo>
+                  <a:lnTo>
+                    <a:pt x="3761593" y="314765"/>
+                  </a:lnTo>
+                  <a:lnTo>
+                    <a:pt x="3684349" y="295316"/>
+                  </a:lnTo>
+                  <a:lnTo>
+                    <a:pt x="3607106" y="275332"/>
+                  </a:lnTo>
+                  <a:lnTo>
+                    <a:pt x="3529862" y="254796"/>
+                  </a:lnTo>
+                  <a:lnTo>
+                    <a:pt x="3452619" y="233694"/>
+                  </a:lnTo>
+                  <a:lnTo>
+                    <a:pt x="3375375" y="212009"/>
+                  </a:lnTo>
+                  <a:lnTo>
+                    <a:pt x="3298131" y="190167"/>
+                  </a:lnTo>
+                  <a:lnTo>
+                    <a:pt x="3220888" y="186148"/>
+                  </a:lnTo>
+                  <a:lnTo>
+                    <a:pt x="3143644" y="182109"/>
+                  </a:lnTo>
+                  <a:lnTo>
+                    <a:pt x="3066401" y="178050"/>
+                  </a:lnTo>
+                  <a:lnTo>
+                    <a:pt x="2989157" y="173972"/>
+                  </a:lnTo>
+                  <a:lnTo>
+                    <a:pt x="2911914" y="169873"/>
+                  </a:lnTo>
+                  <a:lnTo>
+                    <a:pt x="2834670" y="165755"/>
+                  </a:lnTo>
+                  <a:lnTo>
+                    <a:pt x="2757426" y="161617"/>
+                  </a:lnTo>
+                  <a:lnTo>
+                    <a:pt x="2680183" y="157459"/>
+                  </a:lnTo>
+                  <a:lnTo>
+                    <a:pt x="2602939" y="153281"/>
+                  </a:lnTo>
+                  <a:lnTo>
+                    <a:pt x="2525696" y="149083"/>
+                  </a:lnTo>
+                  <a:lnTo>
+                    <a:pt x="2448452" y="144864"/>
+                  </a:lnTo>
+                  <a:lnTo>
+                    <a:pt x="2371209" y="140625"/>
+                  </a:lnTo>
+                  <a:lnTo>
+                    <a:pt x="2293965" y="136365"/>
+                  </a:lnTo>
+                  <a:lnTo>
+                    <a:pt x="2216721" y="132085"/>
+                  </a:lnTo>
+                  <a:lnTo>
+                    <a:pt x="2139478" y="127784"/>
+                  </a:lnTo>
+                  <a:lnTo>
+                    <a:pt x="2062234" y="123462"/>
+                  </a:lnTo>
+                  <a:lnTo>
+                    <a:pt x="1984991" y="119119"/>
+                  </a:lnTo>
+                  <a:lnTo>
+                    <a:pt x="1907747" y="114755"/>
+                  </a:lnTo>
+                  <a:lnTo>
+                    <a:pt x="1830504" y="110370"/>
+                  </a:lnTo>
+                  <a:lnTo>
+                    <a:pt x="1753260" y="105964"/>
+                  </a:lnTo>
+                  <a:lnTo>
+                    <a:pt x="1676016" y="101536"/>
+                  </a:lnTo>
+                  <a:lnTo>
+                    <a:pt x="1598773" y="97087"/>
+                  </a:lnTo>
+                  <a:lnTo>
+                    <a:pt x="1521529" y="92617"/>
+                  </a:lnTo>
+                  <a:lnTo>
+                    <a:pt x="1444286" y="88124"/>
+                  </a:lnTo>
+                  <a:lnTo>
+                    <a:pt x="1367042" y="83610"/>
+                  </a:lnTo>
+                  <a:lnTo>
+                    <a:pt x="1289799" y="79074"/>
+                  </a:lnTo>
+                  <a:lnTo>
+                    <a:pt x="1212555" y="74516"/>
+                  </a:lnTo>
+                  <a:lnTo>
+                    <a:pt x="1135311" y="69936"/>
+                  </a:lnTo>
+                  <a:lnTo>
+                    <a:pt x="1058068" y="65334"/>
+                  </a:lnTo>
+                  <a:lnTo>
+                    <a:pt x="980824" y="60709"/>
+                  </a:lnTo>
+                  <a:lnTo>
+                    <a:pt x="903581" y="56062"/>
+                  </a:lnTo>
+                  <a:lnTo>
+                    <a:pt x="826337" y="51393"/>
+                  </a:lnTo>
+                  <a:lnTo>
+                    <a:pt x="749094" y="46701"/>
+                  </a:lnTo>
+                  <a:lnTo>
+                    <a:pt x="671850" y="41986"/>
+                  </a:lnTo>
+                  <a:lnTo>
+                    <a:pt x="594606" y="37249"/>
+                  </a:lnTo>
+                  <a:lnTo>
+                    <a:pt x="517363" y="32488"/>
+                  </a:lnTo>
+                  <a:lnTo>
+                    <a:pt x="440119" y="27704"/>
+                  </a:lnTo>
+                  <a:lnTo>
+                    <a:pt x="362876" y="22897"/>
+                  </a:lnTo>
+                  <a:lnTo>
+                    <a:pt x="285632" y="18067"/>
+                  </a:lnTo>
+                  <a:lnTo>
+                    <a:pt x="208389" y="13214"/>
+                  </a:lnTo>
+                  <a:lnTo>
+                    <a:pt x="131145" y="8337"/>
+                  </a:lnTo>
+                  <a:lnTo>
+                    <a:pt x="53901" y="3436"/>
                   </a:lnTo>
                   <a:lnTo>
                     <a:pt x="0" y="0"/>
@@ -4247,303 +4247,303 @@
           </p:nvSpPr>
           <p:spPr>
             <a:xfrm>
-              <a:off x="817517" y="3824678"/>
-              <a:ext cx="7392041" cy="1352399"/>
+              <a:off x="817517" y="3912462"/>
+              <a:ext cx="7392041" cy="1289864"/>
             </a:xfrm>
             <a:custGeom>
               <a:avLst/>
               <a:pathLst>
-                <a:path w="7392041" h="1352399">
+                <a:path w="7392041" h="1289864">
                   <a:moveTo>
                     <a:pt x="0" y="0"/>
                   </a:moveTo>
                   <a:lnTo>
-                    <a:pt x="53901" y="19221"/>
-                  </a:lnTo>
-                  <a:lnTo>
-                    <a:pt x="131145" y="46329"/>
-                  </a:lnTo>
-                  <a:lnTo>
-                    <a:pt x="208389" y="73006"/>
-                  </a:lnTo>
-                  <a:lnTo>
-                    <a:pt x="285632" y="99258"/>
-                  </a:lnTo>
-                  <a:lnTo>
-                    <a:pt x="362876" y="125094"/>
-                  </a:lnTo>
-                  <a:lnTo>
-                    <a:pt x="440119" y="150519"/>
-                  </a:lnTo>
-                  <a:lnTo>
-                    <a:pt x="517363" y="175539"/>
-                  </a:lnTo>
-                  <a:lnTo>
-                    <a:pt x="594606" y="200162"/>
-                  </a:lnTo>
-                  <a:lnTo>
-                    <a:pt x="671850" y="224393"/>
-                  </a:lnTo>
-                  <a:lnTo>
-                    <a:pt x="749094" y="248240"/>
-                  </a:lnTo>
-                  <a:lnTo>
-                    <a:pt x="826337" y="271707"/>
-                  </a:lnTo>
-                  <a:lnTo>
-                    <a:pt x="903581" y="294801"/>
-                  </a:lnTo>
-                  <a:lnTo>
-                    <a:pt x="980824" y="317528"/>
-                  </a:lnTo>
-                  <a:lnTo>
-                    <a:pt x="1058068" y="339894"/>
-                  </a:lnTo>
-                  <a:lnTo>
-                    <a:pt x="1135311" y="361904"/>
-                  </a:lnTo>
-                  <a:lnTo>
-                    <a:pt x="1212555" y="383564"/>
-                  </a:lnTo>
-                  <a:lnTo>
-                    <a:pt x="1289799" y="404880"/>
-                  </a:lnTo>
-                  <a:lnTo>
-                    <a:pt x="1367042" y="425858"/>
-                  </a:lnTo>
-                  <a:lnTo>
-                    <a:pt x="1444286" y="446501"/>
-                  </a:lnTo>
-                  <a:lnTo>
-                    <a:pt x="1521529" y="466817"/>
-                  </a:lnTo>
-                  <a:lnTo>
-                    <a:pt x="1598773" y="486810"/>
-                  </a:lnTo>
-                  <a:lnTo>
-                    <a:pt x="1676016" y="506485"/>
-                  </a:lnTo>
-                  <a:lnTo>
-                    <a:pt x="1753260" y="525847"/>
-                  </a:lnTo>
-                  <a:lnTo>
-                    <a:pt x="1830504" y="544901"/>
-                  </a:lnTo>
-                  <a:lnTo>
-                    <a:pt x="1907747" y="563652"/>
-                  </a:lnTo>
-                  <a:lnTo>
-                    <a:pt x="1984991" y="582106"/>
-                  </a:lnTo>
-                  <a:lnTo>
-                    <a:pt x="2062234" y="600266"/>
-                  </a:lnTo>
-                  <a:lnTo>
-                    <a:pt x="2139478" y="618137"/>
-                  </a:lnTo>
-                  <a:lnTo>
-                    <a:pt x="2216721" y="635724"/>
-                  </a:lnTo>
-                  <a:lnTo>
-                    <a:pt x="2293965" y="653032"/>
-                  </a:lnTo>
-                  <a:lnTo>
-                    <a:pt x="2371209" y="670065"/>
-                  </a:lnTo>
-                  <a:lnTo>
-                    <a:pt x="2448452" y="686827"/>
-                  </a:lnTo>
-                  <a:lnTo>
-                    <a:pt x="2525696" y="703322"/>
-                  </a:lnTo>
-                  <a:lnTo>
-                    <a:pt x="2602939" y="719555"/>
-                  </a:lnTo>
-                  <a:lnTo>
-                    <a:pt x="2680183" y="735530"/>
-                  </a:lnTo>
-                  <a:lnTo>
-                    <a:pt x="2757426" y="751251"/>
-                  </a:lnTo>
-                  <a:lnTo>
-                    <a:pt x="2834670" y="766723"/>
-                  </a:lnTo>
-                  <a:lnTo>
-                    <a:pt x="2911914" y="781948"/>
-                  </a:lnTo>
-                  <a:lnTo>
-                    <a:pt x="2989157" y="796931"/>
-                  </a:lnTo>
-                  <a:lnTo>
-                    <a:pt x="3066401" y="811676"/>
-                  </a:lnTo>
-                  <a:lnTo>
-                    <a:pt x="3143644" y="826187"/>
-                  </a:lnTo>
-                  <a:lnTo>
-                    <a:pt x="3220888" y="840467"/>
-                  </a:lnTo>
-                  <a:lnTo>
-                    <a:pt x="3298131" y="854520"/>
-                  </a:lnTo>
-                  <a:lnTo>
-                    <a:pt x="3375375" y="868350"/>
-                  </a:lnTo>
-                  <a:lnTo>
-                    <a:pt x="3452619" y="881960"/>
-                  </a:lnTo>
-                  <a:lnTo>
-                    <a:pt x="3529862" y="895353"/>
-                  </a:lnTo>
-                  <a:lnTo>
-                    <a:pt x="3607106" y="908534"/>
-                  </a:lnTo>
-                  <a:lnTo>
-                    <a:pt x="3684349" y="921505"/>
-                  </a:lnTo>
-                  <a:lnTo>
-                    <a:pt x="3761593" y="934270"/>
-                  </a:lnTo>
-                  <a:lnTo>
-                    <a:pt x="3838836" y="946832"/>
-                  </a:lnTo>
-                  <a:lnTo>
-                    <a:pt x="3916080" y="959194"/>
-                  </a:lnTo>
-                  <a:lnTo>
-                    <a:pt x="3993324" y="971360"/>
-                  </a:lnTo>
-                  <a:lnTo>
-                    <a:pt x="4070567" y="983333"/>
-                  </a:lnTo>
-                  <a:lnTo>
-                    <a:pt x="4147811" y="995115"/>
-                  </a:lnTo>
-                  <a:lnTo>
-                    <a:pt x="4225054" y="1006710"/>
-                  </a:lnTo>
-                  <a:lnTo>
-                    <a:pt x="4302298" y="1018120"/>
-                  </a:lnTo>
-                  <a:lnTo>
-                    <a:pt x="4379541" y="1029349"/>
-                  </a:lnTo>
-                  <a:lnTo>
-                    <a:pt x="4456785" y="1040400"/>
-                  </a:lnTo>
-                  <a:lnTo>
-                    <a:pt x="4534029" y="1051275"/>
-                  </a:lnTo>
-                  <a:lnTo>
-                    <a:pt x="4611272" y="1061977"/>
-                  </a:lnTo>
-                  <a:lnTo>
-                    <a:pt x="4688516" y="1072509"/>
-                  </a:lnTo>
-                  <a:lnTo>
-                    <a:pt x="4765759" y="1082873"/>
-                  </a:lnTo>
-                  <a:lnTo>
-                    <a:pt x="4843003" y="1093073"/>
-                  </a:lnTo>
-                  <a:lnTo>
-                    <a:pt x="4920246" y="1103111"/>
-                  </a:lnTo>
-                  <a:lnTo>
-                    <a:pt x="4997490" y="1112989"/>
-                  </a:lnTo>
-                  <a:lnTo>
-                    <a:pt x="5074734" y="1122710"/>
-                  </a:lnTo>
-                  <a:lnTo>
-                    <a:pt x="5151977" y="1132276"/>
-                  </a:lnTo>
-                  <a:lnTo>
-                    <a:pt x="5229221" y="1141691"/>
-                  </a:lnTo>
-                  <a:lnTo>
-                    <a:pt x="5306464" y="1150956"/>
-                  </a:lnTo>
-                  <a:lnTo>
-                    <a:pt x="5383708" y="1160073"/>
-                  </a:lnTo>
-                  <a:lnTo>
-                    <a:pt x="5460951" y="1169046"/>
-                  </a:lnTo>
-                  <a:lnTo>
-                    <a:pt x="5538195" y="1177876"/>
-                  </a:lnTo>
-                  <a:lnTo>
-                    <a:pt x="5615439" y="1186566"/>
-                  </a:lnTo>
-                  <a:lnTo>
-                    <a:pt x="5692682" y="1195117"/>
-                  </a:lnTo>
-                  <a:lnTo>
-                    <a:pt x="5769926" y="1203533"/>
-                  </a:lnTo>
-                  <a:lnTo>
-                    <a:pt x="5847169" y="1211814"/>
-                  </a:lnTo>
-                  <a:lnTo>
-                    <a:pt x="5924413" y="1219965"/>
-                  </a:lnTo>
-                  <a:lnTo>
-                    <a:pt x="6001656" y="1227985"/>
-                  </a:lnTo>
-                  <a:lnTo>
-                    <a:pt x="6078900" y="1235878"/>
-                  </a:lnTo>
-                  <a:lnTo>
-                    <a:pt x="6156144" y="1243646"/>
-                  </a:lnTo>
-                  <a:lnTo>
-                    <a:pt x="6233387" y="1251290"/>
-                  </a:lnTo>
-                  <a:lnTo>
-                    <a:pt x="6310631" y="1258813"/>
-                  </a:lnTo>
-                  <a:lnTo>
-                    <a:pt x="6387874" y="1266216"/>
-                  </a:lnTo>
-                  <a:lnTo>
-                    <a:pt x="6465118" y="1273501"/>
-                  </a:lnTo>
-                  <a:lnTo>
-                    <a:pt x="6542361" y="1280671"/>
-                  </a:lnTo>
-                  <a:lnTo>
-                    <a:pt x="6619605" y="1287726"/>
-                  </a:lnTo>
-                  <a:lnTo>
-                    <a:pt x="6696849" y="1294670"/>
-                  </a:lnTo>
-                  <a:lnTo>
-                    <a:pt x="6774092" y="1301503"/>
-                  </a:lnTo>
-                  <a:lnTo>
-                    <a:pt x="6851336" y="1308227"/>
-                  </a:lnTo>
-                  <a:lnTo>
-                    <a:pt x="6928579" y="1314845"/>
-                  </a:lnTo>
-                  <a:lnTo>
-                    <a:pt x="7005823" y="1321357"/>
-                  </a:lnTo>
-                  <a:lnTo>
-                    <a:pt x="7083066" y="1327766"/>
-                  </a:lnTo>
-                  <a:lnTo>
-                    <a:pt x="7160310" y="1334073"/>
-                  </a:lnTo>
-                  <a:lnTo>
-                    <a:pt x="7237554" y="1340280"/>
-                  </a:lnTo>
-                  <a:lnTo>
-                    <a:pt x="7314797" y="1346388"/>
-                  </a:lnTo>
-                  <a:lnTo>
-                    <a:pt x="7392041" y="1352399"/>
+                    <a:pt x="53901" y="18332"/>
+                  </a:lnTo>
+                  <a:lnTo>
+                    <a:pt x="131145" y="44187"/>
+                  </a:lnTo>
+                  <a:lnTo>
+                    <a:pt x="208389" y="69630"/>
+                  </a:lnTo>
+                  <a:lnTo>
+                    <a:pt x="285632" y="94669"/>
+                  </a:lnTo>
+                  <a:lnTo>
+                    <a:pt x="362876" y="119310"/>
+                  </a:lnTo>
+                  <a:lnTo>
+                    <a:pt x="440119" y="143559"/>
+                  </a:lnTo>
+                  <a:lnTo>
+                    <a:pt x="517363" y="167422"/>
+                  </a:lnTo>
+                  <a:lnTo>
+                    <a:pt x="594606" y="190907"/>
+                  </a:lnTo>
+                  <a:lnTo>
+                    <a:pt x="671850" y="214017"/>
+                  </a:lnTo>
+                  <a:lnTo>
+                    <a:pt x="749094" y="236761"/>
+                  </a:lnTo>
+                  <a:lnTo>
+                    <a:pt x="826337" y="259143"/>
+                  </a:lnTo>
+                  <a:lnTo>
+                    <a:pt x="903581" y="281169"/>
+                  </a:lnTo>
+                  <a:lnTo>
+                    <a:pt x="980824" y="302846"/>
+                  </a:lnTo>
+                  <a:lnTo>
+                    <a:pt x="1058068" y="324177"/>
+                  </a:lnTo>
+                  <a:lnTo>
+                    <a:pt x="1135311" y="345170"/>
+                  </a:lnTo>
+                  <a:lnTo>
+                    <a:pt x="1212555" y="365828"/>
+                  </a:lnTo>
+                  <a:lnTo>
+                    <a:pt x="1289799" y="386159"/>
+                  </a:lnTo>
+                  <a:lnTo>
+                    <a:pt x="1367042" y="406166"/>
+                  </a:lnTo>
+                  <a:lnTo>
+                    <a:pt x="1444286" y="425855"/>
+                  </a:lnTo>
+                  <a:lnTo>
+                    <a:pt x="1521529" y="445232"/>
+                  </a:lnTo>
+                  <a:lnTo>
+                    <a:pt x="1598773" y="464300"/>
+                  </a:lnTo>
+                  <a:lnTo>
+                    <a:pt x="1676016" y="483065"/>
+                  </a:lnTo>
+                  <a:lnTo>
+                    <a:pt x="1753260" y="501532"/>
+                  </a:lnTo>
+                  <a:lnTo>
+                    <a:pt x="1830504" y="519705"/>
+                  </a:lnTo>
+                  <a:lnTo>
+                    <a:pt x="1907747" y="537589"/>
+                  </a:lnTo>
+                  <a:lnTo>
+                    <a:pt x="1984991" y="555189"/>
+                  </a:lnTo>
+                  <a:lnTo>
+                    <a:pt x="2062234" y="572510"/>
+                  </a:lnTo>
+                  <a:lnTo>
+                    <a:pt x="2139478" y="589555"/>
+                  </a:lnTo>
+                  <a:lnTo>
+                    <a:pt x="2216721" y="606329"/>
+                  </a:lnTo>
+                  <a:lnTo>
+                    <a:pt x="2293965" y="622836"/>
+                  </a:lnTo>
+                  <a:lnTo>
+                    <a:pt x="2371209" y="639081"/>
+                  </a:lnTo>
+                  <a:lnTo>
+                    <a:pt x="2448452" y="655068"/>
+                  </a:lnTo>
+                  <a:lnTo>
+                    <a:pt x="2525696" y="670801"/>
+                  </a:lnTo>
+                  <a:lnTo>
+                    <a:pt x="2602939" y="686283"/>
+                  </a:lnTo>
+                  <a:lnTo>
+                    <a:pt x="2680183" y="701520"/>
+                  </a:lnTo>
+                  <a:lnTo>
+                    <a:pt x="2757426" y="716514"/>
+                  </a:lnTo>
+                  <a:lnTo>
+                    <a:pt x="2834670" y="731270"/>
+                  </a:lnTo>
+                  <a:lnTo>
+                    <a:pt x="2911914" y="745791"/>
+                  </a:lnTo>
+                  <a:lnTo>
+                    <a:pt x="2989157" y="760081"/>
+                  </a:lnTo>
+                  <a:lnTo>
+                    <a:pt x="3066401" y="774145"/>
+                  </a:lnTo>
+                  <a:lnTo>
+                    <a:pt x="3143644" y="787985"/>
+                  </a:lnTo>
+                  <a:lnTo>
+                    <a:pt x="3220888" y="801604"/>
+                  </a:lnTo>
+                  <a:lnTo>
+                    <a:pt x="3298131" y="815008"/>
+                  </a:lnTo>
+                  <a:lnTo>
+                    <a:pt x="3375375" y="828198"/>
+                  </a:lnTo>
+                  <a:lnTo>
+                    <a:pt x="3452619" y="841178"/>
+                  </a:lnTo>
+                  <a:lnTo>
+                    <a:pt x="3529862" y="853953"/>
+                  </a:lnTo>
+                  <a:lnTo>
+                    <a:pt x="3607106" y="866524"/>
+                  </a:lnTo>
+                  <a:lnTo>
+                    <a:pt x="3684349" y="878895"/>
+                  </a:lnTo>
+                  <a:lnTo>
+                    <a:pt x="3761593" y="891070"/>
+                  </a:lnTo>
+                  <a:lnTo>
+                    <a:pt x="3838836" y="903051"/>
+                  </a:lnTo>
+                  <a:lnTo>
+                    <a:pt x="3916080" y="914842"/>
+                  </a:lnTo>
+                  <a:lnTo>
+                    <a:pt x="3993324" y="926445"/>
+                  </a:lnTo>
+                  <a:lnTo>
+                    <a:pt x="4070567" y="937864"/>
+                  </a:lnTo>
+                  <a:lnTo>
+                    <a:pt x="4147811" y="949101"/>
+                  </a:lnTo>
+                  <a:lnTo>
+                    <a:pt x="4225054" y="960160"/>
+                  </a:lnTo>
+                  <a:lnTo>
+                    <a:pt x="4302298" y="971043"/>
+                  </a:lnTo>
+                  <a:lnTo>
+                    <a:pt x="4379541" y="981752"/>
+                  </a:lnTo>
+                  <a:lnTo>
+                    <a:pt x="4456785" y="992292"/>
+                  </a:lnTo>
+                  <a:lnTo>
+                    <a:pt x="4534029" y="1002664"/>
+                  </a:lnTo>
+                  <a:lnTo>
+                    <a:pt x="4611272" y="1012871"/>
+                  </a:lnTo>
+                  <a:lnTo>
+                    <a:pt x="4688516" y="1022916"/>
+                  </a:lnTo>
+                  <a:lnTo>
+                    <a:pt x="4765759" y="1032802"/>
+                  </a:lnTo>
+                  <a:lnTo>
+                    <a:pt x="4843003" y="1042530"/>
+                  </a:lnTo>
+                  <a:lnTo>
+                    <a:pt x="4920246" y="1052103"/>
+                  </a:lnTo>
+                  <a:lnTo>
+                    <a:pt x="4997490" y="1061525"/>
+                  </a:lnTo>
+                  <a:lnTo>
+                    <a:pt x="5074734" y="1070796"/>
+                  </a:lnTo>
+                  <a:lnTo>
+                    <a:pt x="5151977" y="1079920"/>
+                  </a:lnTo>
+                  <a:lnTo>
+                    <a:pt x="5229221" y="1088900"/>
+                  </a:lnTo>
+                  <a:lnTo>
+                    <a:pt x="5306464" y="1097736"/>
+                  </a:lnTo>
+                  <a:lnTo>
+                    <a:pt x="5383708" y="1106432"/>
+                  </a:lnTo>
+                  <a:lnTo>
+                    <a:pt x="5460951" y="1114990"/>
+                  </a:lnTo>
+                  <a:lnTo>
+                    <a:pt x="5538195" y="1123411"/>
+                  </a:lnTo>
+                  <a:lnTo>
+                    <a:pt x="5615439" y="1131699"/>
+                  </a:lnTo>
+                  <a:lnTo>
+                    <a:pt x="5692682" y="1139855"/>
+                  </a:lnTo>
+                  <a:lnTo>
+                    <a:pt x="5769926" y="1147882"/>
+                  </a:lnTo>
+                  <a:lnTo>
+                    <a:pt x="5847169" y="1155781"/>
+                  </a:lnTo>
+                  <a:lnTo>
+                    <a:pt x="5924413" y="1163554"/>
+                  </a:lnTo>
+                  <a:lnTo>
+                    <a:pt x="6001656" y="1171204"/>
+                  </a:lnTo>
+                  <a:lnTo>
+                    <a:pt x="6078900" y="1178732"/>
+                  </a:lnTo>
+                  <a:lnTo>
+                    <a:pt x="6156144" y="1186140"/>
+                  </a:lnTo>
+                  <a:lnTo>
+                    <a:pt x="6233387" y="1193431"/>
+                  </a:lnTo>
+                  <a:lnTo>
+                    <a:pt x="6310631" y="1200606"/>
+                  </a:lnTo>
+                  <a:lnTo>
+                    <a:pt x="6387874" y="1207666"/>
+                  </a:lnTo>
+                  <a:lnTo>
+                    <a:pt x="6465118" y="1214615"/>
+                  </a:lnTo>
+                  <a:lnTo>
+                    <a:pt x="6542361" y="1221453"/>
+                  </a:lnTo>
+                  <a:lnTo>
+                    <a:pt x="6619605" y="1228182"/>
+                  </a:lnTo>
+                  <a:lnTo>
+                    <a:pt x="6696849" y="1234805"/>
+                  </a:lnTo>
+                  <a:lnTo>
+                    <a:pt x="6774092" y="1241322"/>
+                  </a:lnTo>
+                  <a:lnTo>
+                    <a:pt x="6851336" y="1247735"/>
+                  </a:lnTo>
+                  <a:lnTo>
+                    <a:pt x="6928579" y="1254047"/>
+                  </a:lnTo>
+                  <a:lnTo>
+                    <a:pt x="7005823" y="1260258"/>
+                  </a:lnTo>
+                  <a:lnTo>
+                    <a:pt x="7083066" y="1266370"/>
+                  </a:lnTo>
+                  <a:lnTo>
+                    <a:pt x="7160310" y="1272386"/>
+                  </a:lnTo>
+                  <a:lnTo>
+                    <a:pt x="7237554" y="1278306"/>
+                  </a:lnTo>
+                  <a:lnTo>
+                    <a:pt x="7314797" y="1284131"/>
+                  </a:lnTo>
+                  <a:lnTo>
+                    <a:pt x="7392041" y="1289864"/>
                   </a:lnTo>
                 </a:path>
               </a:pathLst>
@@ -4572,7 +4572,7 @@
           </p:nvSpPr>
           <p:spPr>
             <a:xfrm>
-              <a:off x="817517" y="4679530"/>
+              <a:off x="817517" y="4727786"/>
               <a:ext cx="7799693" cy="0"/>
             </a:xfrm>
             <a:custGeom>
@@ -4615,15 +4615,15 @@
           </p:nvSpPr>
           <p:spPr>
             <a:xfrm>
-              <a:off x="4117484" y="1896563"/>
-              <a:ext cx="0" cy="3826579"/>
+              <a:off x="4117484" y="2073503"/>
+              <a:ext cx="0" cy="3649639"/>
             </a:xfrm>
             <a:custGeom>
               <a:avLst/>
               <a:pathLst>
-                <a:path w="0" h="3826579">
+                <a:path w="0" h="3649639">
                   <a:moveTo>
-                    <a:pt x="0" y="3826579"/>
+                    <a:pt x="0" y="3649639"/>
                   </a:moveTo>
                   <a:lnTo>
                     <a:pt x="0" y="0"/>
@@ -4658,7 +4658,7 @@
           </p:nvSpPr>
           <p:spPr>
             <a:xfrm>
-              <a:off x="692708" y="5509156"/>
+              <a:off x="692708" y="5517199"/>
               <a:ext cx="62179" cy="80101"/>
             </a:xfrm>
             <a:prstGeom prst="rect">
@@ -4704,7 +4704,7 @@
           </p:nvSpPr>
           <p:spPr>
             <a:xfrm>
-              <a:off x="692708" y="4639479"/>
+              <a:off x="692708" y="4687735"/>
               <a:ext cx="62179" cy="80101"/>
             </a:xfrm>
             <a:prstGeom prst="rect">
@@ -4750,7 +4750,7 @@
           </p:nvSpPr>
           <p:spPr>
             <a:xfrm>
-              <a:off x="692708" y="3769802"/>
+              <a:off x="692708" y="3858272"/>
               <a:ext cx="62179" cy="80101"/>
             </a:xfrm>
             <a:prstGeom prst="rect">
@@ -4796,7 +4796,7 @@
           </p:nvSpPr>
           <p:spPr>
             <a:xfrm>
-              <a:off x="692708" y="2900125"/>
+              <a:off x="692708" y="3028808"/>
               <a:ext cx="62179" cy="80101"/>
             </a:xfrm>
             <a:prstGeom prst="rect">
@@ -4842,7 +4842,7 @@
           </p:nvSpPr>
           <p:spPr>
             <a:xfrm>
-              <a:off x="692708" y="2030448"/>
+              <a:off x="692708" y="2199345"/>
               <a:ext cx="62179" cy="80101"/>
             </a:xfrm>
             <a:prstGeom prst="rect">
@@ -5118,7 +5118,7 @@
           </p:nvSpPr>
           <p:spPr>
             <a:xfrm rot="-5400000">
-              <a:off x="68446" y="3759743"/>
+              <a:off x="68446" y="3848213"/>
               <a:ext cx="1016904" cy="100218"/>
             </a:xfrm>
             <a:prstGeom prst="rect">
@@ -5159,6 +5159,52 @@
         <p:sp>
           <p:nvSpPr>
             <p:cNvPr id="38" name="tx38"/>
+            <p:cNvSpPr/>
+            <p:nvPr/>
+          </p:nvSpPr>
+          <p:spPr>
+            <a:xfrm>
+              <a:off x="817517" y="1896563"/>
+              <a:ext cx="5626211" cy="82021"/>
+            </a:xfrm>
+            <a:prstGeom prst="rect">
+              <a:avLst/>
+            </a:prstGeom>
+            <a:noFill/>
+          </p:spPr>
+          <p:txBody>
+            <a:bodyPr lIns="0" rIns="0" tIns="0" bIns="0" anchorCtr="1" anchor="ctr" wrap="none"/>
+            <a:lstStyle/>
+            <a:p>
+              <a:pPr algn="l" marL="0" marR="0" indent="0">
+                <a:lnSpc>
+                  <a:spcPts val="900"/>
+                </a:lnSpc>
+                <a:spcBef>
+                  <a:spcPts val="0"/>
+                </a:spcBef>
+                <a:spcAft>
+                  <a:spcPts val="0"/>
+                </a:spcAft>
+              </a:pPr>
+              <a:r>
+                <a:rPr sz="900">
+                  <a:solidFill>
+                    <a:srgbClr val="404040">
+                      <a:alpha val="100000"/>
+                    </a:srgbClr>
+                  </a:solidFill>
+                  <a:latin typeface="Helvetica"/>
+                  <a:cs typeface="Helvetica"/>
+                </a:rPr>
+                <a:t>subHR per 0.1 ratio decline: 1.20 (1.06-1.37)  |  per IQR decline (Δ = 0.30): 1.72 (1.18-2.52)  |  IQR: [0.84, 1.14]</a:t>
+              </a:r>
+            </a:p>
+          </p:txBody>
+        </p:sp>
+        <p:sp>
+          <p:nvSpPr>
+            <p:cNvPr id="39" name="tx39"/>
             <p:cNvSpPr/>
             <p:nvPr/>
           </p:nvSpPr>

--- a/docs/pptx/auc3/jx-auc3-linsubhr-ratio-anyhosp.pptx
+++ b/docs/pptx/auc3/jx-auc3-linsubhr-ratio-anyhosp.pptx
@@ -5165,7 +5165,7 @@
           <p:spPr>
             <a:xfrm>
               <a:off x="817517" y="1896563"/>
-              <a:ext cx="5626211" cy="82021"/>
+              <a:ext cx="6169365" cy="82021"/>
             </a:xfrm>
             <a:prstGeom prst="rect">
               <a:avLst/>
@@ -5197,7 +5197,7 @@
                   <a:latin typeface="Helvetica"/>
                   <a:cs typeface="Helvetica"/>
                 </a:rPr>
-                <a:t>subHR per 0.1 ratio decline: 1.20 (1.06-1.37)  |  per IQR decline (Δ = 0.30): 1.72 (1.18-2.52)  |  IQR: [0.84, 1.14]</a:t>
+                <a:t>subHR per 0.1 ratio decline: 1.20 (1.06-1.37), p = 0.005  |  per IQR decline (Δ = 0.30): 1.72 (1.18-2.52)  |  IQR: [0.84, 1.14]</a:t>
               </a:r>
             </a:p>
           </p:txBody>

--- a/docs/pptx/auc3/jx-auc3-linsubhr-ratio-anyhosp.pptx
+++ b/docs/pptx/auc3/jx-auc3-linsubhr-ratio-anyhosp.pptx
@@ -5165,7 +5165,7 @@
           <p:spPr>
             <a:xfrm>
               <a:off x="817517" y="1896563"/>
-              <a:ext cx="6169365" cy="82021"/>
+              <a:ext cx="6833128" cy="82021"/>
             </a:xfrm>
             <a:prstGeom prst="rect">
               <a:avLst/>
@@ -5197,7 +5197,7 @@
                   <a:latin typeface="Helvetica"/>
                   <a:cs typeface="Helvetica"/>
                 </a:rPr>
-                <a:t>subHR per 0.1 ratio decline: 1.20 (1.06-1.37), p = 0.005  |  per IQR decline (Δ = 0.30): 1.72 (1.18-2.52)  |  IQR: [0.84, 1.14]</a:t>
+                <a:t>subHR per 0.1 ratio decline: 1.20 (1.06-1.37), p_Bonf = 0.030 (n = 6)  |  per IQR decline (Δ = 0.30): 1.72 (1.18-2.52)  |  IQR: [0.84, 1.14]</a:t>
               </a:r>
             </a:p>
           </p:txBody>

--- a/docs/pptx/auc3/jx-auc3-linsubhr-ratio-anyhosp.pptx
+++ b/docs/pptx/auc3/jx-auc3-linsubhr-ratio-anyhosp.pptx
@@ -2443,7 +2443,7 @@
           </p:nvSpPr>
           <p:spPr>
             <a:xfrm>
-              <a:off x="1615213" y="2073503"/>
+              <a:off x="1531834" y="2073503"/>
               <a:ext cx="0" cy="3649639"/>
             </a:xfrm>
             <a:custGeom>
@@ -2486,7 +2486,7 @@
           </p:nvSpPr>
           <p:spPr>
             <a:xfrm>
-              <a:off x="3387871" y="2073503"/>
+              <a:off x="3586410" y="2073503"/>
               <a:ext cx="0" cy="3649639"/>
             </a:xfrm>
             <a:custGeom>
@@ -2529,7 +2529,7 @@
           </p:nvSpPr>
           <p:spPr>
             <a:xfrm>
-              <a:off x="5160528" y="2073503"/>
+              <a:off x="5640985" y="2073503"/>
               <a:ext cx="0" cy="3649639"/>
             </a:xfrm>
             <a:custGeom>
@@ -2572,7 +2572,7 @@
           </p:nvSpPr>
           <p:spPr>
             <a:xfrm>
-              <a:off x="6933186" y="2073503"/>
+              <a:off x="7695561" y="2073503"/>
               <a:ext cx="0" cy="3649639"/>
             </a:xfrm>
             <a:custGeom>
@@ -2830,7 +2830,7 @@
           </p:nvSpPr>
           <p:spPr>
             <a:xfrm>
-              <a:off x="2501542" y="2073503"/>
+              <a:off x="2559122" y="2073503"/>
               <a:ext cx="0" cy="3649639"/>
             </a:xfrm>
             <a:custGeom>
@@ -2873,7 +2873,7 @@
           </p:nvSpPr>
           <p:spPr>
             <a:xfrm>
-              <a:off x="4274200" y="2073503"/>
+              <a:off x="4613698" y="2073503"/>
               <a:ext cx="0" cy="3649639"/>
             </a:xfrm>
             <a:custGeom>
@@ -2916,7 +2916,7 @@
           </p:nvSpPr>
           <p:spPr>
             <a:xfrm>
-              <a:off x="6046857" y="2073503"/>
+              <a:off x="6668273" y="2073503"/>
               <a:ext cx="0" cy="3649639"/>
             </a:xfrm>
             <a:custGeom>
@@ -2953,643 +2953,618 @@
         </p:sp>
         <p:sp>
           <p:nvSpPr>
-            <p:cNvPr id="20" name="pl20"/>
+            <p:cNvPr id="20" name="pg20"/>
             <p:cNvSpPr/>
             <p:nvPr/>
           </p:nvSpPr>
           <p:spPr>
             <a:xfrm>
-              <a:off x="7819515" y="2073503"/>
-              <a:ext cx="0" cy="3649639"/>
+              <a:off x="1172049" y="2654957"/>
+              <a:ext cx="7090630" cy="2706099"/>
             </a:xfrm>
             <a:custGeom>
               <a:avLst/>
               <a:pathLst>
-                <a:path w="0" h="3649639">
-                  <a:moveTo>
-                    <a:pt x="0" y="3649639"/>
-                  </a:moveTo>
-                  <a:lnTo>
-                    <a:pt x="0" y="0"/>
-                  </a:lnTo>
-                  <a:lnTo>
-                    <a:pt x="0" y="0"/>
-                  </a:lnTo>
-                </a:path>
-              </a:pathLst>
-            </a:custGeom>
-            <a:ln w="13550" cap="flat">
-              <a:solidFill>
-                <a:srgbClr val="EBEBEB">
-                  <a:alpha val="100000"/>
-                </a:srgbClr>
-              </a:solidFill>
-              <a:prstDash val="solid"/>
-              <a:round/>
-            </a:ln>
-          </p:spPr>
-          <p:txBody>
-            <a:bodyPr/>
-            <a:lstStyle/>
-            <a:p/>
-          </p:txBody>
-        </p:sp>
-        <p:sp>
-          <p:nvSpPr>
-            <p:cNvPr id="21" name="pg21"/>
-            <p:cNvSpPr/>
-            <p:nvPr/>
-          </p:nvSpPr>
-          <p:spPr>
-            <a:xfrm>
-              <a:off x="817517" y="2904189"/>
-              <a:ext cx="7392041" cy="2456867"/>
-            </a:xfrm>
-            <a:custGeom>
-              <a:avLst/>
-              <a:pathLst>
-                <a:path w="7392041" h="2456867">
+                <a:path w="7090630" h="2706099">
                   <a:moveTo>
                     <a:pt x="0" y="0"/>
                   </a:moveTo>
                   <a:lnTo>
-                    <a:pt x="53901" y="50109"/>
-                  </a:lnTo>
-                  <a:lnTo>
-                    <a:pt x="131145" y="119990"/>
-                  </a:lnTo>
-                  <a:lnTo>
-                    <a:pt x="208389" y="187994"/>
-                  </a:lnTo>
-                  <a:lnTo>
-                    <a:pt x="285632" y="254173"/>
-                  </a:lnTo>
-                  <a:lnTo>
-                    <a:pt x="362876" y="318576"/>
-                  </a:lnTo>
-                  <a:lnTo>
-                    <a:pt x="440119" y="381249"/>
-                  </a:lnTo>
-                  <a:lnTo>
-                    <a:pt x="517363" y="442240"/>
-                  </a:lnTo>
-                  <a:lnTo>
-                    <a:pt x="594606" y="501593"/>
-                  </a:lnTo>
-                  <a:lnTo>
-                    <a:pt x="671850" y="559353"/>
-                  </a:lnTo>
-                  <a:lnTo>
-                    <a:pt x="749094" y="615562"/>
-                  </a:lnTo>
-                  <a:lnTo>
-                    <a:pt x="826337" y="670262"/>
-                  </a:lnTo>
-                  <a:lnTo>
-                    <a:pt x="903581" y="723494"/>
-                  </a:lnTo>
-                  <a:lnTo>
-                    <a:pt x="980824" y="775297"/>
-                  </a:lnTo>
-                  <a:lnTo>
-                    <a:pt x="1058068" y="825709"/>
-                  </a:lnTo>
-                  <a:lnTo>
-                    <a:pt x="1135311" y="874767"/>
-                  </a:lnTo>
-                  <a:lnTo>
-                    <a:pt x="1212555" y="922508"/>
-                  </a:lnTo>
-                  <a:lnTo>
-                    <a:pt x="1289799" y="968968"/>
-                  </a:lnTo>
-                  <a:lnTo>
-                    <a:pt x="1367042" y="1014181"/>
-                  </a:lnTo>
-                  <a:lnTo>
-                    <a:pt x="1444286" y="1058179"/>
-                  </a:lnTo>
-                  <a:lnTo>
-                    <a:pt x="1521529" y="1100997"/>
-                  </a:lnTo>
-                  <a:lnTo>
-                    <a:pt x="1598773" y="1142664"/>
-                  </a:lnTo>
-                  <a:lnTo>
-                    <a:pt x="1676016" y="1183214"/>
-                  </a:lnTo>
-                  <a:lnTo>
-                    <a:pt x="1753260" y="1222674"/>
-                  </a:lnTo>
-                  <a:lnTo>
-                    <a:pt x="1830504" y="1261075"/>
-                  </a:lnTo>
-                  <a:lnTo>
-                    <a:pt x="1907747" y="1298446"/>
-                  </a:lnTo>
-                  <a:lnTo>
-                    <a:pt x="1984991" y="1334813"/>
-                  </a:lnTo>
-                  <a:lnTo>
-                    <a:pt x="2062234" y="1370203"/>
-                  </a:lnTo>
-                  <a:lnTo>
-                    <a:pt x="2139478" y="1404644"/>
-                  </a:lnTo>
-                  <a:lnTo>
-                    <a:pt x="2216721" y="1438160"/>
-                  </a:lnTo>
-                  <a:lnTo>
-                    <a:pt x="2293965" y="1470776"/>
-                  </a:lnTo>
-                  <a:lnTo>
-                    <a:pt x="2371209" y="1502517"/>
-                  </a:lnTo>
-                  <a:lnTo>
-                    <a:pt x="2448452" y="1533405"/>
-                  </a:lnTo>
-                  <a:lnTo>
-                    <a:pt x="2525696" y="1563464"/>
-                  </a:lnTo>
-                  <a:lnTo>
-                    <a:pt x="2602939" y="1592716"/>
-                  </a:lnTo>
-                  <a:lnTo>
-                    <a:pt x="2680183" y="1621183"/>
-                  </a:lnTo>
-                  <a:lnTo>
-                    <a:pt x="2757426" y="1648885"/>
-                  </a:lnTo>
-                  <a:lnTo>
-                    <a:pt x="2834670" y="1675844"/>
-                  </a:lnTo>
-                  <a:lnTo>
-                    <a:pt x="2911914" y="1702079"/>
-                  </a:lnTo>
-                  <a:lnTo>
-                    <a:pt x="2989157" y="1727610"/>
-                  </a:lnTo>
-                  <a:lnTo>
-                    <a:pt x="3066401" y="1752455"/>
-                  </a:lnTo>
-                  <a:lnTo>
-                    <a:pt x="3143644" y="1776634"/>
-                  </a:lnTo>
-                  <a:lnTo>
-                    <a:pt x="3220888" y="1800163"/>
-                  </a:lnTo>
-                  <a:lnTo>
-                    <a:pt x="3298131" y="1823061"/>
-                  </a:lnTo>
-                  <a:lnTo>
-                    <a:pt x="3375375" y="1827502"/>
-                  </a:lnTo>
-                  <a:lnTo>
-                    <a:pt x="3452619" y="1831483"/>
-                  </a:lnTo>
-                  <a:lnTo>
-                    <a:pt x="3529862" y="1835445"/>
-                  </a:lnTo>
-                  <a:lnTo>
-                    <a:pt x="3607106" y="1839387"/>
-                  </a:lnTo>
-                  <a:lnTo>
-                    <a:pt x="3684349" y="1843311"/>
-                  </a:lnTo>
-                  <a:lnTo>
-                    <a:pt x="3761593" y="1847216"/>
-                  </a:lnTo>
-                  <a:lnTo>
-                    <a:pt x="3838836" y="1851102"/>
-                  </a:lnTo>
-                  <a:lnTo>
-                    <a:pt x="3916080" y="1854969"/>
-                  </a:lnTo>
-                  <a:lnTo>
-                    <a:pt x="3993324" y="1858817"/>
-                  </a:lnTo>
-                  <a:lnTo>
-                    <a:pt x="4070567" y="1862647"/>
-                  </a:lnTo>
-                  <a:lnTo>
-                    <a:pt x="4147811" y="1866459"/>
-                  </a:lnTo>
-                  <a:lnTo>
-                    <a:pt x="4225054" y="1870252"/>
-                  </a:lnTo>
-                  <a:lnTo>
-                    <a:pt x="4302298" y="1874027"/>
-                  </a:lnTo>
-                  <a:lnTo>
-                    <a:pt x="4379541" y="1877783"/>
-                  </a:lnTo>
-                  <a:lnTo>
-                    <a:pt x="4456785" y="1881522"/>
-                  </a:lnTo>
-                  <a:lnTo>
-                    <a:pt x="4534029" y="1885242"/>
-                  </a:lnTo>
-                  <a:lnTo>
-                    <a:pt x="4611272" y="1888945"/>
-                  </a:lnTo>
-                  <a:lnTo>
-                    <a:pt x="4688516" y="1892629"/>
-                  </a:lnTo>
-                  <a:lnTo>
-                    <a:pt x="4765759" y="1896296"/>
-                  </a:lnTo>
-                  <a:lnTo>
-                    <a:pt x="4843003" y="1899946"/>
-                  </a:lnTo>
-                  <a:lnTo>
-                    <a:pt x="4920246" y="1903577"/>
-                  </a:lnTo>
-                  <a:lnTo>
-                    <a:pt x="4997490" y="1907191"/>
-                  </a:lnTo>
-                  <a:lnTo>
-                    <a:pt x="5074734" y="1910788"/>
-                  </a:lnTo>
-                  <a:lnTo>
-                    <a:pt x="5151977" y="1914367"/>
-                  </a:lnTo>
-                  <a:lnTo>
-                    <a:pt x="5229221" y="1917929"/>
-                  </a:lnTo>
-                  <a:lnTo>
-                    <a:pt x="5306464" y="1921474"/>
-                  </a:lnTo>
-                  <a:lnTo>
-                    <a:pt x="5383708" y="1925002"/>
-                  </a:lnTo>
-                  <a:lnTo>
-                    <a:pt x="5460951" y="1928513"/>
-                  </a:lnTo>
-                  <a:lnTo>
-                    <a:pt x="5538195" y="1932007"/>
-                  </a:lnTo>
-                  <a:lnTo>
-                    <a:pt x="5615439" y="1935484"/>
-                  </a:lnTo>
-                  <a:lnTo>
-                    <a:pt x="5692682" y="1938944"/>
-                  </a:lnTo>
-                  <a:lnTo>
-                    <a:pt x="5769926" y="1942388"/>
-                  </a:lnTo>
-                  <a:lnTo>
-                    <a:pt x="5847169" y="1945815"/>
-                  </a:lnTo>
-                  <a:lnTo>
-                    <a:pt x="5924413" y="1949225"/>
-                  </a:lnTo>
-                  <a:lnTo>
-                    <a:pt x="6001656" y="1952619"/>
-                  </a:lnTo>
-                  <a:lnTo>
-                    <a:pt x="6078900" y="1955997"/>
-                  </a:lnTo>
-                  <a:lnTo>
-                    <a:pt x="6156144" y="1959358"/>
-                  </a:lnTo>
-                  <a:lnTo>
-                    <a:pt x="6233387" y="1962703"/>
-                  </a:lnTo>
-                  <a:lnTo>
-                    <a:pt x="6310631" y="1966032"/>
-                  </a:lnTo>
-                  <a:lnTo>
-                    <a:pt x="6387874" y="1969345"/>
-                  </a:lnTo>
-                  <a:lnTo>
-                    <a:pt x="6465118" y="1972642"/>
-                  </a:lnTo>
-                  <a:lnTo>
-                    <a:pt x="6542361" y="1975923"/>
-                  </a:lnTo>
-                  <a:lnTo>
-                    <a:pt x="6619605" y="1979189"/>
-                  </a:lnTo>
-                  <a:lnTo>
-                    <a:pt x="6696849" y="1982438"/>
-                  </a:lnTo>
-                  <a:lnTo>
-                    <a:pt x="6774092" y="1985672"/>
-                  </a:lnTo>
-                  <a:lnTo>
-                    <a:pt x="6851336" y="1988890"/>
-                  </a:lnTo>
-                  <a:lnTo>
-                    <a:pt x="6928579" y="1992093"/>
-                  </a:lnTo>
-                  <a:lnTo>
-                    <a:pt x="7005823" y="1995280"/>
-                  </a:lnTo>
-                  <a:lnTo>
-                    <a:pt x="7083066" y="1998452"/>
-                  </a:lnTo>
-                  <a:lnTo>
-                    <a:pt x="7160310" y="2001609"/>
-                  </a:lnTo>
-                  <a:lnTo>
-                    <a:pt x="7237554" y="2004750"/>
-                  </a:lnTo>
-                  <a:lnTo>
-                    <a:pt x="7314797" y="2007876"/>
-                  </a:lnTo>
-                  <a:lnTo>
-                    <a:pt x="7392041" y="2010988"/>
-                  </a:lnTo>
-                  <a:lnTo>
-                    <a:pt x="7392041" y="2456867"/>
-                  </a:lnTo>
-                  <a:lnTo>
-                    <a:pt x="7314797" y="2451455"/>
-                  </a:lnTo>
-                  <a:lnTo>
-                    <a:pt x="7237554" y="2445893"/>
-                  </a:lnTo>
-                  <a:lnTo>
-                    <a:pt x="7160310" y="2440178"/>
-                  </a:lnTo>
-                  <a:lnTo>
-                    <a:pt x="7083066" y="2434305"/>
-                  </a:lnTo>
-                  <a:lnTo>
-                    <a:pt x="7005823" y="2428270"/>
-                  </a:lnTo>
-                  <a:lnTo>
-                    <a:pt x="6928579" y="2422069"/>
-                  </a:lnTo>
-                  <a:lnTo>
-                    <a:pt x="6851336" y="2415696"/>
-                  </a:lnTo>
-                  <a:lnTo>
-                    <a:pt x="6774092" y="2409148"/>
-                  </a:lnTo>
-                  <a:lnTo>
-                    <a:pt x="6696849" y="2402419"/>
-                  </a:lnTo>
-                  <a:lnTo>
-                    <a:pt x="6619605" y="2395505"/>
-                  </a:lnTo>
-                  <a:lnTo>
-                    <a:pt x="6542361" y="2388399"/>
-                  </a:lnTo>
-                  <a:lnTo>
-                    <a:pt x="6465118" y="2381098"/>
-                  </a:lnTo>
-                  <a:lnTo>
-                    <a:pt x="6387874" y="2373595"/>
-                  </a:lnTo>
-                  <a:lnTo>
-                    <a:pt x="6310631" y="2365886"/>
-                  </a:lnTo>
-                  <a:lnTo>
-                    <a:pt x="6233387" y="2357963"/>
-                  </a:lnTo>
-                  <a:lnTo>
-                    <a:pt x="6156144" y="2349822"/>
-                  </a:lnTo>
-                  <a:lnTo>
-                    <a:pt x="6078900" y="2341457"/>
-                  </a:lnTo>
-                  <a:lnTo>
-                    <a:pt x="6001656" y="2332860"/>
-                  </a:lnTo>
-                  <a:lnTo>
-                    <a:pt x="5924413" y="2324027"/>
-                  </a:lnTo>
-                  <a:lnTo>
-                    <a:pt x="5847169" y="2314950"/>
-                  </a:lnTo>
-                  <a:lnTo>
-                    <a:pt x="5769926" y="2305622"/>
-                  </a:lnTo>
-                  <a:lnTo>
-                    <a:pt x="5692682" y="2296037"/>
-                  </a:lnTo>
-                  <a:lnTo>
-                    <a:pt x="5615439" y="2286188"/>
-                  </a:lnTo>
-                  <a:lnTo>
-                    <a:pt x="5538195" y="2276067"/>
-                  </a:lnTo>
-                  <a:lnTo>
-                    <a:pt x="5460951" y="2265667"/>
-                  </a:lnTo>
-                  <a:lnTo>
-                    <a:pt x="5383708" y="2254979"/>
-                  </a:lnTo>
-                  <a:lnTo>
-                    <a:pt x="5306464" y="2243997"/>
-                  </a:lnTo>
-                  <a:lnTo>
-                    <a:pt x="5229221" y="2232712"/>
-                  </a:lnTo>
-                  <a:lnTo>
-                    <a:pt x="5151977" y="2221116"/>
-                  </a:lnTo>
-                  <a:lnTo>
-                    <a:pt x="5074734" y="2209200"/>
-                  </a:lnTo>
-                  <a:lnTo>
-                    <a:pt x="4997490" y="2196955"/>
-                  </a:lnTo>
-                  <a:lnTo>
-                    <a:pt x="4920246" y="2184372"/>
-                  </a:lnTo>
-                  <a:lnTo>
-                    <a:pt x="4843003" y="2171442"/>
-                  </a:lnTo>
-                  <a:lnTo>
-                    <a:pt x="4765759" y="2158156"/>
-                  </a:lnTo>
-                  <a:lnTo>
-                    <a:pt x="4688516" y="2144503"/>
-                  </a:lnTo>
-                  <a:lnTo>
-                    <a:pt x="4611272" y="2130473"/>
-                  </a:lnTo>
-                  <a:lnTo>
-                    <a:pt x="4534029" y="2116056"/>
-                  </a:lnTo>
-                  <a:lnTo>
-                    <a:pt x="4456785" y="2101241"/>
-                  </a:lnTo>
-                  <a:lnTo>
-                    <a:pt x="4379541" y="2086018"/>
-                  </a:lnTo>
-                  <a:lnTo>
-                    <a:pt x="4302298" y="2070375"/>
-                  </a:lnTo>
-                  <a:lnTo>
-                    <a:pt x="4225054" y="2054300"/>
-                  </a:lnTo>
-                  <a:lnTo>
-                    <a:pt x="4147811" y="2037782"/>
-                  </a:lnTo>
-                  <a:lnTo>
-                    <a:pt x="4070567" y="2020808"/>
-                  </a:lnTo>
-                  <a:lnTo>
-                    <a:pt x="3993324" y="2003366"/>
-                  </a:lnTo>
-                  <a:lnTo>
-                    <a:pt x="3916080" y="1985443"/>
-                  </a:lnTo>
-                  <a:lnTo>
-                    <a:pt x="3838836" y="1967025"/>
-                  </a:lnTo>
-                  <a:lnTo>
-                    <a:pt x="3761593" y="1948099"/>
-                  </a:lnTo>
-                  <a:lnTo>
-                    <a:pt x="3684349" y="1928651"/>
-                  </a:lnTo>
-                  <a:lnTo>
-                    <a:pt x="3607106" y="1908666"/>
-                  </a:lnTo>
-                  <a:lnTo>
-                    <a:pt x="3529862" y="1888130"/>
-                  </a:lnTo>
-                  <a:lnTo>
-                    <a:pt x="3452619" y="1867028"/>
-                  </a:lnTo>
-                  <a:lnTo>
-                    <a:pt x="3375375" y="1845343"/>
-                  </a:lnTo>
-                  <a:lnTo>
-                    <a:pt x="3298131" y="1823502"/>
-                  </a:lnTo>
-                  <a:lnTo>
-                    <a:pt x="3220888" y="1819482"/>
-                  </a:lnTo>
-                  <a:lnTo>
-                    <a:pt x="3143644" y="1815443"/>
-                  </a:lnTo>
-                  <a:lnTo>
-                    <a:pt x="3066401" y="1811384"/>
-                  </a:lnTo>
-                  <a:lnTo>
-                    <a:pt x="2989157" y="1807306"/>
-                  </a:lnTo>
-                  <a:lnTo>
-                    <a:pt x="2911914" y="1803208"/>
-                  </a:lnTo>
-                  <a:lnTo>
-                    <a:pt x="2834670" y="1799090"/>
-                  </a:lnTo>
-                  <a:lnTo>
-                    <a:pt x="2757426" y="1794952"/>
-                  </a:lnTo>
-                  <a:lnTo>
-                    <a:pt x="2680183" y="1790794"/>
-                  </a:lnTo>
-                  <a:lnTo>
-                    <a:pt x="2602939" y="1786616"/>
-                  </a:lnTo>
-                  <a:lnTo>
-                    <a:pt x="2525696" y="1782417"/>
-                  </a:lnTo>
-                  <a:lnTo>
-                    <a:pt x="2448452" y="1778199"/>
-                  </a:lnTo>
-                  <a:lnTo>
-                    <a:pt x="2371209" y="1773959"/>
-                  </a:lnTo>
-                  <a:lnTo>
-                    <a:pt x="2293965" y="1769700"/>
-                  </a:lnTo>
-                  <a:lnTo>
-                    <a:pt x="2216721" y="1765419"/>
-                  </a:lnTo>
-                  <a:lnTo>
-                    <a:pt x="2139478" y="1761118"/>
-                  </a:lnTo>
-                  <a:lnTo>
-                    <a:pt x="2062234" y="1756796"/>
-                  </a:lnTo>
-                  <a:lnTo>
-                    <a:pt x="1984991" y="1752454"/>
-                  </a:lnTo>
-                  <a:lnTo>
-                    <a:pt x="1907747" y="1748090"/>
-                  </a:lnTo>
-                  <a:lnTo>
-                    <a:pt x="1830504" y="1743705"/>
-                  </a:lnTo>
-                  <a:lnTo>
-                    <a:pt x="1753260" y="1739298"/>
-                  </a:lnTo>
-                  <a:lnTo>
-                    <a:pt x="1676016" y="1734871"/>
-                  </a:lnTo>
-                  <a:lnTo>
-                    <a:pt x="1598773" y="1730422"/>
-                  </a:lnTo>
-                  <a:lnTo>
-                    <a:pt x="1521529" y="1725951"/>
-                  </a:lnTo>
-                  <a:lnTo>
-                    <a:pt x="1444286" y="1721459"/>
-                  </a:lnTo>
-                  <a:lnTo>
-                    <a:pt x="1367042" y="1716944"/>
-                  </a:lnTo>
-                  <a:lnTo>
-                    <a:pt x="1289799" y="1712408"/>
-                  </a:lnTo>
-                  <a:lnTo>
-                    <a:pt x="1212555" y="1707851"/>
-                  </a:lnTo>
-                  <a:lnTo>
-                    <a:pt x="1135311" y="1703270"/>
-                  </a:lnTo>
-                  <a:lnTo>
-                    <a:pt x="1058068" y="1698668"/>
-                  </a:lnTo>
-                  <a:lnTo>
-                    <a:pt x="980824" y="1694044"/>
-                  </a:lnTo>
-                  <a:lnTo>
-                    <a:pt x="903581" y="1689397"/>
-                  </a:lnTo>
-                  <a:lnTo>
-                    <a:pt x="826337" y="1684727"/>
-                  </a:lnTo>
-                  <a:lnTo>
-                    <a:pt x="749094" y="1680035"/>
-                  </a:lnTo>
-                  <a:lnTo>
-                    <a:pt x="671850" y="1675320"/>
-                  </a:lnTo>
-                  <a:lnTo>
-                    <a:pt x="594606" y="1670583"/>
-                  </a:lnTo>
-                  <a:lnTo>
-                    <a:pt x="517363" y="1665822"/>
-                  </a:lnTo>
-                  <a:lnTo>
-                    <a:pt x="440119" y="1661039"/>
-                  </a:lnTo>
-                  <a:lnTo>
-                    <a:pt x="362876" y="1656232"/>
-                  </a:lnTo>
-                  <a:lnTo>
-                    <a:pt x="285632" y="1651402"/>
-                  </a:lnTo>
-                  <a:lnTo>
-                    <a:pt x="208389" y="1646548"/>
-                  </a:lnTo>
-                  <a:lnTo>
-                    <a:pt x="131145" y="1641671"/>
-                  </a:lnTo>
-                  <a:lnTo>
-                    <a:pt x="53901" y="1636770"/>
-                  </a:lnTo>
-                  <a:lnTo>
-                    <a:pt x="0" y="1633334"/>
+                    <a:pt x="71622" y="77917"/>
+                  </a:lnTo>
+                  <a:lnTo>
+                    <a:pt x="143245" y="153742"/>
+                  </a:lnTo>
+                  <a:lnTo>
+                    <a:pt x="214867" y="227532"/>
+                  </a:lnTo>
+                  <a:lnTo>
+                    <a:pt x="286490" y="299340"/>
+                  </a:lnTo>
+                  <a:lnTo>
+                    <a:pt x="358112" y="369221"/>
+                  </a:lnTo>
+                  <a:lnTo>
+                    <a:pt x="429735" y="437226"/>
+                  </a:lnTo>
+                  <a:lnTo>
+                    <a:pt x="501357" y="503405"/>
+                  </a:lnTo>
+                  <a:lnTo>
+                    <a:pt x="572980" y="567807"/>
+                  </a:lnTo>
+                  <a:lnTo>
+                    <a:pt x="644602" y="630480"/>
+                  </a:lnTo>
+                  <a:lnTo>
+                    <a:pt x="716225" y="691471"/>
+                  </a:lnTo>
+                  <a:lnTo>
+                    <a:pt x="787847" y="750824"/>
+                  </a:lnTo>
+                  <a:lnTo>
+                    <a:pt x="859470" y="808584"/>
+                  </a:lnTo>
+                  <a:lnTo>
+                    <a:pt x="931092" y="864794"/>
+                  </a:lnTo>
+                  <a:lnTo>
+                    <a:pt x="1002715" y="919494"/>
+                  </a:lnTo>
+                  <a:lnTo>
+                    <a:pt x="1074337" y="972726"/>
+                  </a:lnTo>
+                  <a:lnTo>
+                    <a:pt x="1145960" y="1024528"/>
+                  </a:lnTo>
+                  <a:lnTo>
+                    <a:pt x="1217582" y="1074940"/>
+                  </a:lnTo>
+                  <a:lnTo>
+                    <a:pt x="1289205" y="1123998"/>
+                  </a:lnTo>
+                  <a:lnTo>
+                    <a:pt x="1360827" y="1171740"/>
+                  </a:lnTo>
+                  <a:lnTo>
+                    <a:pt x="1432450" y="1218200"/>
+                  </a:lnTo>
+                  <a:lnTo>
+                    <a:pt x="1504073" y="1263412"/>
+                  </a:lnTo>
+                  <a:lnTo>
+                    <a:pt x="1575695" y="1307411"/>
+                  </a:lnTo>
+                  <a:lnTo>
+                    <a:pt x="1647318" y="1350228"/>
+                  </a:lnTo>
+                  <a:lnTo>
+                    <a:pt x="1718940" y="1391896"/>
+                  </a:lnTo>
+                  <a:lnTo>
+                    <a:pt x="1790563" y="1432445"/>
+                  </a:lnTo>
+                  <a:lnTo>
+                    <a:pt x="1862185" y="1471906"/>
+                  </a:lnTo>
+                  <a:lnTo>
+                    <a:pt x="1933808" y="1510307"/>
+                  </a:lnTo>
+                  <a:lnTo>
+                    <a:pt x="2005430" y="1547677"/>
+                  </a:lnTo>
+                  <a:lnTo>
+                    <a:pt x="2077053" y="1584044"/>
+                  </a:lnTo>
+                  <a:lnTo>
+                    <a:pt x="2148675" y="1619435"/>
+                  </a:lnTo>
+                  <a:lnTo>
+                    <a:pt x="2220298" y="1653875"/>
+                  </a:lnTo>
+                  <a:lnTo>
+                    <a:pt x="2291920" y="1687391"/>
+                  </a:lnTo>
+                  <a:lnTo>
+                    <a:pt x="2363543" y="1720007"/>
+                  </a:lnTo>
+                  <a:lnTo>
+                    <a:pt x="2435165" y="1751748"/>
+                  </a:lnTo>
+                  <a:lnTo>
+                    <a:pt x="2506788" y="1782636"/>
+                  </a:lnTo>
+                  <a:lnTo>
+                    <a:pt x="2578410" y="1812695"/>
+                  </a:lnTo>
+                  <a:lnTo>
+                    <a:pt x="2650033" y="1841947"/>
+                  </a:lnTo>
+                  <a:lnTo>
+                    <a:pt x="2721655" y="1870414"/>
+                  </a:lnTo>
+                  <a:lnTo>
+                    <a:pt x="2793278" y="1898117"/>
+                  </a:lnTo>
+                  <a:lnTo>
+                    <a:pt x="2864901" y="1925076"/>
+                  </a:lnTo>
+                  <a:lnTo>
+                    <a:pt x="2936523" y="1951311"/>
+                  </a:lnTo>
+                  <a:lnTo>
+                    <a:pt x="3008146" y="1976841"/>
+                  </a:lnTo>
+                  <a:lnTo>
+                    <a:pt x="3079768" y="2001687"/>
+                  </a:lnTo>
+                  <a:lnTo>
+                    <a:pt x="3151391" y="2025865"/>
+                  </a:lnTo>
+                  <a:lnTo>
+                    <a:pt x="3223013" y="2049394"/>
+                  </a:lnTo>
+                  <a:lnTo>
+                    <a:pt x="3294636" y="2072292"/>
+                  </a:lnTo>
+                  <a:lnTo>
+                    <a:pt x="3366258" y="2076733"/>
+                  </a:lnTo>
+                  <a:lnTo>
+                    <a:pt x="3437881" y="2080714"/>
+                  </a:lnTo>
+                  <a:lnTo>
+                    <a:pt x="3509503" y="2084676"/>
+                  </a:lnTo>
+                  <a:lnTo>
+                    <a:pt x="3581126" y="2088619"/>
+                  </a:lnTo>
+                  <a:lnTo>
+                    <a:pt x="3652748" y="2092542"/>
+                  </a:lnTo>
+                  <a:lnTo>
+                    <a:pt x="3724371" y="2096447"/>
+                  </a:lnTo>
+                  <a:lnTo>
+                    <a:pt x="3795993" y="2100333"/>
+                  </a:lnTo>
+                  <a:lnTo>
+                    <a:pt x="3867616" y="2104200"/>
+                  </a:lnTo>
+                  <a:lnTo>
+                    <a:pt x="3939238" y="2108049"/>
+                  </a:lnTo>
+                  <a:lnTo>
+                    <a:pt x="4010861" y="2111879"/>
+                  </a:lnTo>
+                  <a:lnTo>
+                    <a:pt x="4082483" y="2115690"/>
+                  </a:lnTo>
+                  <a:lnTo>
+                    <a:pt x="4154106" y="2119483"/>
+                  </a:lnTo>
+                  <a:lnTo>
+                    <a:pt x="4225729" y="2123258"/>
+                  </a:lnTo>
+                  <a:lnTo>
+                    <a:pt x="4297351" y="2127015"/>
+                  </a:lnTo>
+                  <a:lnTo>
+                    <a:pt x="4368974" y="2130753"/>
+                  </a:lnTo>
+                  <a:lnTo>
+                    <a:pt x="4440596" y="2134474"/>
+                  </a:lnTo>
+                  <a:lnTo>
+                    <a:pt x="4512219" y="2138176"/>
+                  </a:lnTo>
+                  <a:lnTo>
+                    <a:pt x="4583841" y="2141861"/>
+                  </a:lnTo>
+                  <a:lnTo>
+                    <a:pt x="4655464" y="2145528"/>
+                  </a:lnTo>
+                  <a:lnTo>
+                    <a:pt x="4727086" y="2149177"/>
+                  </a:lnTo>
+                  <a:lnTo>
+                    <a:pt x="4798709" y="2152809"/>
+                  </a:lnTo>
+                  <a:lnTo>
+                    <a:pt x="4870331" y="2156423"/>
+                  </a:lnTo>
+                  <a:lnTo>
+                    <a:pt x="4941954" y="2160019"/>
+                  </a:lnTo>
+                  <a:lnTo>
+                    <a:pt x="5013576" y="2163599"/>
+                  </a:lnTo>
+                  <a:lnTo>
+                    <a:pt x="5085199" y="2167161"/>
+                  </a:lnTo>
+                  <a:lnTo>
+                    <a:pt x="5156821" y="2170706"/>
+                  </a:lnTo>
+                  <a:lnTo>
+                    <a:pt x="5228444" y="2174234"/>
+                  </a:lnTo>
+                  <a:lnTo>
+                    <a:pt x="5300066" y="2177744"/>
+                  </a:lnTo>
+                  <a:lnTo>
+                    <a:pt x="5371689" y="2181238"/>
+                  </a:lnTo>
+                  <a:lnTo>
+                    <a:pt x="5443311" y="2184715"/>
+                  </a:lnTo>
+                  <a:lnTo>
+                    <a:pt x="5514934" y="2188176"/>
+                  </a:lnTo>
+                  <a:lnTo>
+                    <a:pt x="5586557" y="2191619"/>
+                  </a:lnTo>
+                  <a:lnTo>
+                    <a:pt x="5658179" y="2195046"/>
+                  </a:lnTo>
+                  <a:lnTo>
+                    <a:pt x="5729802" y="2198457"/>
+                  </a:lnTo>
+                  <a:lnTo>
+                    <a:pt x="5801424" y="2201851"/>
+                  </a:lnTo>
+                  <a:lnTo>
+                    <a:pt x="5873047" y="2205228"/>
+                  </a:lnTo>
+                  <a:lnTo>
+                    <a:pt x="5944669" y="2208590"/>
+                  </a:lnTo>
+                  <a:lnTo>
+                    <a:pt x="6016292" y="2211935"/>
+                  </a:lnTo>
+                  <a:lnTo>
+                    <a:pt x="6087914" y="2215264"/>
+                  </a:lnTo>
+                  <a:lnTo>
+                    <a:pt x="6159537" y="2218577"/>
+                  </a:lnTo>
+                  <a:lnTo>
+                    <a:pt x="6231159" y="2221874"/>
+                  </a:lnTo>
+                  <a:lnTo>
+                    <a:pt x="6302782" y="2225155"/>
+                  </a:lnTo>
+                  <a:lnTo>
+                    <a:pt x="6374404" y="2228420"/>
+                  </a:lnTo>
+                  <a:lnTo>
+                    <a:pt x="6446027" y="2231669"/>
+                  </a:lnTo>
+                  <a:lnTo>
+                    <a:pt x="6517649" y="2234903"/>
+                  </a:lnTo>
+                  <a:lnTo>
+                    <a:pt x="6589272" y="2238122"/>
+                  </a:lnTo>
+                  <a:lnTo>
+                    <a:pt x="6660894" y="2241324"/>
+                  </a:lnTo>
+                  <a:lnTo>
+                    <a:pt x="6732517" y="2244512"/>
+                  </a:lnTo>
+                  <a:lnTo>
+                    <a:pt x="6804139" y="2247683"/>
+                  </a:lnTo>
+                  <a:lnTo>
+                    <a:pt x="6875762" y="2250840"/>
+                  </a:lnTo>
+                  <a:lnTo>
+                    <a:pt x="6947385" y="2253981"/>
+                  </a:lnTo>
+                  <a:lnTo>
+                    <a:pt x="7019007" y="2257108"/>
+                  </a:lnTo>
+                  <a:lnTo>
+                    <a:pt x="7090630" y="2260219"/>
+                  </a:lnTo>
+                  <a:lnTo>
+                    <a:pt x="7090630" y="2706099"/>
+                  </a:lnTo>
+                  <a:lnTo>
+                    <a:pt x="7019007" y="2700686"/>
+                  </a:lnTo>
+                  <a:lnTo>
+                    <a:pt x="6947385" y="2695124"/>
+                  </a:lnTo>
+                  <a:lnTo>
+                    <a:pt x="6875762" y="2689409"/>
+                  </a:lnTo>
+                  <a:lnTo>
+                    <a:pt x="6804139" y="2683536"/>
+                  </a:lnTo>
+                  <a:lnTo>
+                    <a:pt x="6732517" y="2677502"/>
+                  </a:lnTo>
+                  <a:lnTo>
+                    <a:pt x="6660894" y="2671300"/>
+                  </a:lnTo>
+                  <a:lnTo>
+                    <a:pt x="6589272" y="2664928"/>
+                  </a:lnTo>
+                  <a:lnTo>
+                    <a:pt x="6517649" y="2658379"/>
+                  </a:lnTo>
+                  <a:lnTo>
+                    <a:pt x="6446027" y="2651651"/>
+                  </a:lnTo>
+                  <a:lnTo>
+                    <a:pt x="6374404" y="2644736"/>
+                  </a:lnTo>
+                  <a:lnTo>
+                    <a:pt x="6302782" y="2637631"/>
+                  </a:lnTo>
+                  <a:lnTo>
+                    <a:pt x="6231159" y="2630329"/>
+                  </a:lnTo>
+                  <a:lnTo>
+                    <a:pt x="6159537" y="2622827"/>
+                  </a:lnTo>
+                  <a:lnTo>
+                    <a:pt x="6087914" y="2615117"/>
+                  </a:lnTo>
+                  <a:lnTo>
+                    <a:pt x="6016292" y="2607195"/>
+                  </a:lnTo>
+                  <a:lnTo>
+                    <a:pt x="5944669" y="2599054"/>
+                  </a:lnTo>
+                  <a:lnTo>
+                    <a:pt x="5873047" y="2590688"/>
+                  </a:lnTo>
+                  <a:lnTo>
+                    <a:pt x="5801424" y="2582092"/>
+                  </a:lnTo>
+                  <a:lnTo>
+                    <a:pt x="5729802" y="2573258"/>
+                  </a:lnTo>
+                  <a:lnTo>
+                    <a:pt x="5658179" y="2564181"/>
+                  </a:lnTo>
+                  <a:lnTo>
+                    <a:pt x="5586557" y="2554854"/>
+                  </a:lnTo>
+                  <a:lnTo>
+                    <a:pt x="5514934" y="2545269"/>
+                  </a:lnTo>
+                  <a:lnTo>
+                    <a:pt x="5443311" y="2535419"/>
+                  </a:lnTo>
+                  <a:lnTo>
+                    <a:pt x="5371689" y="2525298"/>
+                  </a:lnTo>
+                  <a:lnTo>
+                    <a:pt x="5300066" y="2514898"/>
+                  </a:lnTo>
+                  <a:lnTo>
+                    <a:pt x="5228444" y="2504211"/>
+                  </a:lnTo>
+                  <a:lnTo>
+                    <a:pt x="5156821" y="2493229"/>
+                  </a:lnTo>
+                  <a:lnTo>
+                    <a:pt x="5085199" y="2481944"/>
+                  </a:lnTo>
+                  <a:lnTo>
+                    <a:pt x="5013576" y="2470347"/>
+                  </a:lnTo>
+                  <a:lnTo>
+                    <a:pt x="4941954" y="2458431"/>
+                  </a:lnTo>
+                  <a:lnTo>
+                    <a:pt x="4870331" y="2446186"/>
+                  </a:lnTo>
+                  <a:lnTo>
+                    <a:pt x="4798709" y="2433604"/>
+                  </a:lnTo>
+                  <a:lnTo>
+                    <a:pt x="4727086" y="2420674"/>
+                  </a:lnTo>
+                  <a:lnTo>
+                    <a:pt x="4655464" y="2407387"/>
+                  </a:lnTo>
+                  <a:lnTo>
+                    <a:pt x="4583841" y="2393734"/>
+                  </a:lnTo>
+                  <a:lnTo>
+                    <a:pt x="4512219" y="2379704"/>
+                  </a:lnTo>
+                  <a:lnTo>
+                    <a:pt x="4440596" y="2365287"/>
+                  </a:lnTo>
+                  <a:lnTo>
+                    <a:pt x="4368974" y="2350473"/>
+                  </a:lnTo>
+                  <a:lnTo>
+                    <a:pt x="4297351" y="2335250"/>
+                  </a:lnTo>
+                  <a:lnTo>
+                    <a:pt x="4225729" y="2319606"/>
+                  </a:lnTo>
+                  <a:lnTo>
+                    <a:pt x="4154106" y="2303532"/>
+                  </a:lnTo>
+                  <a:lnTo>
+                    <a:pt x="4082483" y="2287013"/>
+                  </a:lnTo>
+                  <a:lnTo>
+                    <a:pt x="4010861" y="2270039"/>
+                  </a:lnTo>
+                  <a:lnTo>
+                    <a:pt x="3939238" y="2252597"/>
+                  </a:lnTo>
+                  <a:lnTo>
+                    <a:pt x="3867616" y="2234674"/>
+                  </a:lnTo>
+                  <a:lnTo>
+                    <a:pt x="3795993" y="2216256"/>
+                  </a:lnTo>
+                  <a:lnTo>
+                    <a:pt x="3724371" y="2197330"/>
+                  </a:lnTo>
+                  <a:lnTo>
+                    <a:pt x="3652748" y="2177882"/>
+                  </a:lnTo>
+                  <a:lnTo>
+                    <a:pt x="3581126" y="2157898"/>
+                  </a:lnTo>
+                  <a:lnTo>
+                    <a:pt x="3509503" y="2137362"/>
+                  </a:lnTo>
+                  <a:lnTo>
+                    <a:pt x="3437881" y="2116259"/>
+                  </a:lnTo>
+                  <a:lnTo>
+                    <a:pt x="3366258" y="2094575"/>
+                  </a:lnTo>
+                  <a:lnTo>
+                    <a:pt x="3294636" y="2072733"/>
+                  </a:lnTo>
+                  <a:lnTo>
+                    <a:pt x="3223013" y="2068713"/>
+                  </a:lnTo>
+                  <a:lnTo>
+                    <a:pt x="3151391" y="2064674"/>
+                  </a:lnTo>
+                  <a:lnTo>
+                    <a:pt x="3079768" y="2060615"/>
+                  </a:lnTo>
+                  <a:lnTo>
+                    <a:pt x="3008146" y="2056537"/>
+                  </a:lnTo>
+                  <a:lnTo>
+                    <a:pt x="2936523" y="2052439"/>
+                  </a:lnTo>
+                  <a:lnTo>
+                    <a:pt x="2864901" y="2048321"/>
+                  </a:lnTo>
+                  <a:lnTo>
+                    <a:pt x="2793278" y="2044183"/>
+                  </a:lnTo>
+                  <a:lnTo>
+                    <a:pt x="2721655" y="2040025"/>
+                  </a:lnTo>
+                  <a:lnTo>
+                    <a:pt x="2650033" y="2035847"/>
+                  </a:lnTo>
+                  <a:lnTo>
+                    <a:pt x="2578410" y="2031649"/>
+                  </a:lnTo>
+                  <a:lnTo>
+                    <a:pt x="2506788" y="2027430"/>
+                  </a:lnTo>
+                  <a:lnTo>
+                    <a:pt x="2435165" y="2023191"/>
+                  </a:lnTo>
+                  <a:lnTo>
+                    <a:pt x="2363543" y="2018931"/>
+                  </a:lnTo>
+                  <a:lnTo>
+                    <a:pt x="2291920" y="2014651"/>
+                  </a:lnTo>
+                  <a:lnTo>
+                    <a:pt x="2220298" y="2010350"/>
+                  </a:lnTo>
+                  <a:lnTo>
+                    <a:pt x="2148675" y="2006028"/>
+                  </a:lnTo>
+                  <a:lnTo>
+                    <a:pt x="2077053" y="2001685"/>
+                  </a:lnTo>
+                  <a:lnTo>
+                    <a:pt x="2005430" y="1997321"/>
+                  </a:lnTo>
+                  <a:lnTo>
+                    <a:pt x="1933808" y="1992936"/>
+                  </a:lnTo>
+                  <a:lnTo>
+                    <a:pt x="1862185" y="1988530"/>
+                  </a:lnTo>
+                  <a:lnTo>
+                    <a:pt x="1790563" y="1984102"/>
+                  </a:lnTo>
+                  <a:lnTo>
+                    <a:pt x="1718940" y="1979653"/>
+                  </a:lnTo>
+                  <a:lnTo>
+                    <a:pt x="1647318" y="1975182"/>
+                  </a:lnTo>
+                  <a:lnTo>
+                    <a:pt x="1575695" y="1970690"/>
+                  </a:lnTo>
+                  <a:lnTo>
+                    <a:pt x="1504073" y="1966176"/>
+                  </a:lnTo>
+                  <a:lnTo>
+                    <a:pt x="1432450" y="1961640"/>
+                  </a:lnTo>
+                  <a:lnTo>
+                    <a:pt x="1360827" y="1957082"/>
+                  </a:lnTo>
+                  <a:lnTo>
+                    <a:pt x="1289205" y="1952502"/>
+                  </a:lnTo>
+                  <a:lnTo>
+                    <a:pt x="1217582" y="1947900"/>
+                  </a:lnTo>
+                  <a:lnTo>
+                    <a:pt x="1145960" y="1943275"/>
+                  </a:lnTo>
+                  <a:lnTo>
+                    <a:pt x="1074337" y="1938628"/>
+                  </a:lnTo>
+                  <a:lnTo>
+                    <a:pt x="1002715" y="1933959"/>
+                  </a:lnTo>
+                  <a:lnTo>
+                    <a:pt x="931092" y="1929267"/>
+                  </a:lnTo>
+                  <a:lnTo>
+                    <a:pt x="859470" y="1924552"/>
+                  </a:lnTo>
+                  <a:lnTo>
+                    <a:pt x="787847" y="1919814"/>
+                  </a:lnTo>
+                  <a:lnTo>
+                    <a:pt x="716225" y="1915054"/>
+                  </a:lnTo>
+                  <a:lnTo>
+                    <a:pt x="644602" y="1910270"/>
+                  </a:lnTo>
+                  <a:lnTo>
+                    <a:pt x="572980" y="1905463"/>
+                  </a:lnTo>
+                  <a:lnTo>
+                    <a:pt x="501357" y="1900633"/>
+                  </a:lnTo>
+                  <a:lnTo>
+                    <a:pt x="429735" y="1895779"/>
+                  </a:lnTo>
+                  <a:lnTo>
+                    <a:pt x="358112" y="1890902"/>
+                  </a:lnTo>
+                  <a:lnTo>
+                    <a:pt x="286490" y="1886002"/>
+                  </a:lnTo>
+                  <a:lnTo>
+                    <a:pt x="214867" y="1881077"/>
+                  </a:lnTo>
+                  <a:lnTo>
+                    <a:pt x="143245" y="1876129"/>
+                  </a:lnTo>
+                  <a:lnTo>
+                    <a:pt x="71622" y="1871156"/>
+                  </a:lnTo>
+                  <a:lnTo>
+                    <a:pt x="0" y="1866160"/>
                   </a:lnTo>
                   <a:close/>
                 </a:path>
@@ -3609,309 +3584,643 @@
         </p:sp>
         <p:sp>
           <p:nvSpPr>
+            <p:cNvPr id="21" name="pl21"/>
+            <p:cNvSpPr/>
+            <p:nvPr/>
+          </p:nvSpPr>
+          <p:spPr>
+            <a:xfrm>
+              <a:off x="1172049" y="2654957"/>
+              <a:ext cx="7090630" cy="2260219"/>
+            </a:xfrm>
+            <a:custGeom>
+              <a:avLst/>
+              <a:pathLst>
+                <a:path w="7090630" h="2260219">
+                  <a:moveTo>
+                    <a:pt x="0" y="0"/>
+                  </a:moveTo>
+                  <a:lnTo>
+                    <a:pt x="71622" y="77917"/>
+                  </a:lnTo>
+                  <a:lnTo>
+                    <a:pt x="143245" y="153742"/>
+                  </a:lnTo>
+                  <a:lnTo>
+                    <a:pt x="214867" y="227532"/>
+                  </a:lnTo>
+                  <a:lnTo>
+                    <a:pt x="286490" y="299340"/>
+                  </a:lnTo>
+                  <a:lnTo>
+                    <a:pt x="358112" y="369221"/>
+                  </a:lnTo>
+                  <a:lnTo>
+                    <a:pt x="429735" y="437226"/>
+                  </a:lnTo>
+                  <a:lnTo>
+                    <a:pt x="501357" y="503405"/>
+                  </a:lnTo>
+                  <a:lnTo>
+                    <a:pt x="572980" y="567807"/>
+                  </a:lnTo>
+                  <a:lnTo>
+                    <a:pt x="644602" y="630480"/>
+                  </a:lnTo>
+                  <a:lnTo>
+                    <a:pt x="716225" y="691471"/>
+                  </a:lnTo>
+                  <a:lnTo>
+                    <a:pt x="787847" y="750824"/>
+                  </a:lnTo>
+                  <a:lnTo>
+                    <a:pt x="859470" y="808584"/>
+                  </a:lnTo>
+                  <a:lnTo>
+                    <a:pt x="931092" y="864794"/>
+                  </a:lnTo>
+                  <a:lnTo>
+                    <a:pt x="1002715" y="919494"/>
+                  </a:lnTo>
+                  <a:lnTo>
+                    <a:pt x="1074337" y="972726"/>
+                  </a:lnTo>
+                  <a:lnTo>
+                    <a:pt x="1145960" y="1024528"/>
+                  </a:lnTo>
+                  <a:lnTo>
+                    <a:pt x="1217582" y="1074940"/>
+                  </a:lnTo>
+                  <a:lnTo>
+                    <a:pt x="1289205" y="1123998"/>
+                  </a:lnTo>
+                  <a:lnTo>
+                    <a:pt x="1360827" y="1171740"/>
+                  </a:lnTo>
+                  <a:lnTo>
+                    <a:pt x="1432450" y="1218200"/>
+                  </a:lnTo>
+                  <a:lnTo>
+                    <a:pt x="1504073" y="1263412"/>
+                  </a:lnTo>
+                  <a:lnTo>
+                    <a:pt x="1575695" y="1307411"/>
+                  </a:lnTo>
+                  <a:lnTo>
+                    <a:pt x="1647318" y="1350228"/>
+                  </a:lnTo>
+                  <a:lnTo>
+                    <a:pt x="1718940" y="1391896"/>
+                  </a:lnTo>
+                  <a:lnTo>
+                    <a:pt x="1790563" y="1432445"/>
+                  </a:lnTo>
+                  <a:lnTo>
+                    <a:pt x="1862185" y="1471906"/>
+                  </a:lnTo>
+                  <a:lnTo>
+                    <a:pt x="1933808" y="1510307"/>
+                  </a:lnTo>
+                  <a:lnTo>
+                    <a:pt x="2005430" y="1547677"/>
+                  </a:lnTo>
+                  <a:lnTo>
+                    <a:pt x="2077053" y="1584044"/>
+                  </a:lnTo>
+                  <a:lnTo>
+                    <a:pt x="2148675" y="1619435"/>
+                  </a:lnTo>
+                  <a:lnTo>
+                    <a:pt x="2220298" y="1653875"/>
+                  </a:lnTo>
+                  <a:lnTo>
+                    <a:pt x="2291920" y="1687391"/>
+                  </a:lnTo>
+                  <a:lnTo>
+                    <a:pt x="2363543" y="1720007"/>
+                  </a:lnTo>
+                  <a:lnTo>
+                    <a:pt x="2435165" y="1751748"/>
+                  </a:lnTo>
+                  <a:lnTo>
+                    <a:pt x="2506788" y="1782636"/>
+                  </a:lnTo>
+                  <a:lnTo>
+                    <a:pt x="2578410" y="1812695"/>
+                  </a:lnTo>
+                  <a:lnTo>
+                    <a:pt x="2650033" y="1841947"/>
+                  </a:lnTo>
+                  <a:lnTo>
+                    <a:pt x="2721655" y="1870414"/>
+                  </a:lnTo>
+                  <a:lnTo>
+                    <a:pt x="2793278" y="1898117"/>
+                  </a:lnTo>
+                  <a:lnTo>
+                    <a:pt x="2864901" y="1925076"/>
+                  </a:lnTo>
+                  <a:lnTo>
+                    <a:pt x="2936523" y="1951311"/>
+                  </a:lnTo>
+                  <a:lnTo>
+                    <a:pt x="3008146" y="1976841"/>
+                  </a:lnTo>
+                  <a:lnTo>
+                    <a:pt x="3079768" y="2001687"/>
+                  </a:lnTo>
+                  <a:lnTo>
+                    <a:pt x="3151391" y="2025865"/>
+                  </a:lnTo>
+                  <a:lnTo>
+                    <a:pt x="3223013" y="2049394"/>
+                  </a:lnTo>
+                  <a:lnTo>
+                    <a:pt x="3294636" y="2072292"/>
+                  </a:lnTo>
+                  <a:lnTo>
+                    <a:pt x="3366258" y="2076733"/>
+                  </a:lnTo>
+                  <a:lnTo>
+                    <a:pt x="3437881" y="2080714"/>
+                  </a:lnTo>
+                  <a:lnTo>
+                    <a:pt x="3509503" y="2084676"/>
+                  </a:lnTo>
+                  <a:lnTo>
+                    <a:pt x="3581126" y="2088619"/>
+                  </a:lnTo>
+                  <a:lnTo>
+                    <a:pt x="3652748" y="2092542"/>
+                  </a:lnTo>
+                  <a:lnTo>
+                    <a:pt x="3724371" y="2096447"/>
+                  </a:lnTo>
+                  <a:lnTo>
+                    <a:pt x="3795993" y="2100333"/>
+                  </a:lnTo>
+                  <a:lnTo>
+                    <a:pt x="3867616" y="2104200"/>
+                  </a:lnTo>
+                  <a:lnTo>
+                    <a:pt x="3939238" y="2108049"/>
+                  </a:lnTo>
+                  <a:lnTo>
+                    <a:pt x="4010861" y="2111879"/>
+                  </a:lnTo>
+                  <a:lnTo>
+                    <a:pt x="4082483" y="2115690"/>
+                  </a:lnTo>
+                  <a:lnTo>
+                    <a:pt x="4154106" y="2119483"/>
+                  </a:lnTo>
+                  <a:lnTo>
+                    <a:pt x="4225729" y="2123258"/>
+                  </a:lnTo>
+                  <a:lnTo>
+                    <a:pt x="4297351" y="2127015"/>
+                  </a:lnTo>
+                  <a:lnTo>
+                    <a:pt x="4368974" y="2130753"/>
+                  </a:lnTo>
+                  <a:lnTo>
+                    <a:pt x="4440596" y="2134474"/>
+                  </a:lnTo>
+                  <a:lnTo>
+                    <a:pt x="4512219" y="2138176"/>
+                  </a:lnTo>
+                  <a:lnTo>
+                    <a:pt x="4583841" y="2141861"/>
+                  </a:lnTo>
+                  <a:lnTo>
+                    <a:pt x="4655464" y="2145528"/>
+                  </a:lnTo>
+                  <a:lnTo>
+                    <a:pt x="4727086" y="2149177"/>
+                  </a:lnTo>
+                  <a:lnTo>
+                    <a:pt x="4798709" y="2152809"/>
+                  </a:lnTo>
+                  <a:lnTo>
+                    <a:pt x="4870331" y="2156423"/>
+                  </a:lnTo>
+                  <a:lnTo>
+                    <a:pt x="4941954" y="2160019"/>
+                  </a:lnTo>
+                  <a:lnTo>
+                    <a:pt x="5013576" y="2163599"/>
+                  </a:lnTo>
+                  <a:lnTo>
+                    <a:pt x="5085199" y="2167161"/>
+                  </a:lnTo>
+                  <a:lnTo>
+                    <a:pt x="5156821" y="2170706"/>
+                  </a:lnTo>
+                  <a:lnTo>
+                    <a:pt x="5228444" y="2174234"/>
+                  </a:lnTo>
+                  <a:lnTo>
+                    <a:pt x="5300066" y="2177744"/>
+                  </a:lnTo>
+                  <a:lnTo>
+                    <a:pt x="5371689" y="2181238"/>
+                  </a:lnTo>
+                  <a:lnTo>
+                    <a:pt x="5443311" y="2184715"/>
+                  </a:lnTo>
+                  <a:lnTo>
+                    <a:pt x="5514934" y="2188176"/>
+                  </a:lnTo>
+                  <a:lnTo>
+                    <a:pt x="5586557" y="2191619"/>
+                  </a:lnTo>
+                  <a:lnTo>
+                    <a:pt x="5658179" y="2195046"/>
+                  </a:lnTo>
+                  <a:lnTo>
+                    <a:pt x="5729802" y="2198457"/>
+                  </a:lnTo>
+                  <a:lnTo>
+                    <a:pt x="5801424" y="2201851"/>
+                  </a:lnTo>
+                  <a:lnTo>
+                    <a:pt x="5873047" y="2205228"/>
+                  </a:lnTo>
+                  <a:lnTo>
+                    <a:pt x="5944669" y="2208590"/>
+                  </a:lnTo>
+                  <a:lnTo>
+                    <a:pt x="6016292" y="2211935"/>
+                  </a:lnTo>
+                  <a:lnTo>
+                    <a:pt x="6087914" y="2215264"/>
+                  </a:lnTo>
+                  <a:lnTo>
+                    <a:pt x="6159537" y="2218577"/>
+                  </a:lnTo>
+                  <a:lnTo>
+                    <a:pt x="6231159" y="2221874"/>
+                  </a:lnTo>
+                  <a:lnTo>
+                    <a:pt x="6302782" y="2225155"/>
+                  </a:lnTo>
+                  <a:lnTo>
+                    <a:pt x="6374404" y="2228420"/>
+                  </a:lnTo>
+                  <a:lnTo>
+                    <a:pt x="6446027" y="2231669"/>
+                  </a:lnTo>
+                  <a:lnTo>
+                    <a:pt x="6517649" y="2234903"/>
+                  </a:lnTo>
+                  <a:lnTo>
+                    <a:pt x="6589272" y="2238122"/>
+                  </a:lnTo>
+                  <a:lnTo>
+                    <a:pt x="6660894" y="2241324"/>
+                  </a:lnTo>
+                  <a:lnTo>
+                    <a:pt x="6732517" y="2244512"/>
+                  </a:lnTo>
+                  <a:lnTo>
+                    <a:pt x="6804139" y="2247683"/>
+                  </a:lnTo>
+                  <a:lnTo>
+                    <a:pt x="6875762" y="2250840"/>
+                  </a:lnTo>
+                  <a:lnTo>
+                    <a:pt x="6947385" y="2253981"/>
+                  </a:lnTo>
+                  <a:lnTo>
+                    <a:pt x="7019007" y="2257108"/>
+                  </a:lnTo>
+                  <a:lnTo>
+                    <a:pt x="7090630" y="2260219"/>
+                  </a:lnTo>
+                </a:path>
+              </a:pathLst>
+            </a:custGeom>
+          </p:spPr>
+          <p:txBody>
+            <a:bodyPr/>
+            <a:lstStyle/>
+            <a:p/>
+          </p:txBody>
+        </p:sp>
+        <p:sp>
+          <p:nvSpPr>
             <p:cNvPr id="22" name="pl22"/>
             <p:cNvSpPr/>
             <p:nvPr/>
           </p:nvSpPr>
           <p:spPr>
             <a:xfrm>
-              <a:off x="817517" y="2904189"/>
-              <a:ext cx="7392041" cy="2010988"/>
+              <a:off x="1172049" y="4521118"/>
+              <a:ext cx="7090630" cy="839938"/>
             </a:xfrm>
             <a:custGeom>
               <a:avLst/>
               <a:pathLst>
-                <a:path w="7392041" h="2010988">
+                <a:path w="7090630" h="839938">
                   <a:moveTo>
+                    <a:pt x="7090630" y="839938"/>
+                  </a:moveTo>
+                  <a:lnTo>
+                    <a:pt x="7019007" y="834526"/>
+                  </a:lnTo>
+                  <a:lnTo>
+                    <a:pt x="6947385" y="828964"/>
+                  </a:lnTo>
+                  <a:lnTo>
+                    <a:pt x="6875762" y="823249"/>
+                  </a:lnTo>
+                  <a:lnTo>
+                    <a:pt x="6804139" y="817376"/>
+                  </a:lnTo>
+                  <a:lnTo>
+                    <a:pt x="6732517" y="811341"/>
+                  </a:lnTo>
+                  <a:lnTo>
+                    <a:pt x="6660894" y="805140"/>
+                  </a:lnTo>
+                  <a:lnTo>
+                    <a:pt x="6589272" y="798767"/>
+                  </a:lnTo>
+                  <a:lnTo>
+                    <a:pt x="6517649" y="792219"/>
+                  </a:lnTo>
+                  <a:lnTo>
+                    <a:pt x="6446027" y="785490"/>
+                  </a:lnTo>
+                  <a:lnTo>
+                    <a:pt x="6374404" y="778575"/>
+                  </a:lnTo>
+                  <a:lnTo>
+                    <a:pt x="6302782" y="771470"/>
+                  </a:lnTo>
+                  <a:lnTo>
+                    <a:pt x="6231159" y="764169"/>
+                  </a:lnTo>
+                  <a:lnTo>
+                    <a:pt x="6159537" y="756666"/>
+                  </a:lnTo>
+                  <a:lnTo>
+                    <a:pt x="6087914" y="748956"/>
+                  </a:lnTo>
+                  <a:lnTo>
+                    <a:pt x="6016292" y="741034"/>
+                  </a:lnTo>
+                  <a:lnTo>
+                    <a:pt x="5944669" y="732893"/>
+                  </a:lnTo>
+                  <a:lnTo>
+                    <a:pt x="5873047" y="724528"/>
+                  </a:lnTo>
+                  <a:lnTo>
+                    <a:pt x="5801424" y="715931"/>
+                  </a:lnTo>
+                  <a:lnTo>
+                    <a:pt x="5729802" y="707098"/>
+                  </a:lnTo>
+                  <a:lnTo>
+                    <a:pt x="5658179" y="698021"/>
+                  </a:lnTo>
+                  <a:lnTo>
+                    <a:pt x="5586557" y="688693"/>
+                  </a:lnTo>
+                  <a:lnTo>
+                    <a:pt x="5514934" y="679108"/>
+                  </a:lnTo>
+                  <a:lnTo>
+                    <a:pt x="5443311" y="669259"/>
+                  </a:lnTo>
+                  <a:lnTo>
+                    <a:pt x="5371689" y="659138"/>
+                  </a:lnTo>
+                  <a:lnTo>
+                    <a:pt x="5300066" y="648737"/>
+                  </a:lnTo>
+                  <a:lnTo>
+                    <a:pt x="5228444" y="638050"/>
+                  </a:lnTo>
+                  <a:lnTo>
+                    <a:pt x="5156821" y="627068"/>
+                  </a:lnTo>
+                  <a:lnTo>
+                    <a:pt x="5085199" y="615783"/>
+                  </a:lnTo>
+                  <a:lnTo>
+                    <a:pt x="5013576" y="604187"/>
+                  </a:lnTo>
+                  <a:lnTo>
+                    <a:pt x="4941954" y="592271"/>
+                  </a:lnTo>
+                  <a:lnTo>
+                    <a:pt x="4870331" y="580026"/>
+                  </a:lnTo>
+                  <a:lnTo>
+                    <a:pt x="4798709" y="567443"/>
+                  </a:lnTo>
+                  <a:lnTo>
+                    <a:pt x="4727086" y="554513"/>
+                  </a:lnTo>
+                  <a:lnTo>
+                    <a:pt x="4655464" y="541227"/>
+                  </a:lnTo>
+                  <a:lnTo>
+                    <a:pt x="4583841" y="527573"/>
+                  </a:lnTo>
+                  <a:lnTo>
+                    <a:pt x="4512219" y="513544"/>
+                  </a:lnTo>
+                  <a:lnTo>
+                    <a:pt x="4440596" y="499127"/>
+                  </a:lnTo>
+                  <a:lnTo>
+                    <a:pt x="4368974" y="484312"/>
+                  </a:lnTo>
+                  <a:lnTo>
+                    <a:pt x="4297351" y="469089"/>
+                  </a:lnTo>
+                  <a:lnTo>
+                    <a:pt x="4225729" y="453446"/>
+                  </a:lnTo>
+                  <a:lnTo>
+                    <a:pt x="4154106" y="437371"/>
+                  </a:lnTo>
+                  <a:lnTo>
+                    <a:pt x="4082483" y="420853"/>
+                  </a:lnTo>
+                  <a:lnTo>
+                    <a:pt x="4010861" y="403879"/>
+                  </a:lnTo>
+                  <a:lnTo>
+                    <a:pt x="3939238" y="386437"/>
+                  </a:lnTo>
+                  <a:lnTo>
+                    <a:pt x="3867616" y="368513"/>
+                  </a:lnTo>
+                  <a:lnTo>
+                    <a:pt x="3795993" y="350096"/>
+                  </a:lnTo>
+                  <a:lnTo>
+                    <a:pt x="3724371" y="331170"/>
+                  </a:lnTo>
+                  <a:lnTo>
+                    <a:pt x="3652748" y="311722"/>
+                  </a:lnTo>
+                  <a:lnTo>
+                    <a:pt x="3581126" y="291737"/>
+                  </a:lnTo>
+                  <a:lnTo>
+                    <a:pt x="3509503" y="271201"/>
+                  </a:lnTo>
+                  <a:lnTo>
+                    <a:pt x="3437881" y="250099"/>
+                  </a:lnTo>
+                  <a:lnTo>
+                    <a:pt x="3366258" y="228414"/>
+                  </a:lnTo>
+                  <a:lnTo>
+                    <a:pt x="3294636" y="206572"/>
+                  </a:lnTo>
+                  <a:lnTo>
+                    <a:pt x="3223013" y="202553"/>
+                  </a:lnTo>
+                  <a:lnTo>
+                    <a:pt x="3151391" y="198514"/>
+                  </a:lnTo>
+                  <a:lnTo>
+                    <a:pt x="3079768" y="194455"/>
+                  </a:lnTo>
+                  <a:lnTo>
+                    <a:pt x="3008146" y="190377"/>
+                  </a:lnTo>
+                  <a:lnTo>
+                    <a:pt x="2936523" y="186278"/>
+                  </a:lnTo>
+                  <a:lnTo>
+                    <a:pt x="2864901" y="182160"/>
+                  </a:lnTo>
+                  <a:lnTo>
+                    <a:pt x="2793278" y="178023"/>
+                  </a:lnTo>
+                  <a:lnTo>
+                    <a:pt x="2721655" y="173865"/>
+                  </a:lnTo>
+                  <a:lnTo>
+                    <a:pt x="2650033" y="169686"/>
+                  </a:lnTo>
+                  <a:lnTo>
+                    <a:pt x="2578410" y="165488"/>
+                  </a:lnTo>
+                  <a:lnTo>
+                    <a:pt x="2506788" y="161269"/>
+                  </a:lnTo>
+                  <a:lnTo>
+                    <a:pt x="2435165" y="157030"/>
+                  </a:lnTo>
+                  <a:lnTo>
+                    <a:pt x="2363543" y="152770"/>
+                  </a:lnTo>
+                  <a:lnTo>
+                    <a:pt x="2291920" y="148490"/>
+                  </a:lnTo>
+                  <a:lnTo>
+                    <a:pt x="2220298" y="144189"/>
+                  </a:lnTo>
+                  <a:lnTo>
+                    <a:pt x="2148675" y="139867"/>
+                  </a:lnTo>
+                  <a:lnTo>
+                    <a:pt x="2077053" y="135524"/>
+                  </a:lnTo>
+                  <a:lnTo>
+                    <a:pt x="2005430" y="131160"/>
+                  </a:lnTo>
+                  <a:lnTo>
+                    <a:pt x="1933808" y="126775"/>
+                  </a:lnTo>
+                  <a:lnTo>
+                    <a:pt x="1862185" y="122369"/>
+                  </a:lnTo>
+                  <a:lnTo>
+                    <a:pt x="1790563" y="117941"/>
+                  </a:lnTo>
+                  <a:lnTo>
+                    <a:pt x="1718940" y="113492"/>
+                  </a:lnTo>
+                  <a:lnTo>
+                    <a:pt x="1647318" y="109022"/>
+                  </a:lnTo>
+                  <a:lnTo>
+                    <a:pt x="1575695" y="104529"/>
+                  </a:lnTo>
+                  <a:lnTo>
+                    <a:pt x="1504073" y="100015"/>
+                  </a:lnTo>
+                  <a:lnTo>
+                    <a:pt x="1432450" y="95479"/>
+                  </a:lnTo>
+                  <a:lnTo>
+                    <a:pt x="1360827" y="90921"/>
+                  </a:lnTo>
+                  <a:lnTo>
+                    <a:pt x="1289205" y="86341"/>
+                  </a:lnTo>
+                  <a:lnTo>
+                    <a:pt x="1217582" y="81739"/>
+                  </a:lnTo>
+                  <a:lnTo>
+                    <a:pt x="1145960" y="77115"/>
+                  </a:lnTo>
+                  <a:lnTo>
+                    <a:pt x="1074337" y="72468"/>
+                  </a:lnTo>
+                  <a:lnTo>
+                    <a:pt x="1002715" y="67798"/>
+                  </a:lnTo>
+                  <a:lnTo>
+                    <a:pt x="931092" y="63106"/>
+                  </a:lnTo>
+                  <a:lnTo>
+                    <a:pt x="859470" y="58391"/>
+                  </a:lnTo>
+                  <a:lnTo>
+                    <a:pt x="787847" y="53654"/>
+                  </a:lnTo>
+                  <a:lnTo>
+                    <a:pt x="716225" y="48893"/>
+                  </a:lnTo>
+                  <a:lnTo>
+                    <a:pt x="644602" y="44109"/>
+                  </a:lnTo>
+                  <a:lnTo>
+                    <a:pt x="572980" y="39302"/>
+                  </a:lnTo>
+                  <a:lnTo>
+                    <a:pt x="501357" y="34472"/>
+                  </a:lnTo>
+                  <a:lnTo>
+                    <a:pt x="429735" y="29619"/>
+                  </a:lnTo>
+                  <a:lnTo>
+                    <a:pt x="358112" y="24742"/>
+                  </a:lnTo>
+                  <a:lnTo>
+                    <a:pt x="286490" y="19841"/>
+                  </a:lnTo>
+                  <a:lnTo>
+                    <a:pt x="214867" y="14916"/>
+                  </a:lnTo>
+                  <a:lnTo>
+                    <a:pt x="143245" y="9968"/>
+                  </a:lnTo>
+                  <a:lnTo>
+                    <a:pt x="71622" y="4996"/>
+                  </a:lnTo>
+                  <a:lnTo>
                     <a:pt x="0" y="0"/>
-                  </a:moveTo>
-                  <a:lnTo>
-                    <a:pt x="53901" y="50109"/>
-                  </a:lnTo>
-                  <a:lnTo>
-                    <a:pt x="131145" y="119990"/>
-                  </a:lnTo>
-                  <a:lnTo>
-                    <a:pt x="208389" y="187994"/>
-                  </a:lnTo>
-                  <a:lnTo>
-                    <a:pt x="285632" y="254173"/>
-                  </a:lnTo>
-                  <a:lnTo>
-                    <a:pt x="362876" y="318576"/>
-                  </a:lnTo>
-                  <a:lnTo>
-                    <a:pt x="440119" y="381249"/>
-                  </a:lnTo>
-                  <a:lnTo>
-                    <a:pt x="517363" y="442240"/>
-                  </a:lnTo>
-                  <a:lnTo>
-                    <a:pt x="594606" y="501593"/>
-                  </a:lnTo>
-                  <a:lnTo>
-                    <a:pt x="671850" y="559353"/>
-                  </a:lnTo>
-                  <a:lnTo>
-                    <a:pt x="749094" y="615562"/>
-                  </a:lnTo>
-                  <a:lnTo>
-                    <a:pt x="826337" y="670262"/>
-                  </a:lnTo>
-                  <a:lnTo>
-                    <a:pt x="903581" y="723494"/>
-                  </a:lnTo>
-                  <a:lnTo>
-                    <a:pt x="980824" y="775297"/>
-                  </a:lnTo>
-                  <a:lnTo>
-                    <a:pt x="1058068" y="825709"/>
-                  </a:lnTo>
-                  <a:lnTo>
-                    <a:pt x="1135311" y="874767"/>
-                  </a:lnTo>
-                  <a:lnTo>
-                    <a:pt x="1212555" y="922508"/>
-                  </a:lnTo>
-                  <a:lnTo>
-                    <a:pt x="1289799" y="968968"/>
-                  </a:lnTo>
-                  <a:lnTo>
-                    <a:pt x="1367042" y="1014181"/>
-                  </a:lnTo>
-                  <a:lnTo>
-                    <a:pt x="1444286" y="1058179"/>
-                  </a:lnTo>
-                  <a:lnTo>
-                    <a:pt x="1521529" y="1100997"/>
-                  </a:lnTo>
-                  <a:lnTo>
-                    <a:pt x="1598773" y="1142664"/>
-                  </a:lnTo>
-                  <a:lnTo>
-                    <a:pt x="1676016" y="1183214"/>
-                  </a:lnTo>
-                  <a:lnTo>
-                    <a:pt x="1753260" y="1222674"/>
-                  </a:lnTo>
-                  <a:lnTo>
-                    <a:pt x="1830504" y="1261075"/>
-                  </a:lnTo>
-                  <a:lnTo>
-                    <a:pt x="1907747" y="1298446"/>
-                  </a:lnTo>
-                  <a:lnTo>
-                    <a:pt x="1984991" y="1334813"/>
-                  </a:lnTo>
-                  <a:lnTo>
-                    <a:pt x="2062234" y="1370203"/>
-                  </a:lnTo>
-                  <a:lnTo>
-                    <a:pt x="2139478" y="1404644"/>
-                  </a:lnTo>
-                  <a:lnTo>
-                    <a:pt x="2216721" y="1438160"/>
-                  </a:lnTo>
-                  <a:lnTo>
-                    <a:pt x="2293965" y="1470776"/>
-                  </a:lnTo>
-                  <a:lnTo>
-                    <a:pt x="2371209" y="1502517"/>
-                  </a:lnTo>
-                  <a:lnTo>
-                    <a:pt x="2448452" y="1533405"/>
-                  </a:lnTo>
-                  <a:lnTo>
-                    <a:pt x="2525696" y="1563464"/>
-                  </a:lnTo>
-                  <a:lnTo>
-                    <a:pt x="2602939" y="1592716"/>
-                  </a:lnTo>
-                  <a:lnTo>
-                    <a:pt x="2680183" y="1621183"/>
-                  </a:lnTo>
-                  <a:lnTo>
-                    <a:pt x="2757426" y="1648885"/>
-                  </a:lnTo>
-                  <a:lnTo>
-                    <a:pt x="2834670" y="1675844"/>
-                  </a:lnTo>
-                  <a:lnTo>
-                    <a:pt x="2911914" y="1702079"/>
-                  </a:lnTo>
-                  <a:lnTo>
-                    <a:pt x="2989157" y="1727610"/>
-                  </a:lnTo>
-                  <a:lnTo>
-                    <a:pt x="3066401" y="1752455"/>
-                  </a:lnTo>
-                  <a:lnTo>
-                    <a:pt x="3143644" y="1776634"/>
-                  </a:lnTo>
-                  <a:lnTo>
-                    <a:pt x="3220888" y="1800163"/>
-                  </a:lnTo>
-                  <a:lnTo>
-                    <a:pt x="3298131" y="1823061"/>
-                  </a:lnTo>
-                  <a:lnTo>
-                    <a:pt x="3375375" y="1827502"/>
-                  </a:lnTo>
-                  <a:lnTo>
-                    <a:pt x="3452619" y="1831483"/>
-                  </a:lnTo>
-                  <a:lnTo>
-                    <a:pt x="3529862" y="1835445"/>
-                  </a:lnTo>
-                  <a:lnTo>
-                    <a:pt x="3607106" y="1839387"/>
-                  </a:lnTo>
-                  <a:lnTo>
-                    <a:pt x="3684349" y="1843311"/>
-                  </a:lnTo>
-                  <a:lnTo>
-                    <a:pt x="3761593" y="1847216"/>
-                  </a:lnTo>
-                  <a:lnTo>
-                    <a:pt x="3838836" y="1851102"/>
-                  </a:lnTo>
-                  <a:lnTo>
-                    <a:pt x="3916080" y="1854969"/>
-                  </a:lnTo>
-                  <a:lnTo>
-                    <a:pt x="3993324" y="1858817"/>
-                  </a:lnTo>
-                  <a:lnTo>
-                    <a:pt x="4070567" y="1862647"/>
-                  </a:lnTo>
-                  <a:lnTo>
-                    <a:pt x="4147811" y="1866459"/>
-                  </a:lnTo>
-                  <a:lnTo>
-                    <a:pt x="4225054" y="1870252"/>
-                  </a:lnTo>
-                  <a:lnTo>
-                    <a:pt x="4302298" y="1874027"/>
-                  </a:lnTo>
-                  <a:lnTo>
-                    <a:pt x="4379541" y="1877783"/>
-                  </a:lnTo>
-                  <a:lnTo>
-                    <a:pt x="4456785" y="1881522"/>
-                  </a:lnTo>
-                  <a:lnTo>
-                    <a:pt x="4534029" y="1885242"/>
-                  </a:lnTo>
-                  <a:lnTo>
-                    <a:pt x="4611272" y="1888945"/>
-                  </a:lnTo>
-                  <a:lnTo>
-                    <a:pt x="4688516" y="1892629"/>
-                  </a:lnTo>
-                  <a:lnTo>
-                    <a:pt x="4765759" y="1896296"/>
-                  </a:lnTo>
-                  <a:lnTo>
-                    <a:pt x="4843003" y="1899946"/>
-                  </a:lnTo>
-                  <a:lnTo>
-                    <a:pt x="4920246" y="1903577"/>
-                  </a:lnTo>
-                  <a:lnTo>
-                    <a:pt x="4997490" y="1907191"/>
-                  </a:lnTo>
-                  <a:lnTo>
-                    <a:pt x="5074734" y="1910788"/>
-                  </a:lnTo>
-                  <a:lnTo>
-                    <a:pt x="5151977" y="1914367"/>
-                  </a:lnTo>
-                  <a:lnTo>
-                    <a:pt x="5229221" y="1917929"/>
-                  </a:lnTo>
-                  <a:lnTo>
-                    <a:pt x="5306464" y="1921474"/>
-                  </a:lnTo>
-                  <a:lnTo>
-                    <a:pt x="5383708" y="1925002"/>
-                  </a:lnTo>
-                  <a:lnTo>
-                    <a:pt x="5460951" y="1928513"/>
-                  </a:lnTo>
-                  <a:lnTo>
-                    <a:pt x="5538195" y="1932007"/>
-                  </a:lnTo>
-                  <a:lnTo>
-                    <a:pt x="5615439" y="1935484"/>
-                  </a:lnTo>
-                  <a:lnTo>
-                    <a:pt x="5692682" y="1938944"/>
-                  </a:lnTo>
-                  <a:lnTo>
-                    <a:pt x="5769926" y="1942388"/>
-                  </a:lnTo>
-                  <a:lnTo>
-                    <a:pt x="5847169" y="1945815"/>
-                  </a:lnTo>
-                  <a:lnTo>
-                    <a:pt x="5924413" y="1949225"/>
-                  </a:lnTo>
-                  <a:lnTo>
-                    <a:pt x="6001656" y="1952619"/>
-                  </a:lnTo>
-                  <a:lnTo>
-                    <a:pt x="6078900" y="1955997"/>
-                  </a:lnTo>
-                  <a:lnTo>
-                    <a:pt x="6156144" y="1959358"/>
-                  </a:lnTo>
-                  <a:lnTo>
-                    <a:pt x="6233387" y="1962703"/>
-                  </a:lnTo>
-                  <a:lnTo>
-                    <a:pt x="6310631" y="1966032"/>
-                  </a:lnTo>
-                  <a:lnTo>
-                    <a:pt x="6387874" y="1969345"/>
-                  </a:lnTo>
-                  <a:lnTo>
-                    <a:pt x="6465118" y="1972642"/>
-                  </a:lnTo>
-                  <a:lnTo>
-                    <a:pt x="6542361" y="1975923"/>
-                  </a:lnTo>
-                  <a:lnTo>
-                    <a:pt x="6619605" y="1979189"/>
-                  </a:lnTo>
-                  <a:lnTo>
-                    <a:pt x="6696849" y="1982438"/>
-                  </a:lnTo>
-                  <a:lnTo>
-                    <a:pt x="6774092" y="1985672"/>
-                  </a:lnTo>
-                  <a:lnTo>
-                    <a:pt x="6851336" y="1988890"/>
-                  </a:lnTo>
-                  <a:lnTo>
-                    <a:pt x="6928579" y="1992093"/>
-                  </a:lnTo>
-                  <a:lnTo>
-                    <a:pt x="7005823" y="1995280"/>
-                  </a:lnTo>
-                  <a:lnTo>
-                    <a:pt x="7083066" y="1998452"/>
-                  </a:lnTo>
-                  <a:lnTo>
-                    <a:pt x="7160310" y="2001609"/>
-                  </a:lnTo>
-                  <a:lnTo>
-                    <a:pt x="7237554" y="2004750"/>
-                  </a:lnTo>
-                  <a:lnTo>
-                    <a:pt x="7314797" y="2007876"/>
-                  </a:lnTo>
-                  <a:lnTo>
-                    <a:pt x="7392041" y="2010988"/>
                   </a:lnTo>
                 </a:path>
               </a:pathLst>
@@ -3931,619 +4240,312 @@
           </p:nvSpPr>
           <p:spPr>
             <a:xfrm>
-              <a:off x="817517" y="4537523"/>
-              <a:ext cx="7392041" cy="823533"/>
+              <a:off x="1172049" y="3823134"/>
+              <a:ext cx="7090630" cy="1379192"/>
             </a:xfrm>
             <a:custGeom>
               <a:avLst/>
               <a:pathLst>
-                <a:path w="7392041" h="823533">
-                  <a:moveTo>
-                    <a:pt x="7392041" y="823533"/>
-                  </a:moveTo>
-                  <a:lnTo>
-                    <a:pt x="7314797" y="818121"/>
-                  </a:lnTo>
-                  <a:lnTo>
-                    <a:pt x="7237554" y="812559"/>
-                  </a:lnTo>
-                  <a:lnTo>
-                    <a:pt x="7160310" y="806844"/>
-                  </a:lnTo>
-                  <a:lnTo>
-                    <a:pt x="7083066" y="800971"/>
-                  </a:lnTo>
-                  <a:lnTo>
-                    <a:pt x="7005823" y="794936"/>
-                  </a:lnTo>
-                  <a:lnTo>
-                    <a:pt x="6928579" y="788735"/>
-                  </a:lnTo>
-                  <a:lnTo>
-                    <a:pt x="6851336" y="782362"/>
-                  </a:lnTo>
-                  <a:lnTo>
-                    <a:pt x="6774092" y="775814"/>
-                  </a:lnTo>
-                  <a:lnTo>
-                    <a:pt x="6696849" y="769085"/>
-                  </a:lnTo>
-                  <a:lnTo>
-                    <a:pt x="6619605" y="762170"/>
-                  </a:lnTo>
-                  <a:lnTo>
-                    <a:pt x="6542361" y="755065"/>
-                  </a:lnTo>
-                  <a:lnTo>
-                    <a:pt x="6465118" y="747764"/>
-                  </a:lnTo>
-                  <a:lnTo>
-                    <a:pt x="6387874" y="740261"/>
-                  </a:lnTo>
-                  <a:lnTo>
-                    <a:pt x="6310631" y="732551"/>
-                  </a:lnTo>
-                  <a:lnTo>
-                    <a:pt x="6233387" y="724629"/>
-                  </a:lnTo>
-                  <a:lnTo>
-                    <a:pt x="6156144" y="716488"/>
-                  </a:lnTo>
-                  <a:lnTo>
-                    <a:pt x="6078900" y="708122"/>
-                  </a:lnTo>
-                  <a:lnTo>
-                    <a:pt x="6001656" y="699526"/>
-                  </a:lnTo>
-                  <a:lnTo>
-                    <a:pt x="5924413" y="690693"/>
-                  </a:lnTo>
-                  <a:lnTo>
-                    <a:pt x="5847169" y="681615"/>
-                  </a:lnTo>
-                  <a:lnTo>
-                    <a:pt x="5769926" y="672288"/>
-                  </a:lnTo>
-                  <a:lnTo>
-                    <a:pt x="5692682" y="662703"/>
-                  </a:lnTo>
-                  <a:lnTo>
-                    <a:pt x="5615439" y="652854"/>
-                  </a:lnTo>
-                  <a:lnTo>
-                    <a:pt x="5538195" y="642733"/>
-                  </a:lnTo>
-                  <a:lnTo>
-                    <a:pt x="5460951" y="632332"/>
-                  </a:lnTo>
-                  <a:lnTo>
-                    <a:pt x="5383708" y="621645"/>
-                  </a:lnTo>
-                  <a:lnTo>
-                    <a:pt x="5306464" y="610663"/>
-                  </a:lnTo>
-                  <a:lnTo>
-                    <a:pt x="5229221" y="599378"/>
-                  </a:lnTo>
-                  <a:lnTo>
-                    <a:pt x="5151977" y="587782"/>
-                  </a:lnTo>
-                  <a:lnTo>
-                    <a:pt x="5074734" y="575866"/>
-                  </a:lnTo>
-                  <a:lnTo>
-                    <a:pt x="4997490" y="563621"/>
-                  </a:lnTo>
-                  <a:lnTo>
-                    <a:pt x="4920246" y="551038"/>
-                  </a:lnTo>
-                  <a:lnTo>
-                    <a:pt x="4843003" y="538108"/>
-                  </a:lnTo>
-                  <a:lnTo>
-                    <a:pt x="4765759" y="524821"/>
-                  </a:lnTo>
-                  <a:lnTo>
-                    <a:pt x="4688516" y="511168"/>
-                  </a:lnTo>
-                  <a:lnTo>
-                    <a:pt x="4611272" y="497139"/>
-                  </a:lnTo>
-                  <a:lnTo>
-                    <a:pt x="4534029" y="482722"/>
-                  </a:lnTo>
-                  <a:lnTo>
-                    <a:pt x="4456785" y="467907"/>
-                  </a:lnTo>
-                  <a:lnTo>
-                    <a:pt x="4379541" y="452684"/>
-                  </a:lnTo>
-                  <a:lnTo>
-                    <a:pt x="4302298" y="437041"/>
-                  </a:lnTo>
-                  <a:lnTo>
-                    <a:pt x="4225054" y="420966"/>
-                  </a:lnTo>
-                  <a:lnTo>
-                    <a:pt x="4147811" y="404448"/>
-                  </a:lnTo>
-                  <a:lnTo>
-                    <a:pt x="4070567" y="387474"/>
-                  </a:lnTo>
-                  <a:lnTo>
-                    <a:pt x="3993324" y="370032"/>
-                  </a:lnTo>
-                  <a:lnTo>
-                    <a:pt x="3916080" y="352108"/>
-                  </a:lnTo>
-                  <a:lnTo>
-                    <a:pt x="3838836" y="333690"/>
-                  </a:lnTo>
-                  <a:lnTo>
-                    <a:pt x="3761593" y="314765"/>
-                  </a:lnTo>
-                  <a:lnTo>
-                    <a:pt x="3684349" y="295316"/>
-                  </a:lnTo>
-                  <a:lnTo>
-                    <a:pt x="3607106" y="275332"/>
-                  </a:lnTo>
-                  <a:lnTo>
-                    <a:pt x="3529862" y="254796"/>
-                  </a:lnTo>
-                  <a:lnTo>
-                    <a:pt x="3452619" y="233694"/>
-                  </a:lnTo>
-                  <a:lnTo>
-                    <a:pt x="3375375" y="212009"/>
-                  </a:lnTo>
-                  <a:lnTo>
-                    <a:pt x="3298131" y="190167"/>
-                  </a:lnTo>
-                  <a:lnTo>
-                    <a:pt x="3220888" y="186148"/>
-                  </a:lnTo>
-                  <a:lnTo>
-                    <a:pt x="3143644" y="182109"/>
-                  </a:lnTo>
-                  <a:lnTo>
-                    <a:pt x="3066401" y="178050"/>
-                  </a:lnTo>
-                  <a:lnTo>
-                    <a:pt x="2989157" y="173972"/>
-                  </a:lnTo>
-                  <a:lnTo>
-                    <a:pt x="2911914" y="169873"/>
-                  </a:lnTo>
-                  <a:lnTo>
-                    <a:pt x="2834670" y="165755"/>
-                  </a:lnTo>
-                  <a:lnTo>
-                    <a:pt x="2757426" y="161617"/>
-                  </a:lnTo>
-                  <a:lnTo>
-                    <a:pt x="2680183" y="157459"/>
-                  </a:lnTo>
-                  <a:lnTo>
-                    <a:pt x="2602939" y="153281"/>
-                  </a:lnTo>
-                  <a:lnTo>
-                    <a:pt x="2525696" y="149083"/>
-                  </a:lnTo>
-                  <a:lnTo>
-                    <a:pt x="2448452" y="144864"/>
-                  </a:lnTo>
-                  <a:lnTo>
-                    <a:pt x="2371209" y="140625"/>
-                  </a:lnTo>
-                  <a:lnTo>
-                    <a:pt x="2293965" y="136365"/>
-                  </a:lnTo>
-                  <a:lnTo>
-                    <a:pt x="2216721" y="132085"/>
-                  </a:lnTo>
-                  <a:lnTo>
-                    <a:pt x="2139478" y="127784"/>
-                  </a:lnTo>
-                  <a:lnTo>
-                    <a:pt x="2062234" y="123462"/>
-                  </a:lnTo>
-                  <a:lnTo>
-                    <a:pt x="1984991" y="119119"/>
-                  </a:lnTo>
-                  <a:lnTo>
-                    <a:pt x="1907747" y="114755"/>
-                  </a:lnTo>
-                  <a:lnTo>
-                    <a:pt x="1830504" y="110370"/>
-                  </a:lnTo>
-                  <a:lnTo>
-                    <a:pt x="1753260" y="105964"/>
-                  </a:lnTo>
-                  <a:lnTo>
-                    <a:pt x="1676016" y="101536"/>
-                  </a:lnTo>
-                  <a:lnTo>
-                    <a:pt x="1598773" y="97087"/>
-                  </a:lnTo>
-                  <a:lnTo>
-                    <a:pt x="1521529" y="92617"/>
-                  </a:lnTo>
-                  <a:lnTo>
-                    <a:pt x="1444286" y="88124"/>
-                  </a:lnTo>
-                  <a:lnTo>
-                    <a:pt x="1367042" y="83610"/>
-                  </a:lnTo>
-                  <a:lnTo>
-                    <a:pt x="1289799" y="79074"/>
-                  </a:lnTo>
-                  <a:lnTo>
-                    <a:pt x="1212555" y="74516"/>
-                  </a:lnTo>
-                  <a:lnTo>
-                    <a:pt x="1135311" y="69936"/>
-                  </a:lnTo>
-                  <a:lnTo>
-                    <a:pt x="1058068" y="65334"/>
-                  </a:lnTo>
-                  <a:lnTo>
-                    <a:pt x="980824" y="60709"/>
-                  </a:lnTo>
-                  <a:lnTo>
-                    <a:pt x="903581" y="56062"/>
-                  </a:lnTo>
-                  <a:lnTo>
-                    <a:pt x="826337" y="51393"/>
-                  </a:lnTo>
-                  <a:lnTo>
-                    <a:pt x="749094" y="46701"/>
-                  </a:lnTo>
-                  <a:lnTo>
-                    <a:pt x="671850" y="41986"/>
-                  </a:lnTo>
-                  <a:lnTo>
-                    <a:pt x="594606" y="37249"/>
-                  </a:lnTo>
-                  <a:lnTo>
-                    <a:pt x="517363" y="32488"/>
-                  </a:lnTo>
-                  <a:lnTo>
-                    <a:pt x="440119" y="27704"/>
-                  </a:lnTo>
-                  <a:lnTo>
-                    <a:pt x="362876" y="22897"/>
-                  </a:lnTo>
-                  <a:lnTo>
-                    <a:pt x="285632" y="18067"/>
-                  </a:lnTo>
-                  <a:lnTo>
-                    <a:pt x="208389" y="13214"/>
-                  </a:lnTo>
-                  <a:lnTo>
-                    <a:pt x="131145" y="8337"/>
-                  </a:lnTo>
-                  <a:lnTo>
-                    <a:pt x="53901" y="3436"/>
-                  </a:lnTo>
-                  <a:lnTo>
-                    <a:pt x="0" y="0"/>
-                  </a:lnTo>
-                </a:path>
-              </a:pathLst>
-            </a:custGeom>
-          </p:spPr>
-          <p:txBody>
-            <a:bodyPr/>
-            <a:lstStyle/>
-            <a:p/>
-          </p:txBody>
-        </p:sp>
-        <p:sp>
-          <p:nvSpPr>
-            <p:cNvPr id="24" name="pl24"/>
-            <p:cNvSpPr/>
-            <p:nvPr/>
-          </p:nvSpPr>
-          <p:spPr>
-            <a:xfrm>
-              <a:off x="817517" y="3912462"/>
-              <a:ext cx="7392041" cy="1289864"/>
-            </a:xfrm>
-            <a:custGeom>
-              <a:avLst/>
-              <a:pathLst>
-                <a:path w="7392041" h="1289864">
+                <a:path w="7090630" h="1379192">
                   <a:moveTo>
                     <a:pt x="0" y="0"/>
                   </a:moveTo>
                   <a:lnTo>
-                    <a:pt x="53901" y="18332"/>
-                  </a:lnTo>
-                  <a:lnTo>
-                    <a:pt x="131145" y="44187"/>
-                  </a:lnTo>
-                  <a:lnTo>
-                    <a:pt x="208389" y="69630"/>
-                  </a:lnTo>
-                  <a:lnTo>
-                    <a:pt x="285632" y="94669"/>
-                  </a:lnTo>
-                  <a:lnTo>
-                    <a:pt x="362876" y="119310"/>
-                  </a:lnTo>
-                  <a:lnTo>
-                    <a:pt x="440119" y="143559"/>
-                  </a:lnTo>
-                  <a:lnTo>
-                    <a:pt x="517363" y="167422"/>
-                  </a:lnTo>
-                  <a:lnTo>
-                    <a:pt x="594606" y="190907"/>
-                  </a:lnTo>
-                  <a:lnTo>
-                    <a:pt x="671850" y="214017"/>
-                  </a:lnTo>
-                  <a:lnTo>
-                    <a:pt x="749094" y="236761"/>
-                  </a:lnTo>
-                  <a:lnTo>
-                    <a:pt x="826337" y="259143"/>
-                  </a:lnTo>
-                  <a:lnTo>
-                    <a:pt x="903581" y="281169"/>
-                  </a:lnTo>
-                  <a:lnTo>
-                    <a:pt x="980824" y="302846"/>
-                  </a:lnTo>
-                  <a:lnTo>
-                    <a:pt x="1058068" y="324177"/>
-                  </a:lnTo>
-                  <a:lnTo>
-                    <a:pt x="1135311" y="345170"/>
-                  </a:lnTo>
-                  <a:lnTo>
-                    <a:pt x="1212555" y="365828"/>
-                  </a:lnTo>
-                  <a:lnTo>
-                    <a:pt x="1289799" y="386159"/>
-                  </a:lnTo>
-                  <a:lnTo>
-                    <a:pt x="1367042" y="406166"/>
-                  </a:lnTo>
-                  <a:lnTo>
-                    <a:pt x="1444286" y="425855"/>
-                  </a:lnTo>
-                  <a:lnTo>
-                    <a:pt x="1521529" y="445232"/>
-                  </a:lnTo>
-                  <a:lnTo>
-                    <a:pt x="1598773" y="464300"/>
-                  </a:lnTo>
-                  <a:lnTo>
-                    <a:pt x="1676016" y="483065"/>
-                  </a:lnTo>
-                  <a:lnTo>
-                    <a:pt x="1753260" y="501532"/>
-                  </a:lnTo>
-                  <a:lnTo>
-                    <a:pt x="1830504" y="519705"/>
-                  </a:lnTo>
-                  <a:lnTo>
-                    <a:pt x="1907747" y="537589"/>
-                  </a:lnTo>
-                  <a:lnTo>
-                    <a:pt x="1984991" y="555189"/>
-                  </a:lnTo>
-                  <a:lnTo>
-                    <a:pt x="2062234" y="572510"/>
-                  </a:lnTo>
-                  <a:lnTo>
-                    <a:pt x="2139478" y="589555"/>
-                  </a:lnTo>
-                  <a:lnTo>
-                    <a:pt x="2216721" y="606329"/>
-                  </a:lnTo>
-                  <a:lnTo>
-                    <a:pt x="2293965" y="622836"/>
-                  </a:lnTo>
-                  <a:lnTo>
-                    <a:pt x="2371209" y="639081"/>
-                  </a:lnTo>
-                  <a:lnTo>
-                    <a:pt x="2448452" y="655068"/>
-                  </a:lnTo>
-                  <a:lnTo>
-                    <a:pt x="2525696" y="670801"/>
-                  </a:lnTo>
-                  <a:lnTo>
-                    <a:pt x="2602939" y="686283"/>
-                  </a:lnTo>
-                  <a:lnTo>
-                    <a:pt x="2680183" y="701520"/>
-                  </a:lnTo>
-                  <a:lnTo>
-                    <a:pt x="2757426" y="716514"/>
-                  </a:lnTo>
-                  <a:lnTo>
-                    <a:pt x="2834670" y="731270"/>
-                  </a:lnTo>
-                  <a:lnTo>
-                    <a:pt x="2911914" y="745791"/>
-                  </a:lnTo>
-                  <a:lnTo>
-                    <a:pt x="2989157" y="760081"/>
-                  </a:lnTo>
-                  <a:lnTo>
-                    <a:pt x="3066401" y="774145"/>
-                  </a:lnTo>
-                  <a:lnTo>
-                    <a:pt x="3143644" y="787985"/>
-                  </a:lnTo>
-                  <a:lnTo>
-                    <a:pt x="3220888" y="801604"/>
-                  </a:lnTo>
-                  <a:lnTo>
-                    <a:pt x="3298131" y="815008"/>
-                  </a:lnTo>
-                  <a:lnTo>
-                    <a:pt x="3375375" y="828198"/>
-                  </a:lnTo>
-                  <a:lnTo>
-                    <a:pt x="3452619" y="841178"/>
-                  </a:lnTo>
-                  <a:lnTo>
-                    <a:pt x="3529862" y="853953"/>
-                  </a:lnTo>
-                  <a:lnTo>
-                    <a:pt x="3607106" y="866524"/>
-                  </a:lnTo>
-                  <a:lnTo>
-                    <a:pt x="3684349" y="878895"/>
-                  </a:lnTo>
-                  <a:lnTo>
-                    <a:pt x="3761593" y="891070"/>
-                  </a:lnTo>
-                  <a:lnTo>
-                    <a:pt x="3838836" y="903051"/>
-                  </a:lnTo>
-                  <a:lnTo>
-                    <a:pt x="3916080" y="914842"/>
-                  </a:lnTo>
-                  <a:lnTo>
-                    <a:pt x="3993324" y="926445"/>
-                  </a:lnTo>
-                  <a:lnTo>
-                    <a:pt x="4070567" y="937864"/>
-                  </a:lnTo>
-                  <a:lnTo>
-                    <a:pt x="4147811" y="949101"/>
-                  </a:lnTo>
-                  <a:lnTo>
-                    <a:pt x="4225054" y="960160"/>
-                  </a:lnTo>
-                  <a:lnTo>
-                    <a:pt x="4302298" y="971043"/>
-                  </a:lnTo>
-                  <a:lnTo>
-                    <a:pt x="4379541" y="981752"/>
-                  </a:lnTo>
-                  <a:lnTo>
-                    <a:pt x="4456785" y="992292"/>
-                  </a:lnTo>
-                  <a:lnTo>
-                    <a:pt x="4534029" y="1002664"/>
-                  </a:lnTo>
-                  <a:lnTo>
-                    <a:pt x="4611272" y="1012871"/>
-                  </a:lnTo>
-                  <a:lnTo>
-                    <a:pt x="4688516" y="1022916"/>
-                  </a:lnTo>
-                  <a:lnTo>
-                    <a:pt x="4765759" y="1032802"/>
-                  </a:lnTo>
-                  <a:lnTo>
-                    <a:pt x="4843003" y="1042530"/>
-                  </a:lnTo>
-                  <a:lnTo>
-                    <a:pt x="4920246" y="1052103"/>
-                  </a:lnTo>
-                  <a:lnTo>
-                    <a:pt x="4997490" y="1061525"/>
-                  </a:lnTo>
-                  <a:lnTo>
-                    <a:pt x="5074734" y="1070796"/>
-                  </a:lnTo>
-                  <a:lnTo>
-                    <a:pt x="5151977" y="1079920"/>
-                  </a:lnTo>
-                  <a:lnTo>
-                    <a:pt x="5229221" y="1088900"/>
-                  </a:lnTo>
-                  <a:lnTo>
-                    <a:pt x="5306464" y="1097736"/>
-                  </a:lnTo>
-                  <a:lnTo>
-                    <a:pt x="5383708" y="1106432"/>
-                  </a:lnTo>
-                  <a:lnTo>
-                    <a:pt x="5460951" y="1114990"/>
-                  </a:lnTo>
-                  <a:lnTo>
-                    <a:pt x="5538195" y="1123411"/>
-                  </a:lnTo>
-                  <a:lnTo>
-                    <a:pt x="5615439" y="1131699"/>
-                  </a:lnTo>
-                  <a:lnTo>
-                    <a:pt x="5692682" y="1139855"/>
-                  </a:lnTo>
-                  <a:lnTo>
-                    <a:pt x="5769926" y="1147882"/>
-                  </a:lnTo>
-                  <a:lnTo>
-                    <a:pt x="5847169" y="1155781"/>
-                  </a:lnTo>
-                  <a:lnTo>
-                    <a:pt x="5924413" y="1163554"/>
-                  </a:lnTo>
-                  <a:lnTo>
-                    <a:pt x="6001656" y="1171204"/>
-                  </a:lnTo>
-                  <a:lnTo>
-                    <a:pt x="6078900" y="1178732"/>
-                  </a:lnTo>
-                  <a:lnTo>
-                    <a:pt x="6156144" y="1186140"/>
-                  </a:lnTo>
-                  <a:lnTo>
-                    <a:pt x="6233387" y="1193431"/>
-                  </a:lnTo>
-                  <a:lnTo>
-                    <a:pt x="6310631" y="1200606"/>
-                  </a:lnTo>
-                  <a:lnTo>
-                    <a:pt x="6387874" y="1207666"/>
-                  </a:lnTo>
-                  <a:lnTo>
-                    <a:pt x="6465118" y="1214615"/>
-                  </a:lnTo>
-                  <a:lnTo>
-                    <a:pt x="6542361" y="1221453"/>
-                  </a:lnTo>
-                  <a:lnTo>
-                    <a:pt x="6619605" y="1228182"/>
-                  </a:lnTo>
-                  <a:lnTo>
-                    <a:pt x="6696849" y="1234805"/>
-                  </a:lnTo>
-                  <a:lnTo>
-                    <a:pt x="6774092" y="1241322"/>
-                  </a:lnTo>
-                  <a:lnTo>
-                    <a:pt x="6851336" y="1247735"/>
-                  </a:lnTo>
-                  <a:lnTo>
-                    <a:pt x="6928579" y="1254047"/>
-                  </a:lnTo>
-                  <a:lnTo>
-                    <a:pt x="7005823" y="1260258"/>
-                  </a:lnTo>
-                  <a:lnTo>
-                    <a:pt x="7083066" y="1266370"/>
-                  </a:lnTo>
-                  <a:lnTo>
-                    <a:pt x="7160310" y="1272386"/>
-                  </a:lnTo>
-                  <a:lnTo>
-                    <a:pt x="7237554" y="1278306"/>
-                  </a:lnTo>
-                  <a:lnTo>
-                    <a:pt x="7314797" y="1284131"/>
-                  </a:lnTo>
-                  <a:lnTo>
-                    <a:pt x="7392041" y="1289864"/>
+                    <a:pt x="71622" y="27565"/>
+                  </a:lnTo>
+                  <a:lnTo>
+                    <a:pt x="143245" y="54693"/>
+                  </a:lnTo>
+                  <a:lnTo>
+                    <a:pt x="214867" y="81389"/>
+                  </a:lnTo>
+                  <a:lnTo>
+                    <a:pt x="286490" y="107661"/>
+                  </a:lnTo>
+                  <a:lnTo>
+                    <a:pt x="358112" y="133515"/>
+                  </a:lnTo>
+                  <a:lnTo>
+                    <a:pt x="429735" y="158958"/>
+                  </a:lnTo>
+                  <a:lnTo>
+                    <a:pt x="501357" y="183997"/>
+                  </a:lnTo>
+                  <a:lnTo>
+                    <a:pt x="572980" y="208638"/>
+                  </a:lnTo>
+                  <a:lnTo>
+                    <a:pt x="644602" y="232887"/>
+                  </a:lnTo>
+                  <a:lnTo>
+                    <a:pt x="716225" y="256750"/>
+                  </a:lnTo>
+                  <a:lnTo>
+                    <a:pt x="787847" y="280235"/>
+                  </a:lnTo>
+                  <a:lnTo>
+                    <a:pt x="859470" y="303346"/>
+                  </a:lnTo>
+                  <a:lnTo>
+                    <a:pt x="931092" y="326089"/>
+                  </a:lnTo>
+                  <a:lnTo>
+                    <a:pt x="1002715" y="348471"/>
+                  </a:lnTo>
+                  <a:lnTo>
+                    <a:pt x="1074337" y="370498"/>
+                  </a:lnTo>
+                  <a:lnTo>
+                    <a:pt x="1145960" y="392174"/>
+                  </a:lnTo>
+                  <a:lnTo>
+                    <a:pt x="1217582" y="413505"/>
+                  </a:lnTo>
+                  <a:lnTo>
+                    <a:pt x="1289205" y="434498"/>
+                  </a:lnTo>
+                  <a:lnTo>
+                    <a:pt x="1360827" y="455157"/>
+                  </a:lnTo>
+                  <a:lnTo>
+                    <a:pt x="1432450" y="475487"/>
+                  </a:lnTo>
+                  <a:lnTo>
+                    <a:pt x="1504073" y="495494"/>
+                  </a:lnTo>
+                  <a:lnTo>
+                    <a:pt x="1575695" y="515183"/>
+                  </a:lnTo>
+                  <a:lnTo>
+                    <a:pt x="1647318" y="534560"/>
+                  </a:lnTo>
+                  <a:lnTo>
+                    <a:pt x="1718940" y="553628"/>
+                  </a:lnTo>
+                  <a:lnTo>
+                    <a:pt x="1790563" y="572393"/>
+                  </a:lnTo>
+                  <a:lnTo>
+                    <a:pt x="1862185" y="590860"/>
+                  </a:lnTo>
+                  <a:lnTo>
+                    <a:pt x="1933808" y="609033"/>
+                  </a:lnTo>
+                  <a:lnTo>
+                    <a:pt x="2005430" y="626917"/>
+                  </a:lnTo>
+                  <a:lnTo>
+                    <a:pt x="2077053" y="644518"/>
+                  </a:lnTo>
+                  <a:lnTo>
+                    <a:pt x="2148675" y="661838"/>
+                  </a:lnTo>
+                  <a:lnTo>
+                    <a:pt x="2220298" y="678883"/>
+                  </a:lnTo>
+                  <a:lnTo>
+                    <a:pt x="2291920" y="695657"/>
+                  </a:lnTo>
+                  <a:lnTo>
+                    <a:pt x="2363543" y="712164"/>
+                  </a:lnTo>
+                  <a:lnTo>
+                    <a:pt x="2435165" y="728409"/>
+                  </a:lnTo>
+                  <a:lnTo>
+                    <a:pt x="2506788" y="744396"/>
+                  </a:lnTo>
+                  <a:lnTo>
+                    <a:pt x="2578410" y="760129"/>
+                  </a:lnTo>
+                  <a:lnTo>
+                    <a:pt x="2650033" y="775611"/>
+                  </a:lnTo>
+                  <a:lnTo>
+                    <a:pt x="2721655" y="790848"/>
+                  </a:lnTo>
+                  <a:lnTo>
+                    <a:pt x="2793278" y="805842"/>
+                  </a:lnTo>
+                  <a:lnTo>
+                    <a:pt x="2864901" y="820598"/>
+                  </a:lnTo>
+                  <a:lnTo>
+                    <a:pt x="2936523" y="835119"/>
+                  </a:lnTo>
+                  <a:lnTo>
+                    <a:pt x="3008146" y="849410"/>
+                  </a:lnTo>
+                  <a:lnTo>
+                    <a:pt x="3079768" y="863473"/>
+                  </a:lnTo>
+                  <a:lnTo>
+                    <a:pt x="3151391" y="877313"/>
+                  </a:lnTo>
+                  <a:lnTo>
+                    <a:pt x="3223013" y="890933"/>
+                  </a:lnTo>
+                  <a:lnTo>
+                    <a:pt x="3294636" y="904336"/>
+                  </a:lnTo>
+                  <a:lnTo>
+                    <a:pt x="3366258" y="917526"/>
+                  </a:lnTo>
+                  <a:lnTo>
+                    <a:pt x="3437881" y="930507"/>
+                  </a:lnTo>
+                  <a:lnTo>
+                    <a:pt x="3509503" y="943281"/>
+                  </a:lnTo>
+                  <a:lnTo>
+                    <a:pt x="3581126" y="955852"/>
+                  </a:lnTo>
+                  <a:lnTo>
+                    <a:pt x="3652748" y="968223"/>
+                  </a:lnTo>
+                  <a:lnTo>
+                    <a:pt x="3724371" y="980398"/>
+                  </a:lnTo>
+                  <a:lnTo>
+                    <a:pt x="3795993" y="992379"/>
+                  </a:lnTo>
+                  <a:lnTo>
+                    <a:pt x="3867616" y="1004170"/>
+                  </a:lnTo>
+                  <a:lnTo>
+                    <a:pt x="3939238" y="1015773"/>
+                  </a:lnTo>
+                  <a:lnTo>
+                    <a:pt x="4010861" y="1027192"/>
+                  </a:lnTo>
+                  <a:lnTo>
+                    <a:pt x="4082483" y="1038429"/>
+                  </a:lnTo>
+                  <a:lnTo>
+                    <a:pt x="4154106" y="1049488"/>
+                  </a:lnTo>
+                  <a:lnTo>
+                    <a:pt x="4225729" y="1060371"/>
+                  </a:lnTo>
+                  <a:lnTo>
+                    <a:pt x="4297351" y="1071081"/>
+                  </a:lnTo>
+                  <a:lnTo>
+                    <a:pt x="4368974" y="1081620"/>
+                  </a:lnTo>
+                  <a:lnTo>
+                    <a:pt x="4440596" y="1091992"/>
+                  </a:lnTo>
+                  <a:lnTo>
+                    <a:pt x="4512219" y="1102200"/>
+                  </a:lnTo>
+                  <a:lnTo>
+                    <a:pt x="4583841" y="1112244"/>
+                  </a:lnTo>
+                  <a:lnTo>
+                    <a:pt x="4655464" y="1122130"/>
+                  </a:lnTo>
+                  <a:lnTo>
+                    <a:pt x="4727086" y="1131858"/>
+                  </a:lnTo>
+                  <a:lnTo>
+                    <a:pt x="4798709" y="1141431"/>
+                  </a:lnTo>
+                  <a:lnTo>
+                    <a:pt x="4870331" y="1150853"/>
+                  </a:lnTo>
+                  <a:lnTo>
+                    <a:pt x="4941954" y="1160124"/>
+                  </a:lnTo>
+                  <a:lnTo>
+                    <a:pt x="5013576" y="1169249"/>
+                  </a:lnTo>
+                  <a:lnTo>
+                    <a:pt x="5085199" y="1178228"/>
+                  </a:lnTo>
+                  <a:lnTo>
+                    <a:pt x="5156821" y="1187064"/>
+                  </a:lnTo>
+                  <a:lnTo>
+                    <a:pt x="5228444" y="1195760"/>
+                  </a:lnTo>
+                  <a:lnTo>
+                    <a:pt x="5300066" y="1204318"/>
+                  </a:lnTo>
+                  <a:lnTo>
+                    <a:pt x="5371689" y="1212740"/>
+                  </a:lnTo>
+                  <a:lnTo>
+                    <a:pt x="5443311" y="1221027"/>
+                  </a:lnTo>
+                  <a:lnTo>
+                    <a:pt x="5514934" y="1229183"/>
+                  </a:lnTo>
+                  <a:lnTo>
+                    <a:pt x="5586557" y="1237210"/>
+                  </a:lnTo>
+                  <a:lnTo>
+                    <a:pt x="5658179" y="1245109"/>
+                  </a:lnTo>
+                  <a:lnTo>
+                    <a:pt x="5729802" y="1252882"/>
+                  </a:lnTo>
+                  <a:lnTo>
+                    <a:pt x="5801424" y="1260532"/>
+                  </a:lnTo>
+                  <a:lnTo>
+                    <a:pt x="5873047" y="1268060"/>
+                  </a:lnTo>
+                  <a:lnTo>
+                    <a:pt x="5944669" y="1275468"/>
+                  </a:lnTo>
+                  <a:lnTo>
+                    <a:pt x="6016292" y="1282759"/>
+                  </a:lnTo>
+                  <a:lnTo>
+                    <a:pt x="6087914" y="1289934"/>
+                  </a:lnTo>
+                  <a:lnTo>
+                    <a:pt x="6159537" y="1296994"/>
+                  </a:lnTo>
+                  <a:lnTo>
+                    <a:pt x="6231159" y="1303943"/>
+                  </a:lnTo>
+                  <a:lnTo>
+                    <a:pt x="6302782" y="1310781"/>
+                  </a:lnTo>
+                  <a:lnTo>
+                    <a:pt x="6374404" y="1317510"/>
+                  </a:lnTo>
+                  <a:lnTo>
+                    <a:pt x="6446027" y="1324133"/>
+                  </a:lnTo>
+                  <a:lnTo>
+                    <a:pt x="6517649" y="1330650"/>
+                  </a:lnTo>
+                  <a:lnTo>
+                    <a:pt x="6589272" y="1337063"/>
+                  </a:lnTo>
+                  <a:lnTo>
+                    <a:pt x="6660894" y="1343375"/>
+                  </a:lnTo>
+                  <a:lnTo>
+                    <a:pt x="6732517" y="1349586"/>
+                  </a:lnTo>
+                  <a:lnTo>
+                    <a:pt x="6804139" y="1355699"/>
+                  </a:lnTo>
+                  <a:lnTo>
+                    <a:pt x="6875762" y="1361714"/>
+                  </a:lnTo>
+                  <a:lnTo>
+                    <a:pt x="6947385" y="1367634"/>
+                  </a:lnTo>
+                  <a:lnTo>
+                    <a:pt x="7019007" y="1373459"/>
+                  </a:lnTo>
+                  <a:lnTo>
+                    <a:pt x="7090630" y="1379192"/>
                   </a:lnTo>
                 </a:path>
               </a:pathLst>
@@ -4566,7 +4568,7 @@
         </p:sp>
         <p:sp>
           <p:nvSpPr>
-            <p:cNvPr id="25" name="pl25"/>
+            <p:cNvPr id="24" name="pl24"/>
             <p:cNvSpPr/>
             <p:nvPr/>
           </p:nvSpPr>
@@ -4609,13 +4611,13 @@
         </p:sp>
         <p:sp>
           <p:nvSpPr>
-            <p:cNvPr id="26" name="pl26"/>
+            <p:cNvPr id="25" name="pl25"/>
             <p:cNvSpPr/>
             <p:nvPr/>
           </p:nvSpPr>
           <p:spPr>
             <a:xfrm>
-              <a:off x="4117484" y="2073503"/>
+              <a:off x="4468386" y="2073503"/>
               <a:ext cx="0" cy="3649639"/>
             </a:xfrm>
             <a:custGeom>
@@ -4652,7 +4654,7 @@
         </p:sp>
         <p:sp>
           <p:nvSpPr>
-            <p:cNvPr id="27" name="tx27"/>
+            <p:cNvPr id="26" name="tx26"/>
             <p:cNvSpPr/>
             <p:nvPr/>
           </p:nvSpPr>
@@ -4698,7 +4700,7 @@
         </p:sp>
         <p:sp>
           <p:nvSpPr>
-            <p:cNvPr id="28" name="tx28"/>
+            <p:cNvPr id="27" name="tx27"/>
             <p:cNvSpPr/>
             <p:nvPr/>
           </p:nvSpPr>
@@ -4744,7 +4746,7 @@
         </p:sp>
         <p:sp>
           <p:nvSpPr>
-            <p:cNvPr id="29" name="tx29"/>
+            <p:cNvPr id="28" name="tx28"/>
             <p:cNvSpPr/>
             <p:nvPr/>
           </p:nvSpPr>
@@ -4790,7 +4792,7 @@
         </p:sp>
         <p:sp>
           <p:nvSpPr>
-            <p:cNvPr id="30" name="tx30"/>
+            <p:cNvPr id="29" name="tx29"/>
             <p:cNvSpPr/>
             <p:nvPr/>
           </p:nvSpPr>
@@ -4836,7 +4838,7 @@
         </p:sp>
         <p:sp>
           <p:nvSpPr>
-            <p:cNvPr id="31" name="tx31"/>
+            <p:cNvPr id="30" name="tx30"/>
             <p:cNvSpPr/>
             <p:nvPr/>
           </p:nvSpPr>
@@ -4882,14 +4884,14 @@
         </p:sp>
         <p:sp>
           <p:nvSpPr>
-            <p:cNvPr id="32" name="tx32"/>
+            <p:cNvPr id="31" name="tx31"/>
             <p:cNvSpPr/>
             <p:nvPr/>
           </p:nvSpPr>
           <p:spPr>
             <a:xfrm>
-              <a:off x="2423864" y="5785772"/>
-              <a:ext cx="155356" cy="80101"/>
+              <a:off x="2478335" y="5785772"/>
+              <a:ext cx="161574" cy="80101"/>
             </a:xfrm>
             <a:prstGeom prst="rect">
               <a:avLst/>
@@ -4921,21 +4923,21 @@
                   <a:latin typeface="Helvetica"/>
                   <a:cs typeface="Helvetica"/>
                 </a:rPr>
-                <a:t>0.8</a:t>
+                <a:t>-25</a:t>
               </a:r>
             </a:p>
           </p:txBody>
         </p:sp>
         <p:sp>
           <p:nvSpPr>
-            <p:cNvPr id="33" name="tx33"/>
+            <p:cNvPr id="32" name="tx32"/>
             <p:cNvSpPr/>
             <p:nvPr/>
           </p:nvSpPr>
           <p:spPr>
             <a:xfrm>
-              <a:off x="4196521" y="5785772"/>
-              <a:ext cx="155356" cy="80101"/>
+              <a:off x="4582608" y="5785772"/>
+              <a:ext cx="62179" cy="80101"/>
             </a:xfrm>
             <a:prstGeom prst="rect">
               <a:avLst/>
@@ -4967,21 +4969,21 @@
                   <a:latin typeface="Helvetica"/>
                   <a:cs typeface="Helvetica"/>
                 </a:rPr>
-                <a:t>1.0</a:t>
+                <a:t>0</a:t>
               </a:r>
             </a:p>
           </p:txBody>
         </p:sp>
         <p:sp>
           <p:nvSpPr>
-            <p:cNvPr id="34" name="tx34"/>
+            <p:cNvPr id="33" name="tx33"/>
             <p:cNvSpPr/>
             <p:nvPr/>
           </p:nvSpPr>
           <p:spPr>
             <a:xfrm>
-              <a:off x="5969179" y="5785772"/>
-              <a:ext cx="155356" cy="80101"/>
+              <a:off x="6606094" y="5785772"/>
+              <a:ext cx="124358" cy="80101"/>
             </a:xfrm>
             <a:prstGeom prst="rect">
               <a:avLst/>
@@ -5013,67 +5015,21 @@
                   <a:latin typeface="Helvetica"/>
                   <a:cs typeface="Helvetica"/>
                 </a:rPr>
-                <a:t>1.2</a:t>
+                <a:t>25</a:t>
               </a:r>
             </a:p>
           </p:txBody>
         </p:sp>
         <p:sp>
           <p:nvSpPr>
-            <p:cNvPr id="35" name="tx35"/>
+            <p:cNvPr id="34" name="tx34"/>
             <p:cNvSpPr/>
             <p:nvPr/>
           </p:nvSpPr>
           <p:spPr>
             <a:xfrm>
-              <a:off x="7741836" y="5785772"/>
-              <a:ext cx="155356" cy="80101"/>
-            </a:xfrm>
-            <a:prstGeom prst="rect">
-              <a:avLst/>
-            </a:prstGeom>
-            <a:noFill/>
-          </p:spPr>
-          <p:txBody>
-            <a:bodyPr lIns="0" rIns="0" tIns="0" bIns="0" anchorCtr="1" anchor="ctr" wrap="none"/>
-            <a:lstStyle/>
-            <a:p>
-              <a:pPr algn="l" marL="0" marR="0" indent="0">
-                <a:lnSpc>
-                  <a:spcPts val="880"/>
-                </a:lnSpc>
-                <a:spcBef>
-                  <a:spcPts val="0"/>
-                </a:spcBef>
-                <a:spcAft>
-                  <a:spcPts val="0"/>
-                </a:spcAft>
-              </a:pPr>
-              <a:r>
-                <a:rPr sz="880">
-                  <a:solidFill>
-                    <a:srgbClr val="4D4D4D">
-                      <a:alpha val="100000"/>
-                    </a:srgbClr>
-                  </a:solidFill>
-                  <a:latin typeface="Helvetica"/>
-                  <a:cs typeface="Helvetica"/>
-                </a:rPr>
-                <a:t>1.4</a:t>
-              </a:r>
-            </a:p>
-          </p:txBody>
-        </p:sp>
-        <p:sp>
-          <p:nvSpPr>
-            <p:cNvPr id="36" name="tx36"/>
-            <p:cNvSpPr/>
-            <p:nvPr/>
-          </p:nvSpPr>
-          <p:spPr>
-            <a:xfrm>
-              <a:off x="3879271" y="5925448"/>
-              <a:ext cx="1676186" cy="100218"/>
+              <a:off x="2928340" y="5925448"/>
+              <a:ext cx="3578047" cy="100218"/>
             </a:xfrm>
             <a:prstGeom prst="rect">
               <a:avLst/>
@@ -5105,14 +5061,14 @@
                   <a:latin typeface="Helvetica"/>
                   <a:cs typeface="Helvetica"/>
                 </a:rPr>
-                <a:t>CKD-EPI Cr-Cys / CG ratio</a:t>
+                <a:t>eGFR difference (%): 100 × (CKD-EPI Cr-Cys − CG) / CG</a:t>
               </a:r>
             </a:p>
           </p:txBody>
         </p:sp>
         <p:sp>
           <p:nvSpPr>
-            <p:cNvPr id="37" name="tx37"/>
+            <p:cNvPr id="35" name="tx35"/>
             <p:cNvSpPr/>
             <p:nvPr/>
           </p:nvSpPr>
@@ -5158,14 +5114,14 @@
         </p:sp>
         <p:sp>
           <p:nvSpPr>
-            <p:cNvPr id="38" name="tx38"/>
+            <p:cNvPr id="36" name="tx36"/>
             <p:cNvSpPr/>
             <p:nvPr/>
           </p:nvSpPr>
           <p:spPr>
             <a:xfrm>
               <a:off x="817517" y="1896563"/>
-              <a:ext cx="6833128" cy="82021"/>
+              <a:ext cx="6985375" cy="82021"/>
             </a:xfrm>
             <a:prstGeom prst="rect">
               <a:avLst/>
@@ -5197,14 +5153,14 @@
                   <a:latin typeface="Helvetica"/>
                   <a:cs typeface="Helvetica"/>
                 </a:rPr>
-                <a:t>subHR per 0.1 ratio decline: 1.20 (1.06-1.37), p_Bonf = 0.030 (n = 6)  |  per IQR decline (Δ = 0.30): 1.72 (1.18-2.52)  |  IQR: [0.84, 1.14]</a:t>
+                <a:t>subHR per 10 % decline: 1.20 (1.06-1.37), p_Bonf = 0.030 (n = 6)  |  per IQR decline (Δ = 29.5 %): 1.72 (1.18-2.52)  |  IQR: [-15.6, 13.9] %</a:t>
               </a:r>
             </a:p>
           </p:txBody>
         </p:sp>
         <p:sp>
           <p:nvSpPr>
-            <p:cNvPr id="39" name="tx39"/>
+            <p:cNvPr id="37" name="tx37"/>
             <p:cNvSpPr/>
             <p:nvPr/>
           </p:nvSpPr>

--- a/docs/pptx/auc3/jx-auc3-linsubhr-ratio-anyhosp.pptx
+++ b/docs/pptx/auc3/jx-auc3-linsubhr-ratio-anyhosp.pptx
@@ -2265,34 +2265,26 @@
         </p:sp>
         <p:sp>
           <p:nvSpPr>
-            <p:cNvPr id="4" name="pl4"/>
+            <p:cNvPr id="4" name="rc4"/>
             <p:cNvSpPr/>
             <p:nvPr/>
           </p:nvSpPr>
           <p:spPr>
             <a:xfrm>
-              <a:off x="817517" y="5142518"/>
-              <a:ext cx="7799693" cy="0"/>
+              <a:off x="457200" y="1600200"/>
+              <a:ext cx="8229600" cy="4525962"/>
             </a:xfrm>
-            <a:custGeom>
+            <a:prstGeom prst="rect">
               <a:avLst/>
-              <a:pathLst>
-                <a:path w="7799693" h="0">
-                  <a:moveTo>
-                    <a:pt x="0" y="0"/>
-                  </a:moveTo>
-                  <a:lnTo>
-                    <a:pt x="7799693" y="0"/>
-                  </a:lnTo>
-                  <a:lnTo>
-                    <a:pt x="7799693" y="0"/>
-                  </a:lnTo>
-                </a:path>
-              </a:pathLst>
-            </a:custGeom>
-            <a:ln w="6775" cap="flat">
+            </a:prstGeom>
+            <a:solidFill>
+              <a:srgbClr val="FFFFFF">
+                <a:alpha val="100000"/>
+              </a:srgbClr>
+            </a:solidFill>
+            <a:ln w="13550" cap="rnd">
               <a:solidFill>
-                <a:srgbClr val="EBEBEB">
+                <a:srgbClr val="FFFFFF">
                   <a:alpha val="100000"/>
                 </a:srgbClr>
               </a:solidFill>
@@ -2314,21 +2306,21 @@
           </p:nvSpPr>
           <p:spPr>
             <a:xfrm>
-              <a:off x="817517" y="4313054"/>
-              <a:ext cx="7799693" cy="0"/>
+              <a:off x="887106" y="3250627"/>
+              <a:ext cx="7660515" cy="0"/>
             </a:xfrm>
             <a:custGeom>
               <a:avLst/>
               <a:pathLst>
-                <a:path w="7799693" h="0">
+                <a:path w="7660515" h="0">
                   <a:moveTo>
                     <a:pt x="0" y="0"/>
                   </a:moveTo>
                   <a:lnTo>
-                    <a:pt x="7799693" y="0"/>
-                  </a:lnTo>
-                  <a:lnTo>
-                    <a:pt x="7799693" y="0"/>
+                    <a:pt x="7660515" y="0"/>
+                  </a:lnTo>
+                  <a:lnTo>
+                    <a:pt x="7660515" y="0"/>
                   </a:lnTo>
                 </a:path>
               </a:pathLst>
@@ -2357,21 +2349,21 @@
           </p:nvSpPr>
           <p:spPr>
             <a:xfrm>
-              <a:off x="817517" y="3483591"/>
-              <a:ext cx="7799693" cy="0"/>
+              <a:off x="887106" y="2951293"/>
+              <a:ext cx="7660515" cy="0"/>
             </a:xfrm>
             <a:custGeom>
               <a:avLst/>
               <a:pathLst>
-                <a:path w="7799693" h="0">
+                <a:path w="7660515" h="0">
                   <a:moveTo>
                     <a:pt x="0" y="0"/>
                   </a:moveTo>
                   <a:lnTo>
-                    <a:pt x="7799693" y="0"/>
-                  </a:lnTo>
-                  <a:lnTo>
-                    <a:pt x="7799693" y="0"/>
+                    <a:pt x="7660515" y="0"/>
+                  </a:lnTo>
+                  <a:lnTo>
+                    <a:pt x="7660515" y="0"/>
                   </a:lnTo>
                 </a:path>
               </a:pathLst>
@@ -2400,21 +2392,21 @@
           </p:nvSpPr>
           <p:spPr>
             <a:xfrm>
-              <a:off x="817517" y="2654127"/>
-              <a:ext cx="7799693" cy="0"/>
+              <a:off x="887106" y="2651959"/>
+              <a:ext cx="7660515" cy="0"/>
             </a:xfrm>
             <a:custGeom>
               <a:avLst/>
               <a:pathLst>
-                <a:path w="7799693" h="0">
+                <a:path w="7660515" h="0">
                   <a:moveTo>
                     <a:pt x="0" y="0"/>
                   </a:moveTo>
                   <a:lnTo>
-                    <a:pt x="7799693" y="0"/>
-                  </a:lnTo>
-                  <a:lnTo>
-                    <a:pt x="7799693" y="0"/>
+                    <a:pt x="7660515" y="0"/>
+                  </a:lnTo>
+                  <a:lnTo>
+                    <a:pt x="7660515" y="0"/>
                   </a:lnTo>
                 </a:path>
               </a:pathLst>
@@ -2443,21 +2435,21 @@
           </p:nvSpPr>
           <p:spPr>
             <a:xfrm>
-              <a:off x="1531834" y="2073503"/>
-              <a:ext cx="0" cy="3649639"/>
+              <a:off x="887106" y="2352625"/>
+              <a:ext cx="7660515" cy="0"/>
             </a:xfrm>
             <a:custGeom>
               <a:avLst/>
               <a:pathLst>
-                <a:path w="0" h="3649639">
+                <a:path w="7660515" h="0">
                   <a:moveTo>
-                    <a:pt x="0" y="3649639"/>
+                    <a:pt x="0" y="0"/>
                   </a:moveTo>
                   <a:lnTo>
-                    <a:pt x="0" y="0"/>
-                  </a:lnTo>
-                  <a:lnTo>
-                    <a:pt x="0" y="0"/>
+                    <a:pt x="7660515" y="0"/>
+                  </a:lnTo>
+                  <a:lnTo>
+                    <a:pt x="7660515" y="0"/>
                   </a:lnTo>
                 </a:path>
               </a:pathLst>
@@ -2486,15 +2478,15 @@
           </p:nvSpPr>
           <p:spPr>
             <a:xfrm>
-              <a:off x="3586410" y="2073503"/>
-              <a:ext cx="0" cy="3649639"/>
+              <a:off x="1588677" y="2143092"/>
+              <a:ext cx="0" cy="1317069"/>
             </a:xfrm>
             <a:custGeom>
               <a:avLst/>
               <a:pathLst>
-                <a:path w="0" h="3649639">
+                <a:path w="0" h="1317069">
                   <a:moveTo>
-                    <a:pt x="0" y="3649639"/>
+                    <a:pt x="0" y="1317069"/>
                   </a:moveTo>
                   <a:lnTo>
                     <a:pt x="0" y="0"/>
@@ -2529,15 +2521,15 @@
           </p:nvSpPr>
           <p:spPr>
             <a:xfrm>
-              <a:off x="5640985" y="2073503"/>
-              <a:ext cx="0" cy="3649639"/>
+              <a:off x="3606590" y="2143092"/>
+              <a:ext cx="0" cy="1317069"/>
             </a:xfrm>
             <a:custGeom>
               <a:avLst/>
               <a:pathLst>
-                <a:path w="0" h="3649639">
+                <a:path w="0" h="1317069">
                   <a:moveTo>
-                    <a:pt x="0" y="3649639"/>
+                    <a:pt x="0" y="1317069"/>
                   </a:moveTo>
                   <a:lnTo>
                     <a:pt x="0" y="0"/>
@@ -2572,15 +2564,15 @@
           </p:nvSpPr>
           <p:spPr>
             <a:xfrm>
-              <a:off x="7695561" y="2073503"/>
-              <a:ext cx="0" cy="3649639"/>
+              <a:off x="5624504" y="2143092"/>
+              <a:ext cx="0" cy="1317069"/>
             </a:xfrm>
             <a:custGeom>
               <a:avLst/>
               <a:pathLst>
-                <a:path w="0" h="3649639">
+                <a:path w="0" h="1317069">
                   <a:moveTo>
-                    <a:pt x="0" y="3649639"/>
+                    <a:pt x="0" y="1317069"/>
                   </a:moveTo>
                   <a:lnTo>
                     <a:pt x="0" y="0"/>
@@ -2615,26 +2607,26 @@
           </p:nvSpPr>
           <p:spPr>
             <a:xfrm>
-              <a:off x="817517" y="5557249"/>
-              <a:ext cx="7799693" cy="0"/>
+              <a:off x="7642418" y="2143092"/>
+              <a:ext cx="0" cy="1317069"/>
             </a:xfrm>
             <a:custGeom>
               <a:avLst/>
               <a:pathLst>
-                <a:path w="7799693" h="0">
+                <a:path w="0" h="1317069">
                   <a:moveTo>
+                    <a:pt x="0" y="1317069"/>
+                  </a:moveTo>
+                  <a:lnTo>
                     <a:pt x="0" y="0"/>
-                  </a:moveTo>
-                  <a:lnTo>
-                    <a:pt x="7799693" y="0"/>
-                  </a:lnTo>
-                  <a:lnTo>
-                    <a:pt x="7799693" y="0"/>
+                  </a:lnTo>
+                  <a:lnTo>
+                    <a:pt x="0" y="0"/>
                   </a:lnTo>
                 </a:path>
               </a:pathLst>
             </a:custGeom>
-            <a:ln w="13550" cap="flat">
+            <a:ln w="6775" cap="flat">
               <a:solidFill>
                 <a:srgbClr val="EBEBEB">
                   <a:alpha val="100000"/>
@@ -2658,21 +2650,21 @@
           </p:nvSpPr>
           <p:spPr>
             <a:xfrm>
-              <a:off x="817517" y="4727786"/>
-              <a:ext cx="7799693" cy="0"/>
+              <a:off x="887106" y="3400294"/>
+              <a:ext cx="7660515" cy="0"/>
             </a:xfrm>
             <a:custGeom>
               <a:avLst/>
               <a:pathLst>
-                <a:path w="7799693" h="0">
+                <a:path w="7660515" h="0">
                   <a:moveTo>
                     <a:pt x="0" y="0"/>
                   </a:moveTo>
                   <a:lnTo>
-                    <a:pt x="7799693" y="0"/>
-                  </a:lnTo>
-                  <a:lnTo>
-                    <a:pt x="7799693" y="0"/>
+                    <a:pt x="7660515" y="0"/>
+                  </a:lnTo>
+                  <a:lnTo>
+                    <a:pt x="7660515" y="0"/>
                   </a:lnTo>
                 </a:path>
               </a:pathLst>
@@ -2701,21 +2693,21 @@
           </p:nvSpPr>
           <p:spPr>
             <a:xfrm>
-              <a:off x="817517" y="3898322"/>
-              <a:ext cx="7799693" cy="0"/>
+              <a:off x="887106" y="3100960"/>
+              <a:ext cx="7660515" cy="0"/>
             </a:xfrm>
             <a:custGeom>
               <a:avLst/>
               <a:pathLst>
-                <a:path w="7799693" h="0">
+                <a:path w="7660515" h="0">
                   <a:moveTo>
                     <a:pt x="0" y="0"/>
                   </a:moveTo>
                   <a:lnTo>
-                    <a:pt x="7799693" y="0"/>
-                  </a:lnTo>
-                  <a:lnTo>
-                    <a:pt x="7799693" y="0"/>
+                    <a:pt x="7660515" y="0"/>
+                  </a:lnTo>
+                  <a:lnTo>
+                    <a:pt x="7660515" y="0"/>
                   </a:lnTo>
                 </a:path>
               </a:pathLst>
@@ -2744,21 +2736,21 @@
           </p:nvSpPr>
           <p:spPr>
             <a:xfrm>
-              <a:off x="817517" y="3068859"/>
-              <a:ext cx="7799693" cy="0"/>
+              <a:off x="887106" y="2801626"/>
+              <a:ext cx="7660515" cy="0"/>
             </a:xfrm>
             <a:custGeom>
               <a:avLst/>
               <a:pathLst>
-                <a:path w="7799693" h="0">
+                <a:path w="7660515" h="0">
                   <a:moveTo>
                     <a:pt x="0" y="0"/>
                   </a:moveTo>
                   <a:lnTo>
-                    <a:pt x="7799693" y="0"/>
-                  </a:lnTo>
-                  <a:lnTo>
-                    <a:pt x="7799693" y="0"/>
+                    <a:pt x="7660515" y="0"/>
+                  </a:lnTo>
+                  <a:lnTo>
+                    <a:pt x="7660515" y="0"/>
                   </a:lnTo>
                 </a:path>
               </a:pathLst>
@@ -2787,21 +2779,21 @@
           </p:nvSpPr>
           <p:spPr>
             <a:xfrm>
-              <a:off x="817517" y="2239395"/>
-              <a:ext cx="7799693" cy="0"/>
+              <a:off x="887106" y="2502292"/>
+              <a:ext cx="7660515" cy="0"/>
             </a:xfrm>
             <a:custGeom>
               <a:avLst/>
               <a:pathLst>
-                <a:path w="7799693" h="0">
+                <a:path w="7660515" h="0">
                   <a:moveTo>
                     <a:pt x="0" y="0"/>
                   </a:moveTo>
                   <a:lnTo>
-                    <a:pt x="7799693" y="0"/>
-                  </a:lnTo>
-                  <a:lnTo>
-                    <a:pt x="7799693" y="0"/>
+                    <a:pt x="7660515" y="0"/>
+                  </a:lnTo>
+                  <a:lnTo>
+                    <a:pt x="7660515" y="0"/>
                   </a:lnTo>
                 </a:path>
               </a:pathLst>
@@ -2830,21 +2822,21 @@
           </p:nvSpPr>
           <p:spPr>
             <a:xfrm>
-              <a:off x="2559122" y="2073503"/>
-              <a:ext cx="0" cy="3649639"/>
+              <a:off x="887106" y="2202958"/>
+              <a:ext cx="7660515" cy="0"/>
             </a:xfrm>
             <a:custGeom>
               <a:avLst/>
               <a:pathLst>
-                <a:path w="0" h="3649639">
+                <a:path w="7660515" h="0">
                   <a:moveTo>
-                    <a:pt x="0" y="3649639"/>
+                    <a:pt x="0" y="0"/>
                   </a:moveTo>
                   <a:lnTo>
-                    <a:pt x="0" y="0"/>
-                  </a:lnTo>
-                  <a:lnTo>
-                    <a:pt x="0" y="0"/>
+                    <a:pt x="7660515" y="0"/>
+                  </a:lnTo>
+                  <a:lnTo>
+                    <a:pt x="7660515" y="0"/>
                   </a:lnTo>
                 </a:path>
               </a:pathLst>
@@ -2873,15 +2865,15 @@
           </p:nvSpPr>
           <p:spPr>
             <a:xfrm>
-              <a:off x="4613698" y="2073503"/>
-              <a:ext cx="0" cy="3649639"/>
+              <a:off x="2597634" y="2143092"/>
+              <a:ext cx="0" cy="1317069"/>
             </a:xfrm>
             <a:custGeom>
               <a:avLst/>
               <a:pathLst>
-                <a:path w="0" h="3649639">
+                <a:path w="0" h="1317069">
                   <a:moveTo>
-                    <a:pt x="0" y="3649639"/>
+                    <a:pt x="0" y="1317069"/>
                   </a:moveTo>
                   <a:lnTo>
                     <a:pt x="0" y="0"/>
@@ -2916,15 +2908,15 @@
           </p:nvSpPr>
           <p:spPr>
             <a:xfrm>
-              <a:off x="6668273" y="2073503"/>
-              <a:ext cx="0" cy="3649639"/>
+              <a:off x="4615547" y="2143092"/>
+              <a:ext cx="0" cy="1317069"/>
             </a:xfrm>
             <a:custGeom>
               <a:avLst/>
               <a:pathLst>
-                <a:path w="0" h="3649639">
+                <a:path w="0" h="1317069">
                   <a:moveTo>
-                    <a:pt x="0" y="3649639"/>
+                    <a:pt x="0" y="1317069"/>
                   </a:moveTo>
                   <a:lnTo>
                     <a:pt x="0" y="0"/>
@@ -2953,618 +2945,661 @@
         </p:sp>
         <p:sp>
           <p:nvSpPr>
-            <p:cNvPr id="20" name="pg20"/>
+            <p:cNvPr id="20" name="pl20"/>
             <p:cNvSpPr/>
             <p:nvPr/>
           </p:nvSpPr>
           <p:spPr>
             <a:xfrm>
-              <a:off x="1172049" y="2654957"/>
-              <a:ext cx="7090630" cy="2706099"/>
+              <a:off x="6633461" y="2143092"/>
+              <a:ext cx="0" cy="1317069"/>
             </a:xfrm>
             <a:custGeom>
               <a:avLst/>
               <a:pathLst>
-                <a:path w="7090630" h="2706099">
+                <a:path w="0" h="1317069">
+                  <a:moveTo>
+                    <a:pt x="0" y="1317069"/>
+                  </a:moveTo>
+                  <a:lnTo>
+                    <a:pt x="0" y="0"/>
+                  </a:lnTo>
+                  <a:lnTo>
+                    <a:pt x="0" y="0"/>
+                  </a:lnTo>
+                </a:path>
+              </a:pathLst>
+            </a:custGeom>
+            <a:ln w="13550" cap="flat">
+              <a:solidFill>
+                <a:srgbClr val="EBEBEB">
+                  <a:alpha val="100000"/>
+                </a:srgbClr>
+              </a:solidFill>
+              <a:prstDash val="solid"/>
+              <a:round/>
+            </a:ln>
+          </p:spPr>
+          <p:txBody>
+            <a:bodyPr/>
+            <a:lstStyle/>
+            <a:p/>
+          </p:txBody>
+        </p:sp>
+        <p:sp>
+          <p:nvSpPr>
+            <p:cNvPr id="21" name="pg21"/>
+            <p:cNvSpPr/>
+            <p:nvPr/>
+          </p:nvSpPr>
+          <p:spPr>
+            <a:xfrm>
+              <a:off x="1235312" y="2352925"/>
+              <a:ext cx="6964104" cy="976567"/>
+            </a:xfrm>
+            <a:custGeom>
+              <a:avLst/>
+              <a:pathLst>
+                <a:path w="6964104" h="976567">
                   <a:moveTo>
                     <a:pt x="0" y="0"/>
                   </a:moveTo>
                   <a:lnTo>
-                    <a:pt x="71622" y="77917"/>
-                  </a:lnTo>
-                  <a:lnTo>
-                    <a:pt x="143245" y="153742"/>
-                  </a:lnTo>
-                  <a:lnTo>
-                    <a:pt x="214867" y="227532"/>
-                  </a:lnTo>
-                  <a:lnTo>
-                    <a:pt x="286490" y="299340"/>
-                  </a:lnTo>
-                  <a:lnTo>
-                    <a:pt x="358112" y="369221"/>
-                  </a:lnTo>
-                  <a:lnTo>
-                    <a:pt x="429735" y="437226"/>
-                  </a:lnTo>
-                  <a:lnTo>
-                    <a:pt x="501357" y="503405"/>
-                  </a:lnTo>
-                  <a:lnTo>
-                    <a:pt x="572980" y="567807"/>
-                  </a:lnTo>
-                  <a:lnTo>
-                    <a:pt x="644602" y="630480"/>
-                  </a:lnTo>
-                  <a:lnTo>
-                    <a:pt x="716225" y="691471"/>
-                  </a:lnTo>
-                  <a:lnTo>
-                    <a:pt x="787847" y="750824"/>
-                  </a:lnTo>
-                  <a:lnTo>
-                    <a:pt x="859470" y="808584"/>
-                  </a:lnTo>
-                  <a:lnTo>
-                    <a:pt x="931092" y="864794"/>
-                  </a:lnTo>
-                  <a:lnTo>
-                    <a:pt x="1002715" y="919494"/>
-                  </a:lnTo>
-                  <a:lnTo>
-                    <a:pt x="1074337" y="972726"/>
-                  </a:lnTo>
-                  <a:lnTo>
-                    <a:pt x="1145960" y="1024528"/>
-                  </a:lnTo>
-                  <a:lnTo>
-                    <a:pt x="1217582" y="1074940"/>
-                  </a:lnTo>
-                  <a:lnTo>
-                    <a:pt x="1289205" y="1123998"/>
-                  </a:lnTo>
-                  <a:lnTo>
-                    <a:pt x="1360827" y="1171740"/>
-                  </a:lnTo>
-                  <a:lnTo>
-                    <a:pt x="1432450" y="1218200"/>
-                  </a:lnTo>
-                  <a:lnTo>
-                    <a:pt x="1504073" y="1263412"/>
-                  </a:lnTo>
-                  <a:lnTo>
-                    <a:pt x="1575695" y="1307411"/>
-                  </a:lnTo>
-                  <a:lnTo>
-                    <a:pt x="1647318" y="1350228"/>
-                  </a:lnTo>
-                  <a:lnTo>
-                    <a:pt x="1718940" y="1391896"/>
-                  </a:lnTo>
-                  <a:lnTo>
-                    <a:pt x="1790563" y="1432445"/>
-                  </a:lnTo>
-                  <a:lnTo>
-                    <a:pt x="1862185" y="1471906"/>
-                  </a:lnTo>
-                  <a:lnTo>
-                    <a:pt x="1933808" y="1510307"/>
-                  </a:lnTo>
-                  <a:lnTo>
-                    <a:pt x="2005430" y="1547677"/>
-                  </a:lnTo>
-                  <a:lnTo>
-                    <a:pt x="2077053" y="1584044"/>
-                  </a:lnTo>
-                  <a:lnTo>
-                    <a:pt x="2148675" y="1619435"/>
-                  </a:lnTo>
-                  <a:lnTo>
-                    <a:pt x="2220298" y="1653875"/>
-                  </a:lnTo>
-                  <a:lnTo>
-                    <a:pt x="2291920" y="1687391"/>
-                  </a:lnTo>
-                  <a:lnTo>
-                    <a:pt x="2363543" y="1720007"/>
-                  </a:lnTo>
-                  <a:lnTo>
-                    <a:pt x="2435165" y="1751748"/>
-                  </a:lnTo>
-                  <a:lnTo>
-                    <a:pt x="2506788" y="1782636"/>
-                  </a:lnTo>
-                  <a:lnTo>
-                    <a:pt x="2578410" y="1812695"/>
-                  </a:lnTo>
-                  <a:lnTo>
-                    <a:pt x="2650033" y="1841947"/>
-                  </a:lnTo>
-                  <a:lnTo>
-                    <a:pt x="2721655" y="1870414"/>
-                  </a:lnTo>
-                  <a:lnTo>
-                    <a:pt x="2793278" y="1898117"/>
-                  </a:lnTo>
-                  <a:lnTo>
-                    <a:pt x="2864901" y="1925076"/>
-                  </a:lnTo>
-                  <a:lnTo>
-                    <a:pt x="2936523" y="1951311"/>
-                  </a:lnTo>
-                  <a:lnTo>
-                    <a:pt x="3008146" y="1976841"/>
-                  </a:lnTo>
-                  <a:lnTo>
-                    <a:pt x="3079768" y="2001687"/>
-                  </a:lnTo>
-                  <a:lnTo>
-                    <a:pt x="3151391" y="2025865"/>
-                  </a:lnTo>
-                  <a:lnTo>
-                    <a:pt x="3223013" y="2049394"/>
-                  </a:lnTo>
-                  <a:lnTo>
-                    <a:pt x="3294636" y="2072292"/>
-                  </a:lnTo>
-                  <a:lnTo>
-                    <a:pt x="3366258" y="2076733"/>
-                  </a:lnTo>
-                  <a:lnTo>
-                    <a:pt x="3437881" y="2080714"/>
-                  </a:lnTo>
-                  <a:lnTo>
-                    <a:pt x="3509503" y="2084676"/>
-                  </a:lnTo>
-                  <a:lnTo>
-                    <a:pt x="3581126" y="2088619"/>
-                  </a:lnTo>
-                  <a:lnTo>
-                    <a:pt x="3652748" y="2092542"/>
-                  </a:lnTo>
-                  <a:lnTo>
-                    <a:pt x="3724371" y="2096447"/>
-                  </a:lnTo>
-                  <a:lnTo>
-                    <a:pt x="3795993" y="2100333"/>
-                  </a:lnTo>
-                  <a:lnTo>
-                    <a:pt x="3867616" y="2104200"/>
-                  </a:lnTo>
-                  <a:lnTo>
-                    <a:pt x="3939238" y="2108049"/>
-                  </a:lnTo>
-                  <a:lnTo>
-                    <a:pt x="4010861" y="2111879"/>
-                  </a:lnTo>
-                  <a:lnTo>
-                    <a:pt x="4082483" y="2115690"/>
-                  </a:lnTo>
-                  <a:lnTo>
-                    <a:pt x="4154106" y="2119483"/>
-                  </a:lnTo>
-                  <a:lnTo>
-                    <a:pt x="4225729" y="2123258"/>
-                  </a:lnTo>
-                  <a:lnTo>
-                    <a:pt x="4297351" y="2127015"/>
-                  </a:lnTo>
-                  <a:lnTo>
-                    <a:pt x="4368974" y="2130753"/>
-                  </a:lnTo>
-                  <a:lnTo>
-                    <a:pt x="4440596" y="2134474"/>
-                  </a:lnTo>
-                  <a:lnTo>
-                    <a:pt x="4512219" y="2138176"/>
-                  </a:lnTo>
-                  <a:lnTo>
-                    <a:pt x="4583841" y="2141861"/>
-                  </a:lnTo>
-                  <a:lnTo>
-                    <a:pt x="4655464" y="2145528"/>
-                  </a:lnTo>
-                  <a:lnTo>
-                    <a:pt x="4727086" y="2149177"/>
-                  </a:lnTo>
-                  <a:lnTo>
-                    <a:pt x="4798709" y="2152809"/>
-                  </a:lnTo>
-                  <a:lnTo>
-                    <a:pt x="4870331" y="2156423"/>
-                  </a:lnTo>
-                  <a:lnTo>
-                    <a:pt x="4941954" y="2160019"/>
-                  </a:lnTo>
-                  <a:lnTo>
-                    <a:pt x="5013576" y="2163599"/>
-                  </a:lnTo>
-                  <a:lnTo>
-                    <a:pt x="5085199" y="2167161"/>
-                  </a:lnTo>
-                  <a:lnTo>
-                    <a:pt x="5156821" y="2170706"/>
-                  </a:lnTo>
-                  <a:lnTo>
-                    <a:pt x="5228444" y="2174234"/>
-                  </a:lnTo>
-                  <a:lnTo>
-                    <a:pt x="5300066" y="2177744"/>
-                  </a:lnTo>
-                  <a:lnTo>
-                    <a:pt x="5371689" y="2181238"/>
-                  </a:lnTo>
-                  <a:lnTo>
-                    <a:pt x="5443311" y="2184715"/>
-                  </a:lnTo>
-                  <a:lnTo>
-                    <a:pt x="5514934" y="2188176"/>
-                  </a:lnTo>
-                  <a:lnTo>
-                    <a:pt x="5586557" y="2191619"/>
-                  </a:lnTo>
-                  <a:lnTo>
-                    <a:pt x="5658179" y="2195046"/>
-                  </a:lnTo>
-                  <a:lnTo>
-                    <a:pt x="5729802" y="2198457"/>
-                  </a:lnTo>
-                  <a:lnTo>
-                    <a:pt x="5801424" y="2201851"/>
-                  </a:lnTo>
-                  <a:lnTo>
-                    <a:pt x="5873047" y="2205228"/>
-                  </a:lnTo>
-                  <a:lnTo>
-                    <a:pt x="5944669" y="2208590"/>
-                  </a:lnTo>
-                  <a:lnTo>
-                    <a:pt x="6016292" y="2211935"/>
-                  </a:lnTo>
-                  <a:lnTo>
-                    <a:pt x="6087914" y="2215264"/>
-                  </a:lnTo>
-                  <a:lnTo>
-                    <a:pt x="6159537" y="2218577"/>
-                  </a:lnTo>
-                  <a:lnTo>
-                    <a:pt x="6231159" y="2221874"/>
-                  </a:lnTo>
-                  <a:lnTo>
-                    <a:pt x="6302782" y="2225155"/>
-                  </a:lnTo>
-                  <a:lnTo>
-                    <a:pt x="6374404" y="2228420"/>
-                  </a:lnTo>
-                  <a:lnTo>
-                    <a:pt x="6446027" y="2231669"/>
-                  </a:lnTo>
-                  <a:lnTo>
-                    <a:pt x="6517649" y="2234903"/>
-                  </a:lnTo>
-                  <a:lnTo>
-                    <a:pt x="6589272" y="2238122"/>
-                  </a:lnTo>
-                  <a:lnTo>
-                    <a:pt x="6660894" y="2241324"/>
-                  </a:lnTo>
-                  <a:lnTo>
-                    <a:pt x="6732517" y="2244512"/>
-                  </a:lnTo>
-                  <a:lnTo>
-                    <a:pt x="6804139" y="2247683"/>
-                  </a:lnTo>
-                  <a:lnTo>
-                    <a:pt x="6875762" y="2250840"/>
-                  </a:lnTo>
-                  <a:lnTo>
-                    <a:pt x="6947385" y="2253981"/>
-                  </a:lnTo>
-                  <a:lnTo>
-                    <a:pt x="7019007" y="2257108"/>
-                  </a:lnTo>
-                  <a:lnTo>
-                    <a:pt x="7090630" y="2260219"/>
-                  </a:lnTo>
-                  <a:lnTo>
-                    <a:pt x="7090630" y="2706099"/>
-                  </a:lnTo>
-                  <a:lnTo>
-                    <a:pt x="7019007" y="2700686"/>
-                  </a:lnTo>
-                  <a:lnTo>
-                    <a:pt x="6947385" y="2695124"/>
-                  </a:lnTo>
-                  <a:lnTo>
-                    <a:pt x="6875762" y="2689409"/>
-                  </a:lnTo>
-                  <a:lnTo>
-                    <a:pt x="6804139" y="2683536"/>
-                  </a:lnTo>
-                  <a:lnTo>
-                    <a:pt x="6732517" y="2677502"/>
-                  </a:lnTo>
-                  <a:lnTo>
-                    <a:pt x="6660894" y="2671300"/>
-                  </a:lnTo>
-                  <a:lnTo>
-                    <a:pt x="6589272" y="2664928"/>
-                  </a:lnTo>
-                  <a:lnTo>
-                    <a:pt x="6517649" y="2658379"/>
-                  </a:lnTo>
-                  <a:lnTo>
-                    <a:pt x="6446027" y="2651651"/>
-                  </a:lnTo>
-                  <a:lnTo>
-                    <a:pt x="6374404" y="2644736"/>
-                  </a:lnTo>
-                  <a:lnTo>
-                    <a:pt x="6302782" y="2637631"/>
-                  </a:lnTo>
-                  <a:lnTo>
-                    <a:pt x="6231159" y="2630329"/>
-                  </a:lnTo>
-                  <a:lnTo>
-                    <a:pt x="6159537" y="2622827"/>
-                  </a:lnTo>
-                  <a:lnTo>
-                    <a:pt x="6087914" y="2615117"/>
-                  </a:lnTo>
-                  <a:lnTo>
-                    <a:pt x="6016292" y="2607195"/>
-                  </a:lnTo>
-                  <a:lnTo>
-                    <a:pt x="5944669" y="2599054"/>
-                  </a:lnTo>
-                  <a:lnTo>
-                    <a:pt x="5873047" y="2590688"/>
-                  </a:lnTo>
-                  <a:lnTo>
-                    <a:pt x="5801424" y="2582092"/>
-                  </a:lnTo>
-                  <a:lnTo>
-                    <a:pt x="5729802" y="2573258"/>
-                  </a:lnTo>
-                  <a:lnTo>
-                    <a:pt x="5658179" y="2564181"/>
-                  </a:lnTo>
-                  <a:lnTo>
-                    <a:pt x="5586557" y="2554854"/>
-                  </a:lnTo>
-                  <a:lnTo>
-                    <a:pt x="5514934" y="2545269"/>
-                  </a:lnTo>
-                  <a:lnTo>
-                    <a:pt x="5443311" y="2535419"/>
-                  </a:lnTo>
-                  <a:lnTo>
-                    <a:pt x="5371689" y="2525298"/>
-                  </a:lnTo>
-                  <a:lnTo>
-                    <a:pt x="5300066" y="2514898"/>
-                  </a:lnTo>
-                  <a:lnTo>
-                    <a:pt x="5228444" y="2504211"/>
-                  </a:lnTo>
-                  <a:lnTo>
-                    <a:pt x="5156821" y="2493229"/>
-                  </a:lnTo>
-                  <a:lnTo>
-                    <a:pt x="5085199" y="2481944"/>
-                  </a:lnTo>
-                  <a:lnTo>
-                    <a:pt x="5013576" y="2470347"/>
-                  </a:lnTo>
-                  <a:lnTo>
-                    <a:pt x="4941954" y="2458431"/>
-                  </a:lnTo>
-                  <a:lnTo>
-                    <a:pt x="4870331" y="2446186"/>
-                  </a:lnTo>
-                  <a:lnTo>
-                    <a:pt x="4798709" y="2433604"/>
-                  </a:lnTo>
-                  <a:lnTo>
-                    <a:pt x="4727086" y="2420674"/>
-                  </a:lnTo>
-                  <a:lnTo>
-                    <a:pt x="4655464" y="2407387"/>
-                  </a:lnTo>
-                  <a:lnTo>
-                    <a:pt x="4583841" y="2393734"/>
-                  </a:lnTo>
-                  <a:lnTo>
-                    <a:pt x="4512219" y="2379704"/>
-                  </a:lnTo>
-                  <a:lnTo>
-                    <a:pt x="4440596" y="2365287"/>
-                  </a:lnTo>
-                  <a:lnTo>
-                    <a:pt x="4368974" y="2350473"/>
-                  </a:lnTo>
-                  <a:lnTo>
-                    <a:pt x="4297351" y="2335250"/>
-                  </a:lnTo>
-                  <a:lnTo>
-                    <a:pt x="4225729" y="2319606"/>
-                  </a:lnTo>
-                  <a:lnTo>
-                    <a:pt x="4154106" y="2303532"/>
-                  </a:lnTo>
-                  <a:lnTo>
-                    <a:pt x="4082483" y="2287013"/>
-                  </a:lnTo>
-                  <a:lnTo>
-                    <a:pt x="4010861" y="2270039"/>
-                  </a:lnTo>
-                  <a:lnTo>
-                    <a:pt x="3939238" y="2252597"/>
-                  </a:lnTo>
-                  <a:lnTo>
-                    <a:pt x="3867616" y="2234674"/>
-                  </a:lnTo>
-                  <a:lnTo>
-                    <a:pt x="3795993" y="2216256"/>
-                  </a:lnTo>
-                  <a:lnTo>
-                    <a:pt x="3724371" y="2197330"/>
-                  </a:lnTo>
-                  <a:lnTo>
-                    <a:pt x="3652748" y="2177882"/>
-                  </a:lnTo>
-                  <a:lnTo>
-                    <a:pt x="3581126" y="2157898"/>
-                  </a:lnTo>
-                  <a:lnTo>
-                    <a:pt x="3509503" y="2137362"/>
-                  </a:lnTo>
-                  <a:lnTo>
-                    <a:pt x="3437881" y="2116259"/>
-                  </a:lnTo>
-                  <a:lnTo>
-                    <a:pt x="3366258" y="2094575"/>
-                  </a:lnTo>
-                  <a:lnTo>
-                    <a:pt x="3294636" y="2072733"/>
-                  </a:lnTo>
-                  <a:lnTo>
-                    <a:pt x="3223013" y="2068713"/>
-                  </a:lnTo>
-                  <a:lnTo>
-                    <a:pt x="3151391" y="2064674"/>
-                  </a:lnTo>
-                  <a:lnTo>
-                    <a:pt x="3079768" y="2060615"/>
-                  </a:lnTo>
-                  <a:lnTo>
-                    <a:pt x="3008146" y="2056537"/>
-                  </a:lnTo>
-                  <a:lnTo>
-                    <a:pt x="2936523" y="2052439"/>
-                  </a:lnTo>
-                  <a:lnTo>
-                    <a:pt x="2864901" y="2048321"/>
-                  </a:lnTo>
-                  <a:lnTo>
-                    <a:pt x="2793278" y="2044183"/>
-                  </a:lnTo>
-                  <a:lnTo>
-                    <a:pt x="2721655" y="2040025"/>
-                  </a:lnTo>
-                  <a:lnTo>
-                    <a:pt x="2650033" y="2035847"/>
-                  </a:lnTo>
-                  <a:lnTo>
-                    <a:pt x="2578410" y="2031649"/>
-                  </a:lnTo>
-                  <a:lnTo>
-                    <a:pt x="2506788" y="2027430"/>
-                  </a:lnTo>
-                  <a:lnTo>
-                    <a:pt x="2435165" y="2023191"/>
-                  </a:lnTo>
-                  <a:lnTo>
-                    <a:pt x="2363543" y="2018931"/>
-                  </a:lnTo>
-                  <a:lnTo>
-                    <a:pt x="2291920" y="2014651"/>
-                  </a:lnTo>
-                  <a:lnTo>
-                    <a:pt x="2220298" y="2010350"/>
-                  </a:lnTo>
-                  <a:lnTo>
-                    <a:pt x="2148675" y="2006028"/>
-                  </a:lnTo>
-                  <a:lnTo>
-                    <a:pt x="2077053" y="2001685"/>
-                  </a:lnTo>
-                  <a:lnTo>
-                    <a:pt x="2005430" y="1997321"/>
-                  </a:lnTo>
-                  <a:lnTo>
-                    <a:pt x="1933808" y="1992936"/>
-                  </a:lnTo>
-                  <a:lnTo>
-                    <a:pt x="1862185" y="1988530"/>
-                  </a:lnTo>
-                  <a:lnTo>
-                    <a:pt x="1790563" y="1984102"/>
-                  </a:lnTo>
-                  <a:lnTo>
-                    <a:pt x="1718940" y="1979653"/>
-                  </a:lnTo>
-                  <a:lnTo>
-                    <a:pt x="1647318" y="1975182"/>
-                  </a:lnTo>
-                  <a:lnTo>
-                    <a:pt x="1575695" y="1970690"/>
-                  </a:lnTo>
-                  <a:lnTo>
-                    <a:pt x="1504073" y="1966176"/>
-                  </a:lnTo>
-                  <a:lnTo>
-                    <a:pt x="1432450" y="1961640"/>
-                  </a:lnTo>
-                  <a:lnTo>
-                    <a:pt x="1360827" y="1957082"/>
-                  </a:lnTo>
-                  <a:lnTo>
-                    <a:pt x="1289205" y="1952502"/>
-                  </a:lnTo>
-                  <a:lnTo>
-                    <a:pt x="1217582" y="1947900"/>
-                  </a:lnTo>
-                  <a:lnTo>
-                    <a:pt x="1145960" y="1943275"/>
-                  </a:lnTo>
-                  <a:lnTo>
-                    <a:pt x="1074337" y="1938628"/>
-                  </a:lnTo>
-                  <a:lnTo>
-                    <a:pt x="1002715" y="1933959"/>
-                  </a:lnTo>
-                  <a:lnTo>
-                    <a:pt x="931092" y="1929267"/>
-                  </a:lnTo>
-                  <a:lnTo>
-                    <a:pt x="859470" y="1924552"/>
-                  </a:lnTo>
-                  <a:lnTo>
-                    <a:pt x="787847" y="1919814"/>
-                  </a:lnTo>
-                  <a:lnTo>
-                    <a:pt x="716225" y="1915054"/>
-                  </a:lnTo>
-                  <a:lnTo>
-                    <a:pt x="644602" y="1910270"/>
-                  </a:lnTo>
-                  <a:lnTo>
-                    <a:pt x="572980" y="1905463"/>
-                  </a:lnTo>
-                  <a:lnTo>
-                    <a:pt x="501357" y="1900633"/>
-                  </a:lnTo>
-                  <a:lnTo>
-                    <a:pt x="429735" y="1895779"/>
-                  </a:lnTo>
-                  <a:lnTo>
-                    <a:pt x="358112" y="1890902"/>
-                  </a:lnTo>
-                  <a:lnTo>
-                    <a:pt x="286490" y="1886002"/>
-                  </a:lnTo>
-                  <a:lnTo>
-                    <a:pt x="214867" y="1881077"/>
-                  </a:lnTo>
-                  <a:lnTo>
-                    <a:pt x="143245" y="1876129"/>
-                  </a:lnTo>
-                  <a:lnTo>
-                    <a:pt x="71622" y="1871156"/>
-                  </a:lnTo>
-                  <a:lnTo>
-                    <a:pt x="0" y="1866160"/>
+                    <a:pt x="70344" y="28118"/>
+                  </a:lnTo>
+                  <a:lnTo>
+                    <a:pt x="140688" y="55482"/>
+                  </a:lnTo>
+                  <a:lnTo>
+                    <a:pt x="211033" y="82110"/>
+                  </a:lnTo>
+                  <a:lnTo>
+                    <a:pt x="281377" y="108025"/>
+                  </a:lnTo>
+                  <a:lnTo>
+                    <a:pt x="351722" y="133243"/>
+                  </a:lnTo>
+                  <a:lnTo>
+                    <a:pt x="422066" y="157784"/>
+                  </a:lnTo>
+                  <a:lnTo>
+                    <a:pt x="492411" y="181667"/>
+                  </a:lnTo>
+                  <a:lnTo>
+                    <a:pt x="562755" y="204908"/>
+                  </a:lnTo>
+                  <a:lnTo>
+                    <a:pt x="633100" y="227525"/>
+                  </a:lnTo>
+                  <a:lnTo>
+                    <a:pt x="703444" y="249535"/>
+                  </a:lnTo>
+                  <a:lnTo>
+                    <a:pt x="773789" y="270955"/>
+                  </a:lnTo>
+                  <a:lnTo>
+                    <a:pt x="844133" y="291799"/>
+                  </a:lnTo>
+                  <a:lnTo>
+                    <a:pt x="914478" y="312083"/>
+                  </a:lnTo>
+                  <a:lnTo>
+                    <a:pt x="984822" y="331823"/>
+                  </a:lnTo>
+                  <a:lnTo>
+                    <a:pt x="1055167" y="351033"/>
+                  </a:lnTo>
+                  <a:lnTo>
+                    <a:pt x="1125511" y="369728"/>
+                  </a:lnTo>
+                  <a:lnTo>
+                    <a:pt x="1195856" y="387920"/>
+                  </a:lnTo>
+                  <a:lnTo>
+                    <a:pt x="1266200" y="405624"/>
+                  </a:lnTo>
+                  <a:lnTo>
+                    <a:pt x="1336545" y="422853"/>
+                  </a:lnTo>
+                  <a:lnTo>
+                    <a:pt x="1406889" y="439619"/>
+                  </a:lnTo>
+                  <a:lnTo>
+                    <a:pt x="1477234" y="455935"/>
+                  </a:lnTo>
+                  <a:lnTo>
+                    <a:pt x="1547578" y="471813"/>
+                  </a:lnTo>
+                  <a:lnTo>
+                    <a:pt x="1617923" y="487265"/>
+                  </a:lnTo>
+                  <a:lnTo>
+                    <a:pt x="1688267" y="502302"/>
+                  </a:lnTo>
+                  <a:lnTo>
+                    <a:pt x="1758612" y="516935"/>
+                  </a:lnTo>
+                  <a:lnTo>
+                    <a:pt x="1828956" y="531176"/>
+                  </a:lnTo>
+                  <a:lnTo>
+                    <a:pt x="1899301" y="545034"/>
+                  </a:lnTo>
+                  <a:lnTo>
+                    <a:pt x="1969645" y="558520"/>
+                  </a:lnTo>
+                  <a:lnTo>
+                    <a:pt x="2039990" y="571644"/>
+                  </a:lnTo>
+                  <a:lnTo>
+                    <a:pt x="2110334" y="584416"/>
+                  </a:lnTo>
+                  <a:lnTo>
+                    <a:pt x="2180679" y="596844"/>
+                  </a:lnTo>
+                  <a:lnTo>
+                    <a:pt x="2251023" y="608939"/>
+                  </a:lnTo>
+                  <a:lnTo>
+                    <a:pt x="2321368" y="620710"/>
+                  </a:lnTo>
+                  <a:lnTo>
+                    <a:pt x="2391712" y="632164"/>
+                  </a:lnTo>
+                  <a:lnTo>
+                    <a:pt x="2462057" y="643311"/>
+                  </a:lnTo>
+                  <a:lnTo>
+                    <a:pt x="2532401" y="654159"/>
+                  </a:lnTo>
+                  <a:lnTo>
+                    <a:pt x="2602746" y="664715"/>
+                  </a:lnTo>
+                  <a:lnTo>
+                    <a:pt x="2673090" y="674988"/>
+                  </a:lnTo>
+                  <a:lnTo>
+                    <a:pt x="2743435" y="684985"/>
+                  </a:lnTo>
+                  <a:lnTo>
+                    <a:pt x="2813779" y="694714"/>
+                  </a:lnTo>
+                  <a:lnTo>
+                    <a:pt x="2884124" y="704182"/>
+                  </a:lnTo>
+                  <a:lnTo>
+                    <a:pt x="2954468" y="713395"/>
+                  </a:lnTo>
+                  <a:lnTo>
+                    <a:pt x="3024813" y="722361"/>
+                  </a:lnTo>
+                  <a:lnTo>
+                    <a:pt x="3095157" y="731087"/>
+                  </a:lnTo>
+                  <a:lnTo>
+                    <a:pt x="3165502" y="739578"/>
+                  </a:lnTo>
+                  <a:lnTo>
+                    <a:pt x="3235846" y="747841"/>
+                  </a:lnTo>
+                  <a:lnTo>
+                    <a:pt x="3306191" y="749444"/>
+                  </a:lnTo>
+                  <a:lnTo>
+                    <a:pt x="3376535" y="750880"/>
+                  </a:lnTo>
+                  <a:lnTo>
+                    <a:pt x="3446880" y="752310"/>
+                  </a:lnTo>
+                  <a:lnTo>
+                    <a:pt x="3517224" y="753733"/>
+                  </a:lnTo>
+                  <a:lnTo>
+                    <a:pt x="3587569" y="755149"/>
+                  </a:lnTo>
+                  <a:lnTo>
+                    <a:pt x="3657913" y="756558"/>
+                  </a:lnTo>
+                  <a:lnTo>
+                    <a:pt x="3728257" y="757960"/>
+                  </a:lnTo>
+                  <a:lnTo>
+                    <a:pt x="3798602" y="759356"/>
+                  </a:lnTo>
+                  <a:lnTo>
+                    <a:pt x="3868946" y="760745"/>
+                  </a:lnTo>
+                  <a:lnTo>
+                    <a:pt x="3939291" y="762127"/>
+                  </a:lnTo>
+                  <a:lnTo>
+                    <a:pt x="4009635" y="763502"/>
+                  </a:lnTo>
+                  <a:lnTo>
+                    <a:pt x="4079980" y="764871"/>
+                  </a:lnTo>
+                  <a:lnTo>
+                    <a:pt x="4150324" y="766234"/>
+                  </a:lnTo>
+                  <a:lnTo>
+                    <a:pt x="4220669" y="767589"/>
+                  </a:lnTo>
+                  <a:lnTo>
+                    <a:pt x="4291013" y="768938"/>
+                  </a:lnTo>
+                  <a:lnTo>
+                    <a:pt x="4361358" y="770281"/>
+                  </a:lnTo>
+                  <a:lnTo>
+                    <a:pt x="4431702" y="771617"/>
+                  </a:lnTo>
+                  <a:lnTo>
+                    <a:pt x="4502047" y="772947"/>
+                  </a:lnTo>
+                  <a:lnTo>
+                    <a:pt x="4572391" y="774270"/>
+                  </a:lnTo>
+                  <a:lnTo>
+                    <a:pt x="4642736" y="775587"/>
+                  </a:lnTo>
+                  <a:lnTo>
+                    <a:pt x="4713080" y="776898"/>
+                  </a:lnTo>
+                  <a:lnTo>
+                    <a:pt x="4783425" y="778202"/>
+                  </a:lnTo>
+                  <a:lnTo>
+                    <a:pt x="4853769" y="779500"/>
+                  </a:lnTo>
+                  <a:lnTo>
+                    <a:pt x="4924114" y="780792"/>
+                  </a:lnTo>
+                  <a:lnTo>
+                    <a:pt x="4994458" y="782077"/>
+                  </a:lnTo>
+                  <a:lnTo>
+                    <a:pt x="5064803" y="783356"/>
+                  </a:lnTo>
+                  <a:lnTo>
+                    <a:pt x="5135147" y="784629"/>
+                  </a:lnTo>
+                  <a:lnTo>
+                    <a:pt x="5205492" y="785896"/>
+                  </a:lnTo>
+                  <a:lnTo>
+                    <a:pt x="5275836" y="787157"/>
+                  </a:lnTo>
+                  <a:lnTo>
+                    <a:pt x="5346181" y="788412"/>
+                  </a:lnTo>
+                  <a:lnTo>
+                    <a:pt x="5416525" y="789661"/>
+                  </a:lnTo>
+                  <a:lnTo>
+                    <a:pt x="5486870" y="790903"/>
+                  </a:lnTo>
+                  <a:lnTo>
+                    <a:pt x="5557214" y="792140"/>
+                  </a:lnTo>
+                  <a:lnTo>
+                    <a:pt x="5627559" y="793371"/>
+                  </a:lnTo>
+                  <a:lnTo>
+                    <a:pt x="5697903" y="794596"/>
+                  </a:lnTo>
+                  <a:lnTo>
+                    <a:pt x="5768248" y="795815"/>
+                  </a:lnTo>
+                  <a:lnTo>
+                    <a:pt x="5838592" y="797028"/>
+                  </a:lnTo>
+                  <a:lnTo>
+                    <a:pt x="5908937" y="798235"/>
+                  </a:lnTo>
+                  <a:lnTo>
+                    <a:pt x="5979281" y="799436"/>
+                  </a:lnTo>
+                  <a:lnTo>
+                    <a:pt x="6049626" y="800632"/>
+                  </a:lnTo>
+                  <a:lnTo>
+                    <a:pt x="6119970" y="801822"/>
+                  </a:lnTo>
+                  <a:lnTo>
+                    <a:pt x="6190315" y="803006"/>
+                  </a:lnTo>
+                  <a:lnTo>
+                    <a:pt x="6260659" y="804184"/>
+                  </a:lnTo>
+                  <a:lnTo>
+                    <a:pt x="6331004" y="805357"/>
+                  </a:lnTo>
+                  <a:lnTo>
+                    <a:pt x="6401348" y="806524"/>
+                  </a:lnTo>
+                  <a:lnTo>
+                    <a:pt x="6471693" y="807685"/>
+                  </a:lnTo>
+                  <a:lnTo>
+                    <a:pt x="6542037" y="808841"/>
+                  </a:lnTo>
+                  <a:lnTo>
+                    <a:pt x="6612382" y="809991"/>
+                  </a:lnTo>
+                  <a:lnTo>
+                    <a:pt x="6682726" y="811136"/>
+                  </a:lnTo>
+                  <a:lnTo>
+                    <a:pt x="6753071" y="812275"/>
+                  </a:lnTo>
+                  <a:lnTo>
+                    <a:pt x="6823415" y="813409"/>
+                  </a:lnTo>
+                  <a:lnTo>
+                    <a:pt x="6893760" y="814537"/>
+                  </a:lnTo>
+                  <a:lnTo>
+                    <a:pt x="6964104" y="815660"/>
+                  </a:lnTo>
+                  <a:lnTo>
+                    <a:pt x="6964104" y="976567"/>
+                  </a:lnTo>
+                  <a:lnTo>
+                    <a:pt x="6893760" y="974614"/>
+                  </a:lnTo>
+                  <a:lnTo>
+                    <a:pt x="6823415" y="972607"/>
+                  </a:lnTo>
+                  <a:lnTo>
+                    <a:pt x="6753071" y="970544"/>
+                  </a:lnTo>
+                  <a:lnTo>
+                    <a:pt x="6682726" y="968425"/>
+                  </a:lnTo>
+                  <a:lnTo>
+                    <a:pt x="6612382" y="966247"/>
+                  </a:lnTo>
+                  <a:lnTo>
+                    <a:pt x="6542037" y="964009"/>
+                  </a:lnTo>
+                  <a:lnTo>
+                    <a:pt x="6471693" y="961709"/>
+                  </a:lnTo>
+                  <a:lnTo>
+                    <a:pt x="6401348" y="959346"/>
+                  </a:lnTo>
+                  <a:lnTo>
+                    <a:pt x="6331004" y="956918"/>
+                  </a:lnTo>
+                  <a:lnTo>
+                    <a:pt x="6260659" y="954423"/>
+                  </a:lnTo>
+                  <a:lnTo>
+                    <a:pt x="6190315" y="951859"/>
+                  </a:lnTo>
+                  <a:lnTo>
+                    <a:pt x="6119970" y="949224"/>
+                  </a:lnTo>
+                  <a:lnTo>
+                    <a:pt x="6049626" y="946516"/>
+                  </a:lnTo>
+                  <a:lnTo>
+                    <a:pt x="5979281" y="943734"/>
+                  </a:lnTo>
+                  <a:lnTo>
+                    <a:pt x="5908937" y="940875"/>
+                  </a:lnTo>
+                  <a:lnTo>
+                    <a:pt x="5838592" y="937937"/>
+                  </a:lnTo>
+                  <a:lnTo>
+                    <a:pt x="5768248" y="934918"/>
+                  </a:lnTo>
+                  <a:lnTo>
+                    <a:pt x="5697903" y="931816"/>
+                  </a:lnTo>
+                  <a:lnTo>
+                    <a:pt x="5627559" y="928628"/>
+                  </a:lnTo>
+                  <a:lnTo>
+                    <a:pt x="5557214" y="925352"/>
+                  </a:lnTo>
+                  <a:lnTo>
+                    <a:pt x="5486870" y="921986"/>
+                  </a:lnTo>
+                  <a:lnTo>
+                    <a:pt x="5416525" y="918527"/>
+                  </a:lnTo>
+                  <a:lnTo>
+                    <a:pt x="5346181" y="914973"/>
+                  </a:lnTo>
+                  <a:lnTo>
+                    <a:pt x="5275836" y="911320"/>
+                  </a:lnTo>
+                  <a:lnTo>
+                    <a:pt x="5205492" y="907567"/>
+                  </a:lnTo>
+                  <a:lnTo>
+                    <a:pt x="5135147" y="903710"/>
+                  </a:lnTo>
+                  <a:lnTo>
+                    <a:pt x="5064803" y="899747"/>
+                  </a:lnTo>
+                  <a:lnTo>
+                    <a:pt x="4994458" y="895675"/>
+                  </a:lnTo>
+                  <a:lnTo>
+                    <a:pt x="4924114" y="891490"/>
+                  </a:lnTo>
+                  <a:lnTo>
+                    <a:pt x="4853769" y="887190"/>
+                  </a:lnTo>
+                  <a:lnTo>
+                    <a:pt x="4783425" y="882771"/>
+                  </a:lnTo>
+                  <a:lnTo>
+                    <a:pt x="4713080" y="878230"/>
+                  </a:lnTo>
+                  <a:lnTo>
+                    <a:pt x="4642736" y="873564"/>
+                  </a:lnTo>
+                  <a:lnTo>
+                    <a:pt x="4572391" y="868769"/>
+                  </a:lnTo>
+                  <a:lnTo>
+                    <a:pt x="4502047" y="863842"/>
+                  </a:lnTo>
+                  <a:lnTo>
+                    <a:pt x="4431702" y="858779"/>
+                  </a:lnTo>
+                  <a:lnTo>
+                    <a:pt x="4361358" y="853576"/>
+                  </a:lnTo>
+                  <a:lnTo>
+                    <a:pt x="4291013" y="848230"/>
+                  </a:lnTo>
+                  <a:lnTo>
+                    <a:pt x="4220669" y="842736"/>
+                  </a:lnTo>
+                  <a:lnTo>
+                    <a:pt x="4150324" y="837091"/>
+                  </a:lnTo>
+                  <a:lnTo>
+                    <a:pt x="4079980" y="831290"/>
+                  </a:lnTo>
+                  <a:lnTo>
+                    <a:pt x="4009635" y="825329"/>
+                  </a:lnTo>
+                  <a:lnTo>
+                    <a:pt x="3939291" y="819204"/>
+                  </a:lnTo>
+                  <a:lnTo>
+                    <a:pt x="3868946" y="812909"/>
+                  </a:lnTo>
+                  <a:lnTo>
+                    <a:pt x="3798602" y="806441"/>
+                  </a:lnTo>
+                  <a:lnTo>
+                    <a:pt x="3728257" y="799794"/>
+                  </a:lnTo>
+                  <a:lnTo>
+                    <a:pt x="3657913" y="792964"/>
+                  </a:lnTo>
+                  <a:lnTo>
+                    <a:pt x="3587569" y="785946"/>
+                  </a:lnTo>
+                  <a:lnTo>
+                    <a:pt x="3517224" y="778734"/>
+                  </a:lnTo>
+                  <a:lnTo>
+                    <a:pt x="3446880" y="771323"/>
+                  </a:lnTo>
+                  <a:lnTo>
+                    <a:pt x="3376535" y="763708"/>
+                  </a:lnTo>
+                  <a:lnTo>
+                    <a:pt x="3306191" y="755882"/>
+                  </a:lnTo>
+                  <a:lnTo>
+                    <a:pt x="3235846" y="748000"/>
+                  </a:lnTo>
+                  <a:lnTo>
+                    <a:pt x="3165502" y="746550"/>
+                  </a:lnTo>
+                  <a:lnTo>
+                    <a:pt x="3095157" y="745092"/>
+                  </a:lnTo>
+                  <a:lnTo>
+                    <a:pt x="3024813" y="743627"/>
+                  </a:lnTo>
+                  <a:lnTo>
+                    <a:pt x="2954468" y="742156"/>
+                  </a:lnTo>
+                  <a:lnTo>
+                    <a:pt x="2884124" y="740677"/>
+                  </a:lnTo>
+                  <a:lnTo>
+                    <a:pt x="2813779" y="739191"/>
+                  </a:lnTo>
+                  <a:lnTo>
+                    <a:pt x="2743435" y="737697"/>
+                  </a:lnTo>
+                  <a:lnTo>
+                    <a:pt x="2673090" y="736197"/>
+                  </a:lnTo>
+                  <a:lnTo>
+                    <a:pt x="2602746" y="734689"/>
+                  </a:lnTo>
+                  <a:lnTo>
+                    <a:pt x="2532401" y="733174"/>
+                  </a:lnTo>
+                  <a:lnTo>
+                    <a:pt x="2462057" y="731651"/>
+                  </a:lnTo>
+                  <a:lnTo>
+                    <a:pt x="2391712" y="730122"/>
+                  </a:lnTo>
+                  <a:lnTo>
+                    <a:pt x="2321368" y="728584"/>
+                  </a:lnTo>
+                  <a:lnTo>
+                    <a:pt x="2251023" y="727040"/>
+                  </a:lnTo>
+                  <a:lnTo>
+                    <a:pt x="2180679" y="725488"/>
+                  </a:lnTo>
+                  <a:lnTo>
+                    <a:pt x="2110334" y="723928"/>
+                  </a:lnTo>
+                  <a:lnTo>
+                    <a:pt x="2039990" y="722361"/>
+                  </a:lnTo>
+                  <a:lnTo>
+                    <a:pt x="1969645" y="720786"/>
+                  </a:lnTo>
+                  <a:lnTo>
+                    <a:pt x="1899301" y="719203"/>
+                  </a:lnTo>
+                  <a:lnTo>
+                    <a:pt x="1828956" y="717613"/>
+                  </a:lnTo>
+                  <a:lnTo>
+                    <a:pt x="1758612" y="716015"/>
+                  </a:lnTo>
+                  <a:lnTo>
+                    <a:pt x="1688267" y="714410"/>
+                  </a:lnTo>
+                  <a:lnTo>
+                    <a:pt x="1617923" y="712796"/>
+                  </a:lnTo>
+                  <a:lnTo>
+                    <a:pt x="1547578" y="711175"/>
+                  </a:lnTo>
+                  <a:lnTo>
+                    <a:pt x="1477234" y="709546"/>
+                  </a:lnTo>
+                  <a:lnTo>
+                    <a:pt x="1406889" y="707909"/>
+                  </a:lnTo>
+                  <a:lnTo>
+                    <a:pt x="1336545" y="706264"/>
+                  </a:lnTo>
+                  <a:lnTo>
+                    <a:pt x="1266200" y="704612"/>
+                  </a:lnTo>
+                  <a:lnTo>
+                    <a:pt x="1195856" y="702951"/>
+                  </a:lnTo>
+                  <a:lnTo>
+                    <a:pt x="1125511" y="701282"/>
+                  </a:lnTo>
+                  <a:lnTo>
+                    <a:pt x="1055167" y="699605"/>
+                  </a:lnTo>
+                  <a:lnTo>
+                    <a:pt x="984822" y="697920"/>
+                  </a:lnTo>
+                  <a:lnTo>
+                    <a:pt x="914478" y="696227"/>
+                  </a:lnTo>
+                  <a:lnTo>
+                    <a:pt x="844133" y="694525"/>
+                  </a:lnTo>
+                  <a:lnTo>
+                    <a:pt x="773789" y="692815"/>
+                  </a:lnTo>
+                  <a:lnTo>
+                    <a:pt x="703444" y="691097"/>
+                  </a:lnTo>
+                  <a:lnTo>
+                    <a:pt x="633100" y="689371"/>
+                  </a:lnTo>
+                  <a:lnTo>
+                    <a:pt x="562755" y="687636"/>
+                  </a:lnTo>
+                  <a:lnTo>
+                    <a:pt x="492411" y="685893"/>
+                  </a:lnTo>
+                  <a:lnTo>
+                    <a:pt x="422066" y="684142"/>
+                  </a:lnTo>
+                  <a:lnTo>
+                    <a:pt x="351722" y="682382"/>
+                  </a:lnTo>
+                  <a:lnTo>
+                    <a:pt x="281377" y="680613"/>
+                  </a:lnTo>
+                  <a:lnTo>
+                    <a:pt x="211033" y="678836"/>
+                  </a:lnTo>
+                  <a:lnTo>
+                    <a:pt x="140688" y="677050"/>
+                  </a:lnTo>
+                  <a:lnTo>
+                    <a:pt x="70344" y="675256"/>
+                  </a:lnTo>
+                  <a:lnTo>
+                    <a:pt x="0" y="673453"/>
                   </a:lnTo>
                   <a:close/>
                 </a:path>
@@ -3584,643 +3619,318 @@
         </p:sp>
         <p:sp>
           <p:nvSpPr>
-            <p:cNvPr id="21" name="pl21"/>
-            <p:cNvSpPr/>
-            <p:nvPr/>
-          </p:nvSpPr>
-          <p:spPr>
-            <a:xfrm>
-              <a:off x="1172049" y="2654957"/>
-              <a:ext cx="7090630" cy="2260219"/>
-            </a:xfrm>
-            <a:custGeom>
-              <a:avLst/>
-              <a:pathLst>
-                <a:path w="7090630" h="2260219">
-                  <a:moveTo>
-                    <a:pt x="0" y="0"/>
-                  </a:moveTo>
-                  <a:lnTo>
-                    <a:pt x="71622" y="77917"/>
-                  </a:lnTo>
-                  <a:lnTo>
-                    <a:pt x="143245" y="153742"/>
-                  </a:lnTo>
-                  <a:lnTo>
-                    <a:pt x="214867" y="227532"/>
-                  </a:lnTo>
-                  <a:lnTo>
-                    <a:pt x="286490" y="299340"/>
-                  </a:lnTo>
-                  <a:lnTo>
-                    <a:pt x="358112" y="369221"/>
-                  </a:lnTo>
-                  <a:lnTo>
-                    <a:pt x="429735" y="437226"/>
-                  </a:lnTo>
-                  <a:lnTo>
-                    <a:pt x="501357" y="503405"/>
-                  </a:lnTo>
-                  <a:lnTo>
-                    <a:pt x="572980" y="567807"/>
-                  </a:lnTo>
-                  <a:lnTo>
-                    <a:pt x="644602" y="630480"/>
-                  </a:lnTo>
-                  <a:lnTo>
-                    <a:pt x="716225" y="691471"/>
-                  </a:lnTo>
-                  <a:lnTo>
-                    <a:pt x="787847" y="750824"/>
-                  </a:lnTo>
-                  <a:lnTo>
-                    <a:pt x="859470" y="808584"/>
-                  </a:lnTo>
-                  <a:lnTo>
-                    <a:pt x="931092" y="864794"/>
-                  </a:lnTo>
-                  <a:lnTo>
-                    <a:pt x="1002715" y="919494"/>
-                  </a:lnTo>
-                  <a:lnTo>
-                    <a:pt x="1074337" y="972726"/>
-                  </a:lnTo>
-                  <a:lnTo>
-                    <a:pt x="1145960" y="1024528"/>
-                  </a:lnTo>
-                  <a:lnTo>
-                    <a:pt x="1217582" y="1074940"/>
-                  </a:lnTo>
-                  <a:lnTo>
-                    <a:pt x="1289205" y="1123998"/>
-                  </a:lnTo>
-                  <a:lnTo>
-                    <a:pt x="1360827" y="1171740"/>
-                  </a:lnTo>
-                  <a:lnTo>
-                    <a:pt x="1432450" y="1218200"/>
-                  </a:lnTo>
-                  <a:lnTo>
-                    <a:pt x="1504073" y="1263412"/>
-                  </a:lnTo>
-                  <a:lnTo>
-                    <a:pt x="1575695" y="1307411"/>
-                  </a:lnTo>
-                  <a:lnTo>
-                    <a:pt x="1647318" y="1350228"/>
-                  </a:lnTo>
-                  <a:lnTo>
-                    <a:pt x="1718940" y="1391896"/>
-                  </a:lnTo>
-                  <a:lnTo>
-                    <a:pt x="1790563" y="1432445"/>
-                  </a:lnTo>
-                  <a:lnTo>
-                    <a:pt x="1862185" y="1471906"/>
-                  </a:lnTo>
-                  <a:lnTo>
-                    <a:pt x="1933808" y="1510307"/>
-                  </a:lnTo>
-                  <a:lnTo>
-                    <a:pt x="2005430" y="1547677"/>
-                  </a:lnTo>
-                  <a:lnTo>
-                    <a:pt x="2077053" y="1584044"/>
-                  </a:lnTo>
-                  <a:lnTo>
-                    <a:pt x="2148675" y="1619435"/>
-                  </a:lnTo>
-                  <a:lnTo>
-                    <a:pt x="2220298" y="1653875"/>
-                  </a:lnTo>
-                  <a:lnTo>
-                    <a:pt x="2291920" y="1687391"/>
-                  </a:lnTo>
-                  <a:lnTo>
-                    <a:pt x="2363543" y="1720007"/>
-                  </a:lnTo>
-                  <a:lnTo>
-                    <a:pt x="2435165" y="1751748"/>
-                  </a:lnTo>
-                  <a:lnTo>
-                    <a:pt x="2506788" y="1782636"/>
-                  </a:lnTo>
-                  <a:lnTo>
-                    <a:pt x="2578410" y="1812695"/>
-                  </a:lnTo>
-                  <a:lnTo>
-                    <a:pt x="2650033" y="1841947"/>
-                  </a:lnTo>
-                  <a:lnTo>
-                    <a:pt x="2721655" y="1870414"/>
-                  </a:lnTo>
-                  <a:lnTo>
-                    <a:pt x="2793278" y="1898117"/>
-                  </a:lnTo>
-                  <a:lnTo>
-                    <a:pt x="2864901" y="1925076"/>
-                  </a:lnTo>
-                  <a:lnTo>
-                    <a:pt x="2936523" y="1951311"/>
-                  </a:lnTo>
-                  <a:lnTo>
-                    <a:pt x="3008146" y="1976841"/>
-                  </a:lnTo>
-                  <a:lnTo>
-                    <a:pt x="3079768" y="2001687"/>
-                  </a:lnTo>
-                  <a:lnTo>
-                    <a:pt x="3151391" y="2025865"/>
-                  </a:lnTo>
-                  <a:lnTo>
-                    <a:pt x="3223013" y="2049394"/>
-                  </a:lnTo>
-                  <a:lnTo>
-                    <a:pt x="3294636" y="2072292"/>
-                  </a:lnTo>
-                  <a:lnTo>
-                    <a:pt x="3366258" y="2076733"/>
-                  </a:lnTo>
-                  <a:lnTo>
-                    <a:pt x="3437881" y="2080714"/>
-                  </a:lnTo>
-                  <a:lnTo>
-                    <a:pt x="3509503" y="2084676"/>
-                  </a:lnTo>
-                  <a:lnTo>
-                    <a:pt x="3581126" y="2088619"/>
-                  </a:lnTo>
-                  <a:lnTo>
-                    <a:pt x="3652748" y="2092542"/>
-                  </a:lnTo>
-                  <a:lnTo>
-                    <a:pt x="3724371" y="2096447"/>
-                  </a:lnTo>
-                  <a:lnTo>
-                    <a:pt x="3795993" y="2100333"/>
-                  </a:lnTo>
-                  <a:lnTo>
-                    <a:pt x="3867616" y="2104200"/>
-                  </a:lnTo>
-                  <a:lnTo>
-                    <a:pt x="3939238" y="2108049"/>
-                  </a:lnTo>
-                  <a:lnTo>
-                    <a:pt x="4010861" y="2111879"/>
-                  </a:lnTo>
-                  <a:lnTo>
-                    <a:pt x="4082483" y="2115690"/>
-                  </a:lnTo>
-                  <a:lnTo>
-                    <a:pt x="4154106" y="2119483"/>
-                  </a:lnTo>
-                  <a:lnTo>
-                    <a:pt x="4225729" y="2123258"/>
-                  </a:lnTo>
-                  <a:lnTo>
-                    <a:pt x="4297351" y="2127015"/>
-                  </a:lnTo>
-                  <a:lnTo>
-                    <a:pt x="4368974" y="2130753"/>
-                  </a:lnTo>
-                  <a:lnTo>
-                    <a:pt x="4440596" y="2134474"/>
-                  </a:lnTo>
-                  <a:lnTo>
-                    <a:pt x="4512219" y="2138176"/>
-                  </a:lnTo>
-                  <a:lnTo>
-                    <a:pt x="4583841" y="2141861"/>
-                  </a:lnTo>
-                  <a:lnTo>
-                    <a:pt x="4655464" y="2145528"/>
-                  </a:lnTo>
-                  <a:lnTo>
-                    <a:pt x="4727086" y="2149177"/>
-                  </a:lnTo>
-                  <a:lnTo>
-                    <a:pt x="4798709" y="2152809"/>
-                  </a:lnTo>
-                  <a:lnTo>
-                    <a:pt x="4870331" y="2156423"/>
-                  </a:lnTo>
-                  <a:lnTo>
-                    <a:pt x="4941954" y="2160019"/>
-                  </a:lnTo>
-                  <a:lnTo>
-                    <a:pt x="5013576" y="2163599"/>
-                  </a:lnTo>
-                  <a:lnTo>
-                    <a:pt x="5085199" y="2167161"/>
-                  </a:lnTo>
-                  <a:lnTo>
-                    <a:pt x="5156821" y="2170706"/>
-                  </a:lnTo>
-                  <a:lnTo>
-                    <a:pt x="5228444" y="2174234"/>
-                  </a:lnTo>
-                  <a:lnTo>
-                    <a:pt x="5300066" y="2177744"/>
-                  </a:lnTo>
-                  <a:lnTo>
-                    <a:pt x="5371689" y="2181238"/>
-                  </a:lnTo>
-                  <a:lnTo>
-                    <a:pt x="5443311" y="2184715"/>
-                  </a:lnTo>
-                  <a:lnTo>
-                    <a:pt x="5514934" y="2188176"/>
-                  </a:lnTo>
-                  <a:lnTo>
-                    <a:pt x="5586557" y="2191619"/>
-                  </a:lnTo>
-                  <a:lnTo>
-                    <a:pt x="5658179" y="2195046"/>
-                  </a:lnTo>
-                  <a:lnTo>
-                    <a:pt x="5729802" y="2198457"/>
-                  </a:lnTo>
-                  <a:lnTo>
-                    <a:pt x="5801424" y="2201851"/>
-                  </a:lnTo>
-                  <a:lnTo>
-                    <a:pt x="5873047" y="2205228"/>
-                  </a:lnTo>
-                  <a:lnTo>
-                    <a:pt x="5944669" y="2208590"/>
-                  </a:lnTo>
-                  <a:lnTo>
-                    <a:pt x="6016292" y="2211935"/>
-                  </a:lnTo>
-                  <a:lnTo>
-                    <a:pt x="6087914" y="2215264"/>
-                  </a:lnTo>
-                  <a:lnTo>
-                    <a:pt x="6159537" y="2218577"/>
-                  </a:lnTo>
-                  <a:lnTo>
-                    <a:pt x="6231159" y="2221874"/>
-                  </a:lnTo>
-                  <a:lnTo>
-                    <a:pt x="6302782" y="2225155"/>
-                  </a:lnTo>
-                  <a:lnTo>
-                    <a:pt x="6374404" y="2228420"/>
-                  </a:lnTo>
-                  <a:lnTo>
-                    <a:pt x="6446027" y="2231669"/>
-                  </a:lnTo>
-                  <a:lnTo>
-                    <a:pt x="6517649" y="2234903"/>
-                  </a:lnTo>
-                  <a:lnTo>
-                    <a:pt x="6589272" y="2238122"/>
-                  </a:lnTo>
-                  <a:lnTo>
-                    <a:pt x="6660894" y="2241324"/>
-                  </a:lnTo>
-                  <a:lnTo>
-                    <a:pt x="6732517" y="2244512"/>
-                  </a:lnTo>
-                  <a:lnTo>
-                    <a:pt x="6804139" y="2247683"/>
-                  </a:lnTo>
-                  <a:lnTo>
-                    <a:pt x="6875762" y="2250840"/>
-                  </a:lnTo>
-                  <a:lnTo>
-                    <a:pt x="6947385" y="2253981"/>
-                  </a:lnTo>
-                  <a:lnTo>
-                    <a:pt x="7019007" y="2257108"/>
-                  </a:lnTo>
-                  <a:lnTo>
-                    <a:pt x="7090630" y="2260219"/>
-                  </a:lnTo>
-                </a:path>
-              </a:pathLst>
-            </a:custGeom>
-          </p:spPr>
-          <p:txBody>
-            <a:bodyPr/>
-            <a:lstStyle/>
-            <a:p/>
-          </p:txBody>
-        </p:sp>
-        <p:sp>
-          <p:nvSpPr>
             <p:cNvPr id="22" name="pl22"/>
             <p:cNvSpPr/>
             <p:nvPr/>
           </p:nvSpPr>
           <p:spPr>
             <a:xfrm>
-              <a:off x="1172049" y="4521118"/>
-              <a:ext cx="7090630" cy="839938"/>
+              <a:off x="1235312" y="2352925"/>
+              <a:ext cx="6964104" cy="815660"/>
             </a:xfrm>
             <a:custGeom>
               <a:avLst/>
               <a:pathLst>
-                <a:path w="7090630" h="839938">
+                <a:path w="6964104" h="815660">
                   <a:moveTo>
-                    <a:pt x="7090630" y="839938"/>
+                    <a:pt x="0" y="0"/>
                   </a:moveTo>
                   <a:lnTo>
-                    <a:pt x="7019007" y="834526"/>
-                  </a:lnTo>
-                  <a:lnTo>
-                    <a:pt x="6947385" y="828964"/>
-                  </a:lnTo>
-                  <a:lnTo>
-                    <a:pt x="6875762" y="823249"/>
-                  </a:lnTo>
-                  <a:lnTo>
-                    <a:pt x="6804139" y="817376"/>
-                  </a:lnTo>
-                  <a:lnTo>
-                    <a:pt x="6732517" y="811341"/>
-                  </a:lnTo>
-                  <a:lnTo>
-                    <a:pt x="6660894" y="805140"/>
-                  </a:lnTo>
-                  <a:lnTo>
-                    <a:pt x="6589272" y="798767"/>
-                  </a:lnTo>
-                  <a:lnTo>
-                    <a:pt x="6517649" y="792219"/>
-                  </a:lnTo>
-                  <a:lnTo>
-                    <a:pt x="6446027" y="785490"/>
-                  </a:lnTo>
-                  <a:lnTo>
-                    <a:pt x="6374404" y="778575"/>
-                  </a:lnTo>
-                  <a:lnTo>
-                    <a:pt x="6302782" y="771470"/>
-                  </a:lnTo>
-                  <a:lnTo>
-                    <a:pt x="6231159" y="764169"/>
-                  </a:lnTo>
-                  <a:lnTo>
-                    <a:pt x="6159537" y="756666"/>
-                  </a:lnTo>
-                  <a:lnTo>
-                    <a:pt x="6087914" y="748956"/>
-                  </a:lnTo>
-                  <a:lnTo>
-                    <a:pt x="6016292" y="741034"/>
-                  </a:lnTo>
-                  <a:lnTo>
-                    <a:pt x="5944669" y="732893"/>
-                  </a:lnTo>
-                  <a:lnTo>
-                    <a:pt x="5873047" y="724528"/>
-                  </a:lnTo>
-                  <a:lnTo>
-                    <a:pt x="5801424" y="715931"/>
-                  </a:lnTo>
-                  <a:lnTo>
-                    <a:pt x="5729802" y="707098"/>
-                  </a:lnTo>
-                  <a:lnTo>
-                    <a:pt x="5658179" y="698021"/>
-                  </a:lnTo>
-                  <a:lnTo>
-                    <a:pt x="5586557" y="688693"/>
-                  </a:lnTo>
-                  <a:lnTo>
-                    <a:pt x="5514934" y="679108"/>
-                  </a:lnTo>
-                  <a:lnTo>
-                    <a:pt x="5443311" y="669259"/>
-                  </a:lnTo>
-                  <a:lnTo>
-                    <a:pt x="5371689" y="659138"/>
-                  </a:lnTo>
-                  <a:lnTo>
-                    <a:pt x="5300066" y="648737"/>
-                  </a:lnTo>
-                  <a:lnTo>
-                    <a:pt x="5228444" y="638050"/>
-                  </a:lnTo>
-                  <a:lnTo>
-                    <a:pt x="5156821" y="627068"/>
-                  </a:lnTo>
-                  <a:lnTo>
-                    <a:pt x="5085199" y="615783"/>
-                  </a:lnTo>
-                  <a:lnTo>
-                    <a:pt x="5013576" y="604187"/>
-                  </a:lnTo>
-                  <a:lnTo>
-                    <a:pt x="4941954" y="592271"/>
-                  </a:lnTo>
-                  <a:lnTo>
-                    <a:pt x="4870331" y="580026"/>
-                  </a:lnTo>
-                  <a:lnTo>
-                    <a:pt x="4798709" y="567443"/>
-                  </a:lnTo>
-                  <a:lnTo>
-                    <a:pt x="4727086" y="554513"/>
-                  </a:lnTo>
-                  <a:lnTo>
-                    <a:pt x="4655464" y="541227"/>
-                  </a:lnTo>
-                  <a:lnTo>
-                    <a:pt x="4583841" y="527573"/>
-                  </a:lnTo>
-                  <a:lnTo>
-                    <a:pt x="4512219" y="513544"/>
-                  </a:lnTo>
-                  <a:lnTo>
-                    <a:pt x="4440596" y="499127"/>
-                  </a:lnTo>
-                  <a:lnTo>
-                    <a:pt x="4368974" y="484312"/>
-                  </a:lnTo>
-                  <a:lnTo>
-                    <a:pt x="4297351" y="469089"/>
-                  </a:lnTo>
-                  <a:lnTo>
-                    <a:pt x="4225729" y="453446"/>
-                  </a:lnTo>
-                  <a:lnTo>
-                    <a:pt x="4154106" y="437371"/>
-                  </a:lnTo>
-                  <a:lnTo>
-                    <a:pt x="4082483" y="420853"/>
-                  </a:lnTo>
-                  <a:lnTo>
-                    <a:pt x="4010861" y="403879"/>
-                  </a:lnTo>
-                  <a:lnTo>
-                    <a:pt x="3939238" y="386437"/>
-                  </a:lnTo>
-                  <a:lnTo>
-                    <a:pt x="3867616" y="368513"/>
-                  </a:lnTo>
-                  <a:lnTo>
-                    <a:pt x="3795993" y="350096"/>
-                  </a:lnTo>
-                  <a:lnTo>
-                    <a:pt x="3724371" y="331170"/>
-                  </a:lnTo>
-                  <a:lnTo>
-                    <a:pt x="3652748" y="311722"/>
-                  </a:lnTo>
-                  <a:lnTo>
-                    <a:pt x="3581126" y="291737"/>
-                  </a:lnTo>
-                  <a:lnTo>
-                    <a:pt x="3509503" y="271201"/>
-                  </a:lnTo>
-                  <a:lnTo>
-                    <a:pt x="3437881" y="250099"/>
-                  </a:lnTo>
-                  <a:lnTo>
-                    <a:pt x="3366258" y="228414"/>
-                  </a:lnTo>
-                  <a:lnTo>
-                    <a:pt x="3294636" y="206572"/>
-                  </a:lnTo>
-                  <a:lnTo>
-                    <a:pt x="3223013" y="202553"/>
-                  </a:lnTo>
-                  <a:lnTo>
-                    <a:pt x="3151391" y="198514"/>
-                  </a:lnTo>
-                  <a:lnTo>
-                    <a:pt x="3079768" y="194455"/>
-                  </a:lnTo>
-                  <a:lnTo>
-                    <a:pt x="3008146" y="190377"/>
-                  </a:lnTo>
-                  <a:lnTo>
-                    <a:pt x="2936523" y="186278"/>
-                  </a:lnTo>
-                  <a:lnTo>
-                    <a:pt x="2864901" y="182160"/>
-                  </a:lnTo>
-                  <a:lnTo>
-                    <a:pt x="2793278" y="178023"/>
-                  </a:lnTo>
-                  <a:lnTo>
-                    <a:pt x="2721655" y="173865"/>
-                  </a:lnTo>
-                  <a:lnTo>
-                    <a:pt x="2650033" y="169686"/>
-                  </a:lnTo>
-                  <a:lnTo>
-                    <a:pt x="2578410" y="165488"/>
-                  </a:lnTo>
-                  <a:lnTo>
-                    <a:pt x="2506788" y="161269"/>
-                  </a:lnTo>
-                  <a:lnTo>
-                    <a:pt x="2435165" y="157030"/>
-                  </a:lnTo>
-                  <a:lnTo>
-                    <a:pt x="2363543" y="152770"/>
-                  </a:lnTo>
-                  <a:lnTo>
-                    <a:pt x="2291920" y="148490"/>
-                  </a:lnTo>
-                  <a:lnTo>
-                    <a:pt x="2220298" y="144189"/>
-                  </a:lnTo>
-                  <a:lnTo>
-                    <a:pt x="2148675" y="139867"/>
-                  </a:lnTo>
-                  <a:lnTo>
-                    <a:pt x="2077053" y="135524"/>
-                  </a:lnTo>
-                  <a:lnTo>
-                    <a:pt x="2005430" y="131160"/>
-                  </a:lnTo>
-                  <a:lnTo>
-                    <a:pt x="1933808" y="126775"/>
-                  </a:lnTo>
-                  <a:lnTo>
-                    <a:pt x="1862185" y="122369"/>
-                  </a:lnTo>
-                  <a:lnTo>
-                    <a:pt x="1790563" y="117941"/>
-                  </a:lnTo>
-                  <a:lnTo>
-                    <a:pt x="1718940" y="113492"/>
-                  </a:lnTo>
-                  <a:lnTo>
-                    <a:pt x="1647318" y="109022"/>
-                  </a:lnTo>
-                  <a:lnTo>
-                    <a:pt x="1575695" y="104529"/>
-                  </a:lnTo>
-                  <a:lnTo>
-                    <a:pt x="1504073" y="100015"/>
-                  </a:lnTo>
-                  <a:lnTo>
-                    <a:pt x="1432450" y="95479"/>
-                  </a:lnTo>
-                  <a:lnTo>
-                    <a:pt x="1360827" y="90921"/>
-                  </a:lnTo>
-                  <a:lnTo>
-                    <a:pt x="1289205" y="86341"/>
-                  </a:lnTo>
-                  <a:lnTo>
-                    <a:pt x="1217582" y="81739"/>
-                  </a:lnTo>
-                  <a:lnTo>
-                    <a:pt x="1145960" y="77115"/>
-                  </a:lnTo>
-                  <a:lnTo>
-                    <a:pt x="1074337" y="72468"/>
-                  </a:lnTo>
-                  <a:lnTo>
-                    <a:pt x="1002715" y="67798"/>
-                  </a:lnTo>
-                  <a:lnTo>
-                    <a:pt x="931092" y="63106"/>
-                  </a:lnTo>
-                  <a:lnTo>
-                    <a:pt x="859470" y="58391"/>
-                  </a:lnTo>
-                  <a:lnTo>
-                    <a:pt x="787847" y="53654"/>
-                  </a:lnTo>
-                  <a:lnTo>
-                    <a:pt x="716225" y="48893"/>
-                  </a:lnTo>
-                  <a:lnTo>
-                    <a:pt x="644602" y="44109"/>
-                  </a:lnTo>
-                  <a:lnTo>
-                    <a:pt x="572980" y="39302"/>
-                  </a:lnTo>
-                  <a:lnTo>
-                    <a:pt x="501357" y="34472"/>
-                  </a:lnTo>
-                  <a:lnTo>
-                    <a:pt x="429735" y="29619"/>
-                  </a:lnTo>
-                  <a:lnTo>
-                    <a:pt x="358112" y="24742"/>
-                  </a:lnTo>
-                  <a:lnTo>
-                    <a:pt x="286490" y="19841"/>
-                  </a:lnTo>
-                  <a:lnTo>
-                    <a:pt x="214867" y="14916"/>
-                  </a:lnTo>
-                  <a:lnTo>
-                    <a:pt x="143245" y="9968"/>
-                  </a:lnTo>
-                  <a:lnTo>
-                    <a:pt x="71622" y="4996"/>
-                  </a:lnTo>
-                  <a:lnTo>
-                    <a:pt x="0" y="0"/>
+                    <a:pt x="70344" y="28118"/>
+                  </a:lnTo>
+                  <a:lnTo>
+                    <a:pt x="140688" y="55482"/>
+                  </a:lnTo>
+                  <a:lnTo>
+                    <a:pt x="211033" y="82110"/>
+                  </a:lnTo>
+                  <a:lnTo>
+                    <a:pt x="281377" y="108025"/>
+                  </a:lnTo>
+                  <a:lnTo>
+                    <a:pt x="351722" y="133243"/>
+                  </a:lnTo>
+                  <a:lnTo>
+                    <a:pt x="422066" y="157784"/>
+                  </a:lnTo>
+                  <a:lnTo>
+                    <a:pt x="492411" y="181667"/>
+                  </a:lnTo>
+                  <a:lnTo>
+                    <a:pt x="562755" y="204908"/>
+                  </a:lnTo>
+                  <a:lnTo>
+                    <a:pt x="633100" y="227525"/>
+                  </a:lnTo>
+                  <a:lnTo>
+                    <a:pt x="703444" y="249535"/>
+                  </a:lnTo>
+                  <a:lnTo>
+                    <a:pt x="773789" y="270955"/>
+                  </a:lnTo>
+                  <a:lnTo>
+                    <a:pt x="844133" y="291799"/>
+                  </a:lnTo>
+                  <a:lnTo>
+                    <a:pt x="914478" y="312083"/>
+                  </a:lnTo>
+                  <a:lnTo>
+                    <a:pt x="984822" y="331823"/>
+                  </a:lnTo>
+                  <a:lnTo>
+                    <a:pt x="1055167" y="351033"/>
+                  </a:lnTo>
+                  <a:lnTo>
+                    <a:pt x="1125511" y="369728"/>
+                  </a:lnTo>
+                  <a:lnTo>
+                    <a:pt x="1195856" y="387920"/>
+                  </a:lnTo>
+                  <a:lnTo>
+                    <a:pt x="1266200" y="405624"/>
+                  </a:lnTo>
+                  <a:lnTo>
+                    <a:pt x="1336545" y="422853"/>
+                  </a:lnTo>
+                  <a:lnTo>
+                    <a:pt x="1406889" y="439619"/>
+                  </a:lnTo>
+                  <a:lnTo>
+                    <a:pt x="1477234" y="455935"/>
+                  </a:lnTo>
+                  <a:lnTo>
+                    <a:pt x="1547578" y="471813"/>
+                  </a:lnTo>
+                  <a:lnTo>
+                    <a:pt x="1617923" y="487265"/>
+                  </a:lnTo>
+                  <a:lnTo>
+                    <a:pt x="1688267" y="502302"/>
+                  </a:lnTo>
+                  <a:lnTo>
+                    <a:pt x="1758612" y="516935"/>
+                  </a:lnTo>
+                  <a:lnTo>
+                    <a:pt x="1828956" y="531176"/>
+                  </a:lnTo>
+                  <a:lnTo>
+                    <a:pt x="1899301" y="545034"/>
+                  </a:lnTo>
+                  <a:lnTo>
+                    <a:pt x="1969645" y="558520"/>
+                  </a:lnTo>
+                  <a:lnTo>
+                    <a:pt x="2039990" y="571644"/>
+                  </a:lnTo>
+                  <a:lnTo>
+                    <a:pt x="2110334" y="584416"/>
+                  </a:lnTo>
+                  <a:lnTo>
+                    <a:pt x="2180679" y="596844"/>
+                  </a:lnTo>
+                  <a:lnTo>
+                    <a:pt x="2251023" y="608939"/>
+                  </a:lnTo>
+                  <a:lnTo>
+                    <a:pt x="2321368" y="620710"/>
+                  </a:lnTo>
+                  <a:lnTo>
+                    <a:pt x="2391712" y="632164"/>
+                  </a:lnTo>
+                  <a:lnTo>
+                    <a:pt x="2462057" y="643311"/>
+                  </a:lnTo>
+                  <a:lnTo>
+                    <a:pt x="2532401" y="654159"/>
+                  </a:lnTo>
+                  <a:lnTo>
+                    <a:pt x="2602746" y="664715"/>
+                  </a:lnTo>
+                  <a:lnTo>
+                    <a:pt x="2673090" y="674988"/>
+                  </a:lnTo>
+                  <a:lnTo>
+                    <a:pt x="2743435" y="684985"/>
+                  </a:lnTo>
+                  <a:lnTo>
+                    <a:pt x="2813779" y="694714"/>
+                  </a:lnTo>
+                  <a:lnTo>
+                    <a:pt x="2884124" y="704182"/>
+                  </a:lnTo>
+                  <a:lnTo>
+                    <a:pt x="2954468" y="713395"/>
+                  </a:lnTo>
+                  <a:lnTo>
+                    <a:pt x="3024813" y="722361"/>
+                  </a:lnTo>
+                  <a:lnTo>
+                    <a:pt x="3095157" y="731087"/>
+                  </a:lnTo>
+                  <a:lnTo>
+                    <a:pt x="3165502" y="739578"/>
+                  </a:lnTo>
+                  <a:lnTo>
+                    <a:pt x="3235846" y="747841"/>
+                  </a:lnTo>
+                  <a:lnTo>
+                    <a:pt x="3306191" y="749444"/>
+                  </a:lnTo>
+                  <a:lnTo>
+                    <a:pt x="3376535" y="750880"/>
+                  </a:lnTo>
+                  <a:lnTo>
+                    <a:pt x="3446880" y="752310"/>
+                  </a:lnTo>
+                  <a:lnTo>
+                    <a:pt x="3517224" y="753733"/>
+                  </a:lnTo>
+                  <a:lnTo>
+                    <a:pt x="3587569" y="755149"/>
+                  </a:lnTo>
+                  <a:lnTo>
+                    <a:pt x="3657913" y="756558"/>
+                  </a:lnTo>
+                  <a:lnTo>
+                    <a:pt x="3728257" y="757960"/>
+                  </a:lnTo>
+                  <a:lnTo>
+                    <a:pt x="3798602" y="759356"/>
+                  </a:lnTo>
+                  <a:lnTo>
+                    <a:pt x="3868946" y="760745"/>
+                  </a:lnTo>
+                  <a:lnTo>
+                    <a:pt x="3939291" y="762127"/>
+                  </a:lnTo>
+                  <a:lnTo>
+                    <a:pt x="4009635" y="763502"/>
+                  </a:lnTo>
+                  <a:lnTo>
+                    <a:pt x="4079980" y="764871"/>
+                  </a:lnTo>
+                  <a:lnTo>
+                    <a:pt x="4150324" y="766234"/>
+                  </a:lnTo>
+                  <a:lnTo>
+                    <a:pt x="4220669" y="767589"/>
+                  </a:lnTo>
+                  <a:lnTo>
+                    <a:pt x="4291013" y="768938"/>
+                  </a:lnTo>
+                  <a:lnTo>
+                    <a:pt x="4361358" y="770281"/>
+                  </a:lnTo>
+                  <a:lnTo>
+                    <a:pt x="4431702" y="771617"/>
+                  </a:lnTo>
+                  <a:lnTo>
+                    <a:pt x="4502047" y="772947"/>
+                  </a:lnTo>
+                  <a:lnTo>
+                    <a:pt x="4572391" y="774270"/>
+                  </a:lnTo>
+                  <a:lnTo>
+                    <a:pt x="4642736" y="775587"/>
+                  </a:lnTo>
+                  <a:lnTo>
+                    <a:pt x="4713080" y="776898"/>
+                  </a:lnTo>
+                  <a:lnTo>
+                    <a:pt x="4783425" y="778202"/>
+                  </a:lnTo>
+                  <a:lnTo>
+                    <a:pt x="4853769" y="779500"/>
+                  </a:lnTo>
+                  <a:lnTo>
+                    <a:pt x="4924114" y="780792"/>
+                  </a:lnTo>
+                  <a:lnTo>
+                    <a:pt x="4994458" y="782077"/>
+                  </a:lnTo>
+                  <a:lnTo>
+                    <a:pt x="5064803" y="783356"/>
+                  </a:lnTo>
+                  <a:lnTo>
+                    <a:pt x="5135147" y="784629"/>
+                  </a:lnTo>
+                  <a:lnTo>
+                    <a:pt x="5205492" y="785896"/>
+                  </a:lnTo>
+                  <a:lnTo>
+                    <a:pt x="5275836" y="787157"/>
+                  </a:lnTo>
+                  <a:lnTo>
+                    <a:pt x="5346181" y="788412"/>
+                  </a:lnTo>
+                  <a:lnTo>
+                    <a:pt x="5416525" y="789661"/>
+                  </a:lnTo>
+                  <a:lnTo>
+                    <a:pt x="5486870" y="790903"/>
+                  </a:lnTo>
+                  <a:lnTo>
+                    <a:pt x="5557214" y="792140"/>
+                  </a:lnTo>
+                  <a:lnTo>
+                    <a:pt x="5627559" y="793371"/>
+                  </a:lnTo>
+                  <a:lnTo>
+                    <a:pt x="5697903" y="794596"/>
+                  </a:lnTo>
+                  <a:lnTo>
+                    <a:pt x="5768248" y="795815"/>
+                  </a:lnTo>
+                  <a:lnTo>
+                    <a:pt x="5838592" y="797028"/>
+                  </a:lnTo>
+                  <a:lnTo>
+                    <a:pt x="5908937" y="798235"/>
+                  </a:lnTo>
+                  <a:lnTo>
+                    <a:pt x="5979281" y="799436"/>
+                  </a:lnTo>
+                  <a:lnTo>
+                    <a:pt x="6049626" y="800632"/>
+                  </a:lnTo>
+                  <a:lnTo>
+                    <a:pt x="6119970" y="801822"/>
+                  </a:lnTo>
+                  <a:lnTo>
+                    <a:pt x="6190315" y="803006"/>
+                  </a:lnTo>
+                  <a:lnTo>
+                    <a:pt x="6260659" y="804184"/>
+                  </a:lnTo>
+                  <a:lnTo>
+                    <a:pt x="6331004" y="805357"/>
+                  </a:lnTo>
+                  <a:lnTo>
+                    <a:pt x="6401348" y="806524"/>
+                  </a:lnTo>
+                  <a:lnTo>
+                    <a:pt x="6471693" y="807685"/>
+                  </a:lnTo>
+                  <a:lnTo>
+                    <a:pt x="6542037" y="808841"/>
+                  </a:lnTo>
+                  <a:lnTo>
+                    <a:pt x="6612382" y="809991"/>
+                  </a:lnTo>
+                  <a:lnTo>
+                    <a:pt x="6682726" y="811136"/>
+                  </a:lnTo>
+                  <a:lnTo>
+                    <a:pt x="6753071" y="812275"/>
+                  </a:lnTo>
+                  <a:lnTo>
+                    <a:pt x="6823415" y="813409"/>
+                  </a:lnTo>
+                  <a:lnTo>
+                    <a:pt x="6893760" y="814537"/>
+                  </a:lnTo>
+                  <a:lnTo>
+                    <a:pt x="6964104" y="815660"/>
                   </a:lnTo>
                 </a:path>
               </a:pathLst>
@@ -4240,312 +3950,637 @@
           </p:nvSpPr>
           <p:spPr>
             <a:xfrm>
-              <a:off x="1172049" y="3823134"/>
-              <a:ext cx="7090630" cy="1379192"/>
+              <a:off x="1235312" y="3026378"/>
+              <a:ext cx="6964104" cy="303114"/>
             </a:xfrm>
             <a:custGeom>
               <a:avLst/>
               <a:pathLst>
-                <a:path w="7090630" h="1379192">
+                <a:path w="6964104" h="303114">
+                  <a:moveTo>
+                    <a:pt x="6964104" y="303114"/>
+                  </a:moveTo>
+                  <a:lnTo>
+                    <a:pt x="6893760" y="301160"/>
+                  </a:lnTo>
+                  <a:lnTo>
+                    <a:pt x="6823415" y="299153"/>
+                  </a:lnTo>
+                  <a:lnTo>
+                    <a:pt x="6753071" y="297091"/>
+                  </a:lnTo>
+                  <a:lnTo>
+                    <a:pt x="6682726" y="294971"/>
+                  </a:lnTo>
+                  <a:lnTo>
+                    <a:pt x="6612382" y="292794"/>
+                  </a:lnTo>
+                  <a:lnTo>
+                    <a:pt x="6542037" y="290556"/>
+                  </a:lnTo>
+                  <a:lnTo>
+                    <a:pt x="6471693" y="288256"/>
+                  </a:lnTo>
+                  <a:lnTo>
+                    <a:pt x="6401348" y="285893"/>
+                  </a:lnTo>
+                  <a:lnTo>
+                    <a:pt x="6331004" y="283465"/>
+                  </a:lnTo>
+                  <a:lnTo>
+                    <a:pt x="6260659" y="280969"/>
+                  </a:lnTo>
+                  <a:lnTo>
+                    <a:pt x="6190315" y="278405"/>
+                  </a:lnTo>
+                  <a:lnTo>
+                    <a:pt x="6119970" y="275770"/>
+                  </a:lnTo>
+                  <a:lnTo>
+                    <a:pt x="6049626" y="273063"/>
+                  </a:lnTo>
+                  <a:lnTo>
+                    <a:pt x="5979281" y="270280"/>
+                  </a:lnTo>
+                  <a:lnTo>
+                    <a:pt x="5908937" y="267421"/>
+                  </a:lnTo>
+                  <a:lnTo>
+                    <a:pt x="5838592" y="264484"/>
+                  </a:lnTo>
+                  <a:lnTo>
+                    <a:pt x="5768248" y="261465"/>
+                  </a:lnTo>
+                  <a:lnTo>
+                    <a:pt x="5697903" y="258362"/>
+                  </a:lnTo>
+                  <a:lnTo>
+                    <a:pt x="5627559" y="255175"/>
+                  </a:lnTo>
+                  <a:lnTo>
+                    <a:pt x="5557214" y="251899"/>
+                  </a:lnTo>
+                  <a:lnTo>
+                    <a:pt x="5486870" y="248533"/>
+                  </a:lnTo>
+                  <a:lnTo>
+                    <a:pt x="5416525" y="245074"/>
+                  </a:lnTo>
+                  <a:lnTo>
+                    <a:pt x="5346181" y="241519"/>
+                  </a:lnTo>
+                  <a:lnTo>
+                    <a:pt x="5275836" y="237867"/>
+                  </a:lnTo>
+                  <a:lnTo>
+                    <a:pt x="5205492" y="234114"/>
+                  </a:lnTo>
+                  <a:lnTo>
+                    <a:pt x="5135147" y="230257"/>
+                  </a:lnTo>
+                  <a:lnTo>
+                    <a:pt x="5064803" y="226294"/>
+                  </a:lnTo>
+                  <a:lnTo>
+                    <a:pt x="4994458" y="222221"/>
+                  </a:lnTo>
+                  <a:lnTo>
+                    <a:pt x="4924114" y="218037"/>
+                  </a:lnTo>
+                  <a:lnTo>
+                    <a:pt x="4853769" y="213736"/>
+                  </a:lnTo>
+                  <a:lnTo>
+                    <a:pt x="4783425" y="209317"/>
+                  </a:lnTo>
+                  <a:lnTo>
+                    <a:pt x="4713080" y="204777"/>
+                  </a:lnTo>
+                  <a:lnTo>
+                    <a:pt x="4642736" y="200110"/>
+                  </a:lnTo>
+                  <a:lnTo>
+                    <a:pt x="4572391" y="195316"/>
+                  </a:lnTo>
+                  <a:lnTo>
+                    <a:pt x="4502047" y="190389"/>
+                  </a:lnTo>
+                  <a:lnTo>
+                    <a:pt x="4431702" y="185325"/>
+                  </a:lnTo>
+                  <a:lnTo>
+                    <a:pt x="4361358" y="180123"/>
+                  </a:lnTo>
+                  <a:lnTo>
+                    <a:pt x="4291013" y="174777"/>
+                  </a:lnTo>
+                  <a:lnTo>
+                    <a:pt x="4220669" y="169283"/>
+                  </a:lnTo>
+                  <a:lnTo>
+                    <a:pt x="4150324" y="163638"/>
+                  </a:lnTo>
+                  <a:lnTo>
+                    <a:pt x="4079980" y="157837"/>
+                  </a:lnTo>
+                  <a:lnTo>
+                    <a:pt x="4009635" y="151876"/>
+                  </a:lnTo>
+                  <a:lnTo>
+                    <a:pt x="3939291" y="145750"/>
+                  </a:lnTo>
+                  <a:lnTo>
+                    <a:pt x="3868946" y="139456"/>
+                  </a:lnTo>
+                  <a:lnTo>
+                    <a:pt x="3798602" y="132987"/>
+                  </a:lnTo>
+                  <a:lnTo>
+                    <a:pt x="3728257" y="126341"/>
+                  </a:lnTo>
+                  <a:lnTo>
+                    <a:pt x="3657913" y="119511"/>
+                  </a:lnTo>
+                  <a:lnTo>
+                    <a:pt x="3587569" y="112493"/>
+                  </a:lnTo>
+                  <a:lnTo>
+                    <a:pt x="3517224" y="105281"/>
+                  </a:lnTo>
+                  <a:lnTo>
+                    <a:pt x="3446880" y="97870"/>
+                  </a:lnTo>
+                  <a:lnTo>
+                    <a:pt x="3376535" y="90254"/>
+                  </a:lnTo>
+                  <a:lnTo>
+                    <a:pt x="3306191" y="82429"/>
+                  </a:lnTo>
+                  <a:lnTo>
+                    <a:pt x="3235846" y="74547"/>
+                  </a:lnTo>
+                  <a:lnTo>
+                    <a:pt x="3165502" y="73096"/>
+                  </a:lnTo>
+                  <a:lnTo>
+                    <a:pt x="3095157" y="71639"/>
+                  </a:lnTo>
+                  <a:lnTo>
+                    <a:pt x="3024813" y="70174"/>
+                  </a:lnTo>
+                  <a:lnTo>
+                    <a:pt x="2954468" y="68702"/>
+                  </a:lnTo>
+                  <a:lnTo>
+                    <a:pt x="2884124" y="67223"/>
+                  </a:lnTo>
+                  <a:lnTo>
+                    <a:pt x="2813779" y="65737"/>
+                  </a:lnTo>
+                  <a:lnTo>
+                    <a:pt x="2743435" y="64244"/>
+                  </a:lnTo>
+                  <a:lnTo>
+                    <a:pt x="2673090" y="62743"/>
+                  </a:lnTo>
+                  <a:lnTo>
+                    <a:pt x="2602746" y="61236"/>
+                  </a:lnTo>
+                  <a:lnTo>
+                    <a:pt x="2532401" y="59720"/>
+                  </a:lnTo>
+                  <a:lnTo>
+                    <a:pt x="2462057" y="58198"/>
+                  </a:lnTo>
+                  <a:lnTo>
+                    <a:pt x="2391712" y="56668"/>
+                  </a:lnTo>
+                  <a:lnTo>
+                    <a:pt x="2321368" y="55131"/>
+                  </a:lnTo>
+                  <a:lnTo>
+                    <a:pt x="2251023" y="53586"/>
+                  </a:lnTo>
+                  <a:lnTo>
+                    <a:pt x="2180679" y="52034"/>
+                  </a:lnTo>
+                  <a:lnTo>
+                    <a:pt x="2110334" y="50474"/>
+                  </a:lnTo>
+                  <a:lnTo>
+                    <a:pt x="2039990" y="48907"/>
+                  </a:lnTo>
+                  <a:lnTo>
+                    <a:pt x="1969645" y="47332"/>
+                  </a:lnTo>
+                  <a:lnTo>
+                    <a:pt x="1899301" y="45750"/>
+                  </a:lnTo>
+                  <a:lnTo>
+                    <a:pt x="1828956" y="44160"/>
+                  </a:lnTo>
+                  <a:lnTo>
+                    <a:pt x="1758612" y="42562"/>
+                  </a:lnTo>
+                  <a:lnTo>
+                    <a:pt x="1688267" y="40956"/>
+                  </a:lnTo>
+                  <a:lnTo>
+                    <a:pt x="1617923" y="39343"/>
+                  </a:lnTo>
+                  <a:lnTo>
+                    <a:pt x="1547578" y="37722"/>
+                  </a:lnTo>
+                  <a:lnTo>
+                    <a:pt x="1477234" y="36093"/>
+                  </a:lnTo>
+                  <a:lnTo>
+                    <a:pt x="1406889" y="34456"/>
+                  </a:lnTo>
+                  <a:lnTo>
+                    <a:pt x="1336545" y="32811"/>
+                  </a:lnTo>
+                  <a:lnTo>
+                    <a:pt x="1266200" y="31158"/>
+                  </a:lnTo>
+                  <a:lnTo>
+                    <a:pt x="1195856" y="29497"/>
+                  </a:lnTo>
+                  <a:lnTo>
+                    <a:pt x="1125511" y="27828"/>
+                  </a:lnTo>
+                  <a:lnTo>
+                    <a:pt x="1055167" y="26152"/>
+                  </a:lnTo>
+                  <a:lnTo>
+                    <a:pt x="984822" y="24466"/>
+                  </a:lnTo>
+                  <a:lnTo>
+                    <a:pt x="914478" y="22773"/>
+                  </a:lnTo>
+                  <a:lnTo>
+                    <a:pt x="844133" y="21072"/>
+                  </a:lnTo>
+                  <a:lnTo>
+                    <a:pt x="773789" y="19362"/>
+                  </a:lnTo>
+                  <a:lnTo>
+                    <a:pt x="703444" y="17644"/>
+                  </a:lnTo>
+                  <a:lnTo>
+                    <a:pt x="633100" y="15918"/>
+                  </a:lnTo>
+                  <a:lnTo>
+                    <a:pt x="562755" y="14183"/>
+                  </a:lnTo>
+                  <a:lnTo>
+                    <a:pt x="492411" y="12440"/>
+                  </a:lnTo>
+                  <a:lnTo>
+                    <a:pt x="422066" y="10688"/>
+                  </a:lnTo>
+                  <a:lnTo>
+                    <a:pt x="351722" y="8928"/>
+                  </a:lnTo>
+                  <a:lnTo>
+                    <a:pt x="281377" y="7160"/>
+                  </a:lnTo>
+                  <a:lnTo>
+                    <a:pt x="211033" y="5383"/>
+                  </a:lnTo>
+                  <a:lnTo>
+                    <a:pt x="140688" y="3597"/>
+                  </a:lnTo>
+                  <a:lnTo>
+                    <a:pt x="70344" y="1803"/>
+                  </a:lnTo>
+                  <a:lnTo>
+                    <a:pt x="0" y="0"/>
+                  </a:lnTo>
+                </a:path>
+              </a:pathLst>
+            </a:custGeom>
+          </p:spPr>
+          <p:txBody>
+            <a:bodyPr/>
+            <a:lstStyle/>
+            <a:p/>
+          </p:txBody>
+        </p:sp>
+        <p:sp>
+          <p:nvSpPr>
+            <p:cNvPr id="24" name="pl24"/>
+            <p:cNvSpPr/>
+            <p:nvPr/>
+          </p:nvSpPr>
+          <p:spPr>
+            <a:xfrm>
+              <a:off x="1235312" y="2774492"/>
+              <a:ext cx="6964104" cy="497718"/>
+            </a:xfrm>
+            <a:custGeom>
+              <a:avLst/>
+              <a:pathLst>
+                <a:path w="6964104" h="497718">
                   <a:moveTo>
                     <a:pt x="0" y="0"/>
                   </a:moveTo>
                   <a:lnTo>
-                    <a:pt x="71622" y="27565"/>
-                  </a:lnTo>
-                  <a:lnTo>
-                    <a:pt x="143245" y="54693"/>
-                  </a:lnTo>
-                  <a:lnTo>
-                    <a:pt x="214867" y="81389"/>
-                  </a:lnTo>
-                  <a:lnTo>
-                    <a:pt x="286490" y="107661"/>
-                  </a:lnTo>
-                  <a:lnTo>
-                    <a:pt x="358112" y="133515"/>
-                  </a:lnTo>
-                  <a:lnTo>
-                    <a:pt x="429735" y="158958"/>
-                  </a:lnTo>
-                  <a:lnTo>
-                    <a:pt x="501357" y="183997"/>
-                  </a:lnTo>
-                  <a:lnTo>
-                    <a:pt x="572980" y="208638"/>
-                  </a:lnTo>
-                  <a:lnTo>
-                    <a:pt x="644602" y="232887"/>
-                  </a:lnTo>
-                  <a:lnTo>
-                    <a:pt x="716225" y="256750"/>
-                  </a:lnTo>
-                  <a:lnTo>
-                    <a:pt x="787847" y="280235"/>
-                  </a:lnTo>
-                  <a:lnTo>
-                    <a:pt x="859470" y="303346"/>
-                  </a:lnTo>
-                  <a:lnTo>
-                    <a:pt x="931092" y="326089"/>
-                  </a:lnTo>
-                  <a:lnTo>
-                    <a:pt x="1002715" y="348471"/>
-                  </a:lnTo>
-                  <a:lnTo>
-                    <a:pt x="1074337" y="370498"/>
-                  </a:lnTo>
-                  <a:lnTo>
-                    <a:pt x="1145960" y="392174"/>
-                  </a:lnTo>
-                  <a:lnTo>
-                    <a:pt x="1217582" y="413505"/>
-                  </a:lnTo>
-                  <a:lnTo>
-                    <a:pt x="1289205" y="434498"/>
-                  </a:lnTo>
-                  <a:lnTo>
-                    <a:pt x="1360827" y="455157"/>
-                  </a:lnTo>
-                  <a:lnTo>
-                    <a:pt x="1432450" y="475487"/>
-                  </a:lnTo>
-                  <a:lnTo>
-                    <a:pt x="1504073" y="495494"/>
-                  </a:lnTo>
-                  <a:lnTo>
-                    <a:pt x="1575695" y="515183"/>
-                  </a:lnTo>
-                  <a:lnTo>
-                    <a:pt x="1647318" y="534560"/>
-                  </a:lnTo>
-                  <a:lnTo>
-                    <a:pt x="1718940" y="553628"/>
-                  </a:lnTo>
-                  <a:lnTo>
-                    <a:pt x="1790563" y="572393"/>
-                  </a:lnTo>
-                  <a:lnTo>
-                    <a:pt x="1862185" y="590860"/>
-                  </a:lnTo>
-                  <a:lnTo>
-                    <a:pt x="1933808" y="609033"/>
-                  </a:lnTo>
-                  <a:lnTo>
-                    <a:pt x="2005430" y="626917"/>
-                  </a:lnTo>
-                  <a:lnTo>
-                    <a:pt x="2077053" y="644518"/>
-                  </a:lnTo>
-                  <a:lnTo>
-                    <a:pt x="2148675" y="661838"/>
-                  </a:lnTo>
-                  <a:lnTo>
-                    <a:pt x="2220298" y="678883"/>
-                  </a:lnTo>
-                  <a:lnTo>
-                    <a:pt x="2291920" y="695657"/>
-                  </a:lnTo>
-                  <a:lnTo>
-                    <a:pt x="2363543" y="712164"/>
-                  </a:lnTo>
-                  <a:lnTo>
-                    <a:pt x="2435165" y="728409"/>
-                  </a:lnTo>
-                  <a:lnTo>
-                    <a:pt x="2506788" y="744396"/>
-                  </a:lnTo>
-                  <a:lnTo>
-                    <a:pt x="2578410" y="760129"/>
-                  </a:lnTo>
-                  <a:lnTo>
-                    <a:pt x="2650033" y="775611"/>
-                  </a:lnTo>
-                  <a:lnTo>
-                    <a:pt x="2721655" y="790848"/>
-                  </a:lnTo>
-                  <a:lnTo>
-                    <a:pt x="2793278" y="805842"/>
-                  </a:lnTo>
-                  <a:lnTo>
-                    <a:pt x="2864901" y="820598"/>
-                  </a:lnTo>
-                  <a:lnTo>
-                    <a:pt x="2936523" y="835119"/>
-                  </a:lnTo>
-                  <a:lnTo>
-                    <a:pt x="3008146" y="849410"/>
-                  </a:lnTo>
-                  <a:lnTo>
-                    <a:pt x="3079768" y="863473"/>
-                  </a:lnTo>
-                  <a:lnTo>
-                    <a:pt x="3151391" y="877313"/>
-                  </a:lnTo>
-                  <a:lnTo>
-                    <a:pt x="3223013" y="890933"/>
-                  </a:lnTo>
-                  <a:lnTo>
-                    <a:pt x="3294636" y="904336"/>
-                  </a:lnTo>
-                  <a:lnTo>
-                    <a:pt x="3366258" y="917526"/>
-                  </a:lnTo>
-                  <a:lnTo>
-                    <a:pt x="3437881" y="930507"/>
-                  </a:lnTo>
-                  <a:lnTo>
-                    <a:pt x="3509503" y="943281"/>
-                  </a:lnTo>
-                  <a:lnTo>
-                    <a:pt x="3581126" y="955852"/>
-                  </a:lnTo>
-                  <a:lnTo>
-                    <a:pt x="3652748" y="968223"/>
-                  </a:lnTo>
-                  <a:lnTo>
-                    <a:pt x="3724371" y="980398"/>
-                  </a:lnTo>
-                  <a:lnTo>
-                    <a:pt x="3795993" y="992379"/>
-                  </a:lnTo>
-                  <a:lnTo>
-                    <a:pt x="3867616" y="1004170"/>
-                  </a:lnTo>
-                  <a:lnTo>
-                    <a:pt x="3939238" y="1015773"/>
-                  </a:lnTo>
-                  <a:lnTo>
-                    <a:pt x="4010861" y="1027192"/>
-                  </a:lnTo>
-                  <a:lnTo>
-                    <a:pt x="4082483" y="1038429"/>
-                  </a:lnTo>
-                  <a:lnTo>
-                    <a:pt x="4154106" y="1049488"/>
-                  </a:lnTo>
-                  <a:lnTo>
-                    <a:pt x="4225729" y="1060371"/>
-                  </a:lnTo>
-                  <a:lnTo>
-                    <a:pt x="4297351" y="1071081"/>
-                  </a:lnTo>
-                  <a:lnTo>
-                    <a:pt x="4368974" y="1081620"/>
-                  </a:lnTo>
-                  <a:lnTo>
-                    <a:pt x="4440596" y="1091992"/>
-                  </a:lnTo>
-                  <a:lnTo>
-                    <a:pt x="4512219" y="1102200"/>
-                  </a:lnTo>
-                  <a:lnTo>
-                    <a:pt x="4583841" y="1112244"/>
-                  </a:lnTo>
-                  <a:lnTo>
-                    <a:pt x="4655464" y="1122130"/>
-                  </a:lnTo>
-                  <a:lnTo>
-                    <a:pt x="4727086" y="1131858"/>
-                  </a:lnTo>
-                  <a:lnTo>
-                    <a:pt x="4798709" y="1141431"/>
-                  </a:lnTo>
-                  <a:lnTo>
-                    <a:pt x="4870331" y="1150853"/>
-                  </a:lnTo>
-                  <a:lnTo>
-                    <a:pt x="4941954" y="1160124"/>
-                  </a:lnTo>
-                  <a:lnTo>
-                    <a:pt x="5013576" y="1169249"/>
-                  </a:lnTo>
-                  <a:lnTo>
-                    <a:pt x="5085199" y="1178228"/>
-                  </a:lnTo>
-                  <a:lnTo>
-                    <a:pt x="5156821" y="1187064"/>
-                  </a:lnTo>
-                  <a:lnTo>
-                    <a:pt x="5228444" y="1195760"/>
-                  </a:lnTo>
-                  <a:lnTo>
-                    <a:pt x="5300066" y="1204318"/>
-                  </a:lnTo>
-                  <a:lnTo>
-                    <a:pt x="5371689" y="1212740"/>
-                  </a:lnTo>
-                  <a:lnTo>
-                    <a:pt x="5443311" y="1221027"/>
-                  </a:lnTo>
-                  <a:lnTo>
-                    <a:pt x="5514934" y="1229183"/>
-                  </a:lnTo>
-                  <a:lnTo>
-                    <a:pt x="5586557" y="1237210"/>
-                  </a:lnTo>
-                  <a:lnTo>
-                    <a:pt x="5658179" y="1245109"/>
-                  </a:lnTo>
-                  <a:lnTo>
-                    <a:pt x="5729802" y="1252882"/>
-                  </a:lnTo>
-                  <a:lnTo>
-                    <a:pt x="5801424" y="1260532"/>
-                  </a:lnTo>
-                  <a:lnTo>
-                    <a:pt x="5873047" y="1268060"/>
-                  </a:lnTo>
-                  <a:lnTo>
-                    <a:pt x="5944669" y="1275468"/>
-                  </a:lnTo>
-                  <a:lnTo>
-                    <a:pt x="6016292" y="1282759"/>
-                  </a:lnTo>
-                  <a:lnTo>
-                    <a:pt x="6087914" y="1289934"/>
-                  </a:lnTo>
-                  <a:lnTo>
-                    <a:pt x="6159537" y="1296994"/>
-                  </a:lnTo>
-                  <a:lnTo>
-                    <a:pt x="6231159" y="1303943"/>
-                  </a:lnTo>
-                  <a:lnTo>
-                    <a:pt x="6302782" y="1310781"/>
-                  </a:lnTo>
-                  <a:lnTo>
-                    <a:pt x="6374404" y="1317510"/>
-                  </a:lnTo>
-                  <a:lnTo>
-                    <a:pt x="6446027" y="1324133"/>
-                  </a:lnTo>
-                  <a:lnTo>
-                    <a:pt x="6517649" y="1330650"/>
-                  </a:lnTo>
-                  <a:lnTo>
-                    <a:pt x="6589272" y="1337063"/>
-                  </a:lnTo>
-                  <a:lnTo>
-                    <a:pt x="6660894" y="1343375"/>
-                  </a:lnTo>
-                  <a:lnTo>
-                    <a:pt x="6732517" y="1349586"/>
-                  </a:lnTo>
-                  <a:lnTo>
-                    <a:pt x="6804139" y="1355699"/>
-                  </a:lnTo>
-                  <a:lnTo>
-                    <a:pt x="6875762" y="1361714"/>
-                  </a:lnTo>
-                  <a:lnTo>
-                    <a:pt x="6947385" y="1367634"/>
-                  </a:lnTo>
-                  <a:lnTo>
-                    <a:pt x="7019007" y="1373459"/>
-                  </a:lnTo>
-                  <a:lnTo>
-                    <a:pt x="7090630" y="1379192"/>
+                    <a:pt x="70344" y="9947"/>
+                  </a:lnTo>
+                  <a:lnTo>
+                    <a:pt x="140688" y="19737"/>
+                  </a:lnTo>
+                  <a:lnTo>
+                    <a:pt x="211033" y="29371"/>
+                  </a:lnTo>
+                  <a:lnTo>
+                    <a:pt x="281377" y="38852"/>
+                  </a:lnTo>
+                  <a:lnTo>
+                    <a:pt x="351722" y="48182"/>
+                  </a:lnTo>
+                  <a:lnTo>
+                    <a:pt x="422066" y="57364"/>
+                  </a:lnTo>
+                  <a:lnTo>
+                    <a:pt x="492411" y="66400"/>
+                  </a:lnTo>
+                  <a:lnTo>
+                    <a:pt x="562755" y="75292"/>
+                  </a:lnTo>
+                  <a:lnTo>
+                    <a:pt x="633100" y="84043"/>
+                  </a:lnTo>
+                  <a:lnTo>
+                    <a:pt x="703444" y="92655"/>
+                  </a:lnTo>
+                  <a:lnTo>
+                    <a:pt x="773789" y="101130"/>
+                  </a:lnTo>
+                  <a:lnTo>
+                    <a:pt x="844133" y="109470"/>
+                  </a:lnTo>
+                  <a:lnTo>
+                    <a:pt x="914478" y="117678"/>
+                  </a:lnTo>
+                  <a:lnTo>
+                    <a:pt x="984822" y="125755"/>
+                  </a:lnTo>
+                  <a:lnTo>
+                    <a:pt x="1055167" y="133704"/>
+                  </a:lnTo>
+                  <a:lnTo>
+                    <a:pt x="1125511" y="141526"/>
+                  </a:lnTo>
+                  <a:lnTo>
+                    <a:pt x="1195856" y="149224"/>
+                  </a:lnTo>
+                  <a:lnTo>
+                    <a:pt x="1266200" y="156800"/>
+                  </a:lnTo>
+                  <a:lnTo>
+                    <a:pt x="1336545" y="164255"/>
+                  </a:lnTo>
+                  <a:lnTo>
+                    <a:pt x="1406889" y="171592"/>
+                  </a:lnTo>
+                  <a:lnTo>
+                    <a:pt x="1477234" y="178812"/>
+                  </a:lnTo>
+                  <a:lnTo>
+                    <a:pt x="1547578" y="185917"/>
+                  </a:lnTo>
+                  <a:lnTo>
+                    <a:pt x="1617923" y="192910"/>
+                  </a:lnTo>
+                  <a:lnTo>
+                    <a:pt x="1688267" y="199791"/>
+                  </a:lnTo>
+                  <a:lnTo>
+                    <a:pt x="1758612" y="206563"/>
+                  </a:lnTo>
+                  <a:lnTo>
+                    <a:pt x="1828956" y="213227"/>
+                  </a:lnTo>
+                  <a:lnTo>
+                    <a:pt x="1899301" y="219785"/>
+                  </a:lnTo>
+                  <a:lnTo>
+                    <a:pt x="1969645" y="226239"/>
+                  </a:lnTo>
+                  <a:lnTo>
+                    <a:pt x="2039990" y="232591"/>
+                  </a:lnTo>
+                  <a:lnTo>
+                    <a:pt x="2110334" y="238841"/>
+                  </a:lnTo>
+                  <a:lnTo>
+                    <a:pt x="2180679" y="244993"/>
+                  </a:lnTo>
+                  <a:lnTo>
+                    <a:pt x="2251023" y="251046"/>
+                  </a:lnTo>
+                  <a:lnTo>
+                    <a:pt x="2321368" y="257003"/>
+                  </a:lnTo>
+                  <a:lnTo>
+                    <a:pt x="2391712" y="262865"/>
+                  </a:lnTo>
+                  <a:lnTo>
+                    <a:pt x="2462057" y="268635"/>
+                  </a:lnTo>
+                  <a:lnTo>
+                    <a:pt x="2532401" y="274312"/>
+                  </a:lnTo>
+                  <a:lnTo>
+                    <a:pt x="2602746" y="279900"/>
+                  </a:lnTo>
+                  <a:lnTo>
+                    <a:pt x="2673090" y="285398"/>
+                  </a:lnTo>
+                  <a:lnTo>
+                    <a:pt x="2743435" y="290809"/>
+                  </a:lnTo>
+                  <a:lnTo>
+                    <a:pt x="2813779" y="296134"/>
+                  </a:lnTo>
+                  <a:lnTo>
+                    <a:pt x="2884124" y="301375"/>
+                  </a:lnTo>
+                  <a:lnTo>
+                    <a:pt x="2954468" y="306532"/>
+                  </a:lnTo>
+                  <a:lnTo>
+                    <a:pt x="3024813" y="311607"/>
+                  </a:lnTo>
+                  <a:lnTo>
+                    <a:pt x="3095157" y="316601"/>
+                  </a:lnTo>
+                  <a:lnTo>
+                    <a:pt x="3165502" y="321516"/>
+                  </a:lnTo>
+                  <a:lnTo>
+                    <a:pt x="3235846" y="326353"/>
+                  </a:lnTo>
+                  <a:lnTo>
+                    <a:pt x="3306191" y="331113"/>
+                  </a:lnTo>
+                  <a:lnTo>
+                    <a:pt x="3376535" y="335798"/>
+                  </a:lnTo>
+                  <a:lnTo>
+                    <a:pt x="3446880" y="340408"/>
+                  </a:lnTo>
+                  <a:lnTo>
+                    <a:pt x="3517224" y="344944"/>
+                  </a:lnTo>
+                  <a:lnTo>
+                    <a:pt x="3587569" y="349409"/>
+                  </a:lnTo>
+                  <a:lnTo>
+                    <a:pt x="3657913" y="353802"/>
+                  </a:lnTo>
+                  <a:lnTo>
+                    <a:pt x="3728257" y="358126"/>
+                  </a:lnTo>
+                  <a:lnTo>
+                    <a:pt x="3798602" y="362381"/>
+                  </a:lnTo>
+                  <a:lnTo>
+                    <a:pt x="3868946" y="366568"/>
+                  </a:lnTo>
+                  <a:lnTo>
+                    <a:pt x="3939291" y="370689"/>
+                  </a:lnTo>
+                  <a:lnTo>
+                    <a:pt x="4009635" y="374744"/>
+                  </a:lnTo>
+                  <a:lnTo>
+                    <a:pt x="4079980" y="378735"/>
+                  </a:lnTo>
+                  <a:lnTo>
+                    <a:pt x="4150324" y="382663"/>
+                  </a:lnTo>
+                  <a:lnTo>
+                    <a:pt x="4220669" y="386527"/>
+                  </a:lnTo>
+                  <a:lnTo>
+                    <a:pt x="4291013" y="390331"/>
+                  </a:lnTo>
+                  <a:lnTo>
+                    <a:pt x="4361358" y="394074"/>
+                  </a:lnTo>
+                  <a:lnTo>
+                    <a:pt x="4431702" y="397758"/>
+                  </a:lnTo>
+                  <a:lnTo>
+                    <a:pt x="4502047" y="401383"/>
+                  </a:lnTo>
+                  <a:lnTo>
+                    <a:pt x="4572391" y="404950"/>
+                  </a:lnTo>
+                  <a:lnTo>
+                    <a:pt x="4642736" y="408461"/>
+                  </a:lnTo>
+                  <a:lnTo>
+                    <a:pt x="4713080" y="411915"/>
+                  </a:lnTo>
+                  <a:lnTo>
+                    <a:pt x="4783425" y="415315"/>
+                  </a:lnTo>
+                  <a:lnTo>
+                    <a:pt x="4853769" y="418661"/>
+                  </a:lnTo>
+                  <a:lnTo>
+                    <a:pt x="4924114" y="421954"/>
+                  </a:lnTo>
+                  <a:lnTo>
+                    <a:pt x="4994458" y="425194"/>
+                  </a:lnTo>
+                  <a:lnTo>
+                    <a:pt x="5064803" y="428383"/>
+                  </a:lnTo>
+                  <a:lnTo>
+                    <a:pt x="5135147" y="431521"/>
+                  </a:lnTo>
+                  <a:lnTo>
+                    <a:pt x="5205492" y="434610"/>
+                  </a:lnTo>
+                  <a:lnTo>
+                    <a:pt x="5275836" y="437649"/>
+                  </a:lnTo>
+                  <a:lnTo>
+                    <a:pt x="5346181" y="440640"/>
+                  </a:lnTo>
+                  <a:lnTo>
+                    <a:pt x="5416525" y="443583"/>
+                  </a:lnTo>
+                  <a:lnTo>
+                    <a:pt x="5486870" y="446480"/>
+                  </a:lnTo>
+                  <a:lnTo>
+                    <a:pt x="5557214" y="449330"/>
+                  </a:lnTo>
+                  <a:lnTo>
+                    <a:pt x="5627559" y="452135"/>
+                  </a:lnTo>
+                  <a:lnTo>
+                    <a:pt x="5697903" y="454896"/>
+                  </a:lnTo>
+                  <a:lnTo>
+                    <a:pt x="5768248" y="457613"/>
+                  </a:lnTo>
+                  <a:lnTo>
+                    <a:pt x="5838592" y="460286"/>
+                  </a:lnTo>
+                  <a:lnTo>
+                    <a:pt x="5908937" y="462917"/>
+                  </a:lnTo>
+                  <a:lnTo>
+                    <a:pt x="5979281" y="465506"/>
+                  </a:lnTo>
+                  <a:lnTo>
+                    <a:pt x="6049626" y="468054"/>
+                  </a:lnTo>
+                  <a:lnTo>
+                    <a:pt x="6119970" y="470562"/>
+                  </a:lnTo>
+                  <a:lnTo>
+                    <a:pt x="6190315" y="473030"/>
+                  </a:lnTo>
+                  <a:lnTo>
+                    <a:pt x="6260659" y="475458"/>
+                  </a:lnTo>
+                  <a:lnTo>
+                    <a:pt x="6331004" y="477848"/>
+                  </a:lnTo>
+                  <a:lnTo>
+                    <a:pt x="6401348" y="480200"/>
+                  </a:lnTo>
+                  <a:lnTo>
+                    <a:pt x="6471693" y="482514"/>
+                  </a:lnTo>
+                  <a:lnTo>
+                    <a:pt x="6542037" y="484792"/>
+                  </a:lnTo>
+                  <a:lnTo>
+                    <a:pt x="6612382" y="487034"/>
+                  </a:lnTo>
+                  <a:lnTo>
+                    <a:pt x="6682726" y="489239"/>
+                  </a:lnTo>
+                  <a:lnTo>
+                    <a:pt x="6753071" y="491410"/>
+                  </a:lnTo>
+                  <a:lnTo>
+                    <a:pt x="6823415" y="493546"/>
+                  </a:lnTo>
+                  <a:lnTo>
+                    <a:pt x="6893760" y="495649"/>
+                  </a:lnTo>
+                  <a:lnTo>
+                    <a:pt x="6964104" y="497718"/>
                   </a:lnTo>
                 </a:path>
               </a:pathLst>
@@ -4568,27 +4603,27 @@
         </p:sp>
         <p:sp>
           <p:nvSpPr>
-            <p:cNvPr id="24" name="pl24"/>
+            <p:cNvPr id="25" name="pl25"/>
             <p:cNvSpPr/>
             <p:nvPr/>
           </p:nvSpPr>
           <p:spPr>
             <a:xfrm>
-              <a:off x="817517" y="4727786"/>
-              <a:ext cx="7799693" cy="0"/>
+              <a:off x="887106" y="3100960"/>
+              <a:ext cx="7660515" cy="0"/>
             </a:xfrm>
             <a:custGeom>
               <a:avLst/>
               <a:pathLst>
-                <a:path w="7799693" h="0">
+                <a:path w="7660515" h="0">
                   <a:moveTo>
                     <a:pt x="0" y="0"/>
                   </a:moveTo>
                   <a:lnTo>
-                    <a:pt x="7799693" y="0"/>
-                  </a:lnTo>
-                  <a:lnTo>
-                    <a:pt x="7799693" y="0"/>
+                    <a:pt x="7660515" y="0"/>
+                  </a:lnTo>
+                  <a:lnTo>
+                    <a:pt x="7660515" y="0"/>
                   </a:lnTo>
                 </a:path>
               </a:pathLst>
@@ -4611,21 +4646,21 @@
         </p:sp>
         <p:sp>
           <p:nvSpPr>
-            <p:cNvPr id="25" name="pl25"/>
+            <p:cNvPr id="26" name="pl26"/>
             <p:cNvSpPr/>
             <p:nvPr/>
           </p:nvSpPr>
           <p:spPr>
             <a:xfrm>
-              <a:off x="4468386" y="2073503"/>
-              <a:ext cx="0" cy="3649639"/>
+              <a:off x="4472829" y="2143092"/>
+              <a:ext cx="0" cy="1317069"/>
             </a:xfrm>
             <a:custGeom>
               <a:avLst/>
               <a:pathLst>
-                <a:path w="0" h="3649639">
+                <a:path w="0" h="1317069">
                   <a:moveTo>
-                    <a:pt x="0" y="3649639"/>
+                    <a:pt x="0" y="1317069"/>
                   </a:moveTo>
                   <a:lnTo>
                     <a:pt x="0" y="0"/>
@@ -4654,13 +4689,13 @@
         </p:sp>
         <p:sp>
           <p:nvSpPr>
-            <p:cNvPr id="26" name="tx26"/>
+            <p:cNvPr id="27" name="tx27"/>
             <p:cNvSpPr/>
             <p:nvPr/>
           </p:nvSpPr>
           <p:spPr>
             <a:xfrm>
-              <a:off x="692708" y="5517199"/>
+              <a:off x="762297" y="3360243"/>
               <a:ext cx="62179" cy="80101"/>
             </a:xfrm>
             <a:prstGeom prst="rect">
@@ -4700,13 +4735,13 @@
         </p:sp>
         <p:sp>
           <p:nvSpPr>
-            <p:cNvPr id="27" name="tx27"/>
+            <p:cNvPr id="28" name="tx28"/>
             <p:cNvSpPr/>
             <p:nvPr/>
           </p:nvSpPr>
           <p:spPr>
             <a:xfrm>
-              <a:off x="692708" y="4687735"/>
+              <a:off x="762297" y="3060909"/>
               <a:ext cx="62179" cy="80101"/>
             </a:xfrm>
             <a:prstGeom prst="rect">
@@ -4746,13 +4781,13 @@
         </p:sp>
         <p:sp>
           <p:nvSpPr>
-            <p:cNvPr id="28" name="tx28"/>
+            <p:cNvPr id="29" name="tx29"/>
             <p:cNvSpPr/>
             <p:nvPr/>
           </p:nvSpPr>
           <p:spPr>
             <a:xfrm>
-              <a:off x="692708" y="3858272"/>
+              <a:off x="762297" y="2761575"/>
               <a:ext cx="62179" cy="80101"/>
             </a:xfrm>
             <a:prstGeom prst="rect">
@@ -4792,13 +4827,13 @@
         </p:sp>
         <p:sp>
           <p:nvSpPr>
-            <p:cNvPr id="29" name="tx29"/>
+            <p:cNvPr id="30" name="tx30"/>
             <p:cNvSpPr/>
             <p:nvPr/>
           </p:nvSpPr>
           <p:spPr>
             <a:xfrm>
-              <a:off x="692708" y="3028808"/>
+              <a:off x="762297" y="2462242"/>
               <a:ext cx="62179" cy="80101"/>
             </a:xfrm>
             <a:prstGeom prst="rect">
@@ -4838,13 +4873,13 @@
         </p:sp>
         <p:sp>
           <p:nvSpPr>
-            <p:cNvPr id="30" name="tx30"/>
+            <p:cNvPr id="31" name="tx31"/>
             <p:cNvSpPr/>
             <p:nvPr/>
           </p:nvSpPr>
           <p:spPr>
             <a:xfrm>
-              <a:off x="692708" y="2199345"/>
+              <a:off x="762297" y="2162908"/>
               <a:ext cx="62179" cy="80101"/>
             </a:xfrm>
             <a:prstGeom prst="rect">
@@ -4884,13 +4919,13 @@
         </p:sp>
         <p:sp>
           <p:nvSpPr>
-            <p:cNvPr id="31" name="tx31"/>
+            <p:cNvPr id="32" name="tx32"/>
             <p:cNvSpPr/>
             <p:nvPr/>
           </p:nvSpPr>
           <p:spPr>
             <a:xfrm>
-              <a:off x="2478335" y="5785772"/>
+              <a:off x="2516846" y="3522791"/>
               <a:ext cx="161574" cy="80101"/>
             </a:xfrm>
             <a:prstGeom prst="rect">
@@ -4930,13 +4965,13 @@
         </p:sp>
         <p:sp>
           <p:nvSpPr>
-            <p:cNvPr id="32" name="tx32"/>
+            <p:cNvPr id="33" name="tx33"/>
             <p:cNvSpPr/>
             <p:nvPr/>
           </p:nvSpPr>
           <p:spPr>
             <a:xfrm>
-              <a:off x="4582608" y="5785772"/>
+              <a:off x="4584458" y="3522791"/>
               <a:ext cx="62179" cy="80101"/>
             </a:xfrm>
             <a:prstGeom prst="rect">
@@ -4976,13 +5011,13 @@
         </p:sp>
         <p:sp>
           <p:nvSpPr>
-            <p:cNvPr id="33" name="tx33"/>
+            <p:cNvPr id="34" name="tx34"/>
             <p:cNvSpPr/>
             <p:nvPr/>
           </p:nvSpPr>
           <p:spPr>
             <a:xfrm>
-              <a:off x="6606094" y="5785772"/>
+              <a:off x="6571282" y="3522791"/>
               <a:ext cx="124358" cy="80101"/>
             </a:xfrm>
             <a:prstGeom prst="rect">
@@ -5022,13 +5057,13 @@
         </p:sp>
         <p:sp>
           <p:nvSpPr>
-            <p:cNvPr id="34" name="tx34"/>
+            <p:cNvPr id="35" name="tx35"/>
             <p:cNvSpPr/>
             <p:nvPr/>
           </p:nvSpPr>
           <p:spPr>
             <a:xfrm>
-              <a:off x="2928340" y="5925448"/>
+              <a:off x="2928340" y="3662467"/>
               <a:ext cx="3578047" cy="100218"/>
             </a:xfrm>
             <a:prstGeom prst="rect">
@@ -5068,13 +5103,13 @@
         </p:sp>
         <p:sp>
           <p:nvSpPr>
-            <p:cNvPr id="35" name="tx35"/>
+            <p:cNvPr id="36" name="tx36"/>
             <p:cNvSpPr/>
             <p:nvPr/>
           </p:nvSpPr>
           <p:spPr>
             <a:xfrm rot="-5400000">
-              <a:off x="68446" y="3848213"/>
+              <a:off x="138035" y="2751517"/>
               <a:ext cx="1016904" cy="100218"/>
             </a:xfrm>
             <a:prstGeom prst="rect">
@@ -5114,13 +5149,13 @@
         </p:sp>
         <p:sp>
           <p:nvSpPr>
-            <p:cNvPr id="36" name="tx36"/>
+            <p:cNvPr id="37" name="tx37"/>
             <p:cNvSpPr/>
             <p:nvPr/>
           </p:nvSpPr>
           <p:spPr>
             <a:xfrm>
-              <a:off x="817517" y="1896563"/>
+              <a:off x="887106" y="1966152"/>
               <a:ext cx="6985375" cy="82021"/>
             </a:xfrm>
             <a:prstGeom prst="rect">
@@ -5160,13 +5195,3746 @@
         </p:sp>
         <p:sp>
           <p:nvSpPr>
-            <p:cNvPr id="37" name="tx37"/>
+            <p:cNvPr id="38" name="tx38"/>
             <p:cNvSpPr/>
             <p:nvPr/>
           </p:nvSpPr>
           <p:spPr>
             <a:xfrm>
-              <a:off x="817517" y="1669789"/>
+              <a:off x="887106" y="1739378"/>
+              <a:ext cx="3359962" cy="120152"/>
+            </a:xfrm>
+            <a:prstGeom prst="rect">
+              <a:avLst/>
+            </a:prstGeom>
+            <a:noFill/>
+          </p:spPr>
+          <p:txBody>
+            <a:bodyPr lIns="0" rIns="0" tIns="0" bIns="0" anchorCtr="1" anchor="ctr" wrap="none"/>
+            <a:lstStyle/>
+            <a:p>
+              <a:pPr algn="l" marL="0" marR="0" indent="0">
+                <a:lnSpc>
+                  <a:spcPts val="1320"/>
+                </a:lnSpc>
+                <a:spcBef>
+                  <a:spcPts val="0"/>
+                </a:spcBef>
+                <a:spcAft>
+                  <a:spcPts val="0"/>
+                </a:spcAft>
+              </a:pPr>
+              <a:r>
+                <a:rPr sz="1320">
+                  <a:solidFill>
+                    <a:srgbClr val="000000">
+                      <a:alpha val="100000"/>
+                    </a:srgbClr>
+                  </a:solidFill>
+                  <a:latin typeface="Helvetica"/>
+                  <a:cs typeface="Helvetica"/>
+                </a:rPr>
+                <a:t>Overall Hospitalization (Carboplatin AUC ≥ 3)</a:t>
+              </a:r>
+            </a:p>
+          </p:txBody>
+        </p:sp>
+        <p:sp>
+          <p:nvSpPr>
+            <p:cNvPr id="39" name="pl39"/>
+            <p:cNvSpPr/>
+            <p:nvPr/>
+          </p:nvSpPr>
+          <p:spPr>
+            <a:xfrm>
+              <a:off x="887106" y="5444019"/>
+              <a:ext cx="7660515" cy="0"/>
+            </a:xfrm>
+            <a:custGeom>
+              <a:avLst/>
+              <a:pathLst>
+                <a:path w="7660515" h="0">
+                  <a:moveTo>
+                    <a:pt x="0" y="0"/>
+                  </a:moveTo>
+                  <a:lnTo>
+                    <a:pt x="7660515" y="0"/>
+                  </a:lnTo>
+                  <a:lnTo>
+                    <a:pt x="7660515" y="0"/>
+                  </a:lnTo>
+                </a:path>
+              </a:pathLst>
+            </a:custGeom>
+            <a:ln w="6775" cap="flat">
+              <a:solidFill>
+                <a:srgbClr val="EBEBEB">
+                  <a:alpha val="100000"/>
+                </a:srgbClr>
+              </a:solidFill>
+              <a:prstDash val="solid"/>
+              <a:round/>
+            </a:ln>
+          </p:spPr>
+          <p:txBody>
+            <a:bodyPr/>
+            <a:lstStyle/>
+            <a:p/>
+          </p:txBody>
+        </p:sp>
+        <p:sp>
+          <p:nvSpPr>
+            <p:cNvPr id="40" name="pl40"/>
+            <p:cNvSpPr/>
+            <p:nvPr/>
+          </p:nvSpPr>
+          <p:spPr>
+            <a:xfrm>
+              <a:off x="887106" y="5144686"/>
+              <a:ext cx="7660515" cy="0"/>
+            </a:xfrm>
+            <a:custGeom>
+              <a:avLst/>
+              <a:pathLst>
+                <a:path w="7660515" h="0">
+                  <a:moveTo>
+                    <a:pt x="0" y="0"/>
+                  </a:moveTo>
+                  <a:lnTo>
+                    <a:pt x="7660515" y="0"/>
+                  </a:lnTo>
+                  <a:lnTo>
+                    <a:pt x="7660515" y="0"/>
+                  </a:lnTo>
+                </a:path>
+              </a:pathLst>
+            </a:custGeom>
+            <a:ln w="6775" cap="flat">
+              <a:solidFill>
+                <a:srgbClr val="EBEBEB">
+                  <a:alpha val="100000"/>
+                </a:srgbClr>
+              </a:solidFill>
+              <a:prstDash val="solid"/>
+              <a:round/>
+            </a:ln>
+          </p:spPr>
+          <p:txBody>
+            <a:bodyPr/>
+            <a:lstStyle/>
+            <a:p/>
+          </p:txBody>
+        </p:sp>
+        <p:sp>
+          <p:nvSpPr>
+            <p:cNvPr id="41" name="pl41"/>
+            <p:cNvSpPr/>
+            <p:nvPr/>
+          </p:nvSpPr>
+          <p:spPr>
+            <a:xfrm>
+              <a:off x="887106" y="4845352"/>
+              <a:ext cx="7660515" cy="0"/>
+            </a:xfrm>
+            <a:custGeom>
+              <a:avLst/>
+              <a:pathLst>
+                <a:path w="7660515" h="0">
+                  <a:moveTo>
+                    <a:pt x="0" y="0"/>
+                  </a:moveTo>
+                  <a:lnTo>
+                    <a:pt x="7660515" y="0"/>
+                  </a:lnTo>
+                  <a:lnTo>
+                    <a:pt x="7660515" y="0"/>
+                  </a:lnTo>
+                </a:path>
+              </a:pathLst>
+            </a:custGeom>
+            <a:ln w="6775" cap="flat">
+              <a:solidFill>
+                <a:srgbClr val="EBEBEB">
+                  <a:alpha val="100000"/>
+                </a:srgbClr>
+              </a:solidFill>
+              <a:prstDash val="solid"/>
+              <a:round/>
+            </a:ln>
+          </p:spPr>
+          <p:txBody>
+            <a:bodyPr/>
+            <a:lstStyle/>
+            <a:p/>
+          </p:txBody>
+        </p:sp>
+        <p:sp>
+          <p:nvSpPr>
+            <p:cNvPr id="42" name="pl42"/>
+            <p:cNvSpPr/>
+            <p:nvPr/>
+          </p:nvSpPr>
+          <p:spPr>
+            <a:xfrm>
+              <a:off x="887106" y="4546018"/>
+              <a:ext cx="7660515" cy="0"/>
+            </a:xfrm>
+            <a:custGeom>
+              <a:avLst/>
+              <a:pathLst>
+                <a:path w="7660515" h="0">
+                  <a:moveTo>
+                    <a:pt x="0" y="0"/>
+                  </a:moveTo>
+                  <a:lnTo>
+                    <a:pt x="7660515" y="0"/>
+                  </a:lnTo>
+                  <a:lnTo>
+                    <a:pt x="7660515" y="0"/>
+                  </a:lnTo>
+                </a:path>
+              </a:pathLst>
+            </a:custGeom>
+            <a:ln w="6775" cap="flat">
+              <a:solidFill>
+                <a:srgbClr val="EBEBEB">
+                  <a:alpha val="100000"/>
+                </a:srgbClr>
+              </a:solidFill>
+              <a:prstDash val="solid"/>
+              <a:round/>
+            </a:ln>
+          </p:spPr>
+          <p:txBody>
+            <a:bodyPr/>
+            <a:lstStyle/>
+            <a:p/>
+          </p:txBody>
+        </p:sp>
+        <p:sp>
+          <p:nvSpPr>
+            <p:cNvPr id="43" name="pl43"/>
+            <p:cNvSpPr/>
+            <p:nvPr/>
+          </p:nvSpPr>
+          <p:spPr>
+            <a:xfrm>
+              <a:off x="983303" y="4336484"/>
+              <a:ext cx="0" cy="1317069"/>
+            </a:xfrm>
+            <a:custGeom>
+              <a:avLst/>
+              <a:pathLst>
+                <a:path w="0" h="1317069">
+                  <a:moveTo>
+                    <a:pt x="0" y="1317069"/>
+                  </a:moveTo>
+                  <a:lnTo>
+                    <a:pt x="0" y="0"/>
+                  </a:lnTo>
+                  <a:lnTo>
+                    <a:pt x="0" y="0"/>
+                  </a:lnTo>
+                </a:path>
+              </a:pathLst>
+            </a:custGeom>
+            <a:ln w="6775" cap="flat">
+              <a:solidFill>
+                <a:srgbClr val="EBEBEB">
+                  <a:alpha val="100000"/>
+                </a:srgbClr>
+              </a:solidFill>
+              <a:prstDash val="solid"/>
+              <a:round/>
+            </a:ln>
+          </p:spPr>
+          <p:txBody>
+            <a:bodyPr/>
+            <a:lstStyle/>
+            <a:p/>
+          </p:txBody>
+        </p:sp>
+        <p:sp>
+          <p:nvSpPr>
+            <p:cNvPr id="44" name="pl44"/>
+            <p:cNvSpPr/>
+            <p:nvPr/>
+          </p:nvSpPr>
+          <p:spPr>
+            <a:xfrm>
+              <a:off x="1790468" y="4336484"/>
+              <a:ext cx="0" cy="1317069"/>
+            </a:xfrm>
+            <a:custGeom>
+              <a:avLst/>
+              <a:pathLst>
+                <a:path w="0" h="1317069">
+                  <a:moveTo>
+                    <a:pt x="0" y="1317069"/>
+                  </a:moveTo>
+                  <a:lnTo>
+                    <a:pt x="0" y="0"/>
+                  </a:lnTo>
+                  <a:lnTo>
+                    <a:pt x="0" y="0"/>
+                  </a:lnTo>
+                </a:path>
+              </a:pathLst>
+            </a:custGeom>
+            <a:ln w="6775" cap="flat">
+              <a:solidFill>
+                <a:srgbClr val="EBEBEB">
+                  <a:alpha val="100000"/>
+                </a:srgbClr>
+              </a:solidFill>
+              <a:prstDash val="solid"/>
+              <a:round/>
+            </a:ln>
+          </p:spPr>
+          <p:txBody>
+            <a:bodyPr/>
+            <a:lstStyle/>
+            <a:p/>
+          </p:txBody>
+        </p:sp>
+        <p:sp>
+          <p:nvSpPr>
+            <p:cNvPr id="45" name="pl45"/>
+            <p:cNvSpPr/>
+            <p:nvPr/>
+          </p:nvSpPr>
+          <p:spPr>
+            <a:xfrm>
+              <a:off x="2597634" y="4336484"/>
+              <a:ext cx="0" cy="1317069"/>
+            </a:xfrm>
+            <a:custGeom>
+              <a:avLst/>
+              <a:pathLst>
+                <a:path w="0" h="1317069">
+                  <a:moveTo>
+                    <a:pt x="0" y="1317069"/>
+                  </a:moveTo>
+                  <a:lnTo>
+                    <a:pt x="0" y="0"/>
+                  </a:lnTo>
+                  <a:lnTo>
+                    <a:pt x="0" y="0"/>
+                  </a:lnTo>
+                </a:path>
+              </a:pathLst>
+            </a:custGeom>
+            <a:ln w="6775" cap="flat">
+              <a:solidFill>
+                <a:srgbClr val="EBEBEB">
+                  <a:alpha val="100000"/>
+                </a:srgbClr>
+              </a:solidFill>
+              <a:prstDash val="solid"/>
+              <a:round/>
+            </a:ln>
+          </p:spPr>
+          <p:txBody>
+            <a:bodyPr/>
+            <a:lstStyle/>
+            <a:p/>
+          </p:txBody>
+        </p:sp>
+        <p:sp>
+          <p:nvSpPr>
+            <p:cNvPr id="46" name="pl46"/>
+            <p:cNvSpPr/>
+            <p:nvPr/>
+          </p:nvSpPr>
+          <p:spPr>
+            <a:xfrm>
+              <a:off x="3404799" y="4336484"/>
+              <a:ext cx="0" cy="1317069"/>
+            </a:xfrm>
+            <a:custGeom>
+              <a:avLst/>
+              <a:pathLst>
+                <a:path w="0" h="1317069">
+                  <a:moveTo>
+                    <a:pt x="0" y="1317069"/>
+                  </a:moveTo>
+                  <a:lnTo>
+                    <a:pt x="0" y="0"/>
+                  </a:lnTo>
+                  <a:lnTo>
+                    <a:pt x="0" y="0"/>
+                  </a:lnTo>
+                </a:path>
+              </a:pathLst>
+            </a:custGeom>
+            <a:ln w="6775" cap="flat">
+              <a:solidFill>
+                <a:srgbClr val="EBEBEB">
+                  <a:alpha val="100000"/>
+                </a:srgbClr>
+              </a:solidFill>
+              <a:prstDash val="solid"/>
+              <a:round/>
+            </a:ln>
+          </p:spPr>
+          <p:txBody>
+            <a:bodyPr/>
+            <a:lstStyle/>
+            <a:p/>
+          </p:txBody>
+        </p:sp>
+        <p:sp>
+          <p:nvSpPr>
+            <p:cNvPr id="47" name="pl47"/>
+            <p:cNvSpPr/>
+            <p:nvPr/>
+          </p:nvSpPr>
+          <p:spPr>
+            <a:xfrm>
+              <a:off x="4211965" y="4336484"/>
+              <a:ext cx="0" cy="1317069"/>
+            </a:xfrm>
+            <a:custGeom>
+              <a:avLst/>
+              <a:pathLst>
+                <a:path w="0" h="1317069">
+                  <a:moveTo>
+                    <a:pt x="0" y="1317069"/>
+                  </a:moveTo>
+                  <a:lnTo>
+                    <a:pt x="0" y="0"/>
+                  </a:lnTo>
+                  <a:lnTo>
+                    <a:pt x="0" y="0"/>
+                  </a:lnTo>
+                </a:path>
+              </a:pathLst>
+            </a:custGeom>
+            <a:ln w="6775" cap="flat">
+              <a:solidFill>
+                <a:srgbClr val="EBEBEB">
+                  <a:alpha val="100000"/>
+                </a:srgbClr>
+              </a:solidFill>
+              <a:prstDash val="solid"/>
+              <a:round/>
+            </a:ln>
+          </p:spPr>
+          <p:txBody>
+            <a:bodyPr/>
+            <a:lstStyle/>
+            <a:p/>
+          </p:txBody>
+        </p:sp>
+        <p:sp>
+          <p:nvSpPr>
+            <p:cNvPr id="48" name="pl48"/>
+            <p:cNvSpPr/>
+            <p:nvPr/>
+          </p:nvSpPr>
+          <p:spPr>
+            <a:xfrm>
+              <a:off x="5019130" y="4336484"/>
+              <a:ext cx="0" cy="1317069"/>
+            </a:xfrm>
+            <a:custGeom>
+              <a:avLst/>
+              <a:pathLst>
+                <a:path w="0" h="1317069">
+                  <a:moveTo>
+                    <a:pt x="0" y="1317069"/>
+                  </a:moveTo>
+                  <a:lnTo>
+                    <a:pt x="0" y="0"/>
+                  </a:lnTo>
+                  <a:lnTo>
+                    <a:pt x="0" y="0"/>
+                  </a:lnTo>
+                </a:path>
+              </a:pathLst>
+            </a:custGeom>
+            <a:ln w="6775" cap="flat">
+              <a:solidFill>
+                <a:srgbClr val="EBEBEB">
+                  <a:alpha val="100000"/>
+                </a:srgbClr>
+              </a:solidFill>
+              <a:prstDash val="solid"/>
+              <a:round/>
+            </a:ln>
+          </p:spPr>
+          <p:txBody>
+            <a:bodyPr/>
+            <a:lstStyle/>
+            <a:p/>
+          </p:txBody>
+        </p:sp>
+        <p:sp>
+          <p:nvSpPr>
+            <p:cNvPr id="49" name="pl49"/>
+            <p:cNvSpPr/>
+            <p:nvPr/>
+          </p:nvSpPr>
+          <p:spPr>
+            <a:xfrm>
+              <a:off x="5826296" y="4336484"/>
+              <a:ext cx="0" cy="1317069"/>
+            </a:xfrm>
+            <a:custGeom>
+              <a:avLst/>
+              <a:pathLst>
+                <a:path w="0" h="1317069">
+                  <a:moveTo>
+                    <a:pt x="0" y="1317069"/>
+                  </a:moveTo>
+                  <a:lnTo>
+                    <a:pt x="0" y="0"/>
+                  </a:lnTo>
+                  <a:lnTo>
+                    <a:pt x="0" y="0"/>
+                  </a:lnTo>
+                </a:path>
+              </a:pathLst>
+            </a:custGeom>
+            <a:ln w="6775" cap="flat">
+              <a:solidFill>
+                <a:srgbClr val="EBEBEB">
+                  <a:alpha val="100000"/>
+                </a:srgbClr>
+              </a:solidFill>
+              <a:prstDash val="solid"/>
+              <a:round/>
+            </a:ln>
+          </p:spPr>
+          <p:txBody>
+            <a:bodyPr/>
+            <a:lstStyle/>
+            <a:p/>
+          </p:txBody>
+        </p:sp>
+        <p:sp>
+          <p:nvSpPr>
+            <p:cNvPr id="50" name="pl50"/>
+            <p:cNvSpPr/>
+            <p:nvPr/>
+          </p:nvSpPr>
+          <p:spPr>
+            <a:xfrm>
+              <a:off x="6633461" y="4336484"/>
+              <a:ext cx="0" cy="1317069"/>
+            </a:xfrm>
+            <a:custGeom>
+              <a:avLst/>
+              <a:pathLst>
+                <a:path w="0" h="1317069">
+                  <a:moveTo>
+                    <a:pt x="0" y="1317069"/>
+                  </a:moveTo>
+                  <a:lnTo>
+                    <a:pt x="0" y="0"/>
+                  </a:lnTo>
+                  <a:lnTo>
+                    <a:pt x="0" y="0"/>
+                  </a:lnTo>
+                </a:path>
+              </a:pathLst>
+            </a:custGeom>
+            <a:ln w="6775" cap="flat">
+              <a:solidFill>
+                <a:srgbClr val="EBEBEB">
+                  <a:alpha val="100000"/>
+                </a:srgbClr>
+              </a:solidFill>
+              <a:prstDash val="solid"/>
+              <a:round/>
+            </a:ln>
+          </p:spPr>
+          <p:txBody>
+            <a:bodyPr/>
+            <a:lstStyle/>
+            <a:p/>
+          </p:txBody>
+        </p:sp>
+        <p:sp>
+          <p:nvSpPr>
+            <p:cNvPr id="51" name="pl51"/>
+            <p:cNvSpPr/>
+            <p:nvPr/>
+          </p:nvSpPr>
+          <p:spPr>
+            <a:xfrm>
+              <a:off x="7440627" y="4336484"/>
+              <a:ext cx="0" cy="1317069"/>
+            </a:xfrm>
+            <a:custGeom>
+              <a:avLst/>
+              <a:pathLst>
+                <a:path w="0" h="1317069">
+                  <a:moveTo>
+                    <a:pt x="0" y="1317069"/>
+                  </a:moveTo>
+                  <a:lnTo>
+                    <a:pt x="0" y="0"/>
+                  </a:lnTo>
+                  <a:lnTo>
+                    <a:pt x="0" y="0"/>
+                  </a:lnTo>
+                </a:path>
+              </a:pathLst>
+            </a:custGeom>
+            <a:ln w="6775" cap="flat">
+              <a:solidFill>
+                <a:srgbClr val="EBEBEB">
+                  <a:alpha val="100000"/>
+                </a:srgbClr>
+              </a:solidFill>
+              <a:prstDash val="solid"/>
+              <a:round/>
+            </a:ln>
+          </p:spPr>
+          <p:txBody>
+            <a:bodyPr/>
+            <a:lstStyle/>
+            <a:p/>
+          </p:txBody>
+        </p:sp>
+        <p:sp>
+          <p:nvSpPr>
+            <p:cNvPr id="52" name="pl52"/>
+            <p:cNvSpPr/>
+            <p:nvPr/>
+          </p:nvSpPr>
+          <p:spPr>
+            <a:xfrm>
+              <a:off x="8247792" y="4336484"/>
+              <a:ext cx="0" cy="1317069"/>
+            </a:xfrm>
+            <a:custGeom>
+              <a:avLst/>
+              <a:pathLst>
+                <a:path w="0" h="1317069">
+                  <a:moveTo>
+                    <a:pt x="0" y="1317069"/>
+                  </a:moveTo>
+                  <a:lnTo>
+                    <a:pt x="0" y="0"/>
+                  </a:lnTo>
+                  <a:lnTo>
+                    <a:pt x="0" y="0"/>
+                  </a:lnTo>
+                </a:path>
+              </a:pathLst>
+            </a:custGeom>
+            <a:ln w="6775" cap="flat">
+              <a:solidFill>
+                <a:srgbClr val="EBEBEB">
+                  <a:alpha val="100000"/>
+                </a:srgbClr>
+              </a:solidFill>
+              <a:prstDash val="solid"/>
+              <a:round/>
+            </a:ln>
+          </p:spPr>
+          <p:txBody>
+            <a:bodyPr/>
+            <a:lstStyle/>
+            <a:p/>
+          </p:txBody>
+        </p:sp>
+        <p:sp>
+          <p:nvSpPr>
+            <p:cNvPr id="53" name="pl53"/>
+            <p:cNvSpPr/>
+            <p:nvPr/>
+          </p:nvSpPr>
+          <p:spPr>
+            <a:xfrm>
+              <a:off x="887106" y="5593686"/>
+              <a:ext cx="7660515" cy="0"/>
+            </a:xfrm>
+            <a:custGeom>
+              <a:avLst/>
+              <a:pathLst>
+                <a:path w="7660515" h="0">
+                  <a:moveTo>
+                    <a:pt x="0" y="0"/>
+                  </a:moveTo>
+                  <a:lnTo>
+                    <a:pt x="7660515" y="0"/>
+                  </a:lnTo>
+                  <a:lnTo>
+                    <a:pt x="7660515" y="0"/>
+                  </a:lnTo>
+                </a:path>
+              </a:pathLst>
+            </a:custGeom>
+            <a:ln w="13550" cap="flat">
+              <a:solidFill>
+                <a:srgbClr val="EBEBEB">
+                  <a:alpha val="100000"/>
+                </a:srgbClr>
+              </a:solidFill>
+              <a:prstDash val="solid"/>
+              <a:round/>
+            </a:ln>
+          </p:spPr>
+          <p:txBody>
+            <a:bodyPr/>
+            <a:lstStyle/>
+            <a:p/>
+          </p:txBody>
+        </p:sp>
+        <p:sp>
+          <p:nvSpPr>
+            <p:cNvPr id="54" name="pl54"/>
+            <p:cNvSpPr/>
+            <p:nvPr/>
+          </p:nvSpPr>
+          <p:spPr>
+            <a:xfrm>
+              <a:off x="887106" y="5294352"/>
+              <a:ext cx="7660515" cy="0"/>
+            </a:xfrm>
+            <a:custGeom>
+              <a:avLst/>
+              <a:pathLst>
+                <a:path w="7660515" h="0">
+                  <a:moveTo>
+                    <a:pt x="0" y="0"/>
+                  </a:moveTo>
+                  <a:lnTo>
+                    <a:pt x="7660515" y="0"/>
+                  </a:lnTo>
+                  <a:lnTo>
+                    <a:pt x="7660515" y="0"/>
+                  </a:lnTo>
+                </a:path>
+              </a:pathLst>
+            </a:custGeom>
+            <a:ln w="13550" cap="flat">
+              <a:solidFill>
+                <a:srgbClr val="EBEBEB">
+                  <a:alpha val="100000"/>
+                </a:srgbClr>
+              </a:solidFill>
+              <a:prstDash val="solid"/>
+              <a:round/>
+            </a:ln>
+          </p:spPr>
+          <p:txBody>
+            <a:bodyPr/>
+            <a:lstStyle/>
+            <a:p/>
+          </p:txBody>
+        </p:sp>
+        <p:sp>
+          <p:nvSpPr>
+            <p:cNvPr id="55" name="pl55"/>
+            <p:cNvSpPr/>
+            <p:nvPr/>
+          </p:nvSpPr>
+          <p:spPr>
+            <a:xfrm>
+              <a:off x="887106" y="4995019"/>
+              <a:ext cx="7660515" cy="0"/>
+            </a:xfrm>
+            <a:custGeom>
+              <a:avLst/>
+              <a:pathLst>
+                <a:path w="7660515" h="0">
+                  <a:moveTo>
+                    <a:pt x="0" y="0"/>
+                  </a:moveTo>
+                  <a:lnTo>
+                    <a:pt x="7660515" y="0"/>
+                  </a:lnTo>
+                  <a:lnTo>
+                    <a:pt x="7660515" y="0"/>
+                  </a:lnTo>
+                </a:path>
+              </a:pathLst>
+            </a:custGeom>
+            <a:ln w="13550" cap="flat">
+              <a:solidFill>
+                <a:srgbClr val="EBEBEB">
+                  <a:alpha val="100000"/>
+                </a:srgbClr>
+              </a:solidFill>
+              <a:prstDash val="solid"/>
+              <a:round/>
+            </a:ln>
+          </p:spPr>
+          <p:txBody>
+            <a:bodyPr/>
+            <a:lstStyle/>
+            <a:p/>
+          </p:txBody>
+        </p:sp>
+        <p:sp>
+          <p:nvSpPr>
+            <p:cNvPr id="56" name="pl56"/>
+            <p:cNvSpPr/>
+            <p:nvPr/>
+          </p:nvSpPr>
+          <p:spPr>
+            <a:xfrm>
+              <a:off x="887106" y="4695685"/>
+              <a:ext cx="7660515" cy="0"/>
+            </a:xfrm>
+            <a:custGeom>
+              <a:avLst/>
+              <a:pathLst>
+                <a:path w="7660515" h="0">
+                  <a:moveTo>
+                    <a:pt x="0" y="0"/>
+                  </a:moveTo>
+                  <a:lnTo>
+                    <a:pt x="7660515" y="0"/>
+                  </a:lnTo>
+                  <a:lnTo>
+                    <a:pt x="7660515" y="0"/>
+                  </a:lnTo>
+                </a:path>
+              </a:pathLst>
+            </a:custGeom>
+            <a:ln w="13550" cap="flat">
+              <a:solidFill>
+                <a:srgbClr val="EBEBEB">
+                  <a:alpha val="100000"/>
+                </a:srgbClr>
+              </a:solidFill>
+              <a:prstDash val="solid"/>
+              <a:round/>
+            </a:ln>
+          </p:spPr>
+          <p:txBody>
+            <a:bodyPr/>
+            <a:lstStyle/>
+            <a:p/>
+          </p:txBody>
+        </p:sp>
+        <p:sp>
+          <p:nvSpPr>
+            <p:cNvPr id="57" name="pl57"/>
+            <p:cNvSpPr/>
+            <p:nvPr/>
+          </p:nvSpPr>
+          <p:spPr>
+            <a:xfrm>
+              <a:off x="887106" y="4396351"/>
+              <a:ext cx="7660515" cy="0"/>
+            </a:xfrm>
+            <a:custGeom>
+              <a:avLst/>
+              <a:pathLst>
+                <a:path w="7660515" h="0">
+                  <a:moveTo>
+                    <a:pt x="0" y="0"/>
+                  </a:moveTo>
+                  <a:lnTo>
+                    <a:pt x="7660515" y="0"/>
+                  </a:lnTo>
+                  <a:lnTo>
+                    <a:pt x="7660515" y="0"/>
+                  </a:lnTo>
+                </a:path>
+              </a:pathLst>
+            </a:custGeom>
+            <a:ln w="13550" cap="flat">
+              <a:solidFill>
+                <a:srgbClr val="EBEBEB">
+                  <a:alpha val="100000"/>
+                </a:srgbClr>
+              </a:solidFill>
+              <a:prstDash val="solid"/>
+              <a:round/>
+            </a:ln>
+          </p:spPr>
+          <p:txBody>
+            <a:bodyPr/>
+            <a:lstStyle/>
+            <a:p/>
+          </p:txBody>
+        </p:sp>
+        <p:sp>
+          <p:nvSpPr>
+            <p:cNvPr id="58" name="pl58"/>
+            <p:cNvSpPr/>
+            <p:nvPr/>
+          </p:nvSpPr>
+          <p:spPr>
+            <a:xfrm>
+              <a:off x="1386885" y="4336484"/>
+              <a:ext cx="0" cy="1317069"/>
+            </a:xfrm>
+            <a:custGeom>
+              <a:avLst/>
+              <a:pathLst>
+                <a:path w="0" h="1317069">
+                  <a:moveTo>
+                    <a:pt x="0" y="1317069"/>
+                  </a:moveTo>
+                  <a:lnTo>
+                    <a:pt x="0" y="0"/>
+                  </a:lnTo>
+                  <a:lnTo>
+                    <a:pt x="0" y="0"/>
+                  </a:lnTo>
+                </a:path>
+              </a:pathLst>
+            </a:custGeom>
+            <a:ln w="13550" cap="flat">
+              <a:solidFill>
+                <a:srgbClr val="EBEBEB">
+                  <a:alpha val="100000"/>
+                </a:srgbClr>
+              </a:solidFill>
+              <a:prstDash val="solid"/>
+              <a:round/>
+            </a:ln>
+          </p:spPr>
+          <p:txBody>
+            <a:bodyPr/>
+            <a:lstStyle/>
+            <a:p/>
+          </p:txBody>
+        </p:sp>
+        <p:sp>
+          <p:nvSpPr>
+            <p:cNvPr id="59" name="pl59"/>
+            <p:cNvSpPr/>
+            <p:nvPr/>
+          </p:nvSpPr>
+          <p:spPr>
+            <a:xfrm>
+              <a:off x="2194051" y="4336484"/>
+              <a:ext cx="0" cy="1317069"/>
+            </a:xfrm>
+            <a:custGeom>
+              <a:avLst/>
+              <a:pathLst>
+                <a:path w="0" h="1317069">
+                  <a:moveTo>
+                    <a:pt x="0" y="1317069"/>
+                  </a:moveTo>
+                  <a:lnTo>
+                    <a:pt x="0" y="0"/>
+                  </a:lnTo>
+                  <a:lnTo>
+                    <a:pt x="0" y="0"/>
+                  </a:lnTo>
+                </a:path>
+              </a:pathLst>
+            </a:custGeom>
+            <a:ln w="13550" cap="flat">
+              <a:solidFill>
+                <a:srgbClr val="EBEBEB">
+                  <a:alpha val="100000"/>
+                </a:srgbClr>
+              </a:solidFill>
+              <a:prstDash val="solid"/>
+              <a:round/>
+            </a:ln>
+          </p:spPr>
+          <p:txBody>
+            <a:bodyPr/>
+            <a:lstStyle/>
+            <a:p/>
+          </p:txBody>
+        </p:sp>
+        <p:sp>
+          <p:nvSpPr>
+            <p:cNvPr id="60" name="pl60"/>
+            <p:cNvSpPr/>
+            <p:nvPr/>
+          </p:nvSpPr>
+          <p:spPr>
+            <a:xfrm>
+              <a:off x="3001216" y="4336484"/>
+              <a:ext cx="0" cy="1317069"/>
+            </a:xfrm>
+            <a:custGeom>
+              <a:avLst/>
+              <a:pathLst>
+                <a:path w="0" h="1317069">
+                  <a:moveTo>
+                    <a:pt x="0" y="1317069"/>
+                  </a:moveTo>
+                  <a:lnTo>
+                    <a:pt x="0" y="0"/>
+                  </a:lnTo>
+                  <a:lnTo>
+                    <a:pt x="0" y="0"/>
+                  </a:lnTo>
+                </a:path>
+              </a:pathLst>
+            </a:custGeom>
+            <a:ln w="13550" cap="flat">
+              <a:solidFill>
+                <a:srgbClr val="EBEBEB">
+                  <a:alpha val="100000"/>
+                </a:srgbClr>
+              </a:solidFill>
+              <a:prstDash val="solid"/>
+              <a:round/>
+            </a:ln>
+          </p:spPr>
+          <p:txBody>
+            <a:bodyPr/>
+            <a:lstStyle/>
+            <a:p/>
+          </p:txBody>
+        </p:sp>
+        <p:sp>
+          <p:nvSpPr>
+            <p:cNvPr id="61" name="pl61"/>
+            <p:cNvSpPr/>
+            <p:nvPr/>
+          </p:nvSpPr>
+          <p:spPr>
+            <a:xfrm>
+              <a:off x="3808382" y="4336484"/>
+              <a:ext cx="0" cy="1317069"/>
+            </a:xfrm>
+            <a:custGeom>
+              <a:avLst/>
+              <a:pathLst>
+                <a:path w="0" h="1317069">
+                  <a:moveTo>
+                    <a:pt x="0" y="1317069"/>
+                  </a:moveTo>
+                  <a:lnTo>
+                    <a:pt x="0" y="0"/>
+                  </a:lnTo>
+                  <a:lnTo>
+                    <a:pt x="0" y="0"/>
+                  </a:lnTo>
+                </a:path>
+              </a:pathLst>
+            </a:custGeom>
+            <a:ln w="13550" cap="flat">
+              <a:solidFill>
+                <a:srgbClr val="EBEBEB">
+                  <a:alpha val="100000"/>
+                </a:srgbClr>
+              </a:solidFill>
+              <a:prstDash val="solid"/>
+              <a:round/>
+            </a:ln>
+          </p:spPr>
+          <p:txBody>
+            <a:bodyPr/>
+            <a:lstStyle/>
+            <a:p/>
+          </p:txBody>
+        </p:sp>
+        <p:sp>
+          <p:nvSpPr>
+            <p:cNvPr id="62" name="pl62"/>
+            <p:cNvSpPr/>
+            <p:nvPr/>
+          </p:nvSpPr>
+          <p:spPr>
+            <a:xfrm>
+              <a:off x="4615547" y="4336484"/>
+              <a:ext cx="0" cy="1317069"/>
+            </a:xfrm>
+            <a:custGeom>
+              <a:avLst/>
+              <a:pathLst>
+                <a:path w="0" h="1317069">
+                  <a:moveTo>
+                    <a:pt x="0" y="1317069"/>
+                  </a:moveTo>
+                  <a:lnTo>
+                    <a:pt x="0" y="0"/>
+                  </a:lnTo>
+                  <a:lnTo>
+                    <a:pt x="0" y="0"/>
+                  </a:lnTo>
+                </a:path>
+              </a:pathLst>
+            </a:custGeom>
+            <a:ln w="13550" cap="flat">
+              <a:solidFill>
+                <a:srgbClr val="EBEBEB">
+                  <a:alpha val="100000"/>
+                </a:srgbClr>
+              </a:solidFill>
+              <a:prstDash val="solid"/>
+              <a:round/>
+            </a:ln>
+          </p:spPr>
+          <p:txBody>
+            <a:bodyPr/>
+            <a:lstStyle/>
+            <a:p/>
+          </p:txBody>
+        </p:sp>
+        <p:sp>
+          <p:nvSpPr>
+            <p:cNvPr id="63" name="pl63"/>
+            <p:cNvSpPr/>
+            <p:nvPr/>
+          </p:nvSpPr>
+          <p:spPr>
+            <a:xfrm>
+              <a:off x="5422713" y="4336484"/>
+              <a:ext cx="0" cy="1317069"/>
+            </a:xfrm>
+            <a:custGeom>
+              <a:avLst/>
+              <a:pathLst>
+                <a:path w="0" h="1317069">
+                  <a:moveTo>
+                    <a:pt x="0" y="1317069"/>
+                  </a:moveTo>
+                  <a:lnTo>
+                    <a:pt x="0" y="0"/>
+                  </a:lnTo>
+                  <a:lnTo>
+                    <a:pt x="0" y="0"/>
+                  </a:lnTo>
+                </a:path>
+              </a:pathLst>
+            </a:custGeom>
+            <a:ln w="13550" cap="flat">
+              <a:solidFill>
+                <a:srgbClr val="EBEBEB">
+                  <a:alpha val="100000"/>
+                </a:srgbClr>
+              </a:solidFill>
+              <a:prstDash val="solid"/>
+              <a:round/>
+            </a:ln>
+          </p:spPr>
+          <p:txBody>
+            <a:bodyPr/>
+            <a:lstStyle/>
+            <a:p/>
+          </p:txBody>
+        </p:sp>
+        <p:sp>
+          <p:nvSpPr>
+            <p:cNvPr id="64" name="pl64"/>
+            <p:cNvSpPr/>
+            <p:nvPr/>
+          </p:nvSpPr>
+          <p:spPr>
+            <a:xfrm>
+              <a:off x="6229878" y="4336484"/>
+              <a:ext cx="0" cy="1317069"/>
+            </a:xfrm>
+            <a:custGeom>
+              <a:avLst/>
+              <a:pathLst>
+                <a:path w="0" h="1317069">
+                  <a:moveTo>
+                    <a:pt x="0" y="1317069"/>
+                  </a:moveTo>
+                  <a:lnTo>
+                    <a:pt x="0" y="0"/>
+                  </a:lnTo>
+                  <a:lnTo>
+                    <a:pt x="0" y="0"/>
+                  </a:lnTo>
+                </a:path>
+              </a:pathLst>
+            </a:custGeom>
+            <a:ln w="13550" cap="flat">
+              <a:solidFill>
+                <a:srgbClr val="EBEBEB">
+                  <a:alpha val="100000"/>
+                </a:srgbClr>
+              </a:solidFill>
+              <a:prstDash val="solid"/>
+              <a:round/>
+            </a:ln>
+          </p:spPr>
+          <p:txBody>
+            <a:bodyPr/>
+            <a:lstStyle/>
+            <a:p/>
+          </p:txBody>
+        </p:sp>
+        <p:sp>
+          <p:nvSpPr>
+            <p:cNvPr id="65" name="pl65"/>
+            <p:cNvSpPr/>
+            <p:nvPr/>
+          </p:nvSpPr>
+          <p:spPr>
+            <a:xfrm>
+              <a:off x="7037044" y="4336484"/>
+              <a:ext cx="0" cy="1317069"/>
+            </a:xfrm>
+            <a:custGeom>
+              <a:avLst/>
+              <a:pathLst>
+                <a:path w="0" h="1317069">
+                  <a:moveTo>
+                    <a:pt x="0" y="1317069"/>
+                  </a:moveTo>
+                  <a:lnTo>
+                    <a:pt x="0" y="0"/>
+                  </a:lnTo>
+                  <a:lnTo>
+                    <a:pt x="0" y="0"/>
+                  </a:lnTo>
+                </a:path>
+              </a:pathLst>
+            </a:custGeom>
+            <a:ln w="13550" cap="flat">
+              <a:solidFill>
+                <a:srgbClr val="EBEBEB">
+                  <a:alpha val="100000"/>
+                </a:srgbClr>
+              </a:solidFill>
+              <a:prstDash val="solid"/>
+              <a:round/>
+            </a:ln>
+          </p:spPr>
+          <p:txBody>
+            <a:bodyPr/>
+            <a:lstStyle/>
+            <a:p/>
+          </p:txBody>
+        </p:sp>
+        <p:sp>
+          <p:nvSpPr>
+            <p:cNvPr id="66" name="pl66"/>
+            <p:cNvSpPr/>
+            <p:nvPr/>
+          </p:nvSpPr>
+          <p:spPr>
+            <a:xfrm>
+              <a:off x="7844209" y="4336484"/>
+              <a:ext cx="0" cy="1317069"/>
+            </a:xfrm>
+            <a:custGeom>
+              <a:avLst/>
+              <a:pathLst>
+                <a:path w="0" h="1317069">
+                  <a:moveTo>
+                    <a:pt x="0" y="1317069"/>
+                  </a:moveTo>
+                  <a:lnTo>
+                    <a:pt x="0" y="0"/>
+                  </a:lnTo>
+                  <a:lnTo>
+                    <a:pt x="0" y="0"/>
+                  </a:lnTo>
+                </a:path>
+              </a:pathLst>
+            </a:custGeom>
+            <a:ln w="13550" cap="flat">
+              <a:solidFill>
+                <a:srgbClr val="EBEBEB">
+                  <a:alpha val="100000"/>
+                </a:srgbClr>
+              </a:solidFill>
+              <a:prstDash val="solid"/>
+              <a:round/>
+            </a:ln>
+          </p:spPr>
+          <p:txBody>
+            <a:bodyPr/>
+            <a:lstStyle/>
+            <a:p/>
+          </p:txBody>
+        </p:sp>
+        <p:sp>
+          <p:nvSpPr>
+            <p:cNvPr id="67" name="pg67"/>
+            <p:cNvSpPr/>
+            <p:nvPr/>
+          </p:nvSpPr>
+          <p:spPr>
+            <a:xfrm>
+              <a:off x="1235312" y="4546317"/>
+              <a:ext cx="6964104" cy="976567"/>
+            </a:xfrm>
+            <a:custGeom>
+              <a:avLst/>
+              <a:pathLst>
+                <a:path w="6964104" h="976567">
+                  <a:moveTo>
+                    <a:pt x="0" y="0"/>
+                  </a:moveTo>
+                  <a:lnTo>
+                    <a:pt x="70344" y="28118"/>
+                  </a:lnTo>
+                  <a:lnTo>
+                    <a:pt x="140688" y="55482"/>
+                  </a:lnTo>
+                  <a:lnTo>
+                    <a:pt x="211033" y="82110"/>
+                  </a:lnTo>
+                  <a:lnTo>
+                    <a:pt x="281377" y="108025"/>
+                  </a:lnTo>
+                  <a:lnTo>
+                    <a:pt x="351722" y="133243"/>
+                  </a:lnTo>
+                  <a:lnTo>
+                    <a:pt x="422066" y="157784"/>
+                  </a:lnTo>
+                  <a:lnTo>
+                    <a:pt x="492411" y="181667"/>
+                  </a:lnTo>
+                  <a:lnTo>
+                    <a:pt x="562755" y="204908"/>
+                  </a:lnTo>
+                  <a:lnTo>
+                    <a:pt x="633100" y="227525"/>
+                  </a:lnTo>
+                  <a:lnTo>
+                    <a:pt x="703444" y="249535"/>
+                  </a:lnTo>
+                  <a:lnTo>
+                    <a:pt x="773789" y="270955"/>
+                  </a:lnTo>
+                  <a:lnTo>
+                    <a:pt x="844133" y="291799"/>
+                  </a:lnTo>
+                  <a:lnTo>
+                    <a:pt x="914478" y="312083"/>
+                  </a:lnTo>
+                  <a:lnTo>
+                    <a:pt x="984822" y="331823"/>
+                  </a:lnTo>
+                  <a:lnTo>
+                    <a:pt x="1055167" y="351033"/>
+                  </a:lnTo>
+                  <a:lnTo>
+                    <a:pt x="1125511" y="369728"/>
+                  </a:lnTo>
+                  <a:lnTo>
+                    <a:pt x="1195856" y="387920"/>
+                  </a:lnTo>
+                  <a:lnTo>
+                    <a:pt x="1266200" y="405624"/>
+                  </a:lnTo>
+                  <a:lnTo>
+                    <a:pt x="1336545" y="422853"/>
+                  </a:lnTo>
+                  <a:lnTo>
+                    <a:pt x="1406889" y="439619"/>
+                  </a:lnTo>
+                  <a:lnTo>
+                    <a:pt x="1477234" y="455935"/>
+                  </a:lnTo>
+                  <a:lnTo>
+                    <a:pt x="1547578" y="471813"/>
+                  </a:lnTo>
+                  <a:lnTo>
+                    <a:pt x="1617923" y="487265"/>
+                  </a:lnTo>
+                  <a:lnTo>
+                    <a:pt x="1688267" y="502302"/>
+                  </a:lnTo>
+                  <a:lnTo>
+                    <a:pt x="1758612" y="516935"/>
+                  </a:lnTo>
+                  <a:lnTo>
+                    <a:pt x="1828956" y="531176"/>
+                  </a:lnTo>
+                  <a:lnTo>
+                    <a:pt x="1899301" y="545034"/>
+                  </a:lnTo>
+                  <a:lnTo>
+                    <a:pt x="1969645" y="558520"/>
+                  </a:lnTo>
+                  <a:lnTo>
+                    <a:pt x="2039990" y="571644"/>
+                  </a:lnTo>
+                  <a:lnTo>
+                    <a:pt x="2110334" y="584416"/>
+                  </a:lnTo>
+                  <a:lnTo>
+                    <a:pt x="2180679" y="596844"/>
+                  </a:lnTo>
+                  <a:lnTo>
+                    <a:pt x="2251023" y="608939"/>
+                  </a:lnTo>
+                  <a:lnTo>
+                    <a:pt x="2321368" y="620710"/>
+                  </a:lnTo>
+                  <a:lnTo>
+                    <a:pt x="2391712" y="632164"/>
+                  </a:lnTo>
+                  <a:lnTo>
+                    <a:pt x="2462057" y="643311"/>
+                  </a:lnTo>
+                  <a:lnTo>
+                    <a:pt x="2532401" y="654159"/>
+                  </a:lnTo>
+                  <a:lnTo>
+                    <a:pt x="2602746" y="664715"/>
+                  </a:lnTo>
+                  <a:lnTo>
+                    <a:pt x="2673090" y="674988"/>
+                  </a:lnTo>
+                  <a:lnTo>
+                    <a:pt x="2743435" y="684985"/>
+                  </a:lnTo>
+                  <a:lnTo>
+                    <a:pt x="2813779" y="694714"/>
+                  </a:lnTo>
+                  <a:lnTo>
+                    <a:pt x="2884124" y="704182"/>
+                  </a:lnTo>
+                  <a:lnTo>
+                    <a:pt x="2954468" y="713395"/>
+                  </a:lnTo>
+                  <a:lnTo>
+                    <a:pt x="3024813" y="722361"/>
+                  </a:lnTo>
+                  <a:lnTo>
+                    <a:pt x="3095157" y="731087"/>
+                  </a:lnTo>
+                  <a:lnTo>
+                    <a:pt x="3165502" y="739578"/>
+                  </a:lnTo>
+                  <a:lnTo>
+                    <a:pt x="3235846" y="747841"/>
+                  </a:lnTo>
+                  <a:lnTo>
+                    <a:pt x="3306191" y="749444"/>
+                  </a:lnTo>
+                  <a:lnTo>
+                    <a:pt x="3376535" y="750880"/>
+                  </a:lnTo>
+                  <a:lnTo>
+                    <a:pt x="3446880" y="752310"/>
+                  </a:lnTo>
+                  <a:lnTo>
+                    <a:pt x="3517224" y="753733"/>
+                  </a:lnTo>
+                  <a:lnTo>
+                    <a:pt x="3587569" y="755149"/>
+                  </a:lnTo>
+                  <a:lnTo>
+                    <a:pt x="3657913" y="756558"/>
+                  </a:lnTo>
+                  <a:lnTo>
+                    <a:pt x="3728257" y="757960"/>
+                  </a:lnTo>
+                  <a:lnTo>
+                    <a:pt x="3798602" y="759356"/>
+                  </a:lnTo>
+                  <a:lnTo>
+                    <a:pt x="3868946" y="760745"/>
+                  </a:lnTo>
+                  <a:lnTo>
+                    <a:pt x="3939291" y="762127"/>
+                  </a:lnTo>
+                  <a:lnTo>
+                    <a:pt x="4009635" y="763502"/>
+                  </a:lnTo>
+                  <a:lnTo>
+                    <a:pt x="4079980" y="764871"/>
+                  </a:lnTo>
+                  <a:lnTo>
+                    <a:pt x="4150324" y="766234"/>
+                  </a:lnTo>
+                  <a:lnTo>
+                    <a:pt x="4220669" y="767589"/>
+                  </a:lnTo>
+                  <a:lnTo>
+                    <a:pt x="4291013" y="768938"/>
+                  </a:lnTo>
+                  <a:lnTo>
+                    <a:pt x="4361358" y="770281"/>
+                  </a:lnTo>
+                  <a:lnTo>
+                    <a:pt x="4431702" y="771617"/>
+                  </a:lnTo>
+                  <a:lnTo>
+                    <a:pt x="4502047" y="772947"/>
+                  </a:lnTo>
+                  <a:lnTo>
+                    <a:pt x="4572391" y="774270"/>
+                  </a:lnTo>
+                  <a:lnTo>
+                    <a:pt x="4642736" y="775587"/>
+                  </a:lnTo>
+                  <a:lnTo>
+                    <a:pt x="4713080" y="776898"/>
+                  </a:lnTo>
+                  <a:lnTo>
+                    <a:pt x="4783425" y="778202"/>
+                  </a:lnTo>
+                  <a:lnTo>
+                    <a:pt x="4853769" y="779500"/>
+                  </a:lnTo>
+                  <a:lnTo>
+                    <a:pt x="4924114" y="780792"/>
+                  </a:lnTo>
+                  <a:lnTo>
+                    <a:pt x="4994458" y="782077"/>
+                  </a:lnTo>
+                  <a:lnTo>
+                    <a:pt x="5064803" y="783356"/>
+                  </a:lnTo>
+                  <a:lnTo>
+                    <a:pt x="5135147" y="784629"/>
+                  </a:lnTo>
+                  <a:lnTo>
+                    <a:pt x="5205492" y="785896"/>
+                  </a:lnTo>
+                  <a:lnTo>
+                    <a:pt x="5275836" y="787157"/>
+                  </a:lnTo>
+                  <a:lnTo>
+                    <a:pt x="5346181" y="788412"/>
+                  </a:lnTo>
+                  <a:lnTo>
+                    <a:pt x="5416525" y="789661"/>
+                  </a:lnTo>
+                  <a:lnTo>
+                    <a:pt x="5486870" y="790903"/>
+                  </a:lnTo>
+                  <a:lnTo>
+                    <a:pt x="5557214" y="792140"/>
+                  </a:lnTo>
+                  <a:lnTo>
+                    <a:pt x="5627559" y="793371"/>
+                  </a:lnTo>
+                  <a:lnTo>
+                    <a:pt x="5697903" y="794596"/>
+                  </a:lnTo>
+                  <a:lnTo>
+                    <a:pt x="5768248" y="795815"/>
+                  </a:lnTo>
+                  <a:lnTo>
+                    <a:pt x="5838592" y="797028"/>
+                  </a:lnTo>
+                  <a:lnTo>
+                    <a:pt x="5908937" y="798235"/>
+                  </a:lnTo>
+                  <a:lnTo>
+                    <a:pt x="5979281" y="799436"/>
+                  </a:lnTo>
+                  <a:lnTo>
+                    <a:pt x="6049626" y="800632"/>
+                  </a:lnTo>
+                  <a:lnTo>
+                    <a:pt x="6119970" y="801822"/>
+                  </a:lnTo>
+                  <a:lnTo>
+                    <a:pt x="6190315" y="803006"/>
+                  </a:lnTo>
+                  <a:lnTo>
+                    <a:pt x="6260659" y="804184"/>
+                  </a:lnTo>
+                  <a:lnTo>
+                    <a:pt x="6331004" y="805357"/>
+                  </a:lnTo>
+                  <a:lnTo>
+                    <a:pt x="6401348" y="806524"/>
+                  </a:lnTo>
+                  <a:lnTo>
+                    <a:pt x="6471693" y="807685"/>
+                  </a:lnTo>
+                  <a:lnTo>
+                    <a:pt x="6542037" y="808841"/>
+                  </a:lnTo>
+                  <a:lnTo>
+                    <a:pt x="6612382" y="809991"/>
+                  </a:lnTo>
+                  <a:lnTo>
+                    <a:pt x="6682726" y="811136"/>
+                  </a:lnTo>
+                  <a:lnTo>
+                    <a:pt x="6753071" y="812275"/>
+                  </a:lnTo>
+                  <a:lnTo>
+                    <a:pt x="6823415" y="813409"/>
+                  </a:lnTo>
+                  <a:lnTo>
+                    <a:pt x="6893760" y="814537"/>
+                  </a:lnTo>
+                  <a:lnTo>
+                    <a:pt x="6964104" y="815660"/>
+                  </a:lnTo>
+                  <a:lnTo>
+                    <a:pt x="6964104" y="976567"/>
+                  </a:lnTo>
+                  <a:lnTo>
+                    <a:pt x="6893760" y="974614"/>
+                  </a:lnTo>
+                  <a:lnTo>
+                    <a:pt x="6823415" y="972607"/>
+                  </a:lnTo>
+                  <a:lnTo>
+                    <a:pt x="6753071" y="970544"/>
+                  </a:lnTo>
+                  <a:lnTo>
+                    <a:pt x="6682726" y="968425"/>
+                  </a:lnTo>
+                  <a:lnTo>
+                    <a:pt x="6612382" y="966247"/>
+                  </a:lnTo>
+                  <a:lnTo>
+                    <a:pt x="6542037" y="964009"/>
+                  </a:lnTo>
+                  <a:lnTo>
+                    <a:pt x="6471693" y="961709"/>
+                  </a:lnTo>
+                  <a:lnTo>
+                    <a:pt x="6401348" y="959346"/>
+                  </a:lnTo>
+                  <a:lnTo>
+                    <a:pt x="6331004" y="956918"/>
+                  </a:lnTo>
+                  <a:lnTo>
+                    <a:pt x="6260659" y="954423"/>
+                  </a:lnTo>
+                  <a:lnTo>
+                    <a:pt x="6190315" y="951859"/>
+                  </a:lnTo>
+                  <a:lnTo>
+                    <a:pt x="6119970" y="949224"/>
+                  </a:lnTo>
+                  <a:lnTo>
+                    <a:pt x="6049626" y="946516"/>
+                  </a:lnTo>
+                  <a:lnTo>
+                    <a:pt x="5979281" y="943734"/>
+                  </a:lnTo>
+                  <a:lnTo>
+                    <a:pt x="5908937" y="940875"/>
+                  </a:lnTo>
+                  <a:lnTo>
+                    <a:pt x="5838592" y="937937"/>
+                  </a:lnTo>
+                  <a:lnTo>
+                    <a:pt x="5768248" y="934918"/>
+                  </a:lnTo>
+                  <a:lnTo>
+                    <a:pt x="5697903" y="931816"/>
+                  </a:lnTo>
+                  <a:lnTo>
+                    <a:pt x="5627559" y="928628"/>
+                  </a:lnTo>
+                  <a:lnTo>
+                    <a:pt x="5557214" y="925352"/>
+                  </a:lnTo>
+                  <a:lnTo>
+                    <a:pt x="5486870" y="921986"/>
+                  </a:lnTo>
+                  <a:lnTo>
+                    <a:pt x="5416525" y="918527"/>
+                  </a:lnTo>
+                  <a:lnTo>
+                    <a:pt x="5346181" y="914973"/>
+                  </a:lnTo>
+                  <a:lnTo>
+                    <a:pt x="5275836" y="911320"/>
+                  </a:lnTo>
+                  <a:lnTo>
+                    <a:pt x="5205492" y="907567"/>
+                  </a:lnTo>
+                  <a:lnTo>
+                    <a:pt x="5135147" y="903710"/>
+                  </a:lnTo>
+                  <a:lnTo>
+                    <a:pt x="5064803" y="899747"/>
+                  </a:lnTo>
+                  <a:lnTo>
+                    <a:pt x="4994458" y="895675"/>
+                  </a:lnTo>
+                  <a:lnTo>
+                    <a:pt x="4924114" y="891490"/>
+                  </a:lnTo>
+                  <a:lnTo>
+                    <a:pt x="4853769" y="887190"/>
+                  </a:lnTo>
+                  <a:lnTo>
+                    <a:pt x="4783425" y="882771"/>
+                  </a:lnTo>
+                  <a:lnTo>
+                    <a:pt x="4713080" y="878230"/>
+                  </a:lnTo>
+                  <a:lnTo>
+                    <a:pt x="4642736" y="873564"/>
+                  </a:lnTo>
+                  <a:lnTo>
+                    <a:pt x="4572391" y="868769"/>
+                  </a:lnTo>
+                  <a:lnTo>
+                    <a:pt x="4502047" y="863842"/>
+                  </a:lnTo>
+                  <a:lnTo>
+                    <a:pt x="4431702" y="858779"/>
+                  </a:lnTo>
+                  <a:lnTo>
+                    <a:pt x="4361358" y="853576"/>
+                  </a:lnTo>
+                  <a:lnTo>
+                    <a:pt x="4291013" y="848230"/>
+                  </a:lnTo>
+                  <a:lnTo>
+                    <a:pt x="4220669" y="842736"/>
+                  </a:lnTo>
+                  <a:lnTo>
+                    <a:pt x="4150324" y="837091"/>
+                  </a:lnTo>
+                  <a:lnTo>
+                    <a:pt x="4079980" y="831290"/>
+                  </a:lnTo>
+                  <a:lnTo>
+                    <a:pt x="4009635" y="825329"/>
+                  </a:lnTo>
+                  <a:lnTo>
+                    <a:pt x="3939291" y="819204"/>
+                  </a:lnTo>
+                  <a:lnTo>
+                    <a:pt x="3868946" y="812909"/>
+                  </a:lnTo>
+                  <a:lnTo>
+                    <a:pt x="3798602" y="806441"/>
+                  </a:lnTo>
+                  <a:lnTo>
+                    <a:pt x="3728257" y="799794"/>
+                  </a:lnTo>
+                  <a:lnTo>
+                    <a:pt x="3657913" y="792964"/>
+                  </a:lnTo>
+                  <a:lnTo>
+                    <a:pt x="3587569" y="785946"/>
+                  </a:lnTo>
+                  <a:lnTo>
+                    <a:pt x="3517224" y="778734"/>
+                  </a:lnTo>
+                  <a:lnTo>
+                    <a:pt x="3446880" y="771323"/>
+                  </a:lnTo>
+                  <a:lnTo>
+                    <a:pt x="3376535" y="763708"/>
+                  </a:lnTo>
+                  <a:lnTo>
+                    <a:pt x="3306191" y="755882"/>
+                  </a:lnTo>
+                  <a:lnTo>
+                    <a:pt x="3235846" y="748000"/>
+                  </a:lnTo>
+                  <a:lnTo>
+                    <a:pt x="3165502" y="746550"/>
+                  </a:lnTo>
+                  <a:lnTo>
+                    <a:pt x="3095157" y="745092"/>
+                  </a:lnTo>
+                  <a:lnTo>
+                    <a:pt x="3024813" y="743627"/>
+                  </a:lnTo>
+                  <a:lnTo>
+                    <a:pt x="2954468" y="742156"/>
+                  </a:lnTo>
+                  <a:lnTo>
+                    <a:pt x="2884124" y="740677"/>
+                  </a:lnTo>
+                  <a:lnTo>
+                    <a:pt x="2813779" y="739191"/>
+                  </a:lnTo>
+                  <a:lnTo>
+                    <a:pt x="2743435" y="737697"/>
+                  </a:lnTo>
+                  <a:lnTo>
+                    <a:pt x="2673090" y="736197"/>
+                  </a:lnTo>
+                  <a:lnTo>
+                    <a:pt x="2602746" y="734689"/>
+                  </a:lnTo>
+                  <a:lnTo>
+                    <a:pt x="2532401" y="733174"/>
+                  </a:lnTo>
+                  <a:lnTo>
+                    <a:pt x="2462057" y="731651"/>
+                  </a:lnTo>
+                  <a:lnTo>
+                    <a:pt x="2391712" y="730122"/>
+                  </a:lnTo>
+                  <a:lnTo>
+                    <a:pt x="2321368" y="728584"/>
+                  </a:lnTo>
+                  <a:lnTo>
+                    <a:pt x="2251023" y="727040"/>
+                  </a:lnTo>
+                  <a:lnTo>
+                    <a:pt x="2180679" y="725488"/>
+                  </a:lnTo>
+                  <a:lnTo>
+                    <a:pt x="2110334" y="723928"/>
+                  </a:lnTo>
+                  <a:lnTo>
+                    <a:pt x="2039990" y="722361"/>
+                  </a:lnTo>
+                  <a:lnTo>
+                    <a:pt x="1969645" y="720786"/>
+                  </a:lnTo>
+                  <a:lnTo>
+                    <a:pt x="1899301" y="719203"/>
+                  </a:lnTo>
+                  <a:lnTo>
+                    <a:pt x="1828956" y="717613"/>
+                  </a:lnTo>
+                  <a:lnTo>
+                    <a:pt x="1758612" y="716015"/>
+                  </a:lnTo>
+                  <a:lnTo>
+                    <a:pt x="1688267" y="714410"/>
+                  </a:lnTo>
+                  <a:lnTo>
+                    <a:pt x="1617923" y="712796"/>
+                  </a:lnTo>
+                  <a:lnTo>
+                    <a:pt x="1547578" y="711175"/>
+                  </a:lnTo>
+                  <a:lnTo>
+                    <a:pt x="1477234" y="709546"/>
+                  </a:lnTo>
+                  <a:lnTo>
+                    <a:pt x="1406889" y="707909"/>
+                  </a:lnTo>
+                  <a:lnTo>
+                    <a:pt x="1336545" y="706264"/>
+                  </a:lnTo>
+                  <a:lnTo>
+                    <a:pt x="1266200" y="704612"/>
+                  </a:lnTo>
+                  <a:lnTo>
+                    <a:pt x="1195856" y="702951"/>
+                  </a:lnTo>
+                  <a:lnTo>
+                    <a:pt x="1125511" y="701282"/>
+                  </a:lnTo>
+                  <a:lnTo>
+                    <a:pt x="1055167" y="699605"/>
+                  </a:lnTo>
+                  <a:lnTo>
+                    <a:pt x="984822" y="697920"/>
+                  </a:lnTo>
+                  <a:lnTo>
+                    <a:pt x="914478" y="696227"/>
+                  </a:lnTo>
+                  <a:lnTo>
+                    <a:pt x="844133" y="694525"/>
+                  </a:lnTo>
+                  <a:lnTo>
+                    <a:pt x="773789" y="692815"/>
+                  </a:lnTo>
+                  <a:lnTo>
+                    <a:pt x="703444" y="691097"/>
+                  </a:lnTo>
+                  <a:lnTo>
+                    <a:pt x="633100" y="689371"/>
+                  </a:lnTo>
+                  <a:lnTo>
+                    <a:pt x="562755" y="687636"/>
+                  </a:lnTo>
+                  <a:lnTo>
+                    <a:pt x="492411" y="685893"/>
+                  </a:lnTo>
+                  <a:lnTo>
+                    <a:pt x="422066" y="684142"/>
+                  </a:lnTo>
+                  <a:lnTo>
+                    <a:pt x="351722" y="682382"/>
+                  </a:lnTo>
+                  <a:lnTo>
+                    <a:pt x="281377" y="680613"/>
+                  </a:lnTo>
+                  <a:lnTo>
+                    <a:pt x="211033" y="678836"/>
+                  </a:lnTo>
+                  <a:lnTo>
+                    <a:pt x="140688" y="677050"/>
+                  </a:lnTo>
+                  <a:lnTo>
+                    <a:pt x="70344" y="675256"/>
+                  </a:lnTo>
+                  <a:lnTo>
+                    <a:pt x="0" y="673453"/>
+                  </a:lnTo>
+                  <a:close/>
+                </a:path>
+              </a:pathLst>
+            </a:custGeom>
+            <a:solidFill>
+              <a:srgbClr val="FF8C00">
+                <a:alpha val="20000"/>
+              </a:srgbClr>
+            </a:solidFill>
+          </p:spPr>
+          <p:txBody>
+            <a:bodyPr/>
+            <a:lstStyle/>
+            <a:p/>
+          </p:txBody>
+        </p:sp>
+        <p:sp>
+          <p:nvSpPr>
+            <p:cNvPr id="68" name="pl68"/>
+            <p:cNvSpPr/>
+            <p:nvPr/>
+          </p:nvSpPr>
+          <p:spPr>
+            <a:xfrm>
+              <a:off x="1235312" y="4546317"/>
+              <a:ext cx="6964104" cy="815660"/>
+            </a:xfrm>
+            <a:custGeom>
+              <a:avLst/>
+              <a:pathLst>
+                <a:path w="6964104" h="815660">
+                  <a:moveTo>
+                    <a:pt x="0" y="0"/>
+                  </a:moveTo>
+                  <a:lnTo>
+                    <a:pt x="70344" y="28118"/>
+                  </a:lnTo>
+                  <a:lnTo>
+                    <a:pt x="140688" y="55482"/>
+                  </a:lnTo>
+                  <a:lnTo>
+                    <a:pt x="211033" y="82110"/>
+                  </a:lnTo>
+                  <a:lnTo>
+                    <a:pt x="281377" y="108025"/>
+                  </a:lnTo>
+                  <a:lnTo>
+                    <a:pt x="351722" y="133243"/>
+                  </a:lnTo>
+                  <a:lnTo>
+                    <a:pt x="422066" y="157784"/>
+                  </a:lnTo>
+                  <a:lnTo>
+                    <a:pt x="492411" y="181667"/>
+                  </a:lnTo>
+                  <a:lnTo>
+                    <a:pt x="562755" y="204908"/>
+                  </a:lnTo>
+                  <a:lnTo>
+                    <a:pt x="633100" y="227525"/>
+                  </a:lnTo>
+                  <a:lnTo>
+                    <a:pt x="703444" y="249535"/>
+                  </a:lnTo>
+                  <a:lnTo>
+                    <a:pt x="773789" y="270955"/>
+                  </a:lnTo>
+                  <a:lnTo>
+                    <a:pt x="844133" y="291799"/>
+                  </a:lnTo>
+                  <a:lnTo>
+                    <a:pt x="914478" y="312083"/>
+                  </a:lnTo>
+                  <a:lnTo>
+                    <a:pt x="984822" y="331823"/>
+                  </a:lnTo>
+                  <a:lnTo>
+                    <a:pt x="1055167" y="351033"/>
+                  </a:lnTo>
+                  <a:lnTo>
+                    <a:pt x="1125511" y="369728"/>
+                  </a:lnTo>
+                  <a:lnTo>
+                    <a:pt x="1195856" y="387920"/>
+                  </a:lnTo>
+                  <a:lnTo>
+                    <a:pt x="1266200" y="405624"/>
+                  </a:lnTo>
+                  <a:lnTo>
+                    <a:pt x="1336545" y="422853"/>
+                  </a:lnTo>
+                  <a:lnTo>
+                    <a:pt x="1406889" y="439619"/>
+                  </a:lnTo>
+                  <a:lnTo>
+                    <a:pt x="1477234" y="455935"/>
+                  </a:lnTo>
+                  <a:lnTo>
+                    <a:pt x="1547578" y="471813"/>
+                  </a:lnTo>
+                  <a:lnTo>
+                    <a:pt x="1617923" y="487265"/>
+                  </a:lnTo>
+                  <a:lnTo>
+                    <a:pt x="1688267" y="502302"/>
+                  </a:lnTo>
+                  <a:lnTo>
+                    <a:pt x="1758612" y="516935"/>
+                  </a:lnTo>
+                  <a:lnTo>
+                    <a:pt x="1828956" y="531176"/>
+                  </a:lnTo>
+                  <a:lnTo>
+                    <a:pt x="1899301" y="545034"/>
+                  </a:lnTo>
+                  <a:lnTo>
+                    <a:pt x="1969645" y="558520"/>
+                  </a:lnTo>
+                  <a:lnTo>
+                    <a:pt x="2039990" y="571644"/>
+                  </a:lnTo>
+                  <a:lnTo>
+                    <a:pt x="2110334" y="584416"/>
+                  </a:lnTo>
+                  <a:lnTo>
+                    <a:pt x="2180679" y="596844"/>
+                  </a:lnTo>
+                  <a:lnTo>
+                    <a:pt x="2251023" y="608939"/>
+                  </a:lnTo>
+                  <a:lnTo>
+                    <a:pt x="2321368" y="620710"/>
+                  </a:lnTo>
+                  <a:lnTo>
+                    <a:pt x="2391712" y="632164"/>
+                  </a:lnTo>
+                  <a:lnTo>
+                    <a:pt x="2462057" y="643311"/>
+                  </a:lnTo>
+                  <a:lnTo>
+                    <a:pt x="2532401" y="654159"/>
+                  </a:lnTo>
+                  <a:lnTo>
+                    <a:pt x="2602746" y="664715"/>
+                  </a:lnTo>
+                  <a:lnTo>
+                    <a:pt x="2673090" y="674988"/>
+                  </a:lnTo>
+                  <a:lnTo>
+                    <a:pt x="2743435" y="684985"/>
+                  </a:lnTo>
+                  <a:lnTo>
+                    <a:pt x="2813779" y="694714"/>
+                  </a:lnTo>
+                  <a:lnTo>
+                    <a:pt x="2884124" y="704182"/>
+                  </a:lnTo>
+                  <a:lnTo>
+                    <a:pt x="2954468" y="713395"/>
+                  </a:lnTo>
+                  <a:lnTo>
+                    <a:pt x="3024813" y="722361"/>
+                  </a:lnTo>
+                  <a:lnTo>
+                    <a:pt x="3095157" y="731087"/>
+                  </a:lnTo>
+                  <a:lnTo>
+                    <a:pt x="3165502" y="739578"/>
+                  </a:lnTo>
+                  <a:lnTo>
+                    <a:pt x="3235846" y="747841"/>
+                  </a:lnTo>
+                  <a:lnTo>
+                    <a:pt x="3306191" y="749444"/>
+                  </a:lnTo>
+                  <a:lnTo>
+                    <a:pt x="3376535" y="750880"/>
+                  </a:lnTo>
+                  <a:lnTo>
+                    <a:pt x="3446880" y="752310"/>
+                  </a:lnTo>
+                  <a:lnTo>
+                    <a:pt x="3517224" y="753733"/>
+                  </a:lnTo>
+                  <a:lnTo>
+                    <a:pt x="3587569" y="755149"/>
+                  </a:lnTo>
+                  <a:lnTo>
+                    <a:pt x="3657913" y="756558"/>
+                  </a:lnTo>
+                  <a:lnTo>
+                    <a:pt x="3728257" y="757960"/>
+                  </a:lnTo>
+                  <a:lnTo>
+                    <a:pt x="3798602" y="759356"/>
+                  </a:lnTo>
+                  <a:lnTo>
+                    <a:pt x="3868946" y="760745"/>
+                  </a:lnTo>
+                  <a:lnTo>
+                    <a:pt x="3939291" y="762127"/>
+                  </a:lnTo>
+                  <a:lnTo>
+                    <a:pt x="4009635" y="763502"/>
+                  </a:lnTo>
+                  <a:lnTo>
+                    <a:pt x="4079980" y="764871"/>
+                  </a:lnTo>
+                  <a:lnTo>
+                    <a:pt x="4150324" y="766234"/>
+                  </a:lnTo>
+                  <a:lnTo>
+                    <a:pt x="4220669" y="767589"/>
+                  </a:lnTo>
+                  <a:lnTo>
+                    <a:pt x="4291013" y="768938"/>
+                  </a:lnTo>
+                  <a:lnTo>
+                    <a:pt x="4361358" y="770281"/>
+                  </a:lnTo>
+                  <a:lnTo>
+                    <a:pt x="4431702" y="771617"/>
+                  </a:lnTo>
+                  <a:lnTo>
+                    <a:pt x="4502047" y="772947"/>
+                  </a:lnTo>
+                  <a:lnTo>
+                    <a:pt x="4572391" y="774270"/>
+                  </a:lnTo>
+                  <a:lnTo>
+                    <a:pt x="4642736" y="775587"/>
+                  </a:lnTo>
+                  <a:lnTo>
+                    <a:pt x="4713080" y="776898"/>
+                  </a:lnTo>
+                  <a:lnTo>
+                    <a:pt x="4783425" y="778202"/>
+                  </a:lnTo>
+                  <a:lnTo>
+                    <a:pt x="4853769" y="779500"/>
+                  </a:lnTo>
+                  <a:lnTo>
+                    <a:pt x="4924114" y="780792"/>
+                  </a:lnTo>
+                  <a:lnTo>
+                    <a:pt x="4994458" y="782077"/>
+                  </a:lnTo>
+                  <a:lnTo>
+                    <a:pt x="5064803" y="783356"/>
+                  </a:lnTo>
+                  <a:lnTo>
+                    <a:pt x="5135147" y="784629"/>
+                  </a:lnTo>
+                  <a:lnTo>
+                    <a:pt x="5205492" y="785896"/>
+                  </a:lnTo>
+                  <a:lnTo>
+                    <a:pt x="5275836" y="787157"/>
+                  </a:lnTo>
+                  <a:lnTo>
+                    <a:pt x="5346181" y="788412"/>
+                  </a:lnTo>
+                  <a:lnTo>
+                    <a:pt x="5416525" y="789661"/>
+                  </a:lnTo>
+                  <a:lnTo>
+                    <a:pt x="5486870" y="790903"/>
+                  </a:lnTo>
+                  <a:lnTo>
+                    <a:pt x="5557214" y="792140"/>
+                  </a:lnTo>
+                  <a:lnTo>
+                    <a:pt x="5627559" y="793371"/>
+                  </a:lnTo>
+                  <a:lnTo>
+                    <a:pt x="5697903" y="794596"/>
+                  </a:lnTo>
+                  <a:lnTo>
+                    <a:pt x="5768248" y="795815"/>
+                  </a:lnTo>
+                  <a:lnTo>
+                    <a:pt x="5838592" y="797028"/>
+                  </a:lnTo>
+                  <a:lnTo>
+                    <a:pt x="5908937" y="798235"/>
+                  </a:lnTo>
+                  <a:lnTo>
+                    <a:pt x="5979281" y="799436"/>
+                  </a:lnTo>
+                  <a:lnTo>
+                    <a:pt x="6049626" y="800632"/>
+                  </a:lnTo>
+                  <a:lnTo>
+                    <a:pt x="6119970" y="801822"/>
+                  </a:lnTo>
+                  <a:lnTo>
+                    <a:pt x="6190315" y="803006"/>
+                  </a:lnTo>
+                  <a:lnTo>
+                    <a:pt x="6260659" y="804184"/>
+                  </a:lnTo>
+                  <a:lnTo>
+                    <a:pt x="6331004" y="805357"/>
+                  </a:lnTo>
+                  <a:lnTo>
+                    <a:pt x="6401348" y="806524"/>
+                  </a:lnTo>
+                  <a:lnTo>
+                    <a:pt x="6471693" y="807685"/>
+                  </a:lnTo>
+                  <a:lnTo>
+                    <a:pt x="6542037" y="808841"/>
+                  </a:lnTo>
+                  <a:lnTo>
+                    <a:pt x="6612382" y="809991"/>
+                  </a:lnTo>
+                  <a:lnTo>
+                    <a:pt x="6682726" y="811136"/>
+                  </a:lnTo>
+                  <a:lnTo>
+                    <a:pt x="6753071" y="812275"/>
+                  </a:lnTo>
+                  <a:lnTo>
+                    <a:pt x="6823415" y="813409"/>
+                  </a:lnTo>
+                  <a:lnTo>
+                    <a:pt x="6893760" y="814537"/>
+                  </a:lnTo>
+                  <a:lnTo>
+                    <a:pt x="6964104" y="815660"/>
+                  </a:lnTo>
+                </a:path>
+              </a:pathLst>
+            </a:custGeom>
+          </p:spPr>
+          <p:txBody>
+            <a:bodyPr/>
+            <a:lstStyle/>
+            <a:p/>
+          </p:txBody>
+        </p:sp>
+        <p:sp>
+          <p:nvSpPr>
+            <p:cNvPr id="69" name="pl69"/>
+            <p:cNvSpPr/>
+            <p:nvPr/>
+          </p:nvSpPr>
+          <p:spPr>
+            <a:xfrm>
+              <a:off x="1235312" y="5219771"/>
+              <a:ext cx="6964104" cy="303114"/>
+            </a:xfrm>
+            <a:custGeom>
+              <a:avLst/>
+              <a:pathLst>
+                <a:path w="6964104" h="303114">
+                  <a:moveTo>
+                    <a:pt x="6964104" y="303114"/>
+                  </a:moveTo>
+                  <a:lnTo>
+                    <a:pt x="6893760" y="301160"/>
+                  </a:lnTo>
+                  <a:lnTo>
+                    <a:pt x="6823415" y="299153"/>
+                  </a:lnTo>
+                  <a:lnTo>
+                    <a:pt x="6753071" y="297091"/>
+                  </a:lnTo>
+                  <a:lnTo>
+                    <a:pt x="6682726" y="294971"/>
+                  </a:lnTo>
+                  <a:lnTo>
+                    <a:pt x="6612382" y="292794"/>
+                  </a:lnTo>
+                  <a:lnTo>
+                    <a:pt x="6542037" y="290556"/>
+                  </a:lnTo>
+                  <a:lnTo>
+                    <a:pt x="6471693" y="288256"/>
+                  </a:lnTo>
+                  <a:lnTo>
+                    <a:pt x="6401348" y="285893"/>
+                  </a:lnTo>
+                  <a:lnTo>
+                    <a:pt x="6331004" y="283465"/>
+                  </a:lnTo>
+                  <a:lnTo>
+                    <a:pt x="6260659" y="280969"/>
+                  </a:lnTo>
+                  <a:lnTo>
+                    <a:pt x="6190315" y="278405"/>
+                  </a:lnTo>
+                  <a:lnTo>
+                    <a:pt x="6119970" y="275770"/>
+                  </a:lnTo>
+                  <a:lnTo>
+                    <a:pt x="6049626" y="273063"/>
+                  </a:lnTo>
+                  <a:lnTo>
+                    <a:pt x="5979281" y="270280"/>
+                  </a:lnTo>
+                  <a:lnTo>
+                    <a:pt x="5908937" y="267421"/>
+                  </a:lnTo>
+                  <a:lnTo>
+                    <a:pt x="5838592" y="264484"/>
+                  </a:lnTo>
+                  <a:lnTo>
+                    <a:pt x="5768248" y="261465"/>
+                  </a:lnTo>
+                  <a:lnTo>
+                    <a:pt x="5697903" y="258362"/>
+                  </a:lnTo>
+                  <a:lnTo>
+                    <a:pt x="5627559" y="255175"/>
+                  </a:lnTo>
+                  <a:lnTo>
+                    <a:pt x="5557214" y="251899"/>
+                  </a:lnTo>
+                  <a:lnTo>
+                    <a:pt x="5486870" y="248533"/>
+                  </a:lnTo>
+                  <a:lnTo>
+                    <a:pt x="5416525" y="245074"/>
+                  </a:lnTo>
+                  <a:lnTo>
+                    <a:pt x="5346181" y="241519"/>
+                  </a:lnTo>
+                  <a:lnTo>
+                    <a:pt x="5275836" y="237867"/>
+                  </a:lnTo>
+                  <a:lnTo>
+                    <a:pt x="5205492" y="234114"/>
+                  </a:lnTo>
+                  <a:lnTo>
+                    <a:pt x="5135147" y="230257"/>
+                  </a:lnTo>
+                  <a:lnTo>
+                    <a:pt x="5064803" y="226294"/>
+                  </a:lnTo>
+                  <a:lnTo>
+                    <a:pt x="4994458" y="222221"/>
+                  </a:lnTo>
+                  <a:lnTo>
+                    <a:pt x="4924114" y="218037"/>
+                  </a:lnTo>
+                  <a:lnTo>
+                    <a:pt x="4853769" y="213736"/>
+                  </a:lnTo>
+                  <a:lnTo>
+                    <a:pt x="4783425" y="209317"/>
+                  </a:lnTo>
+                  <a:lnTo>
+                    <a:pt x="4713080" y="204777"/>
+                  </a:lnTo>
+                  <a:lnTo>
+                    <a:pt x="4642736" y="200110"/>
+                  </a:lnTo>
+                  <a:lnTo>
+                    <a:pt x="4572391" y="195316"/>
+                  </a:lnTo>
+                  <a:lnTo>
+                    <a:pt x="4502047" y="190389"/>
+                  </a:lnTo>
+                  <a:lnTo>
+                    <a:pt x="4431702" y="185325"/>
+                  </a:lnTo>
+                  <a:lnTo>
+                    <a:pt x="4361358" y="180123"/>
+                  </a:lnTo>
+                  <a:lnTo>
+                    <a:pt x="4291013" y="174777"/>
+                  </a:lnTo>
+                  <a:lnTo>
+                    <a:pt x="4220669" y="169283"/>
+                  </a:lnTo>
+                  <a:lnTo>
+                    <a:pt x="4150324" y="163638"/>
+                  </a:lnTo>
+                  <a:lnTo>
+                    <a:pt x="4079980" y="157837"/>
+                  </a:lnTo>
+                  <a:lnTo>
+                    <a:pt x="4009635" y="151876"/>
+                  </a:lnTo>
+                  <a:lnTo>
+                    <a:pt x="3939291" y="145750"/>
+                  </a:lnTo>
+                  <a:lnTo>
+                    <a:pt x="3868946" y="139456"/>
+                  </a:lnTo>
+                  <a:lnTo>
+                    <a:pt x="3798602" y="132987"/>
+                  </a:lnTo>
+                  <a:lnTo>
+                    <a:pt x="3728257" y="126341"/>
+                  </a:lnTo>
+                  <a:lnTo>
+                    <a:pt x="3657913" y="119511"/>
+                  </a:lnTo>
+                  <a:lnTo>
+                    <a:pt x="3587569" y="112493"/>
+                  </a:lnTo>
+                  <a:lnTo>
+                    <a:pt x="3517224" y="105281"/>
+                  </a:lnTo>
+                  <a:lnTo>
+                    <a:pt x="3446880" y="97870"/>
+                  </a:lnTo>
+                  <a:lnTo>
+                    <a:pt x="3376535" y="90254"/>
+                  </a:lnTo>
+                  <a:lnTo>
+                    <a:pt x="3306191" y="82429"/>
+                  </a:lnTo>
+                  <a:lnTo>
+                    <a:pt x="3235846" y="74547"/>
+                  </a:lnTo>
+                  <a:lnTo>
+                    <a:pt x="3165502" y="73096"/>
+                  </a:lnTo>
+                  <a:lnTo>
+                    <a:pt x="3095157" y="71639"/>
+                  </a:lnTo>
+                  <a:lnTo>
+                    <a:pt x="3024813" y="70174"/>
+                  </a:lnTo>
+                  <a:lnTo>
+                    <a:pt x="2954468" y="68702"/>
+                  </a:lnTo>
+                  <a:lnTo>
+                    <a:pt x="2884124" y="67223"/>
+                  </a:lnTo>
+                  <a:lnTo>
+                    <a:pt x="2813779" y="65737"/>
+                  </a:lnTo>
+                  <a:lnTo>
+                    <a:pt x="2743435" y="64244"/>
+                  </a:lnTo>
+                  <a:lnTo>
+                    <a:pt x="2673090" y="62743"/>
+                  </a:lnTo>
+                  <a:lnTo>
+                    <a:pt x="2602746" y="61236"/>
+                  </a:lnTo>
+                  <a:lnTo>
+                    <a:pt x="2532401" y="59720"/>
+                  </a:lnTo>
+                  <a:lnTo>
+                    <a:pt x="2462057" y="58198"/>
+                  </a:lnTo>
+                  <a:lnTo>
+                    <a:pt x="2391712" y="56668"/>
+                  </a:lnTo>
+                  <a:lnTo>
+                    <a:pt x="2321368" y="55131"/>
+                  </a:lnTo>
+                  <a:lnTo>
+                    <a:pt x="2251023" y="53586"/>
+                  </a:lnTo>
+                  <a:lnTo>
+                    <a:pt x="2180679" y="52034"/>
+                  </a:lnTo>
+                  <a:lnTo>
+                    <a:pt x="2110334" y="50474"/>
+                  </a:lnTo>
+                  <a:lnTo>
+                    <a:pt x="2039990" y="48907"/>
+                  </a:lnTo>
+                  <a:lnTo>
+                    <a:pt x="1969645" y="47332"/>
+                  </a:lnTo>
+                  <a:lnTo>
+                    <a:pt x="1899301" y="45750"/>
+                  </a:lnTo>
+                  <a:lnTo>
+                    <a:pt x="1828956" y="44160"/>
+                  </a:lnTo>
+                  <a:lnTo>
+                    <a:pt x="1758612" y="42562"/>
+                  </a:lnTo>
+                  <a:lnTo>
+                    <a:pt x="1688267" y="40956"/>
+                  </a:lnTo>
+                  <a:lnTo>
+                    <a:pt x="1617923" y="39343"/>
+                  </a:lnTo>
+                  <a:lnTo>
+                    <a:pt x="1547578" y="37722"/>
+                  </a:lnTo>
+                  <a:lnTo>
+                    <a:pt x="1477234" y="36093"/>
+                  </a:lnTo>
+                  <a:lnTo>
+                    <a:pt x="1406889" y="34456"/>
+                  </a:lnTo>
+                  <a:lnTo>
+                    <a:pt x="1336545" y="32811"/>
+                  </a:lnTo>
+                  <a:lnTo>
+                    <a:pt x="1266200" y="31158"/>
+                  </a:lnTo>
+                  <a:lnTo>
+                    <a:pt x="1195856" y="29497"/>
+                  </a:lnTo>
+                  <a:lnTo>
+                    <a:pt x="1125511" y="27828"/>
+                  </a:lnTo>
+                  <a:lnTo>
+                    <a:pt x="1055167" y="26152"/>
+                  </a:lnTo>
+                  <a:lnTo>
+                    <a:pt x="984822" y="24466"/>
+                  </a:lnTo>
+                  <a:lnTo>
+                    <a:pt x="914478" y="22773"/>
+                  </a:lnTo>
+                  <a:lnTo>
+                    <a:pt x="844133" y="21072"/>
+                  </a:lnTo>
+                  <a:lnTo>
+                    <a:pt x="773789" y="19362"/>
+                  </a:lnTo>
+                  <a:lnTo>
+                    <a:pt x="703444" y="17644"/>
+                  </a:lnTo>
+                  <a:lnTo>
+                    <a:pt x="633100" y="15918"/>
+                  </a:lnTo>
+                  <a:lnTo>
+                    <a:pt x="562755" y="14183"/>
+                  </a:lnTo>
+                  <a:lnTo>
+                    <a:pt x="492411" y="12440"/>
+                  </a:lnTo>
+                  <a:lnTo>
+                    <a:pt x="422066" y="10688"/>
+                  </a:lnTo>
+                  <a:lnTo>
+                    <a:pt x="351722" y="8928"/>
+                  </a:lnTo>
+                  <a:lnTo>
+                    <a:pt x="281377" y="7160"/>
+                  </a:lnTo>
+                  <a:lnTo>
+                    <a:pt x="211033" y="5383"/>
+                  </a:lnTo>
+                  <a:lnTo>
+                    <a:pt x="140688" y="3597"/>
+                  </a:lnTo>
+                  <a:lnTo>
+                    <a:pt x="70344" y="1803"/>
+                  </a:lnTo>
+                  <a:lnTo>
+                    <a:pt x="0" y="0"/>
+                  </a:lnTo>
+                </a:path>
+              </a:pathLst>
+            </a:custGeom>
+          </p:spPr>
+          <p:txBody>
+            <a:bodyPr/>
+            <a:lstStyle/>
+            <a:p/>
+          </p:txBody>
+        </p:sp>
+        <p:sp>
+          <p:nvSpPr>
+            <p:cNvPr id="70" name="pl70"/>
+            <p:cNvSpPr/>
+            <p:nvPr/>
+          </p:nvSpPr>
+          <p:spPr>
+            <a:xfrm>
+              <a:off x="1235312" y="4967885"/>
+              <a:ext cx="6964104" cy="497718"/>
+            </a:xfrm>
+            <a:custGeom>
+              <a:avLst/>
+              <a:pathLst>
+                <a:path w="6964104" h="497718">
+                  <a:moveTo>
+                    <a:pt x="0" y="0"/>
+                  </a:moveTo>
+                  <a:lnTo>
+                    <a:pt x="70344" y="9947"/>
+                  </a:lnTo>
+                  <a:lnTo>
+                    <a:pt x="140688" y="19737"/>
+                  </a:lnTo>
+                  <a:lnTo>
+                    <a:pt x="211033" y="29371"/>
+                  </a:lnTo>
+                  <a:lnTo>
+                    <a:pt x="281377" y="38852"/>
+                  </a:lnTo>
+                  <a:lnTo>
+                    <a:pt x="351722" y="48182"/>
+                  </a:lnTo>
+                  <a:lnTo>
+                    <a:pt x="422066" y="57364"/>
+                  </a:lnTo>
+                  <a:lnTo>
+                    <a:pt x="492411" y="66400"/>
+                  </a:lnTo>
+                  <a:lnTo>
+                    <a:pt x="562755" y="75292"/>
+                  </a:lnTo>
+                  <a:lnTo>
+                    <a:pt x="633100" y="84043"/>
+                  </a:lnTo>
+                  <a:lnTo>
+                    <a:pt x="703444" y="92655"/>
+                  </a:lnTo>
+                  <a:lnTo>
+                    <a:pt x="773789" y="101130"/>
+                  </a:lnTo>
+                  <a:lnTo>
+                    <a:pt x="844133" y="109470"/>
+                  </a:lnTo>
+                  <a:lnTo>
+                    <a:pt x="914478" y="117678"/>
+                  </a:lnTo>
+                  <a:lnTo>
+                    <a:pt x="984822" y="125755"/>
+                  </a:lnTo>
+                  <a:lnTo>
+                    <a:pt x="1055167" y="133704"/>
+                  </a:lnTo>
+                  <a:lnTo>
+                    <a:pt x="1125511" y="141526"/>
+                  </a:lnTo>
+                  <a:lnTo>
+                    <a:pt x="1195856" y="149224"/>
+                  </a:lnTo>
+                  <a:lnTo>
+                    <a:pt x="1266200" y="156800"/>
+                  </a:lnTo>
+                  <a:lnTo>
+                    <a:pt x="1336545" y="164255"/>
+                  </a:lnTo>
+                  <a:lnTo>
+                    <a:pt x="1406889" y="171592"/>
+                  </a:lnTo>
+                  <a:lnTo>
+                    <a:pt x="1477234" y="178812"/>
+                  </a:lnTo>
+                  <a:lnTo>
+                    <a:pt x="1547578" y="185917"/>
+                  </a:lnTo>
+                  <a:lnTo>
+                    <a:pt x="1617923" y="192910"/>
+                  </a:lnTo>
+                  <a:lnTo>
+                    <a:pt x="1688267" y="199791"/>
+                  </a:lnTo>
+                  <a:lnTo>
+                    <a:pt x="1758612" y="206563"/>
+                  </a:lnTo>
+                  <a:lnTo>
+                    <a:pt x="1828956" y="213227"/>
+                  </a:lnTo>
+                  <a:lnTo>
+                    <a:pt x="1899301" y="219785"/>
+                  </a:lnTo>
+                  <a:lnTo>
+                    <a:pt x="1969645" y="226239"/>
+                  </a:lnTo>
+                  <a:lnTo>
+                    <a:pt x="2039990" y="232591"/>
+                  </a:lnTo>
+                  <a:lnTo>
+                    <a:pt x="2110334" y="238841"/>
+                  </a:lnTo>
+                  <a:lnTo>
+                    <a:pt x="2180679" y="244993"/>
+                  </a:lnTo>
+                  <a:lnTo>
+                    <a:pt x="2251023" y="251046"/>
+                  </a:lnTo>
+                  <a:lnTo>
+                    <a:pt x="2321368" y="257003"/>
+                  </a:lnTo>
+                  <a:lnTo>
+                    <a:pt x="2391712" y="262865"/>
+                  </a:lnTo>
+                  <a:lnTo>
+                    <a:pt x="2462057" y="268635"/>
+                  </a:lnTo>
+                  <a:lnTo>
+                    <a:pt x="2532401" y="274312"/>
+                  </a:lnTo>
+                  <a:lnTo>
+                    <a:pt x="2602746" y="279900"/>
+                  </a:lnTo>
+                  <a:lnTo>
+                    <a:pt x="2673090" y="285398"/>
+                  </a:lnTo>
+                  <a:lnTo>
+                    <a:pt x="2743435" y="290809"/>
+                  </a:lnTo>
+                  <a:lnTo>
+                    <a:pt x="2813779" y="296134"/>
+                  </a:lnTo>
+                  <a:lnTo>
+                    <a:pt x="2884124" y="301375"/>
+                  </a:lnTo>
+                  <a:lnTo>
+                    <a:pt x="2954468" y="306532"/>
+                  </a:lnTo>
+                  <a:lnTo>
+                    <a:pt x="3024813" y="311607"/>
+                  </a:lnTo>
+                  <a:lnTo>
+                    <a:pt x="3095157" y="316601"/>
+                  </a:lnTo>
+                  <a:lnTo>
+                    <a:pt x="3165502" y="321516"/>
+                  </a:lnTo>
+                  <a:lnTo>
+                    <a:pt x="3235846" y="326353"/>
+                  </a:lnTo>
+                  <a:lnTo>
+                    <a:pt x="3306191" y="331113"/>
+                  </a:lnTo>
+                  <a:lnTo>
+                    <a:pt x="3376535" y="335798"/>
+                  </a:lnTo>
+                  <a:lnTo>
+                    <a:pt x="3446880" y="340408"/>
+                  </a:lnTo>
+                  <a:lnTo>
+                    <a:pt x="3517224" y="344944"/>
+                  </a:lnTo>
+                  <a:lnTo>
+                    <a:pt x="3587569" y="349409"/>
+                  </a:lnTo>
+                  <a:lnTo>
+                    <a:pt x="3657913" y="353802"/>
+                  </a:lnTo>
+                  <a:lnTo>
+                    <a:pt x="3728257" y="358126"/>
+                  </a:lnTo>
+                  <a:lnTo>
+                    <a:pt x="3798602" y="362381"/>
+                  </a:lnTo>
+                  <a:lnTo>
+                    <a:pt x="3868946" y="366568"/>
+                  </a:lnTo>
+                  <a:lnTo>
+                    <a:pt x="3939291" y="370689"/>
+                  </a:lnTo>
+                  <a:lnTo>
+                    <a:pt x="4009635" y="374744"/>
+                  </a:lnTo>
+                  <a:lnTo>
+                    <a:pt x="4079980" y="378735"/>
+                  </a:lnTo>
+                  <a:lnTo>
+                    <a:pt x="4150324" y="382663"/>
+                  </a:lnTo>
+                  <a:lnTo>
+                    <a:pt x="4220669" y="386527"/>
+                  </a:lnTo>
+                  <a:lnTo>
+                    <a:pt x="4291013" y="390331"/>
+                  </a:lnTo>
+                  <a:lnTo>
+                    <a:pt x="4361358" y="394074"/>
+                  </a:lnTo>
+                  <a:lnTo>
+                    <a:pt x="4431702" y="397758"/>
+                  </a:lnTo>
+                  <a:lnTo>
+                    <a:pt x="4502047" y="401383"/>
+                  </a:lnTo>
+                  <a:lnTo>
+                    <a:pt x="4572391" y="404950"/>
+                  </a:lnTo>
+                  <a:lnTo>
+                    <a:pt x="4642736" y="408461"/>
+                  </a:lnTo>
+                  <a:lnTo>
+                    <a:pt x="4713080" y="411915"/>
+                  </a:lnTo>
+                  <a:lnTo>
+                    <a:pt x="4783425" y="415315"/>
+                  </a:lnTo>
+                  <a:lnTo>
+                    <a:pt x="4853769" y="418661"/>
+                  </a:lnTo>
+                  <a:lnTo>
+                    <a:pt x="4924114" y="421954"/>
+                  </a:lnTo>
+                  <a:lnTo>
+                    <a:pt x="4994458" y="425194"/>
+                  </a:lnTo>
+                  <a:lnTo>
+                    <a:pt x="5064803" y="428383"/>
+                  </a:lnTo>
+                  <a:lnTo>
+                    <a:pt x="5135147" y="431521"/>
+                  </a:lnTo>
+                  <a:lnTo>
+                    <a:pt x="5205492" y="434610"/>
+                  </a:lnTo>
+                  <a:lnTo>
+                    <a:pt x="5275836" y="437649"/>
+                  </a:lnTo>
+                  <a:lnTo>
+                    <a:pt x="5346181" y="440640"/>
+                  </a:lnTo>
+                  <a:lnTo>
+                    <a:pt x="5416525" y="443583"/>
+                  </a:lnTo>
+                  <a:lnTo>
+                    <a:pt x="5486870" y="446480"/>
+                  </a:lnTo>
+                  <a:lnTo>
+                    <a:pt x="5557214" y="449330"/>
+                  </a:lnTo>
+                  <a:lnTo>
+                    <a:pt x="5627559" y="452135"/>
+                  </a:lnTo>
+                  <a:lnTo>
+                    <a:pt x="5697903" y="454896"/>
+                  </a:lnTo>
+                  <a:lnTo>
+                    <a:pt x="5768248" y="457613"/>
+                  </a:lnTo>
+                  <a:lnTo>
+                    <a:pt x="5838592" y="460286"/>
+                  </a:lnTo>
+                  <a:lnTo>
+                    <a:pt x="5908937" y="462917"/>
+                  </a:lnTo>
+                  <a:lnTo>
+                    <a:pt x="5979281" y="465506"/>
+                  </a:lnTo>
+                  <a:lnTo>
+                    <a:pt x="6049626" y="468054"/>
+                  </a:lnTo>
+                  <a:lnTo>
+                    <a:pt x="6119970" y="470562"/>
+                  </a:lnTo>
+                  <a:lnTo>
+                    <a:pt x="6190315" y="473030"/>
+                  </a:lnTo>
+                  <a:lnTo>
+                    <a:pt x="6260659" y="475458"/>
+                  </a:lnTo>
+                  <a:lnTo>
+                    <a:pt x="6331004" y="477848"/>
+                  </a:lnTo>
+                  <a:lnTo>
+                    <a:pt x="6401348" y="480200"/>
+                  </a:lnTo>
+                  <a:lnTo>
+                    <a:pt x="6471693" y="482514"/>
+                  </a:lnTo>
+                  <a:lnTo>
+                    <a:pt x="6542037" y="484792"/>
+                  </a:lnTo>
+                  <a:lnTo>
+                    <a:pt x="6612382" y="487034"/>
+                  </a:lnTo>
+                  <a:lnTo>
+                    <a:pt x="6682726" y="489239"/>
+                  </a:lnTo>
+                  <a:lnTo>
+                    <a:pt x="6753071" y="491410"/>
+                  </a:lnTo>
+                  <a:lnTo>
+                    <a:pt x="6823415" y="493546"/>
+                  </a:lnTo>
+                  <a:lnTo>
+                    <a:pt x="6893760" y="495649"/>
+                  </a:lnTo>
+                  <a:lnTo>
+                    <a:pt x="6964104" y="497718"/>
+                  </a:lnTo>
+                </a:path>
+              </a:pathLst>
+            </a:custGeom>
+            <a:ln w="27101" cap="flat">
+              <a:solidFill>
+                <a:srgbClr val="FF8C00">
+                  <a:alpha val="100000"/>
+                </a:srgbClr>
+              </a:solidFill>
+              <a:prstDash val="solid"/>
+              <a:round/>
+            </a:ln>
+          </p:spPr>
+          <p:txBody>
+            <a:bodyPr/>
+            <a:lstStyle/>
+            <a:p/>
+          </p:txBody>
+        </p:sp>
+        <p:sp>
+          <p:nvSpPr>
+            <p:cNvPr id="71" name="pl71"/>
+            <p:cNvSpPr/>
+            <p:nvPr/>
+          </p:nvSpPr>
+          <p:spPr>
+            <a:xfrm>
+              <a:off x="887106" y="5294352"/>
+              <a:ext cx="7660515" cy="0"/>
+            </a:xfrm>
+            <a:custGeom>
+              <a:avLst/>
+              <a:pathLst>
+                <a:path w="7660515" h="0">
+                  <a:moveTo>
+                    <a:pt x="0" y="0"/>
+                  </a:moveTo>
+                  <a:lnTo>
+                    <a:pt x="7660515" y="0"/>
+                  </a:lnTo>
+                  <a:lnTo>
+                    <a:pt x="7660515" y="0"/>
+                  </a:lnTo>
+                </a:path>
+              </a:pathLst>
+            </a:custGeom>
+            <a:ln w="13550" cap="flat">
+              <a:solidFill>
+                <a:srgbClr val="7F7F7F">
+                  <a:alpha val="100000"/>
+                </a:srgbClr>
+              </a:solidFill>
+              <a:prstDash val="dash"/>
+              <a:round/>
+            </a:ln>
+          </p:spPr>
+          <p:txBody>
+            <a:bodyPr/>
+            <a:lstStyle/>
+            <a:p/>
+          </p:txBody>
+        </p:sp>
+        <p:sp>
+          <p:nvSpPr>
+            <p:cNvPr id="72" name="pl72"/>
+            <p:cNvSpPr/>
+            <p:nvPr/>
+          </p:nvSpPr>
+          <p:spPr>
+            <a:xfrm>
+              <a:off x="4472829" y="4336484"/>
+              <a:ext cx="0" cy="1317069"/>
+            </a:xfrm>
+            <a:custGeom>
+              <a:avLst/>
+              <a:pathLst>
+                <a:path w="0" h="1317069">
+                  <a:moveTo>
+                    <a:pt x="0" y="1317069"/>
+                  </a:moveTo>
+                  <a:lnTo>
+                    <a:pt x="0" y="0"/>
+                  </a:lnTo>
+                  <a:lnTo>
+                    <a:pt x="0" y="0"/>
+                  </a:lnTo>
+                </a:path>
+              </a:pathLst>
+            </a:custGeom>
+            <a:ln w="13550" cap="flat">
+              <a:solidFill>
+                <a:srgbClr val="666666">
+                  <a:alpha val="100000"/>
+                </a:srgbClr>
+              </a:solidFill>
+              <a:prstDash val="dot"/>
+              <a:round/>
+            </a:ln>
+          </p:spPr>
+          <p:txBody>
+            <a:bodyPr/>
+            <a:lstStyle/>
+            <a:p/>
+          </p:txBody>
+        </p:sp>
+        <p:sp>
+          <p:nvSpPr>
+            <p:cNvPr id="73" name="tx73"/>
+            <p:cNvSpPr/>
+            <p:nvPr/>
+          </p:nvSpPr>
+          <p:spPr>
+            <a:xfrm>
+              <a:off x="762297" y="5553636"/>
+              <a:ext cx="62179" cy="80101"/>
+            </a:xfrm>
+            <a:prstGeom prst="rect">
+              <a:avLst/>
+            </a:prstGeom>
+            <a:noFill/>
+          </p:spPr>
+          <p:txBody>
+            <a:bodyPr lIns="0" rIns="0" tIns="0" bIns="0" anchorCtr="1" anchor="ctr" wrap="none"/>
+            <a:lstStyle/>
+            <a:p>
+              <a:pPr algn="l" marL="0" marR="0" indent="0">
+                <a:lnSpc>
+                  <a:spcPts val="880"/>
+                </a:lnSpc>
+                <a:spcBef>
+                  <a:spcPts val="0"/>
+                </a:spcBef>
+                <a:spcAft>
+                  <a:spcPts val="0"/>
+                </a:spcAft>
+              </a:pPr>
+              <a:r>
+                <a:rPr sz="880">
+                  <a:solidFill>
+                    <a:srgbClr val="4D4D4D">
+                      <a:alpha val="100000"/>
+                    </a:srgbClr>
+                  </a:solidFill>
+                  <a:latin typeface="Helvetica"/>
+                  <a:cs typeface="Helvetica"/>
+                </a:rPr>
+                <a:t>0</a:t>
+              </a:r>
+            </a:p>
+          </p:txBody>
+        </p:sp>
+        <p:sp>
+          <p:nvSpPr>
+            <p:cNvPr id="74" name="tx74"/>
+            <p:cNvSpPr/>
+            <p:nvPr/>
+          </p:nvSpPr>
+          <p:spPr>
+            <a:xfrm>
+              <a:off x="762297" y="5254302"/>
+              <a:ext cx="62179" cy="80101"/>
+            </a:xfrm>
+            <a:prstGeom prst="rect">
+              <a:avLst/>
+            </a:prstGeom>
+            <a:noFill/>
+          </p:spPr>
+          <p:txBody>
+            <a:bodyPr lIns="0" rIns="0" tIns="0" bIns="0" anchorCtr="1" anchor="ctr" wrap="none"/>
+            <a:lstStyle/>
+            <a:p>
+              <a:pPr algn="l" marL="0" marR="0" indent="0">
+                <a:lnSpc>
+                  <a:spcPts val="880"/>
+                </a:lnSpc>
+                <a:spcBef>
+                  <a:spcPts val="0"/>
+                </a:spcBef>
+                <a:spcAft>
+                  <a:spcPts val="0"/>
+                </a:spcAft>
+              </a:pPr>
+              <a:r>
+                <a:rPr sz="880">
+                  <a:solidFill>
+                    <a:srgbClr val="4D4D4D">
+                      <a:alpha val="100000"/>
+                    </a:srgbClr>
+                  </a:solidFill>
+                  <a:latin typeface="Helvetica"/>
+                  <a:cs typeface="Helvetica"/>
+                </a:rPr>
+                <a:t>1</a:t>
+              </a:r>
+            </a:p>
+          </p:txBody>
+        </p:sp>
+        <p:sp>
+          <p:nvSpPr>
+            <p:cNvPr id="75" name="tx75"/>
+            <p:cNvSpPr/>
+            <p:nvPr/>
+          </p:nvSpPr>
+          <p:spPr>
+            <a:xfrm>
+              <a:off x="762297" y="4954968"/>
+              <a:ext cx="62179" cy="80101"/>
+            </a:xfrm>
+            <a:prstGeom prst="rect">
+              <a:avLst/>
+            </a:prstGeom>
+            <a:noFill/>
+          </p:spPr>
+          <p:txBody>
+            <a:bodyPr lIns="0" rIns="0" tIns="0" bIns="0" anchorCtr="1" anchor="ctr" wrap="none"/>
+            <a:lstStyle/>
+            <a:p>
+              <a:pPr algn="l" marL="0" marR="0" indent="0">
+                <a:lnSpc>
+                  <a:spcPts val="880"/>
+                </a:lnSpc>
+                <a:spcBef>
+                  <a:spcPts val="0"/>
+                </a:spcBef>
+                <a:spcAft>
+                  <a:spcPts val="0"/>
+                </a:spcAft>
+              </a:pPr>
+              <a:r>
+                <a:rPr sz="880">
+                  <a:solidFill>
+                    <a:srgbClr val="4D4D4D">
+                      <a:alpha val="100000"/>
+                    </a:srgbClr>
+                  </a:solidFill>
+                  <a:latin typeface="Helvetica"/>
+                  <a:cs typeface="Helvetica"/>
+                </a:rPr>
+                <a:t>2</a:t>
+              </a:r>
+            </a:p>
+          </p:txBody>
+        </p:sp>
+        <p:sp>
+          <p:nvSpPr>
+            <p:cNvPr id="76" name="tx76"/>
+            <p:cNvSpPr/>
+            <p:nvPr/>
+          </p:nvSpPr>
+          <p:spPr>
+            <a:xfrm>
+              <a:off x="762297" y="4655634"/>
+              <a:ext cx="62179" cy="80101"/>
+            </a:xfrm>
+            <a:prstGeom prst="rect">
+              <a:avLst/>
+            </a:prstGeom>
+            <a:noFill/>
+          </p:spPr>
+          <p:txBody>
+            <a:bodyPr lIns="0" rIns="0" tIns="0" bIns="0" anchorCtr="1" anchor="ctr" wrap="none"/>
+            <a:lstStyle/>
+            <a:p>
+              <a:pPr algn="l" marL="0" marR="0" indent="0">
+                <a:lnSpc>
+                  <a:spcPts val="880"/>
+                </a:lnSpc>
+                <a:spcBef>
+                  <a:spcPts val="0"/>
+                </a:spcBef>
+                <a:spcAft>
+                  <a:spcPts val="0"/>
+                </a:spcAft>
+              </a:pPr>
+              <a:r>
+                <a:rPr sz="880">
+                  <a:solidFill>
+                    <a:srgbClr val="4D4D4D">
+                      <a:alpha val="100000"/>
+                    </a:srgbClr>
+                  </a:solidFill>
+                  <a:latin typeface="Helvetica"/>
+                  <a:cs typeface="Helvetica"/>
+                </a:rPr>
+                <a:t>3</a:t>
+              </a:r>
+            </a:p>
+          </p:txBody>
+        </p:sp>
+        <p:sp>
+          <p:nvSpPr>
+            <p:cNvPr id="77" name="tx77"/>
+            <p:cNvSpPr/>
+            <p:nvPr/>
+          </p:nvSpPr>
+          <p:spPr>
+            <a:xfrm>
+              <a:off x="762297" y="4356300"/>
+              <a:ext cx="62179" cy="80101"/>
+            </a:xfrm>
+            <a:prstGeom prst="rect">
+              <a:avLst/>
+            </a:prstGeom>
+            <a:noFill/>
+          </p:spPr>
+          <p:txBody>
+            <a:bodyPr lIns="0" rIns="0" tIns="0" bIns="0" anchorCtr="1" anchor="ctr" wrap="none"/>
+            <a:lstStyle/>
+            <a:p>
+              <a:pPr algn="l" marL="0" marR="0" indent="0">
+                <a:lnSpc>
+                  <a:spcPts val="880"/>
+                </a:lnSpc>
+                <a:spcBef>
+                  <a:spcPts val="0"/>
+                </a:spcBef>
+                <a:spcAft>
+                  <a:spcPts val="0"/>
+                </a:spcAft>
+              </a:pPr>
+              <a:r>
+                <a:rPr sz="880">
+                  <a:solidFill>
+                    <a:srgbClr val="4D4D4D">
+                      <a:alpha val="100000"/>
+                    </a:srgbClr>
+                  </a:solidFill>
+                  <a:latin typeface="Helvetica"/>
+                  <a:cs typeface="Helvetica"/>
+                </a:rPr>
+                <a:t>4</a:t>
+              </a:r>
+            </a:p>
+          </p:txBody>
+        </p:sp>
+        <p:sp>
+          <p:nvSpPr>
+            <p:cNvPr id="78" name="tx78"/>
+            <p:cNvSpPr/>
+            <p:nvPr/>
+          </p:nvSpPr>
+          <p:spPr>
+            <a:xfrm>
+              <a:off x="1306098" y="5716183"/>
+              <a:ext cx="161574" cy="80101"/>
+            </a:xfrm>
+            <a:prstGeom prst="rect">
+              <a:avLst/>
+            </a:prstGeom>
+            <a:noFill/>
+          </p:spPr>
+          <p:txBody>
+            <a:bodyPr lIns="0" rIns="0" tIns="0" bIns="0" anchorCtr="1" anchor="ctr" wrap="none"/>
+            <a:lstStyle/>
+            <a:p>
+              <a:pPr algn="l" marL="0" marR="0" indent="0">
+                <a:lnSpc>
+                  <a:spcPts val="880"/>
+                </a:lnSpc>
+                <a:spcBef>
+                  <a:spcPts val="0"/>
+                </a:spcBef>
+                <a:spcAft>
+                  <a:spcPts val="0"/>
+                </a:spcAft>
+              </a:pPr>
+              <a:r>
+                <a:rPr sz="880">
+                  <a:solidFill>
+                    <a:srgbClr val="4D4D4D">
+                      <a:alpha val="100000"/>
+                    </a:srgbClr>
+                  </a:solidFill>
+                  <a:latin typeface="Helvetica"/>
+                  <a:cs typeface="Helvetica"/>
+                </a:rPr>
+                <a:t>-40</a:t>
+              </a:r>
+            </a:p>
+          </p:txBody>
+        </p:sp>
+        <p:sp>
+          <p:nvSpPr>
+            <p:cNvPr id="79" name="tx79"/>
+            <p:cNvSpPr/>
+            <p:nvPr/>
+          </p:nvSpPr>
+          <p:spPr>
+            <a:xfrm>
+              <a:off x="2113264" y="5716183"/>
+              <a:ext cx="161574" cy="80101"/>
+            </a:xfrm>
+            <a:prstGeom prst="rect">
+              <a:avLst/>
+            </a:prstGeom>
+            <a:noFill/>
+          </p:spPr>
+          <p:txBody>
+            <a:bodyPr lIns="0" rIns="0" tIns="0" bIns="0" anchorCtr="1" anchor="ctr" wrap="none"/>
+            <a:lstStyle/>
+            <a:p>
+              <a:pPr algn="l" marL="0" marR="0" indent="0">
+                <a:lnSpc>
+                  <a:spcPts val="880"/>
+                </a:lnSpc>
+                <a:spcBef>
+                  <a:spcPts val="0"/>
+                </a:spcBef>
+                <a:spcAft>
+                  <a:spcPts val="0"/>
+                </a:spcAft>
+              </a:pPr>
+              <a:r>
+                <a:rPr sz="880">
+                  <a:solidFill>
+                    <a:srgbClr val="4D4D4D">
+                      <a:alpha val="100000"/>
+                    </a:srgbClr>
+                  </a:solidFill>
+                  <a:latin typeface="Helvetica"/>
+                  <a:cs typeface="Helvetica"/>
+                </a:rPr>
+                <a:t>-30</a:t>
+              </a:r>
+            </a:p>
+          </p:txBody>
+        </p:sp>
+        <p:sp>
+          <p:nvSpPr>
+            <p:cNvPr id="80" name="tx80"/>
+            <p:cNvSpPr/>
+            <p:nvPr/>
+          </p:nvSpPr>
+          <p:spPr>
+            <a:xfrm>
+              <a:off x="2920429" y="5716183"/>
+              <a:ext cx="161574" cy="80101"/>
+            </a:xfrm>
+            <a:prstGeom prst="rect">
+              <a:avLst/>
+            </a:prstGeom>
+            <a:noFill/>
+          </p:spPr>
+          <p:txBody>
+            <a:bodyPr lIns="0" rIns="0" tIns="0" bIns="0" anchorCtr="1" anchor="ctr" wrap="none"/>
+            <a:lstStyle/>
+            <a:p>
+              <a:pPr algn="l" marL="0" marR="0" indent="0">
+                <a:lnSpc>
+                  <a:spcPts val="880"/>
+                </a:lnSpc>
+                <a:spcBef>
+                  <a:spcPts val="0"/>
+                </a:spcBef>
+                <a:spcAft>
+                  <a:spcPts val="0"/>
+                </a:spcAft>
+              </a:pPr>
+              <a:r>
+                <a:rPr sz="880">
+                  <a:solidFill>
+                    <a:srgbClr val="4D4D4D">
+                      <a:alpha val="100000"/>
+                    </a:srgbClr>
+                  </a:solidFill>
+                  <a:latin typeface="Helvetica"/>
+                  <a:cs typeface="Helvetica"/>
+                </a:rPr>
+                <a:t>-20</a:t>
+              </a:r>
+            </a:p>
+          </p:txBody>
+        </p:sp>
+        <p:sp>
+          <p:nvSpPr>
+            <p:cNvPr id="81" name="tx81"/>
+            <p:cNvSpPr/>
+            <p:nvPr/>
+          </p:nvSpPr>
+          <p:spPr>
+            <a:xfrm>
+              <a:off x="3727595" y="5716183"/>
+              <a:ext cx="161574" cy="80101"/>
+            </a:xfrm>
+            <a:prstGeom prst="rect">
+              <a:avLst/>
+            </a:prstGeom>
+            <a:noFill/>
+          </p:spPr>
+          <p:txBody>
+            <a:bodyPr lIns="0" rIns="0" tIns="0" bIns="0" anchorCtr="1" anchor="ctr" wrap="none"/>
+            <a:lstStyle/>
+            <a:p>
+              <a:pPr algn="l" marL="0" marR="0" indent="0">
+                <a:lnSpc>
+                  <a:spcPts val="880"/>
+                </a:lnSpc>
+                <a:spcBef>
+                  <a:spcPts val="0"/>
+                </a:spcBef>
+                <a:spcAft>
+                  <a:spcPts val="0"/>
+                </a:spcAft>
+              </a:pPr>
+              <a:r>
+                <a:rPr sz="880">
+                  <a:solidFill>
+                    <a:srgbClr val="4D4D4D">
+                      <a:alpha val="100000"/>
+                    </a:srgbClr>
+                  </a:solidFill>
+                  <a:latin typeface="Helvetica"/>
+                  <a:cs typeface="Helvetica"/>
+                </a:rPr>
+                <a:t>-10</a:t>
+              </a:r>
+            </a:p>
+          </p:txBody>
+        </p:sp>
+        <p:sp>
+          <p:nvSpPr>
+            <p:cNvPr id="82" name="tx82"/>
+            <p:cNvSpPr/>
+            <p:nvPr/>
+          </p:nvSpPr>
+          <p:spPr>
+            <a:xfrm>
+              <a:off x="4584458" y="5716183"/>
+              <a:ext cx="62179" cy="80101"/>
+            </a:xfrm>
+            <a:prstGeom prst="rect">
+              <a:avLst/>
+            </a:prstGeom>
+            <a:noFill/>
+          </p:spPr>
+          <p:txBody>
+            <a:bodyPr lIns="0" rIns="0" tIns="0" bIns="0" anchorCtr="1" anchor="ctr" wrap="none"/>
+            <a:lstStyle/>
+            <a:p>
+              <a:pPr algn="l" marL="0" marR="0" indent="0">
+                <a:lnSpc>
+                  <a:spcPts val="880"/>
+                </a:lnSpc>
+                <a:spcBef>
+                  <a:spcPts val="0"/>
+                </a:spcBef>
+                <a:spcAft>
+                  <a:spcPts val="0"/>
+                </a:spcAft>
+              </a:pPr>
+              <a:r>
+                <a:rPr sz="880">
+                  <a:solidFill>
+                    <a:srgbClr val="4D4D4D">
+                      <a:alpha val="100000"/>
+                    </a:srgbClr>
+                  </a:solidFill>
+                  <a:latin typeface="Helvetica"/>
+                  <a:cs typeface="Helvetica"/>
+                </a:rPr>
+                <a:t>0</a:t>
+              </a:r>
+            </a:p>
+          </p:txBody>
+        </p:sp>
+        <p:sp>
+          <p:nvSpPr>
+            <p:cNvPr id="83" name="tx83"/>
+            <p:cNvSpPr/>
+            <p:nvPr/>
+          </p:nvSpPr>
+          <p:spPr>
+            <a:xfrm>
+              <a:off x="5360534" y="5716183"/>
+              <a:ext cx="124358" cy="80101"/>
+            </a:xfrm>
+            <a:prstGeom prst="rect">
+              <a:avLst/>
+            </a:prstGeom>
+            <a:noFill/>
+          </p:spPr>
+          <p:txBody>
+            <a:bodyPr lIns="0" rIns="0" tIns="0" bIns="0" anchorCtr="1" anchor="ctr" wrap="none"/>
+            <a:lstStyle/>
+            <a:p>
+              <a:pPr algn="l" marL="0" marR="0" indent="0">
+                <a:lnSpc>
+                  <a:spcPts val="880"/>
+                </a:lnSpc>
+                <a:spcBef>
+                  <a:spcPts val="0"/>
+                </a:spcBef>
+                <a:spcAft>
+                  <a:spcPts val="0"/>
+                </a:spcAft>
+              </a:pPr>
+              <a:r>
+                <a:rPr sz="880">
+                  <a:solidFill>
+                    <a:srgbClr val="4D4D4D">
+                      <a:alpha val="100000"/>
+                    </a:srgbClr>
+                  </a:solidFill>
+                  <a:latin typeface="Helvetica"/>
+                  <a:cs typeface="Helvetica"/>
+                </a:rPr>
+                <a:t>10</a:t>
+              </a:r>
+            </a:p>
+          </p:txBody>
+        </p:sp>
+        <p:sp>
+          <p:nvSpPr>
+            <p:cNvPr id="84" name="tx84"/>
+            <p:cNvSpPr/>
+            <p:nvPr/>
+          </p:nvSpPr>
+          <p:spPr>
+            <a:xfrm>
+              <a:off x="6167699" y="5716183"/>
+              <a:ext cx="124358" cy="80101"/>
+            </a:xfrm>
+            <a:prstGeom prst="rect">
+              <a:avLst/>
+            </a:prstGeom>
+            <a:noFill/>
+          </p:spPr>
+          <p:txBody>
+            <a:bodyPr lIns="0" rIns="0" tIns="0" bIns="0" anchorCtr="1" anchor="ctr" wrap="none"/>
+            <a:lstStyle/>
+            <a:p>
+              <a:pPr algn="l" marL="0" marR="0" indent="0">
+                <a:lnSpc>
+                  <a:spcPts val="880"/>
+                </a:lnSpc>
+                <a:spcBef>
+                  <a:spcPts val="0"/>
+                </a:spcBef>
+                <a:spcAft>
+                  <a:spcPts val="0"/>
+                </a:spcAft>
+              </a:pPr>
+              <a:r>
+                <a:rPr sz="880">
+                  <a:solidFill>
+                    <a:srgbClr val="4D4D4D">
+                      <a:alpha val="100000"/>
+                    </a:srgbClr>
+                  </a:solidFill>
+                  <a:latin typeface="Helvetica"/>
+                  <a:cs typeface="Helvetica"/>
+                </a:rPr>
+                <a:t>20</a:t>
+              </a:r>
+            </a:p>
+          </p:txBody>
+        </p:sp>
+        <p:sp>
+          <p:nvSpPr>
+            <p:cNvPr id="85" name="tx85"/>
+            <p:cNvSpPr/>
+            <p:nvPr/>
+          </p:nvSpPr>
+          <p:spPr>
+            <a:xfrm>
+              <a:off x="6974865" y="5716183"/>
+              <a:ext cx="124358" cy="80101"/>
+            </a:xfrm>
+            <a:prstGeom prst="rect">
+              <a:avLst/>
+            </a:prstGeom>
+            <a:noFill/>
+          </p:spPr>
+          <p:txBody>
+            <a:bodyPr lIns="0" rIns="0" tIns="0" bIns="0" anchorCtr="1" anchor="ctr" wrap="none"/>
+            <a:lstStyle/>
+            <a:p>
+              <a:pPr algn="l" marL="0" marR="0" indent="0">
+                <a:lnSpc>
+                  <a:spcPts val="880"/>
+                </a:lnSpc>
+                <a:spcBef>
+                  <a:spcPts val="0"/>
+                </a:spcBef>
+                <a:spcAft>
+                  <a:spcPts val="0"/>
+                </a:spcAft>
+              </a:pPr>
+              <a:r>
+                <a:rPr sz="880">
+                  <a:solidFill>
+                    <a:srgbClr val="4D4D4D">
+                      <a:alpha val="100000"/>
+                    </a:srgbClr>
+                  </a:solidFill>
+                  <a:latin typeface="Helvetica"/>
+                  <a:cs typeface="Helvetica"/>
+                </a:rPr>
+                <a:t>30</a:t>
+              </a:r>
+            </a:p>
+          </p:txBody>
+        </p:sp>
+        <p:sp>
+          <p:nvSpPr>
+            <p:cNvPr id="86" name="tx86"/>
+            <p:cNvSpPr/>
+            <p:nvPr/>
+          </p:nvSpPr>
+          <p:spPr>
+            <a:xfrm>
+              <a:off x="7782030" y="5716183"/>
+              <a:ext cx="124358" cy="80101"/>
+            </a:xfrm>
+            <a:prstGeom prst="rect">
+              <a:avLst/>
+            </a:prstGeom>
+            <a:noFill/>
+          </p:spPr>
+          <p:txBody>
+            <a:bodyPr lIns="0" rIns="0" tIns="0" bIns="0" anchorCtr="1" anchor="ctr" wrap="none"/>
+            <a:lstStyle/>
+            <a:p>
+              <a:pPr algn="l" marL="0" marR="0" indent="0">
+                <a:lnSpc>
+                  <a:spcPts val="880"/>
+                </a:lnSpc>
+                <a:spcBef>
+                  <a:spcPts val="0"/>
+                </a:spcBef>
+                <a:spcAft>
+                  <a:spcPts val="0"/>
+                </a:spcAft>
+              </a:pPr>
+              <a:r>
+                <a:rPr sz="880">
+                  <a:solidFill>
+                    <a:srgbClr val="4D4D4D">
+                      <a:alpha val="100000"/>
+                    </a:srgbClr>
+                  </a:solidFill>
+                  <a:latin typeface="Helvetica"/>
+                  <a:cs typeface="Helvetica"/>
+                </a:rPr>
+                <a:t>40</a:t>
+              </a:r>
+            </a:p>
+          </p:txBody>
+        </p:sp>
+        <p:sp>
+          <p:nvSpPr>
+            <p:cNvPr id="87" name="tx87"/>
+            <p:cNvSpPr/>
+            <p:nvPr/>
+          </p:nvSpPr>
+          <p:spPr>
+            <a:xfrm>
+              <a:off x="2928340" y="5855859"/>
+              <a:ext cx="3578047" cy="100218"/>
+            </a:xfrm>
+            <a:prstGeom prst="rect">
+              <a:avLst/>
+            </a:prstGeom>
+            <a:noFill/>
+          </p:spPr>
+          <p:txBody>
+            <a:bodyPr lIns="0" rIns="0" tIns="0" bIns="0" anchorCtr="1" anchor="ctr" wrap="none"/>
+            <a:lstStyle/>
+            <a:p>
+              <a:pPr algn="l" marL="0" marR="0" indent="0">
+                <a:lnSpc>
+                  <a:spcPts val="1100"/>
+                </a:lnSpc>
+                <a:spcBef>
+                  <a:spcPts val="0"/>
+                </a:spcBef>
+                <a:spcAft>
+                  <a:spcPts val="0"/>
+                </a:spcAft>
+              </a:pPr>
+              <a:r>
+                <a:rPr sz="1100">
+                  <a:solidFill>
+                    <a:srgbClr val="000000">
+                      <a:alpha val="100000"/>
+                    </a:srgbClr>
+                  </a:solidFill>
+                  <a:latin typeface="Helvetica"/>
+                  <a:cs typeface="Helvetica"/>
+                </a:rPr>
+                <a:t>eGFR difference (%): 100 × (CKD-EPI Cr-Cys − CG) / CG</a:t>
+              </a:r>
+            </a:p>
+          </p:txBody>
+        </p:sp>
+        <p:sp>
+          <p:nvSpPr>
+            <p:cNvPr id="88" name="tx88"/>
+            <p:cNvSpPr/>
+            <p:nvPr/>
+          </p:nvSpPr>
+          <p:spPr>
+            <a:xfrm rot="-5400000">
+              <a:off x="138035" y="4944909"/>
+              <a:ext cx="1016904" cy="100218"/>
+            </a:xfrm>
+            <a:prstGeom prst="rect">
+              <a:avLst/>
+            </a:prstGeom>
+            <a:noFill/>
+          </p:spPr>
+          <p:txBody>
+            <a:bodyPr lIns="0" rIns="0" tIns="0" bIns="0" anchorCtr="1" anchor="ctr" wrap="none"/>
+            <a:lstStyle/>
+            <a:p>
+              <a:pPr algn="l" marL="0" marR="0" indent="0">
+                <a:lnSpc>
+                  <a:spcPts val="1100"/>
+                </a:lnSpc>
+                <a:spcBef>
+                  <a:spcPts val="0"/>
+                </a:spcBef>
+                <a:spcAft>
+                  <a:spcPts val="0"/>
+                </a:spcAft>
+              </a:pPr>
+              <a:r>
+                <a:rPr sz="1100">
+                  <a:solidFill>
+                    <a:srgbClr val="000000">
+                      <a:alpha val="100000"/>
+                    </a:srgbClr>
+                  </a:solidFill>
+                  <a:latin typeface="Helvetica"/>
+                  <a:cs typeface="Helvetica"/>
+                </a:rPr>
+                <a:t>subHR (95% CI)</a:t>
+              </a:r>
+            </a:p>
+          </p:txBody>
+        </p:sp>
+        <p:sp>
+          <p:nvSpPr>
+            <p:cNvPr id="89" name="tx89"/>
+            <p:cNvSpPr/>
+            <p:nvPr/>
+          </p:nvSpPr>
+          <p:spPr>
+            <a:xfrm>
+              <a:off x="887106" y="4159544"/>
+              <a:ext cx="6985375" cy="82021"/>
+            </a:xfrm>
+            <a:prstGeom prst="rect">
+              <a:avLst/>
+            </a:prstGeom>
+            <a:noFill/>
+          </p:spPr>
+          <p:txBody>
+            <a:bodyPr lIns="0" rIns="0" tIns="0" bIns="0" anchorCtr="1" anchor="ctr" wrap="none"/>
+            <a:lstStyle/>
+            <a:p>
+              <a:pPr algn="l" marL="0" marR="0" indent="0">
+                <a:lnSpc>
+                  <a:spcPts val="900"/>
+                </a:lnSpc>
+                <a:spcBef>
+                  <a:spcPts val="0"/>
+                </a:spcBef>
+                <a:spcAft>
+                  <a:spcPts val="0"/>
+                </a:spcAft>
+              </a:pPr>
+              <a:r>
+                <a:rPr sz="900">
+                  <a:solidFill>
+                    <a:srgbClr val="404040">
+                      <a:alpha val="100000"/>
+                    </a:srgbClr>
+                  </a:solidFill>
+                  <a:latin typeface="Helvetica"/>
+                  <a:cs typeface="Helvetica"/>
+                </a:rPr>
+                <a:t>subHR per 10 % decline: 1.20 (1.06-1.37), p_Bonf = 0.030 (n = 6)  |  per IQR decline (Δ = 29.5 %): 1.72 (1.18-2.52)  |  IQR: [-15.6, 13.9] %</a:t>
+              </a:r>
+            </a:p>
+          </p:txBody>
+        </p:sp>
+        <p:sp>
+          <p:nvSpPr>
+            <p:cNvPr id="90" name="tx90"/>
+            <p:cNvSpPr/>
+            <p:nvPr/>
+          </p:nvSpPr>
+          <p:spPr>
+            <a:xfrm>
+              <a:off x="887106" y="3932770"/>
               <a:ext cx="3359962" cy="120152"/>
             </a:xfrm>
             <a:prstGeom prst="rect">
